--- a/output/HPC_Locality_Scheduling_Presentation.pptx
+++ b/output/HPC_Locality_Scheduling_Presentation.pptx
@@ -15,8 +15,8 @@
   <p:notesMasterIdLst>
     <p:notesMasterId r:id="rId8"/>
   </p:notesMasterIdLst>
-  <p:sldSz cx="9144000" cy="5143500"/>
-  <p:notesSz cx="5143500" cy="9144000"/>
+  <p:sldSz cx="12191695" cy="6858000"/>
+  <p:notesSz cx="6858000" cy="12191695"/>
   <p:defaultTextStyle>
     <a:lvl1pPr marL="0" algn="l" defTabSz="914400" rtl="0" eaLnBrk="1" latinLnBrk="0" hangingPunct="1">
       <a:defRPr sz="1800" kern="1200">
@@ -1876,7 +1876,7 @@
                 <a:ea typeface="Courier New" pitchFamily="34" charset="-122"/>
                 <a:cs typeface="Courier New" pitchFamily="34" charset="-120"/>
               </a:rPr>
-              <a:t>Qasim · Awadesh · Devashish · Husaam · Chirag</a:t>
+              <a:t>Locality-Aware Task Scheduling on Heterogeneous HPC Architectures</a:t>
             </a:r>
             <a:endParaRPr lang="en-US" sz="950" dirty="0"/>
           </a:p>
@@ -8784,7 +8784,7 @@
                 <a:ea typeface="Courier New" pitchFamily="34" charset="-122"/>
                 <a:cs typeface="Courier New" pitchFamily="34" charset="-120"/>
               </a:rPr>
-              <a:t>Final HPC Project Defense · Qasim · Awadesh · Devashish · Husaam · Chirag</a:t>
+              <a:t>Locality-Aware Task Scheduling · Final Project Defense</a:t>
             </a:r>
             <a:endParaRPr lang="en-US" sz="950" dirty="0"/>
           </a:p>

--- a/output/HPC_Locality_Scheduling_Presentation.pptx
+++ b/output/HPC_Locality_Scheduling_Presentation.pptx
@@ -1220,7 +1220,7 @@
 </file>
 
 <file path=ppt/slides/slide4.xml><?xml version="1.0" encoding="UTF-8" standalone="yes"?>
-<p:sld xmlns:a="http://schemas.openxmlformats.org/drawingml/2006/main" xmlns:r="http://schemas.openxmlformats.org/officeDocument/2006/relationships" xmlns:p="http://schemas.openxmlformats.org/presentationml/2006/main"><p:cSld name="Slide 4"><p:spTree><p:nvGrpSpPr><p:cNvPr id="1" name=""/><p:cNvGrpSpPr/><p:nvPr/></p:nvGrpSpPr><p:grpSpPr><a:xfrm><a:off x="0" y="0"/><a:ext cx="0" cy="0"/><a:chOff x="0" y="0"/><a:chExt cx="0" cy="0"/></a:xfrm></p:grpSpPr><p:sp><p:nvSpPr><p:cNvPr id="2" name="Shape 0"></p:cNvPr><p:cNvSpPr/><p:nvPr></p:nvPr></p:nvSpPr><p:spPr><a:xfrm><a:off x="0" y="0"/><a:ext cx="12191695" cy="6858000"/></a:xfrm><a:prstGeom prst="rect"><a:avLst></a:avLst></a:prstGeom><a:solidFill><a:srgbClr val="F4F0EA"/></a:solidFill><a:ln w="12700"><a:solidFill><a:srgbClr val="F4F0EA"/></a:solidFill><a:prstDash val="solid"/></a:ln></p:spPr></p:sp><p:sp><p:nvSpPr><p:cNvPr id="3" name="Shape 1"></p:cNvPr><p:cNvSpPr/><p:nvPr></p:nvPr></p:nvSpPr><p:spPr><a:xfrm><a:off x="960120" y="0"/><a:ext cx="9144" cy="6858000"/></a:xfrm><a:prstGeom prst="rect"><a:avLst></a:avLst></a:prstGeom><a:solidFill><a:srgbClr val="DDD8CF"/></a:solidFill><a:ln w="12700"><a:solidFill><a:srgbClr val="DDD8CF"/></a:solidFill><a:prstDash val="solid"/></a:ln></p:spPr></p:sp><p:sp><p:nvSpPr><p:cNvPr id="4" name="Shape 2"></p:cNvPr><p:cNvSpPr/><p:nvPr></p:nvPr></p:nvSpPr><p:spPr><a:xfrm><a:off x="1920240" y="0"/><a:ext cx="9144" cy="6858000"/></a:xfrm><a:prstGeom prst="rect"><a:avLst></a:avLst></a:prstGeom><a:solidFill><a:srgbClr val="DDD8CF"/></a:solidFill><a:ln w="12700"><a:solidFill><a:srgbClr val="DDD8CF"/></a:solidFill><a:prstDash val="solid"/></a:ln></p:spPr></p:sp><p:sp><p:nvSpPr><p:cNvPr id="5" name="Shape 3"></p:cNvPr><p:cNvSpPr/><p:nvPr></p:nvPr></p:nvSpPr><p:spPr><a:xfrm><a:off x="2880360" y="0"/><a:ext cx="9144" cy="6858000"/></a:xfrm><a:prstGeom prst="rect"><a:avLst></a:avLst></a:prstGeom><a:solidFill><a:srgbClr val="DDD8CF"/></a:solidFill><a:ln w="12700"><a:solidFill><a:srgbClr val="DDD8CF"/></a:solidFill><a:prstDash val="solid"/></a:ln></p:spPr></p:sp><p:sp><p:nvSpPr><p:cNvPr id="6" name="Shape 4"></p:cNvPr><p:cNvSpPr/><p:nvPr></p:nvPr></p:nvSpPr><p:spPr><a:xfrm><a:off x="3840480" y="0"/><a:ext cx="9144" cy="6858000"/></a:xfrm><a:prstGeom prst="rect"><a:avLst></a:avLst></a:prstGeom><a:solidFill><a:srgbClr val="DDD8CF"/></a:solidFill><a:ln w="12700"><a:solidFill><a:srgbClr val="DDD8CF"/></a:solidFill><a:prstDash val="solid"/></a:ln></p:spPr></p:sp><p:sp><p:nvSpPr><p:cNvPr id="7" name="Shape 5"></p:cNvPr><p:cNvSpPr/><p:nvPr></p:nvPr></p:nvSpPr><p:spPr><a:xfrm><a:off x="4800600" y="0"/><a:ext cx="9144" cy="6858000"/></a:xfrm><a:prstGeom prst="rect"><a:avLst></a:avLst></a:prstGeom><a:solidFill><a:srgbClr val="DDD8CF"/></a:solidFill><a:ln w="12700"><a:solidFill><a:srgbClr val="DDD8CF"/></a:solidFill><a:prstDash val="solid"/></a:ln></p:spPr></p:sp><p:sp><p:nvSpPr><p:cNvPr id="8" name="Shape 6"></p:cNvPr><p:cNvSpPr/><p:nvPr></p:nvPr></p:nvSpPr><p:spPr><a:xfrm><a:off x="5760720" y="0"/><a:ext cx="9144" cy="6858000"/></a:xfrm><a:prstGeom prst="rect"><a:avLst></a:avLst></a:prstGeom><a:solidFill><a:srgbClr val="DDD8CF"/></a:solidFill><a:ln w="12700"><a:solidFill><a:srgbClr val="DDD8CF"/></a:solidFill><a:prstDash val="solid"/></a:ln></p:spPr></p:sp><p:sp><p:nvSpPr><p:cNvPr id="9" name="Shape 7"></p:cNvPr><p:cNvSpPr/><p:nvPr></p:nvPr></p:nvSpPr><p:spPr><a:xfrm><a:off x="6720840" y="0"/><a:ext cx="9144" cy="6858000"/></a:xfrm><a:prstGeom prst="rect"><a:avLst></a:avLst></a:prstGeom><a:solidFill><a:srgbClr val="DDD8CF"/></a:solidFill><a:ln w="12700"><a:solidFill><a:srgbClr val="DDD8CF"/></a:solidFill><a:prstDash val="solid"/></a:ln></p:spPr></p:sp><p:sp><p:nvSpPr><p:cNvPr id="10" name="Shape 8"></p:cNvPr><p:cNvSpPr/><p:nvPr></p:nvPr></p:nvSpPr><p:spPr><a:xfrm><a:off x="7680960" y="0"/><a:ext cx="9144" cy="6858000"/></a:xfrm><a:prstGeom prst="rect"><a:avLst></a:avLst></a:prstGeom><a:solidFill><a:srgbClr val="DDD8CF"/></a:solidFill><a:ln w="12700"><a:solidFill><a:srgbClr val="DDD8CF"/></a:solidFill><a:prstDash val="solid"/></a:ln></p:spPr></p:sp><p:sp><p:nvSpPr><p:cNvPr id="11" name="Shape 9"></p:cNvPr><p:cNvSpPr/><p:nvPr></p:nvPr></p:nvSpPr><p:spPr><a:xfrm><a:off x="8641080" y="0"/><a:ext cx="9144" cy="6858000"/></a:xfrm><a:prstGeom prst="rect"><a:avLst></a:avLst></a:prstGeom><a:solidFill><a:srgbClr val="DDD8CF"/></a:solidFill><a:ln w="12700"><a:solidFill><a:srgbClr val="DDD8CF"/></a:solidFill><a:prstDash val="solid"/></a:ln></p:spPr></p:sp><p:sp><p:nvSpPr><p:cNvPr id="12" name="Shape 10"></p:cNvPr><p:cNvSpPr/><p:nvPr></p:nvPr></p:nvSpPr><p:spPr><a:xfrm><a:off x="9601200" y="0"/><a:ext cx="9144" cy="6858000"/></a:xfrm><a:prstGeom prst="rect"><a:avLst></a:avLst></a:prstGeom><a:solidFill><a:srgbClr val="DDD8CF"/></a:solidFill><a:ln w="12700"><a:solidFill><a:srgbClr val="DDD8CF"/></a:solidFill><a:prstDash val="solid"/></a:ln></p:spPr></p:sp><p:sp><p:nvSpPr><p:cNvPr id="13" name="Shape 11"></p:cNvPr><p:cNvSpPr/><p:nvPr></p:nvPr></p:nvSpPr><p:spPr><a:xfrm><a:off x="10561320" y="0"/><a:ext cx="9144" cy="6858000"/></a:xfrm><a:prstGeom prst="rect"><a:avLst></a:avLst></a:prstGeom><a:solidFill><a:srgbClr val="DDD8CF"/></a:solidFill><a:ln w="12700"><a:solidFill><a:srgbClr val="DDD8CF"/></a:solidFill><a:prstDash val="solid"/></a:ln></p:spPr></p:sp><p:sp><p:nvSpPr><p:cNvPr id="14" name="Shape 12"></p:cNvPr><p:cNvSpPr/><p:nvPr></p:nvPr></p:nvSpPr><p:spPr><a:xfrm><a:off x="0" y="960120"/><a:ext cx="12191695" cy="9144"/></a:xfrm><a:prstGeom prst="rect"><a:avLst></a:avLst></a:prstGeom><a:solidFill><a:srgbClr val="DDD8CF"/></a:solidFill><a:ln w="12700"><a:solidFill><a:srgbClr val="DDD8CF"/></a:solidFill><a:prstDash val="solid"/></a:ln></p:spPr></p:sp><p:sp><p:nvSpPr><p:cNvPr id="15" name="Shape 13"></p:cNvPr><p:cNvSpPr/><p:nvPr></p:nvPr></p:nvSpPr><p:spPr><a:xfrm><a:off x="0" y="1920240"/><a:ext cx="12191695" cy="9144"/></a:xfrm><a:prstGeom prst="rect"><a:avLst></a:avLst></a:prstGeom><a:solidFill><a:srgbClr val="DDD8CF"/></a:solidFill><a:ln w="12700"><a:solidFill><a:srgbClr val="DDD8CF"/></a:solidFill><a:prstDash val="solid"/></a:ln></p:spPr></p:sp><p:sp><p:nvSpPr><p:cNvPr id="16" name="Shape 14"></p:cNvPr><p:cNvSpPr/><p:nvPr></p:nvPr></p:nvSpPr><p:spPr><a:xfrm><a:off x="0" y="2880360"/><a:ext cx="12191695" cy="9144"/></a:xfrm><a:prstGeom prst="rect"><a:avLst></a:avLst></a:prstGeom><a:solidFill><a:srgbClr val="DDD8CF"/></a:solidFill><a:ln w="12700"><a:solidFill><a:srgbClr val="DDD8CF"/></a:solidFill><a:prstDash val="solid"/></a:ln></p:spPr></p:sp><p:sp><p:nvSpPr><p:cNvPr id="17" name="Shape 15"></p:cNvPr><p:cNvSpPr/><p:nvPr></p:nvPr></p:nvSpPr><p:spPr><a:xfrm><a:off x="0" y="3840480"/><a:ext cx="12191695" cy="9144"/></a:xfrm><a:prstGeom prst="rect"><a:avLst></a:avLst></a:prstGeom><a:solidFill><a:srgbClr val="DDD8CF"/></a:solidFill><a:ln w="12700"><a:solidFill><a:srgbClr val="DDD8CF"/></a:solidFill><a:prstDash val="solid"/></a:ln></p:spPr></p:sp><p:sp><p:nvSpPr><p:cNvPr id="18" name="Shape 16"></p:cNvPr><p:cNvSpPr/><p:nvPr></p:nvPr></p:nvSpPr><p:spPr><a:xfrm><a:off x="0" y="4800600"/><a:ext cx="12191695" cy="9144"/></a:xfrm><a:prstGeom prst="rect"><a:avLst></a:avLst></a:prstGeom><a:solidFill><a:srgbClr val="DDD8CF"/></a:solidFill><a:ln w="12700"><a:solidFill><a:srgbClr val="DDD8CF"/></a:solidFill><a:prstDash val="solid"/></a:ln></p:spPr></p:sp><p:sp><p:nvSpPr><p:cNvPr id="19" name="Shape 17"></p:cNvPr><p:cNvSpPr/><p:nvPr></p:nvPr></p:nvSpPr><p:spPr><a:xfrm><a:off x="0" y="5760720"/><a:ext cx="12191695" cy="9144"/></a:xfrm><a:prstGeom prst="rect"><a:avLst></a:avLst></a:prstGeom><a:solidFill><a:srgbClr val="DDD8CF"/></a:solidFill><a:ln w="12700"><a:solidFill><a:srgbClr val="DDD8CF"/></a:solidFill><a:prstDash val="solid"/></a:ln></p:spPr></p:sp><p:sp><p:nvSpPr><p:cNvPr id="20" name="Shape 18"></p:cNvPr><p:cNvSpPr/><p:nvPr></p:nvPr></p:nvSpPr><p:spPr><a:xfrm><a:off x="411480" y="320040"/><a:ext cx="2377440" cy="292608"/></a:xfrm><a:prstGeom prst="roundRect"><a:avLst><a:gd name="adj" fmla="val 50000"/></a:avLst></a:prstGeom><a:solidFill><a:srgbClr val="111827"/></a:solidFill><a:ln w="12700"><a:solidFill><a:srgbClr val="111827"/></a:solidFill><a:prstDash val="solid"/></a:ln></p:spPr></p:sp><p:sp><p:nvSpPr><p:cNvPr id="21" name="Text 19"></p:cNvPr><p:cNvSpPr/><p:nvPr></p:nvPr></p:nvSpPr><p:spPr><a:xfrm><a:off x="502920" y="320040"/><a:ext cx="2194560" cy="292608"/></a:xfrm><a:prstGeom prst="rect"><a:avLst></a:avLst></a:prstGeom><a:noFill/><a:ln></a:ln></p:spPr><p:txBody><a:bodyPr wrap="square" rtlCol="0" anchor="ctr"></a:bodyPr><a:lstStyle/><a:p><a:pPr indent="0" marL="0"><a:buNone/></a:pPr><a:r><a:rPr lang="en-US" sz="900" b="1" spc="200" kern="0" dirty="0"><a:solidFill><a:srgbClr val="FFD147"/></a:solidFill><a:latin typeface=""JetBrains Mono", "Courier New", monospace" pitchFamily="34" charset="0"/><a:ea typeface=""JetBrains Mono", "Courier New", monospace" pitchFamily="34" charset="-122"/><a:cs typeface=""JetBrains Mono", "Courier New", monospace" pitchFamily="34" charset="-120"/></a:rPr><a:t>PART 03</a:t></a:r><a:endParaRPr lang="en-US" sz="900" dirty="0"/></a:p></p:txBody></p:sp><p:sp><p:nvSpPr><p:cNvPr id="22" name="Text 20"></p:cNvPr><p:cNvSpPr/><p:nvPr></p:nvPr></p:nvSpPr><p:spPr><a:xfrm><a:off x="411480" y="777240"/><a:ext cx="10972800" cy="731520"/></a:xfrm><a:prstGeom prst="rect"><a:avLst></a:avLst></a:prstGeom><a:noFill/><a:ln></a:ln></p:spPr><p:txBody><a:bodyPr wrap="square" rtlCol="0" anchor="ctr"></a:bodyPr><a:lstStyle/><a:p><a:pPr indent="0" marL="0"><a:buNone/></a:pPr><a:r><a:rPr lang="en-US" sz="4200" b="1" spc="-300" kern="0" dirty="0"><a:solidFill><a:srgbClr val="111827"/></a:solidFill><a:latin typeface="Arial Black, "Trebuchet MS", "Helvetica Neue", sans-serif" pitchFamily="34" charset="0"/><a:ea typeface="Arial Black, "Trebuchet MS", "Helvetica Neue", sans-serif" pitchFamily="34" charset="-122"/><a:cs typeface="Arial Black, "Trebuchet MS", "Helvetica Neue", sans-serif" pitchFamily="34" charset="-120"/></a:rPr><a:t>The SparseLU Paradox:</a:t></a:r><a:endParaRPr lang="en-US" sz="4200" dirty="0"/></a:p></p:txBody></p:sp><p:sp><p:nvSpPr><p:cNvPr id="23" name="Shape 21"></p:cNvPr><p:cNvSpPr/><p:nvPr></p:nvPr></p:nvSpPr><p:spPr><a:xfrm><a:off x="5943600" y="1417320"/><a:ext cx="5852160" cy="640080"/></a:xfrm><a:prstGeom prst="roundRect"><a:avLst><a:gd name="adj" fmla="val 11429"/></a:avLst></a:prstGeom><a:solidFill><a:srgbClr val="FFD147"/></a:solidFill><a:ln w="31750"><a:solidFill><a:srgbClr val="111827"/></a:solidFill><a:prstDash val="solid"/></a:ln></p:spPr></p:sp><p:sp><p:nvSpPr><p:cNvPr id="24" name="Text 22"></p:cNvPr><p:cNvSpPr/><p:nvPr></p:nvPr></p:nvSpPr><p:spPr><a:xfrm><a:off x="6035040" y="1463040"/><a:ext cx="5669280" cy="548640"/></a:xfrm><a:prstGeom prst="rect"><a:avLst></a:avLst></a:prstGeom><a:noFill/><a:ln></a:ln></p:spPr><p:txBody><a:bodyPr wrap="square" rtlCol="0" anchor="ctr"></a:bodyPr><a:lstStyle/><a:p><a:pPr indent="0" marL="0"><a:buNone/></a:pPr><a:r><a:rPr lang="en-US" sz="3000" b="1" spc="-200" kern="0" dirty="0"><a:solidFill><a:srgbClr val="111827"/></a:solidFill><a:latin typeface="Arial Black, "Trebuchet MS", "Helvetica Neue", sans-serif" pitchFamily="34" charset="0"/><a:ea typeface="Arial Black, "Trebuchet MS", "Helvetica Neue", sans-serif" pitchFamily="34" charset="-122"/><a:cs typeface="Arial Black, "Trebuchet MS", "Helvetica Neue", sans-serif" pitchFamily="34" charset="-120"/></a:rPr><a:t>When Locality Slows Down</a:t></a:r><a:endParaRPr lang="en-US" sz="3000" dirty="0"/></a:p></p:txBody></p:sp><p:sp><p:nvSpPr><p:cNvPr id="25" name="Text 23"></p:cNvPr><p:cNvSpPr/><p:nvPr></p:nvPr></p:nvSpPr><p:spPr><a:xfrm><a:off x="411480" y="2148840"/><a:ext cx="10972800" cy="274320"/></a:xfrm><a:prstGeom prst="rect"><a:avLst></a:avLst></a:prstGeom><a:noFill/><a:ln></a:ln></p:spPr><p:txBody><a:bodyPr wrap="square" rtlCol="0" anchor="ctr"></a:bodyPr><a:lstStyle/><a:p><a:pPr indent="0" marL="0"><a:buNone/></a:pPr><a:r><a:rPr lang="en-US" sz="1400" i="1" dirty="0"><a:solidFill><a:srgbClr val="4B5563"/></a:solidFill><a:latin typeface="Inter, "Segoe UI", sans-serif" pitchFamily="34" charset="0"/><a:ea typeface="Inter, "Segoe UI", sans-serif" pitchFamily="34" charset="-122"/><a:cs typeface="Inter, "Segoe UI", sans-serif" pitchFamily="34" charset="-120"/></a:rPr><a:t>100 NUMA runs (8-node Opteron) + 56 TILEPro64 mesh configurations</a:t></a:r><a:endParaRPr lang="en-US" sz="1400" dirty="0"/></a:p></p:txBody></p:sp><p:sp><p:nvSpPr><p:cNvPr id="26" name="Shape 24"></p:cNvPr><p:cNvSpPr/><p:nvPr></p:nvPr></p:nvSpPr><p:spPr><a:xfrm><a:off x="411480" y="2606040"/><a:ext cx="6583680" cy="3383280"/></a:xfrm><a:prstGeom prst="roundRect"><a:avLst><a:gd name="adj" fmla="val 2162"/></a:avLst></a:prstGeom><a:solidFill><a:srgbClr val="F4F0EA"/></a:solidFill><a:ln w="31750"><a:solidFill><a:srgbClr val="111827"/></a:solidFill><a:prstDash val="solid"/></a:ln><a:effectLst> <a:outerShdw sx="100000" sy="100000" kx="0" ky="0" algn="bl" rotWithShape="0" blurRad="50800" dist="50800" dir="16200000"> <a:srgbClr val="C8C6BF"> <a:alpha val="75000"/></a:srgbClr> </a:outerShdw></a:effectLst></p:spPr></p:sp><p:sp><p:nvSpPr><p:cNvPr id="27" name="Text 25"></p:cNvPr><p:cNvSpPr/><p:nvPr></p:nvPr></p:nvSpPr><p:spPr><a:xfrm><a:off x="685800" y="2743200"/><a:ext cx="6035040" cy="274320"/></a:xfrm><a:prstGeom prst="rect"><a:avLst></a:avLst></a:prstGeom><a:noFill/><a:ln></a:ln></p:spPr><p:txBody><a:bodyPr wrap="square" rtlCol="0" anchor="ctr"></a:bodyPr><a:lstStyle/><a:p><a:pPr indent="0" marL="0"><a:buNone/></a:pPr><a:r><a:rPr lang="en-US" sz="1500" b="1" dirty="0"><a:solidFill><a:srgbClr val="111827"/></a:solidFill><a:latin typeface="Arial Black, "Trebuchet MS", "Helvetica Neue", sans-serif" pitchFamily="34" charset="0"/><a:ea typeface="Arial Black, "Trebuchet MS", "Helvetica Neue", sans-serif" pitchFamily="34" charset="-122"/><a:cs typeface="Arial Black, "Trebuchet MS", "Helvetica Neue", sans-serif" pitchFamily="34" charset="-120"/></a:rPr><a:t>AMD Opteron Reproduction (100 Runs · 100% Verification)</a:t></a:r><a:endParaRPr lang="en-US" sz="1500" dirty="0"/></a:p></p:txBody></p:sp><p:pic>  <p:nvPicPr><p:cNvPr id="28" name="Image 0" descr="./results/numa/fig7_reproduction.png">    </p:cNvPr>    <p:cNvPicPr><a:picLocks noChangeAspect="1"/></p:cNvPicPr>    <p:nvPr></p:nvPr>  </p:nvPicPr><p:blipFill><a:blip r:embed="rId1"></a:blip>  <a:stretch><a:fillRect/></a:stretch></p:blipFill><p:spPr> <a:xfrm>  <a:off x="685800" y="3063240"/>  <a:ext cx="6035040" cy="2194560"/> </a:xfrm> <a:prstGeom prst="rect"><a:avLst/></a:prstGeom></p:spPr></p:pic><p:sp><p:nvSpPr><p:cNvPr id="29" name="Shape 26"></p:cNvPr><p:cNvSpPr/><p:nvPr></p:nvPr></p:nvSpPr><p:spPr><a:xfrm><a:off x="685800" y="5303520"/><a:ext cx="6035040" cy="548640"/></a:xfrm><a:prstGeom prst="roundRect"><a:avLst><a:gd name="adj" fmla="val 10000"/></a:avLst></a:prstGeom><a:solidFill><a:srgbClr val="EFEAE3"/></a:solidFill><a:ln w="12700"><a:solidFill><a:srgbClr val="111827"/></a:solidFill><a:prstDash val="solid"/></a:ln></p:spPr></p:sp><p:sp><p:nvSpPr><p:cNvPr id="30" name="Text 27"></p:cNvPr><p:cNvSpPr/><p:nvPr></p:nvPr></p:nvSpPr><p:spPr><a:xfrm><a:off x="822960" y="5349240"/><a:ext cx="5760720" cy="457200"/></a:xfrm><a:prstGeom prst="rect"><a:avLst></a:avLst></a:prstGeom><a:noFill/><a:ln></a:ln></p:spPr><p:txBody><a:bodyPr wrap="square" rtlCol="0" anchor="ctr"></a:bodyPr><a:lstStyle/><a:p><a:pPr indent="0" marL="0"><a:buNone/></a:pPr><a:r><a:rPr lang="en-US" sz="1000" dirty="0"><a:solidFill><a:srgbClr val="111827"/></a:solidFill><a:latin typeface=""JetBrains Mono", "Courier New", monospace" pitchFamily="34" charset="0"/><a:ea typeface=""JetBrains Mono", "Courier New", monospace" pitchFamily="34" charset="-122"/><a:cs typeface=""JetBrains Mono", "Courier New", monospace" pitchFamily="34" charset="-120"/></a:rPr><a:t>•  Map: −45.1% Comm (0.55×) · −19.0% Cycles (0.81×)    •  Matmul: −22.5% Comm (0.78×) · Parity    •  SparseLU: −26.7% Comm BUT +15.1% SLOWER!</a:t></a:r><a:endParaRPr lang="en-US" sz="1000" dirty="0"/></a:p></p:txBody></p:sp><p:sp><p:nvSpPr><p:cNvPr id="31" name="Shape 28"></p:cNvPr><p:cNvSpPr/><p:nvPr></p:nvPr></p:nvSpPr><p:spPr><a:xfrm><a:off x="7223760" y="2606040"/><a:ext cx="4572000" cy="1828800"/></a:xfrm><a:prstGeom prst="roundRect"><a:avLst><a:gd name="adj" fmla="val 4000"/></a:avLst></a:prstGeom><a:solidFill><a:srgbClr val="111827"/></a:solidFill><a:ln w="31750"><a:solidFill><a:srgbClr val="111827"/></a:solidFill><a:prstDash val="solid"/></a:ln></p:spPr></p:sp><p:sp><p:nvSpPr><p:cNvPr id="32" name="Text 29"></p:cNvPr><p:cNvSpPr/><p:nvPr></p:nvPr></p:nvSpPr><p:spPr><a:xfrm><a:off x="7452360" y="2743200"/><a:ext cx="4114800" cy="274320"/></a:xfrm><a:prstGeom prst="rect"><a:avLst></a:avLst></a:prstGeom><a:noFill/><a:ln></a:ln></p:spPr><p:txBody><a:bodyPr wrap="square" rtlCol="0" anchor="ctr"></a:bodyPr><a:lstStyle/><a:p><a:pPr indent="0" marL="0"><a:buNone/></a:pPr><a:r><a:rPr lang="en-US" sz="1400" b="1" spc="200" kern="0" dirty="0"><a:solidFill><a:srgbClr val="FFD147"/></a:solidFill><a:latin typeface=""JetBrains Mono", "Courier New", monospace" pitchFamily="34" charset="0"/><a:ea typeface=""JetBrains Mono", "Courier New", monospace" pitchFamily="34" charset="-122"/><a:cs typeface=""JetBrains Mono", "Courier New", monospace" pitchFamily="34" charset="-120"/></a:rPr><a:t>THE PARADOX EXPLAINED</a:t></a:r><a:endParaRPr lang="en-US" sz="1400" dirty="0"/></a:p></p:txBody></p:sp><p:sp><p:nvSpPr><p:cNvPr id="33" name="Text 30"></p:cNvPr><p:cNvSpPr/><p:nvPr></p:nvPr></p:nvSpPr><p:spPr><a:xfrm><a:off x="7452360" y="3063240"/><a:ext cx="4114800" cy="274320"/></a:xfrm><a:prstGeom prst="rect"><a:avLst></a:avLst></a:prstGeom><a:noFill/><a:ln></a:ln></p:spPr><p:txBody><a:bodyPr wrap="square" rtlCol="0" anchor="ctr"></a:bodyPr><a:lstStyle/><a:p><a:pPr indent="0" marL="0"><a:buNone/></a:pPr><a:r><a:rPr lang="en-US" sz="1100" dirty="0"><a:solidFill><a:srgbClr val="F4F0EA"/></a:solidFill><a:latin typeface=""JetBrains Mono", "Courier New", monospace" pitchFamily="34" charset="0"/><a:ea typeface=""JetBrains Mono", "Courier New", monospace" pitchFamily="34" charset="-122"/><a:cs typeface=""JetBrains Mono", "Courier New", monospace" pitchFamily="34" charset="-120"/></a:rPr><a:t>1. Irregular DAG: tasks have skewed input dependencies.</a:t></a:r><a:endParaRPr lang="en-US" sz="1100" dirty="0"/></a:p></p:txBody></p:sp><p:sp><p:nvSpPr><p:cNvPr id="34" name="Text 31"></p:cNvPr><p:cNvSpPr/><p:nvPr></p:nvPr></p:nvSpPr><p:spPr><a:xfrm><a:off x="7452360" y="3355848"/><a:ext cx="4114800" cy="274320"/></a:xfrm><a:prstGeom prst="rect"><a:avLst></a:avLst></a:prstGeom><a:noFill/><a:ln></a:ln></p:spPr><p:txBody><a:bodyPr wrap="square" rtlCol="0" anchor="ctr"></a:bodyPr><a:lstStyle/><a:p><a:pPr indent="0" marL="0"><a:buNone/></a:pPr><a:r><a:rPr lang="en-US" sz="1100" dirty="0"><a:solidFill><a:srgbClr val="F4F0EA"/></a:solidFill><a:latin typeface=""JetBrains Mono", "Courier New", monospace" pitchFamily="34" charset="0"/><a:ea typeface=""JetBrains Mono", "Courier New", monospace" pitchFamily="34" charset="-122"/><a:cs typeface=""JetBrains Mono", "Courier New", monospace" pitchFamily="34" charset="-120"/></a:rPr><a:t>2. Load-blind dealer sends critical tasks to Node 0.</a:t></a:r><a:endParaRPr lang="en-US" sz="1100" dirty="0"/></a:p></p:txBody></p:sp><p:sp><p:nvSpPr><p:cNvPr id="35" name="Text 32"></p:cNvPr><p:cNvSpPr/><p:nvPr></p:nvPr></p:nvSpPr><p:spPr><a:xfrm><a:off x="7452360" y="3648456"/><a:ext cx="4114800" cy="274320"/></a:xfrm><a:prstGeom prst="rect"><a:avLst></a:avLst></a:prstGeom><a:noFill/><a:ln></a:ln></p:spPr><p:txBody><a:bodyPr wrap="square" rtlCol="0" anchor="ctr"></a:bodyPr><a:lstStyle/><a:p><a:pPr indent="0" marL="0"><a:buNone/></a:pPr><a:r><a:rPr lang="en-US" sz="1100" dirty="0"><a:solidFill><a:srgbClr val="F4F0EA"/></a:solidFill><a:latin typeface=""JetBrains Mono", "Courier New", monospace" pitchFamily="34" charset="0"/><a:ea typeface=""JetBrains Mono", "Courier New", monospace" pitchFamily="34" charset="-122"/><a:cs typeface=""JetBrains Mono", "Courier New", monospace" pitchFamily="34" charset="-120"/></a:rPr><a:t>3. Queue 0: 20 tasks  ·  Queues 1–7: EMPTY.</a:t></a:r><a:endParaRPr lang="en-US" sz="1100" dirty="0"/></a:p></p:txBody></p:sp><p:sp><p:nvSpPr><p:cNvPr id="36" name="Text 33"></p:cNvPr><p:cNvSpPr/><p:nvPr></p:nvPr></p:nvSpPr><p:spPr><a:xfrm><a:off x="7452360" y="3941064"/><a:ext cx="4114800" cy="274320"/></a:xfrm><a:prstGeom prst="rect"><a:avLst></a:avLst></a:prstGeom><a:noFill/><a:ln></a:ln></p:spPr><p:txBody><a:bodyPr wrap="square" rtlCol="0" anchor="ctr"></a:bodyPr><a:lstStyle/><a:p><a:pPr indent="0" marL="0"><a:buNone/></a:pPr><a:r><a:rPr lang="en-US" sz="1100" dirty="0"><a:solidFill><a:srgbClr val="F4F0EA"/></a:solidFill><a:latin typeface=""JetBrains Mono", "Courier New", monospace" pitchFamily="34" charset="0"/><a:ea typeface=""JetBrains Mono", "Courier New", monospace" pitchFamily="34" charset="-122"/><a:cs typeface=""JetBrains Mono", "Courier New", monospace" pitchFamily="34" charset="-120"/></a:rPr><a:t>4. 23 cores idle — comm win wiped by starvation.</a:t></a:r><a:endParaRPr lang="en-US" sz="1100" dirty="0"/></a:p></p:txBody></p:sp><p:sp><p:nvSpPr><p:cNvPr id="37" name="Shape 34"></p:cNvPr><p:cNvSpPr/><p:nvPr></p:nvPr></p:nvSpPr><p:spPr><a:xfrm><a:off x="7223760" y="4572000"/><a:ext cx="4572000" cy="1417320"/></a:xfrm><a:prstGeom prst="roundRect"><a:avLst><a:gd name="adj" fmla="val 5161"/></a:avLst></a:prstGeom><a:solidFill><a:srgbClr val="EFEAE3"/></a:solidFill><a:ln w="31750"><a:solidFill><a:srgbClr val="111827"/></a:solidFill><a:prstDash val="solid"/></a:ln></p:spPr></p:sp><p:sp><p:nvSpPr><p:cNvPr id="38" name="Text 35"></p:cNvPr><p:cNvSpPr/><p:nvPr></p:nvPr></p:nvSpPr><p:spPr><a:xfrm><a:off x="7452360" y="4663440"/><a:ext cx="4114800" cy="274320"/></a:xfrm><a:prstGeom prst="rect"><a:avLst></a:avLst></a:prstGeom><a:noFill/><a:ln></a:ln></p:spPr><p:txBody><a:bodyPr wrap="square" rtlCol="0" anchor="ctr"></a:bodyPr><a:lstStyle/><a:p><a:pPr indent="0" marL="0"><a:buNone/></a:pPr><a:r><a:rPr lang="en-US" sz="1600" b="1" dirty="0"><a:solidFill><a:srgbClr val="111827"/></a:solidFill><a:latin typeface="Arial Black, "Trebuchet MS", "Helvetica Neue", sans-serif" pitchFamily="34" charset="0"/><a:ea typeface="Arial Black, "Trebuchet MS", "Helvetica Neue", sans-serif" pitchFamily="34" charset="-122"/><a:cs typeface="Arial Black, "Trebuchet MS", "Helvetica Neue", sans-serif" pitchFamily="34" charset="-120"/></a:rPr><a:t>TILEPro64 8×8 Mesh</a:t></a:r><a:endParaRPr lang="en-US" sz="1600" dirty="0"/></a:p></p:txBody></p:sp><p:sp><p:nvSpPr><p:cNvPr id="39" name="Text 36"></p:cNvPr><p:cNvSpPr/><p:nvPr></p:nvPr></p:nvSpPr><p:spPr><a:xfrm><a:off x="7452360" y="4983480"/><a:ext cx="4114800" cy="731520"/></a:xfrm><a:prstGeom prst="rect"><a:avLst></a:avLst></a:prstGeom><a:noFill/><a:ln></a:ln></p:spPr><p:txBody><a:bodyPr wrap="square" rtlCol="0" anchor="ctr"></a:bodyPr><a:lstStyle/><a:p><a:pPr indent="0" marL="0"><a:lnSpc><a:spcPts val="1300"/></a:lnSpc><a:buNone/></a:pPr><a:r><a:rPr lang="en-US" sz="1100" dirty="0"><a:solidFill><a:srgbClr val="111827"/></a:solidFill><a:latin typeface="Inter, "Segoe UI", sans-serif" pitchFamily="34" charset="0"/><a:ea typeface="Inter, "Segoe UI", sans-serif" pitchFamily="34" charset="-122"/><a:cs typeface="Inter, "Segoe UI", sans-serif" pitchFamily="34" charset="-120"/></a:rPr><a:t>• 80.3% comm reduction (6.67M → 1.31M cycles)  ·  • 39.3% speedup (281K → 170K cycles)  ·  • Zero remote steals (63 → 0)</a:t></a:r><a:endParaRPr lang="en-US" sz="1100" dirty="0"/></a:p></p:txBody></p:sp><p:sp><p:nvSpPr><p:cNvPr id="40" name="Text 37"></p:cNvPr><p:cNvSpPr/><p:nvPr></p:nvPr></p:nvSpPr><p:spPr><a:xfrm><a:off x="7452360" y="5715000"/><a:ext cx="4114800" cy="228600"/></a:xfrm><a:prstGeom prst="rect"><a:avLst></a:avLst></a:prstGeom><a:noFill/><a:ln></a:ln></p:spPr><p:txBody><a:bodyPr wrap="square" rtlCol="0" anchor="ctr"></a:bodyPr><a:lstStyle/><a:p><a:pPr indent="0" marL="0"><a:buNone/></a:pPr><a:r><a:rPr lang="en-US" sz="900" b="1" dirty="0"><a:solidFill><a:srgbClr val="B91C1C"/></a:solidFill><a:latin typeface=""JetBrains Mono", "Courier New", monospace" pitchFamily="34" charset="0"/><a:ea typeface=""JetBrains Mono", "Courier New", monospace" pitchFamily="34" charset="-122"/><a:cs typeface=""JetBrains Mono", "Courier New", monospace" pitchFamily="34" charset="-120"/></a:rPr><a:t>+15.1% execution slowdown vs −26.7% comm cost drop — the paradox</a:t></a:r><a:endParaRPr lang="en-US" sz="900" dirty="0"/></a:p></p:txBody></p:sp><p:sp><p:nvSpPr><p:cNvPr id="41" name="Text 38"></p:cNvPr><p:cNvSpPr/><p:nvPr></p:nvPr></p:nvSpPr><p:spPr><a:xfrm><a:off x="411480" y="6537960"/><a:ext cx="11338560" cy="182880"/></a:xfrm><a:prstGeom prst="rect"><a:avLst></a:avLst></a:prstGeom><a:noFill/><a:ln></a:ln></p:spPr><p:txBody><a:bodyPr wrap="square" rtlCol="0" anchor="ctr"></a:bodyPr><a:lstStyle/><a:p><a:pPr indent="0" marL="0"><a:buNone/></a:pPr><a:r><a:rPr lang="en-US" sz="900" dirty="0"><a:solidFill><a:srgbClr val="6B6B6B"/></a:solidFill><a:latin typeface=""JetBrains Mono", "Courier New", monospace" pitchFamily="34" charset="0"/><a:ea typeface=""JetBrains Mono", "Courier New", monospace" pitchFamily="34" charset="-122"/><a:cs typeface=""JetBrains Mono", "Courier New", monospace" pitchFamily="34" charset="-120"/></a:rPr><a:t>Empirical Reproduction: AMD Opteron NUMA &amp; TILEPro64 Manycore Mesh  ·  04 / 05</a:t></a:r><a:endParaRPr lang="en-US" sz="900" dirty="0"/></a:p></p:txBody></p:sp></p:spTree></p:cSld><p:clrMapOvr><a:masterClrMapping/></p:clrMapOvr></p:sld>
+<p:sld xmlns:a="http://schemas.openxmlformats.org/drawingml/2006/main" xmlns:r="http://schemas.openxmlformats.org/officeDocument/2006/relationships" xmlns:p="http://schemas.openxmlformats.org/presentationml/2006/main"><p:cSld name="Slide 4"><p:spTree><p:nvGrpSpPr><p:cNvPr id="1" name=""/><p:cNvGrpSpPr/><p:nvPr/></p:nvGrpSpPr><p:grpSpPr><a:xfrm><a:off x="0" y="0"/><a:ext cx="0" cy="0"/><a:chOff x="0" y="0"/><a:chExt cx="0" cy="0"/></a:xfrm></p:grpSpPr><p:sp><p:nvSpPr><p:cNvPr id="2" name="Shape 0"></p:cNvPr><p:cNvSpPr/><p:nvPr></p:nvPr></p:nvSpPr><p:spPr><a:xfrm><a:off x="0" y="0"/><a:ext cx="12191695" cy="6858000"/></a:xfrm><a:prstGeom prst="rect"><a:avLst></a:avLst></a:prstGeom><a:solidFill><a:srgbClr val="F4F0EA"/></a:solidFill><a:ln w="12700"><a:solidFill><a:srgbClr val="F4F0EA"/></a:solidFill><a:prstDash val="solid"/></a:ln></p:spPr></p:sp><p:sp><p:nvSpPr><p:cNvPr id="3" name="Shape 1"></p:cNvPr><p:cNvSpPr/><p:nvPr></p:nvPr></p:nvSpPr><p:spPr><a:xfrm><a:off x="960120" y="0"/><a:ext cx="9144" cy="6858000"/></a:xfrm><a:prstGeom prst="rect"><a:avLst></a:avLst></a:prstGeom><a:solidFill><a:srgbClr val="DDD8CF"/></a:solidFill><a:ln w="12700"><a:solidFill><a:srgbClr val="DDD8CF"/></a:solidFill><a:prstDash val="solid"/></a:ln></p:spPr></p:sp><p:sp><p:nvSpPr><p:cNvPr id="4" name="Shape 2"></p:cNvPr><p:cNvSpPr/><p:nvPr></p:nvPr></p:nvSpPr><p:spPr><a:xfrm><a:off x="1920240" y="0"/><a:ext cx="9144" cy="6858000"/></a:xfrm><a:prstGeom prst="rect"><a:avLst></a:avLst></a:prstGeom><a:solidFill><a:srgbClr val="DDD8CF"/></a:solidFill><a:ln w="12700"><a:solidFill><a:srgbClr val="DDD8CF"/></a:solidFill><a:prstDash val="solid"/></a:ln></p:spPr></p:sp><p:sp><p:nvSpPr><p:cNvPr id="5" name="Shape 3"></p:cNvPr><p:cNvSpPr/><p:nvPr></p:nvPr></p:nvSpPr><p:spPr><a:xfrm><a:off x="2880360" y="0"/><a:ext cx="9144" cy="6858000"/></a:xfrm><a:prstGeom prst="rect"><a:avLst></a:avLst></a:prstGeom><a:solidFill><a:srgbClr val="DDD8CF"/></a:solidFill><a:ln w="12700"><a:solidFill><a:srgbClr val="DDD8CF"/></a:solidFill><a:prstDash val="solid"/></a:ln></p:spPr></p:sp><p:sp><p:nvSpPr><p:cNvPr id="6" name="Shape 4"></p:cNvPr><p:cNvSpPr/><p:nvPr></p:nvPr></p:nvSpPr><p:spPr><a:xfrm><a:off x="3840480" y="0"/><a:ext cx="9144" cy="6858000"/></a:xfrm><a:prstGeom prst="rect"><a:avLst></a:avLst></a:prstGeom><a:solidFill><a:srgbClr val="DDD8CF"/></a:solidFill><a:ln w="12700"><a:solidFill><a:srgbClr val="DDD8CF"/></a:solidFill><a:prstDash val="solid"/></a:ln></p:spPr></p:sp><p:sp><p:nvSpPr><p:cNvPr id="7" name="Shape 5"></p:cNvPr><p:cNvSpPr/><p:nvPr></p:nvPr></p:nvSpPr><p:spPr><a:xfrm><a:off x="4800600" y="0"/><a:ext cx="9144" cy="6858000"/></a:xfrm><a:prstGeom prst="rect"><a:avLst></a:avLst></a:prstGeom><a:solidFill><a:srgbClr val="DDD8CF"/></a:solidFill><a:ln w="12700"><a:solidFill><a:srgbClr val="DDD8CF"/></a:solidFill><a:prstDash val="solid"/></a:ln></p:spPr></p:sp><p:sp><p:nvSpPr><p:cNvPr id="8" name="Shape 6"></p:cNvPr><p:cNvSpPr/><p:nvPr></p:nvPr></p:nvSpPr><p:spPr><a:xfrm><a:off x="5760720" y="0"/><a:ext cx="9144" cy="6858000"/></a:xfrm><a:prstGeom prst="rect"><a:avLst></a:avLst></a:prstGeom><a:solidFill><a:srgbClr val="DDD8CF"/></a:solidFill><a:ln w="12700"><a:solidFill><a:srgbClr val="DDD8CF"/></a:solidFill><a:prstDash val="solid"/></a:ln></p:spPr></p:sp><p:sp><p:nvSpPr><p:cNvPr id="9" name="Shape 7"></p:cNvPr><p:cNvSpPr/><p:nvPr></p:nvPr></p:nvSpPr><p:spPr><a:xfrm><a:off x="6720840" y="0"/><a:ext cx="9144" cy="6858000"/></a:xfrm><a:prstGeom prst="rect"><a:avLst></a:avLst></a:prstGeom><a:solidFill><a:srgbClr val="DDD8CF"/></a:solidFill><a:ln w="12700"><a:solidFill><a:srgbClr val="DDD8CF"/></a:solidFill><a:prstDash val="solid"/></a:ln></p:spPr></p:sp><p:sp><p:nvSpPr><p:cNvPr id="10" name="Shape 8"></p:cNvPr><p:cNvSpPr/><p:nvPr></p:nvPr></p:nvSpPr><p:spPr><a:xfrm><a:off x="7680960" y="0"/><a:ext cx="9144" cy="6858000"/></a:xfrm><a:prstGeom prst="rect"><a:avLst></a:avLst></a:prstGeom><a:solidFill><a:srgbClr val="DDD8CF"/></a:solidFill><a:ln w="12700"><a:solidFill><a:srgbClr val="DDD8CF"/></a:solidFill><a:prstDash val="solid"/></a:ln></p:spPr></p:sp><p:sp><p:nvSpPr><p:cNvPr id="11" name="Shape 9"></p:cNvPr><p:cNvSpPr/><p:nvPr></p:nvPr></p:nvSpPr><p:spPr><a:xfrm><a:off x="8641080" y="0"/><a:ext cx="9144" cy="6858000"/></a:xfrm><a:prstGeom prst="rect"><a:avLst></a:avLst></a:prstGeom><a:solidFill><a:srgbClr val="DDD8CF"/></a:solidFill><a:ln w="12700"><a:solidFill><a:srgbClr val="DDD8CF"/></a:solidFill><a:prstDash val="solid"/></a:ln></p:spPr></p:sp><p:sp><p:nvSpPr><p:cNvPr id="12" name="Shape 10"></p:cNvPr><p:cNvSpPr/><p:nvPr></p:nvPr></p:nvSpPr><p:spPr><a:xfrm><a:off x="9601200" y="0"/><a:ext cx="9144" cy="6858000"/></a:xfrm><a:prstGeom prst="rect"><a:avLst></a:avLst></a:prstGeom><a:solidFill><a:srgbClr val="DDD8CF"/></a:solidFill><a:ln w="12700"><a:solidFill><a:srgbClr val="DDD8CF"/></a:solidFill><a:prstDash val="solid"/></a:ln></p:spPr></p:sp><p:sp><p:nvSpPr><p:cNvPr id="13" name="Shape 11"></p:cNvPr><p:cNvSpPr/><p:nvPr></p:nvPr></p:nvSpPr><p:spPr><a:xfrm><a:off x="10561320" y="0"/><a:ext cx="9144" cy="6858000"/></a:xfrm><a:prstGeom prst="rect"><a:avLst></a:avLst></a:prstGeom><a:solidFill><a:srgbClr val="DDD8CF"/></a:solidFill><a:ln w="12700"><a:solidFill><a:srgbClr val="DDD8CF"/></a:solidFill><a:prstDash val="solid"/></a:ln></p:spPr></p:sp><p:sp><p:nvSpPr><p:cNvPr id="14" name="Shape 12"></p:cNvPr><p:cNvSpPr/><p:nvPr></p:nvPr></p:nvSpPr><p:spPr><a:xfrm><a:off x="0" y="960120"/><a:ext cx="12191695" cy="9144"/></a:xfrm><a:prstGeom prst="rect"><a:avLst></a:avLst></a:prstGeom><a:solidFill><a:srgbClr val="DDD8CF"/></a:solidFill><a:ln w="12700"><a:solidFill><a:srgbClr val="DDD8CF"/></a:solidFill><a:prstDash val="solid"/></a:ln></p:spPr></p:sp><p:sp><p:nvSpPr><p:cNvPr id="15" name="Shape 13"></p:cNvPr><p:cNvSpPr/><p:nvPr></p:nvPr></p:nvSpPr><p:spPr><a:xfrm><a:off x="0" y="1920240"/><a:ext cx="12191695" cy="9144"/></a:xfrm><a:prstGeom prst="rect"><a:avLst></a:avLst></a:prstGeom><a:solidFill><a:srgbClr val="DDD8CF"/></a:solidFill><a:ln w="12700"><a:solidFill><a:srgbClr val="DDD8CF"/></a:solidFill><a:prstDash val="solid"/></a:ln></p:spPr></p:sp><p:sp><p:nvSpPr><p:cNvPr id="16" name="Shape 14"></p:cNvPr><p:cNvSpPr/><p:nvPr></p:nvPr></p:nvSpPr><p:spPr><a:xfrm><a:off x="0" y="2880360"/><a:ext cx="12191695" cy="9144"/></a:xfrm><a:prstGeom prst="rect"><a:avLst></a:avLst></a:prstGeom><a:solidFill><a:srgbClr val="DDD8CF"/></a:solidFill><a:ln w="12700"><a:solidFill><a:srgbClr val="DDD8CF"/></a:solidFill><a:prstDash val="solid"/></a:ln></p:spPr></p:sp><p:sp><p:nvSpPr><p:cNvPr id="17" name="Shape 15"></p:cNvPr><p:cNvSpPr/><p:nvPr></p:nvPr></p:nvSpPr><p:spPr><a:xfrm><a:off x="0" y="3840480"/><a:ext cx="12191695" cy="9144"/></a:xfrm><a:prstGeom prst="rect"><a:avLst></a:avLst></a:prstGeom><a:solidFill><a:srgbClr val="DDD8CF"/></a:solidFill><a:ln w="12700"><a:solidFill><a:srgbClr val="DDD8CF"/></a:solidFill><a:prstDash val="solid"/></a:ln></p:spPr></p:sp><p:sp><p:nvSpPr><p:cNvPr id="18" name="Shape 16"></p:cNvPr><p:cNvSpPr/><p:nvPr></p:nvPr></p:nvSpPr><p:spPr><a:xfrm><a:off x="0" y="4800600"/><a:ext cx="12191695" cy="9144"/></a:xfrm><a:prstGeom prst="rect"><a:avLst></a:avLst></a:prstGeom><a:solidFill><a:srgbClr val="DDD8CF"/></a:solidFill><a:ln w="12700"><a:solidFill><a:srgbClr val="DDD8CF"/></a:solidFill><a:prstDash val="solid"/></a:ln></p:spPr></p:sp><p:sp><p:nvSpPr><p:cNvPr id="19" name="Shape 17"></p:cNvPr><p:cNvSpPr/><p:nvPr></p:nvPr></p:nvSpPr><p:spPr><a:xfrm><a:off x="0" y="5760720"/><a:ext cx="12191695" cy="9144"/></a:xfrm><a:prstGeom prst="rect"><a:avLst></a:avLst></a:prstGeom><a:solidFill><a:srgbClr val="DDD8CF"/></a:solidFill><a:ln w="12700"><a:solidFill><a:srgbClr val="DDD8CF"/></a:solidFill><a:prstDash val="solid"/></a:ln></p:spPr></p:sp><p:sp><p:nvSpPr><p:cNvPr id="20" name="Shape 18"></p:cNvPr><p:cNvSpPr/><p:nvPr></p:nvPr></p:nvSpPr><p:spPr><a:xfrm><a:off x="411480" y="320040"/><a:ext cx="2377440" cy="292608"/></a:xfrm><a:prstGeom prst="roundRect"><a:avLst><a:gd name="adj" fmla="val 50000"/></a:avLst></a:prstGeom><a:solidFill><a:srgbClr val="111827"/></a:solidFill><a:ln w="12700"><a:solidFill><a:srgbClr val="111827"/></a:solidFill><a:prstDash val="solid"/></a:ln></p:spPr></p:sp><p:sp><p:nvSpPr><p:cNvPr id="21" name="Text 19"></p:cNvPr><p:cNvSpPr/><p:nvPr></p:nvPr></p:nvSpPr><p:spPr><a:xfrm><a:off x="502920" y="320040"/><a:ext cx="2194560" cy="292608"/></a:xfrm><a:prstGeom prst="rect"><a:avLst></a:avLst></a:prstGeom><a:noFill/><a:ln></a:ln></p:spPr><p:txBody><a:bodyPr wrap="square" rtlCol="0" anchor="ctr"></a:bodyPr><a:lstStyle/><a:p><a:pPr indent="0" marL="0"><a:buNone/></a:pPr><a:r><a:rPr lang="en-US" sz="900" b="1" spc="200" kern="0" dirty="0"><a:solidFill><a:srgbClr val="FFD147"/></a:solidFill><a:latin typeface=""JetBrains Mono", "Courier New", monospace" pitchFamily="34" charset="0"/><a:ea typeface=""JetBrains Mono", "Courier New", monospace" pitchFamily="34" charset="-122"/><a:cs typeface=""JetBrains Mono", "Courier New", monospace" pitchFamily="34" charset="-120"/></a:rPr><a:t>PART 03</a:t></a:r><a:endParaRPr lang="en-US" sz="900" dirty="0"/></a:p></p:txBody></p:sp><p:sp><p:nvSpPr><p:cNvPr id="22" name="Text 20"></p:cNvPr><p:cNvSpPr/><p:nvPr></p:nvPr></p:nvSpPr><p:spPr><a:xfrm><a:off x="411480" y="777240"/><a:ext cx="10972800" cy="731520"/></a:xfrm><a:prstGeom prst="rect"><a:avLst></a:avLst></a:prstGeom><a:noFill/><a:ln></a:ln></p:spPr><p:txBody><a:bodyPr wrap="square" rtlCol="0" anchor="ctr"></a:bodyPr><a:lstStyle/><a:p><a:pPr indent="0" marL="0"><a:buNone/></a:pPr><a:r><a:rPr lang="en-US" sz="4200" b="1" spc="-300" kern="0" dirty="0"><a:solidFill><a:srgbClr val="111827"/></a:solidFill><a:latin typeface="Arial Black, "Trebuchet MS", "Helvetica Neue", sans-serif" pitchFamily="34" charset="0"/><a:ea typeface="Arial Black, "Trebuchet MS", "Helvetica Neue", sans-serif" pitchFamily="34" charset="-122"/><a:cs typeface="Arial Black, "Trebuchet MS", "Helvetica Neue", sans-serif" pitchFamily="34" charset="-120"/></a:rPr><a:t>The SparseLU Paradox:</a:t></a:r><a:endParaRPr lang="en-US" sz="4200" dirty="0"/></a:p></p:txBody></p:sp><p:sp><p:nvSpPr><p:cNvPr id="23" name="Shape 21"></p:cNvPr><p:cNvSpPr/><p:nvPr></p:nvPr></p:nvSpPr><p:spPr><a:xfrm><a:off x="5943600" y="1417320"/><a:ext cx="5852160" cy="640080"/></a:xfrm><a:prstGeom prst="roundRect"><a:avLst><a:gd name="adj" fmla="val 11429"/></a:avLst></a:prstGeom><a:solidFill><a:srgbClr val="FFD147"/></a:solidFill><a:ln w="31750"><a:solidFill><a:srgbClr val="111827"/></a:solidFill><a:prstDash val="solid"/></a:ln></p:spPr></p:sp><p:sp><p:nvSpPr><p:cNvPr id="24" name="Text 22"></p:cNvPr><p:cNvSpPr/><p:nvPr></p:nvPr></p:nvSpPr><p:spPr><a:xfrm><a:off x="6035040" y="1463040"/><a:ext cx="5669280" cy="548640"/></a:xfrm><a:prstGeom prst="rect"><a:avLst></a:avLst></a:prstGeom><a:noFill/><a:ln></a:ln></p:spPr><p:txBody><a:bodyPr wrap="square" rtlCol="0" anchor="ctr"></a:bodyPr><a:lstStyle/><a:p><a:pPr indent="0" marL="0"><a:buNone/></a:pPr><a:r><a:rPr lang="en-US" sz="3000" b="1" spc="-200" kern="0" dirty="0"><a:solidFill><a:srgbClr val="111827"/></a:solidFill><a:latin typeface="Arial Black, "Trebuchet MS", "Helvetica Neue", sans-serif" pitchFamily="34" charset="0"/><a:ea typeface="Arial Black, "Trebuchet MS", "Helvetica Neue", sans-serif" pitchFamily="34" charset="-122"/><a:cs typeface="Arial Black, "Trebuchet MS", "Helvetica Neue", sans-serif" pitchFamily="34" charset="-120"/></a:rPr><a:t>When Locality Slows Down</a:t></a:r><a:endParaRPr lang="en-US" sz="3000" dirty="0"/></a:p></p:txBody></p:sp><p:sp><p:nvSpPr><p:cNvPr id="25" name="Text 23"></p:cNvPr><p:cNvSpPr/><p:nvPr></p:nvPr></p:nvSpPr><p:spPr><a:xfrm><a:off x="411480" y="2148840"/><a:ext cx="10972800" cy="274320"/></a:xfrm><a:prstGeom prst="rect"><a:avLst></a:avLst></a:prstGeom><a:noFill/><a:ln></a:ln></p:spPr><p:txBody><a:bodyPr wrap="square" rtlCol="0" anchor="ctr"></a:bodyPr><a:lstStyle/><a:p><a:pPr indent="0" marL="0"><a:buNone/></a:pPr><a:r><a:rPr lang="en-US" sz="1400" i="1" dirty="0"><a:solidFill><a:srgbClr val="4B5563"/></a:solidFill><a:latin typeface="Inter, "Segoe UI", sans-serif" pitchFamily="34" charset="0"/><a:ea typeface="Inter, "Segoe UI", sans-serif" pitchFamily="34" charset="-122"/><a:cs typeface="Inter, "Segoe UI", sans-serif" pitchFamily="34" charset="-120"/></a:rPr><a:t>100 NUMA runs (8-node Opteron) + 56 TILEPro64 mesh configurations</a:t></a:r><a:endParaRPr lang="en-US" sz="1400" dirty="0"/></a:p></p:txBody></p:sp><p:sp><p:nvSpPr><p:cNvPr id="26" name="Shape 24"></p:cNvPr><p:cNvSpPr/><p:nvPr></p:nvPr></p:nvSpPr><p:spPr><a:xfrm><a:off x="411480" y="2606040"/><a:ext cx="6583680" cy="3383280"/></a:xfrm><a:prstGeom prst="roundRect"><a:avLst><a:gd name="adj" fmla="val 2162"/></a:avLst></a:prstGeom><a:solidFill><a:srgbClr val="F4F0EA"/></a:solidFill><a:ln w="31750"><a:solidFill><a:srgbClr val="111827"/></a:solidFill><a:prstDash val="solid"/></a:ln><a:effectLst> <a:outerShdw sx="100000" sy="100000" kx="0" ky="0" algn="bl" rotWithShape="0" blurRad="50800" dist="50800" dir="16200000"> <a:srgbClr val="C8C6BF"> <a:alpha val="75000"/></a:srgbClr> </a:outerShdw></a:effectLst></p:spPr></p:sp><p:sp><p:nvSpPr><p:cNvPr id="27" name="Text 25"></p:cNvPr><p:cNvSpPr/><p:nvPr></p:nvPr></p:nvSpPr><p:spPr><a:xfrm><a:off x="685800" y="2743200"/><a:ext cx="6035040" cy="274320"/></a:xfrm><a:prstGeom prst="rect"><a:avLst></a:avLst></a:prstGeom><a:noFill/><a:ln></a:ln></p:spPr><p:txBody><a:bodyPr wrap="square" rtlCol="0" anchor="ctr"></a:bodyPr><a:lstStyle/><a:p><a:pPr indent="0" marL="0"><a:buNone/></a:pPr><a:r><a:rPr lang="en-US" sz="1500" b="1" dirty="0"><a:solidFill><a:srgbClr val="111827"/></a:solidFill><a:latin typeface="Arial Black, "Trebuchet MS", "Helvetica Neue", sans-serif" pitchFamily="34" charset="0"/><a:ea typeface="Arial Black, "Trebuchet MS", "Helvetica Neue", sans-serif" pitchFamily="34" charset="-122"/><a:cs typeface="Arial Black, "Trebuchet MS", "Helvetica Neue", sans-serif" pitchFamily="34" charset="-120"/></a:rPr><a:t>AMD Opteron Reproduction (100 Runs · 100% Verification)</a:t></a:r><a:endParaRPr lang="en-US" sz="1500" dirty="0"/></a:p></p:txBody></p:sp><p:pic>  <p:nvPicPr><p:cNvPr id="28" name="Image 0" descr="./results/numa/fig7_reproduction.png">    </p:cNvPr>    <p:cNvPicPr><a:picLocks noChangeAspect="1"/></p:cNvPicPr>    <p:nvPr></p:nvPr>  </p:nvPicPr><p:blipFill><a:blip r:embed="rId1"></a:blip>  <a:stretch><a:fillRect/></a:stretch></p:blipFill><p:spPr> <a:xfrm>  <a:off x="685800" y="3063240"/>  <a:ext cx="5852160" cy="2103120"/> </a:xfrm> <a:prstGeom prst="rect"><a:avLst/></a:prstGeom></p:spPr></p:pic><p:sp><p:nvSpPr><p:cNvPr id="29" name="Shape 26"></p:cNvPr><p:cNvSpPr/><p:nvPr></p:nvPr></p:nvSpPr><p:spPr><a:xfrm><a:off x="685800" y="5303520"/><a:ext cx="6035040" cy="548640"/></a:xfrm><a:prstGeom prst="roundRect"><a:avLst><a:gd name="adj" fmla="val 10000"/></a:avLst></a:prstGeom><a:solidFill><a:srgbClr val="EFEAE3"/></a:solidFill><a:ln w="12700"><a:solidFill><a:srgbClr val="111827"/></a:solidFill><a:prstDash val="solid"/></a:ln></p:spPr></p:sp><p:sp><p:nvSpPr><p:cNvPr id="30" name="Text 27"></p:cNvPr><p:cNvSpPr/><p:nvPr></p:nvPr></p:nvSpPr><p:spPr><a:xfrm><a:off x="822960" y="5349240"/><a:ext cx="5760720" cy="457200"/></a:xfrm><a:prstGeom prst="rect"><a:avLst></a:avLst></a:prstGeom><a:noFill/><a:ln></a:ln></p:spPr><p:txBody><a:bodyPr wrap="square" rtlCol="0" anchor="ctr"></a:bodyPr><a:lstStyle/><a:p><a:pPr indent="0" marL="0"><a:buNone/></a:pPr><a:r><a:rPr lang="en-US" sz="1000" dirty="0"><a:solidFill><a:srgbClr val="111827"/></a:solidFill><a:latin typeface=""JetBrains Mono", "Courier New", monospace" pitchFamily="34" charset="0"/><a:ea typeface=""JetBrains Mono", "Courier New", monospace" pitchFamily="34" charset="-122"/><a:cs typeface=""JetBrains Mono", "Courier New", monospace" pitchFamily="34" charset="-120"/></a:rPr><a:t>•  Map: −45.1% Comm (0.55×) · −19.0% Cycles (0.81×)    •  Matmul: −22.5% Comm (0.78×) · Parity    •  SparseLU: −26.7% Comm BUT +15.1% SLOWER!</a:t></a:r><a:endParaRPr lang="en-US" sz="1000" dirty="0"/></a:p></p:txBody></p:sp><p:sp><p:nvSpPr><p:cNvPr id="31" name="Shape 28"></p:cNvPr><p:cNvSpPr/><p:nvPr></p:nvPr></p:nvSpPr><p:spPr><a:xfrm><a:off x="7223760" y="2606040"/><a:ext cx="4572000" cy="1828800"/></a:xfrm><a:prstGeom prst="roundRect"><a:avLst><a:gd name="adj" fmla="val 4000"/></a:avLst></a:prstGeom><a:solidFill><a:srgbClr val="111827"/></a:solidFill><a:ln w="31750"><a:solidFill><a:srgbClr val="111827"/></a:solidFill><a:prstDash val="solid"/></a:ln></p:spPr></p:sp><p:sp><p:nvSpPr><p:cNvPr id="32" name="Text 29"></p:cNvPr><p:cNvSpPr/><p:nvPr></p:nvPr></p:nvSpPr><p:spPr><a:xfrm><a:off x="7452360" y="2743200"/><a:ext cx="4114800" cy="274320"/></a:xfrm><a:prstGeom prst="rect"><a:avLst></a:avLst></a:prstGeom><a:noFill/><a:ln></a:ln></p:spPr><p:txBody><a:bodyPr wrap="square" rtlCol="0" anchor="ctr"></a:bodyPr><a:lstStyle/><a:p><a:pPr indent="0" marL="0"><a:buNone/></a:pPr><a:r><a:rPr lang="en-US" sz="1400" b="1" spc="200" kern="0" dirty="0"><a:solidFill><a:srgbClr val="FFD147"/></a:solidFill><a:latin typeface=""JetBrains Mono", "Courier New", monospace" pitchFamily="34" charset="0"/><a:ea typeface=""JetBrains Mono", "Courier New", monospace" pitchFamily="34" charset="-122"/><a:cs typeface=""JetBrains Mono", "Courier New", monospace" pitchFamily="34" charset="-120"/></a:rPr><a:t>THE PARADOX EXPLAINED</a:t></a:r><a:endParaRPr lang="en-US" sz="1400" dirty="0"/></a:p></p:txBody></p:sp><p:sp><p:nvSpPr><p:cNvPr id="33" name="Text 30"></p:cNvPr><p:cNvSpPr/><p:nvPr></p:nvPr></p:nvSpPr><p:spPr><a:xfrm><a:off x="7452360" y="3063240"/><a:ext cx="4114800" cy="274320"/></a:xfrm><a:prstGeom prst="rect"><a:avLst></a:avLst></a:prstGeom><a:noFill/><a:ln></a:ln></p:spPr><p:txBody><a:bodyPr wrap="square" rtlCol="0" anchor="ctr"></a:bodyPr><a:lstStyle/><a:p><a:pPr indent="0" marL="0"><a:buNone/></a:pPr><a:r><a:rPr lang="en-US" sz="1100" dirty="0"><a:solidFill><a:srgbClr val="F4F0EA"/></a:solidFill><a:latin typeface=""JetBrains Mono", "Courier New", monospace" pitchFamily="34" charset="0"/><a:ea typeface=""JetBrains Mono", "Courier New", monospace" pitchFamily="34" charset="-122"/><a:cs typeface=""JetBrains Mono", "Courier New", monospace" pitchFamily="34" charset="-120"/></a:rPr><a:t>1. Irregular DAG: tasks have skewed input dependencies.</a:t></a:r><a:endParaRPr lang="en-US" sz="1100" dirty="0"/></a:p></p:txBody></p:sp><p:sp><p:nvSpPr><p:cNvPr id="34" name="Text 31"></p:cNvPr><p:cNvSpPr/><p:nvPr></p:nvPr></p:nvSpPr><p:spPr><a:xfrm><a:off x="7452360" y="3355848"/><a:ext cx="4114800" cy="274320"/></a:xfrm><a:prstGeom prst="rect"><a:avLst></a:avLst></a:prstGeom><a:noFill/><a:ln></a:ln></p:spPr><p:txBody><a:bodyPr wrap="square" rtlCol="0" anchor="ctr"></a:bodyPr><a:lstStyle/><a:p><a:pPr indent="0" marL="0"><a:buNone/></a:pPr><a:r><a:rPr lang="en-US" sz="1100" dirty="0"><a:solidFill><a:srgbClr val="F4F0EA"/></a:solidFill><a:latin typeface=""JetBrains Mono", "Courier New", monospace" pitchFamily="34" charset="0"/><a:ea typeface=""JetBrains Mono", "Courier New", monospace" pitchFamily="34" charset="-122"/><a:cs typeface=""JetBrains Mono", "Courier New", monospace" pitchFamily="34" charset="-120"/></a:rPr><a:t>2. Load-blind dealer sends critical tasks to Node 0.</a:t></a:r><a:endParaRPr lang="en-US" sz="1100" dirty="0"/></a:p></p:txBody></p:sp><p:sp><p:nvSpPr><p:cNvPr id="35" name="Text 32"></p:cNvPr><p:cNvSpPr/><p:nvPr></p:nvPr></p:nvSpPr><p:spPr><a:xfrm><a:off x="7452360" y="3648456"/><a:ext cx="4114800" cy="274320"/></a:xfrm><a:prstGeom prst="rect"><a:avLst></a:avLst></a:prstGeom><a:noFill/><a:ln></a:ln></p:spPr><p:txBody><a:bodyPr wrap="square" rtlCol="0" anchor="ctr"></a:bodyPr><a:lstStyle/><a:p><a:pPr indent="0" marL="0"><a:buNone/></a:pPr><a:r><a:rPr lang="en-US" sz="1100" dirty="0"><a:solidFill><a:srgbClr val="F4F0EA"/></a:solidFill><a:latin typeface=""JetBrains Mono", "Courier New", monospace" pitchFamily="34" charset="0"/><a:ea typeface=""JetBrains Mono", "Courier New", monospace" pitchFamily="34" charset="-122"/><a:cs typeface=""JetBrains Mono", "Courier New", monospace" pitchFamily="34" charset="-120"/></a:rPr><a:t>3. Queue 0: 20 tasks  ·  Queues 1–7: EMPTY.</a:t></a:r><a:endParaRPr lang="en-US" sz="1100" dirty="0"/></a:p></p:txBody></p:sp><p:sp><p:nvSpPr><p:cNvPr id="36" name="Text 33"></p:cNvPr><p:cNvSpPr/><p:nvPr></p:nvPr></p:nvSpPr><p:spPr><a:xfrm><a:off x="7452360" y="3941064"/><a:ext cx="4114800" cy="274320"/></a:xfrm><a:prstGeom prst="rect"><a:avLst></a:avLst></a:prstGeom><a:noFill/><a:ln></a:ln></p:spPr><p:txBody><a:bodyPr wrap="square" rtlCol="0" anchor="ctr"></a:bodyPr><a:lstStyle/><a:p><a:pPr indent="0" marL="0"><a:buNone/></a:pPr><a:r><a:rPr lang="en-US" sz="1100" dirty="0"><a:solidFill><a:srgbClr val="F4F0EA"/></a:solidFill><a:latin typeface=""JetBrains Mono", "Courier New", monospace" pitchFamily="34" charset="0"/><a:ea typeface=""JetBrains Mono", "Courier New", monospace" pitchFamily="34" charset="-122"/><a:cs typeface=""JetBrains Mono", "Courier New", monospace" pitchFamily="34" charset="-120"/></a:rPr><a:t>4. 23 cores idle — comm win wiped by starvation.</a:t></a:r><a:endParaRPr lang="en-US" sz="1100" dirty="0"/></a:p></p:txBody></p:sp><p:sp><p:nvSpPr><p:cNvPr id="37" name="Shape 34"></p:cNvPr><p:cNvSpPr/><p:nvPr></p:nvPr></p:nvSpPr><p:spPr><a:xfrm><a:off x="7223760" y="4572000"/><a:ext cx="4572000" cy="1097280"/></a:xfrm><a:prstGeom prst="roundRect"><a:avLst><a:gd name="adj" fmla="val 6667"/></a:avLst></a:prstGeom><a:solidFill><a:srgbClr val="EFEAE3"/></a:solidFill><a:ln w="31750"><a:solidFill><a:srgbClr val="111827"/></a:solidFill><a:prstDash val="solid"/></a:ln></p:spPr></p:sp><p:sp><p:nvSpPr><p:cNvPr id="38" name="Text 35"></p:cNvPr><p:cNvSpPr/><p:nvPr></p:nvPr></p:nvSpPr><p:spPr><a:xfrm><a:off x="7452360" y="4663440"/><a:ext cx="4114800" cy="274320"/></a:xfrm><a:prstGeom prst="rect"><a:avLst></a:avLst></a:prstGeom><a:noFill/><a:ln></a:ln></p:spPr><p:txBody><a:bodyPr wrap="square" rtlCol="0" anchor="ctr"></a:bodyPr><a:lstStyle/><a:p><a:pPr indent="0" marL="0"><a:buNone/></a:pPr><a:r><a:rPr lang="en-US" sz="1600" b="1" dirty="0"><a:solidFill><a:srgbClr val="111827"/></a:solidFill><a:latin typeface="Arial Black, "Trebuchet MS", "Helvetica Neue", sans-serif" pitchFamily="34" charset="0"/><a:ea typeface="Arial Black, "Trebuchet MS", "Helvetica Neue", sans-serif" pitchFamily="34" charset="-122"/><a:cs typeface="Arial Black, "Trebuchet MS", "Helvetica Neue", sans-serif" pitchFamily="34" charset="-120"/></a:rPr><a:t>TILEPro64 8×8 Mesh</a:t></a:r><a:endParaRPr lang="en-US" sz="1600" dirty="0"/></a:p></p:txBody></p:sp><p:sp><p:nvSpPr><p:cNvPr id="39" name="Text 36"></p:cNvPr><p:cNvSpPr/><p:nvPr></p:nvPr></p:nvSpPr><p:spPr><a:xfrm><a:off x="7452360" y="4892040"/><a:ext cx="4114800" cy="457200"/></a:xfrm><a:prstGeom prst="rect"><a:avLst></a:avLst></a:prstGeom><a:noFill/><a:ln></a:ln></p:spPr><p:txBody><a:bodyPr wrap="square" rtlCol="0" anchor="ctr"></a:bodyPr><a:lstStyle/><a:p><a:pPr indent="0" marL="0"><a:lnSpc><a:spcPts val="1200"/></a:lnSpc><a:buNone/></a:pPr><a:r><a:rPr lang="en-US" sz="1000" dirty="0"><a:solidFill><a:srgbClr val="111827"/></a:solidFill><a:latin typeface="Inter, "Segoe UI", sans-serif" pitchFamily="34" charset="0"/><a:ea typeface="Inter, "Segoe UI", sans-serif" pitchFamily="34" charset="-122"/><a:cs typeface="Inter, "Segoe UI", sans-serif" pitchFamily="34" charset="-120"/></a:rPr><a:t>• 80.3% comm reduction (6.67M → 1.31M)  ·  • 39.3% speedup (281K → 170K)  ·  • 0 steals (63 → 0)</a:t></a:r><a:endParaRPr lang="en-US" sz="1000" dirty="0"/></a:p></p:txBody></p:sp><p:pic>  <p:nvPicPr><p:cNvPr id="40" name="Image 1" descr="./tilepro64/results/tilepro64_results.png">    </p:cNvPr>    <p:cNvPicPr><a:picLocks noChangeAspect="1"/></p:cNvPicPr>    <p:nvPr></p:nvPr>  </p:nvPicPr><p:blipFill><a:blip r:embed="rId2"></a:blip>  <a:stretch><a:fillRect/></a:stretch></p:blipFill><p:spPr> <a:xfrm>  <a:off x="7223760" y="5486400"/>  <a:ext cx="4572000" cy="502920"/> </a:xfrm> <a:prstGeom prst="rect"><a:avLst/></a:prstGeom></p:spPr></p:pic><p:pic>  <p:nvPicPr><p:cNvPr id="41" name="Image 2" descr="./tilepro64/results/tilepro64_results.png">    </p:cNvPr>    <p:cNvPicPr><a:picLocks noChangeAspect="1"/></p:cNvPicPr>    <p:nvPr></p:nvPr>  </p:nvPicPr><p:blipFill><a:blip r:embed="rId3"></a:blip>  <a:stretch><a:fillRect/></a:stretch></p:blipFill><p:spPr> <a:xfrm>  <a:off x="7223760" y="5989320"/>  <a:ext cx="4572000" cy="502920"/> </a:xfrm> <a:prstGeom prst="rect"><a:avLst/></a:prstGeom></p:spPr></p:pic><p:sp><p:nvSpPr><p:cNvPr id="42" name="Shape 37"></p:cNvPr><p:cNvSpPr/><p:nvPr></p:nvPr></p:nvSpPr><p:spPr><a:xfrm><a:off x="7223760" y="5623560"/><a:ext cx="4572000" cy="320040"/></a:xfrm><a:prstGeom prst="roundRect"><a:avLst><a:gd name="adj" fmla="val 17143"/></a:avLst></a:prstGeom><a:solidFill><a:srgbClr val="B91C1C"/></a:solidFill><a:ln w="12700"><a:solidFill><a:srgbClr val="111827"/></a:solidFill><a:prstDash val="solid"/></a:ln></p:spPr></p:sp><p:sp><p:nvSpPr><p:cNvPr id="43" name="Text 38"></p:cNvPr><p:cNvSpPr/><p:nvPr></p:nvPr></p:nvSpPr><p:spPr><a:xfrm><a:off x="7315200" y="5641848"/><a:ext cx="4389120" cy="274320"/></a:xfrm><a:prstGeom prst="rect"><a:avLst></a:avLst></a:prstGeom><a:noFill/><a:ln></a:ln></p:spPr><p:txBody><a:bodyPr wrap="square" rtlCol="0" anchor="ctr"></a:bodyPr><a:lstStyle/><a:p><a:pPr algn="ctr" indent="0" marL="0"><a:buNone/></a:pPr><a:r><a:rPr lang="en-US" sz="900" b="1" dirty="0"><a:solidFill><a:srgbClr val="F4F0EA"/></a:solidFill><a:latin typeface=""JetBrains Mono", "Courier New", monospace" pitchFamily="34" charset="0"/><a:ea typeface=""JetBrains Mono", "Courier New", monospace" pitchFamily="34" charset="-122"/><a:cs typeface=""JetBrains Mono", "Courier New", monospace" pitchFamily="34" charset="-120"/></a:rPr><a:t>+15.1% slowdown vs −26.7% comm drop — THE PARADOX</a:t></a:r><a:endParaRPr lang="en-US" sz="900" dirty="0"/></a:p></p:txBody></p:sp><p:sp><p:nvSpPr><p:cNvPr id="44" name="Text 39"></p:cNvPr><p:cNvSpPr/><p:nvPr></p:nvPr></p:nvSpPr><p:spPr><a:xfrm><a:off x="411480" y="6537960"/><a:ext cx="11338560" cy="182880"/></a:xfrm><a:prstGeom prst="rect"><a:avLst></a:avLst></a:prstGeom><a:noFill/><a:ln></a:ln></p:spPr><p:txBody><a:bodyPr wrap="square" rtlCol="0" anchor="ctr"></a:bodyPr><a:lstStyle/><a:p><a:pPr indent="0" marL="0"><a:buNone/></a:pPr><a:r><a:rPr lang="en-US" sz="900" dirty="0"><a:solidFill><a:srgbClr val="6B6B6B"/></a:solidFill><a:latin typeface=""JetBrains Mono", "Courier New", monospace" pitchFamily="34" charset="0"/><a:ea typeface=""JetBrains Mono", "Courier New", monospace" pitchFamily="34" charset="-122"/><a:cs typeface=""JetBrains Mono", "Courier New", monospace" pitchFamily="34" charset="-120"/></a:rPr><a:t>Empirical Reproduction: AMD Opteron NUMA &amp; TILEPro64 Manycore Mesh  ·  04 / 05</a:t></a:r><a:endParaRPr lang="en-US" sz="900" dirty="0"/></a:p></p:txBody></p:sp></p:spTree></p:cSld><p:clrMapOvr><a:masterClrMapping/></p:clrMapOvr></p:sld>
 </file>
 
 <file path=ppt/slides/slide5.xml><?xml version="1.0" encoding="UTF-8" standalone="yes"?>

--- a/output/HPC_Locality_Scheduling_Presentation.pptx
+++ b/output/HPC_Locality_Scheduling_Presentation.pptx
@@ -1220,7 +1220,7 @@
 </file>
 
 <file path=ppt/slides/slide4.xml><?xml version="1.0" encoding="UTF-8" standalone="yes"?>
-<p:sld xmlns:a="http://schemas.openxmlformats.org/drawingml/2006/main" xmlns:r="http://schemas.openxmlformats.org/officeDocument/2006/relationships" xmlns:p="http://schemas.openxmlformats.org/presentationml/2006/main"><p:cSld name="Slide 4"><p:spTree><p:nvGrpSpPr><p:cNvPr id="1" name=""/><p:cNvGrpSpPr/><p:nvPr/></p:nvGrpSpPr><p:grpSpPr><a:xfrm><a:off x="0" y="0"/><a:ext cx="0" cy="0"/><a:chOff x="0" y="0"/><a:chExt cx="0" cy="0"/></a:xfrm></p:grpSpPr><p:sp><p:nvSpPr><p:cNvPr id="2" name="Shape 0"></p:cNvPr><p:cNvSpPr/><p:nvPr></p:nvPr></p:nvSpPr><p:spPr><a:xfrm><a:off x="0" y="0"/><a:ext cx="12191695" cy="6858000"/></a:xfrm><a:prstGeom prst="rect"><a:avLst></a:avLst></a:prstGeom><a:solidFill><a:srgbClr val="F4F0EA"/></a:solidFill><a:ln w="12700"><a:solidFill><a:srgbClr val="F4F0EA"/></a:solidFill><a:prstDash val="solid"/></a:ln></p:spPr></p:sp><p:sp><p:nvSpPr><p:cNvPr id="3" name="Shape 1"></p:cNvPr><p:cNvSpPr/><p:nvPr></p:nvPr></p:nvSpPr><p:spPr><a:xfrm><a:off x="960120" y="0"/><a:ext cx="9144" cy="6858000"/></a:xfrm><a:prstGeom prst="rect"><a:avLst></a:avLst></a:prstGeom><a:solidFill><a:srgbClr val="DDD8CF"/></a:solidFill><a:ln w="12700"><a:solidFill><a:srgbClr val="DDD8CF"/></a:solidFill><a:prstDash val="solid"/></a:ln></p:spPr></p:sp><p:sp><p:nvSpPr><p:cNvPr id="4" name="Shape 2"></p:cNvPr><p:cNvSpPr/><p:nvPr></p:nvPr></p:nvSpPr><p:spPr><a:xfrm><a:off x="1920240" y="0"/><a:ext cx="9144" cy="6858000"/></a:xfrm><a:prstGeom prst="rect"><a:avLst></a:avLst></a:prstGeom><a:solidFill><a:srgbClr val="DDD8CF"/></a:solidFill><a:ln w="12700"><a:solidFill><a:srgbClr val="DDD8CF"/></a:solidFill><a:prstDash val="solid"/></a:ln></p:spPr></p:sp><p:sp><p:nvSpPr><p:cNvPr id="5" name="Shape 3"></p:cNvPr><p:cNvSpPr/><p:nvPr></p:nvPr></p:nvSpPr><p:spPr><a:xfrm><a:off x="2880360" y="0"/><a:ext cx="9144" cy="6858000"/></a:xfrm><a:prstGeom prst="rect"><a:avLst></a:avLst></a:prstGeom><a:solidFill><a:srgbClr val="DDD8CF"/></a:solidFill><a:ln w="12700"><a:solidFill><a:srgbClr val="DDD8CF"/></a:solidFill><a:prstDash val="solid"/></a:ln></p:spPr></p:sp><p:sp><p:nvSpPr><p:cNvPr id="6" name="Shape 4"></p:cNvPr><p:cNvSpPr/><p:nvPr></p:nvPr></p:nvSpPr><p:spPr><a:xfrm><a:off x="3840480" y="0"/><a:ext cx="9144" cy="6858000"/></a:xfrm><a:prstGeom prst="rect"><a:avLst></a:avLst></a:prstGeom><a:solidFill><a:srgbClr val="DDD8CF"/></a:solidFill><a:ln w="12700"><a:solidFill><a:srgbClr val="DDD8CF"/></a:solidFill><a:prstDash val="solid"/></a:ln></p:spPr></p:sp><p:sp><p:nvSpPr><p:cNvPr id="7" name="Shape 5"></p:cNvPr><p:cNvSpPr/><p:nvPr></p:nvPr></p:nvSpPr><p:spPr><a:xfrm><a:off x="4800600" y="0"/><a:ext cx="9144" cy="6858000"/></a:xfrm><a:prstGeom prst="rect"><a:avLst></a:avLst></a:prstGeom><a:solidFill><a:srgbClr val="DDD8CF"/></a:solidFill><a:ln w="12700"><a:solidFill><a:srgbClr val="DDD8CF"/></a:solidFill><a:prstDash val="solid"/></a:ln></p:spPr></p:sp><p:sp><p:nvSpPr><p:cNvPr id="8" name="Shape 6"></p:cNvPr><p:cNvSpPr/><p:nvPr></p:nvPr></p:nvSpPr><p:spPr><a:xfrm><a:off x="5760720" y="0"/><a:ext cx="9144" cy="6858000"/></a:xfrm><a:prstGeom prst="rect"><a:avLst></a:avLst></a:prstGeom><a:solidFill><a:srgbClr val="DDD8CF"/></a:solidFill><a:ln w="12700"><a:solidFill><a:srgbClr val="DDD8CF"/></a:solidFill><a:prstDash val="solid"/></a:ln></p:spPr></p:sp><p:sp><p:nvSpPr><p:cNvPr id="9" name="Shape 7"></p:cNvPr><p:cNvSpPr/><p:nvPr></p:nvPr></p:nvSpPr><p:spPr><a:xfrm><a:off x="6720840" y="0"/><a:ext cx="9144" cy="6858000"/></a:xfrm><a:prstGeom prst="rect"><a:avLst></a:avLst></a:prstGeom><a:solidFill><a:srgbClr val="DDD8CF"/></a:solidFill><a:ln w="12700"><a:solidFill><a:srgbClr val="DDD8CF"/></a:solidFill><a:prstDash val="solid"/></a:ln></p:spPr></p:sp><p:sp><p:nvSpPr><p:cNvPr id="10" name="Shape 8"></p:cNvPr><p:cNvSpPr/><p:nvPr></p:nvPr></p:nvSpPr><p:spPr><a:xfrm><a:off x="7680960" y="0"/><a:ext cx="9144" cy="6858000"/></a:xfrm><a:prstGeom prst="rect"><a:avLst></a:avLst></a:prstGeom><a:solidFill><a:srgbClr val="DDD8CF"/></a:solidFill><a:ln w="12700"><a:solidFill><a:srgbClr val="DDD8CF"/></a:solidFill><a:prstDash val="solid"/></a:ln></p:spPr></p:sp><p:sp><p:nvSpPr><p:cNvPr id="11" name="Shape 9"></p:cNvPr><p:cNvSpPr/><p:nvPr></p:nvPr></p:nvSpPr><p:spPr><a:xfrm><a:off x="8641080" y="0"/><a:ext cx="9144" cy="6858000"/></a:xfrm><a:prstGeom prst="rect"><a:avLst></a:avLst></a:prstGeom><a:solidFill><a:srgbClr val="DDD8CF"/></a:solidFill><a:ln w="12700"><a:solidFill><a:srgbClr val="DDD8CF"/></a:solidFill><a:prstDash val="solid"/></a:ln></p:spPr></p:sp><p:sp><p:nvSpPr><p:cNvPr id="12" name="Shape 10"></p:cNvPr><p:cNvSpPr/><p:nvPr></p:nvPr></p:nvSpPr><p:spPr><a:xfrm><a:off x="9601200" y="0"/><a:ext cx="9144" cy="6858000"/></a:xfrm><a:prstGeom prst="rect"><a:avLst></a:avLst></a:prstGeom><a:solidFill><a:srgbClr val="DDD8CF"/></a:solidFill><a:ln w="12700"><a:solidFill><a:srgbClr val="DDD8CF"/></a:solidFill><a:prstDash val="solid"/></a:ln></p:spPr></p:sp><p:sp><p:nvSpPr><p:cNvPr id="13" name="Shape 11"></p:cNvPr><p:cNvSpPr/><p:nvPr></p:nvPr></p:nvSpPr><p:spPr><a:xfrm><a:off x="10561320" y="0"/><a:ext cx="9144" cy="6858000"/></a:xfrm><a:prstGeom prst="rect"><a:avLst></a:avLst></a:prstGeom><a:solidFill><a:srgbClr val="DDD8CF"/></a:solidFill><a:ln w="12700"><a:solidFill><a:srgbClr val="DDD8CF"/></a:solidFill><a:prstDash val="solid"/></a:ln></p:spPr></p:sp><p:sp><p:nvSpPr><p:cNvPr id="14" name="Shape 12"></p:cNvPr><p:cNvSpPr/><p:nvPr></p:nvPr></p:nvSpPr><p:spPr><a:xfrm><a:off x="0" y="960120"/><a:ext cx="12191695" cy="9144"/></a:xfrm><a:prstGeom prst="rect"><a:avLst></a:avLst></a:prstGeom><a:solidFill><a:srgbClr val="DDD8CF"/></a:solidFill><a:ln w="12700"><a:solidFill><a:srgbClr val="DDD8CF"/></a:solidFill><a:prstDash val="solid"/></a:ln></p:spPr></p:sp><p:sp><p:nvSpPr><p:cNvPr id="15" name="Shape 13"></p:cNvPr><p:cNvSpPr/><p:nvPr></p:nvPr></p:nvSpPr><p:spPr><a:xfrm><a:off x="0" y="1920240"/><a:ext cx="12191695" cy="9144"/></a:xfrm><a:prstGeom prst="rect"><a:avLst></a:avLst></a:prstGeom><a:solidFill><a:srgbClr val="DDD8CF"/></a:solidFill><a:ln w="12700"><a:solidFill><a:srgbClr val="DDD8CF"/></a:solidFill><a:prstDash val="solid"/></a:ln></p:spPr></p:sp><p:sp><p:nvSpPr><p:cNvPr id="16" name="Shape 14"></p:cNvPr><p:cNvSpPr/><p:nvPr></p:nvPr></p:nvSpPr><p:spPr><a:xfrm><a:off x="0" y="2880360"/><a:ext cx="12191695" cy="9144"/></a:xfrm><a:prstGeom prst="rect"><a:avLst></a:avLst></a:prstGeom><a:solidFill><a:srgbClr val="DDD8CF"/></a:solidFill><a:ln w="12700"><a:solidFill><a:srgbClr val="DDD8CF"/></a:solidFill><a:prstDash val="solid"/></a:ln></p:spPr></p:sp><p:sp><p:nvSpPr><p:cNvPr id="17" name="Shape 15"></p:cNvPr><p:cNvSpPr/><p:nvPr></p:nvPr></p:nvSpPr><p:spPr><a:xfrm><a:off x="0" y="3840480"/><a:ext cx="12191695" cy="9144"/></a:xfrm><a:prstGeom prst="rect"><a:avLst></a:avLst></a:prstGeom><a:solidFill><a:srgbClr val="DDD8CF"/></a:solidFill><a:ln w="12700"><a:solidFill><a:srgbClr val="DDD8CF"/></a:solidFill><a:prstDash val="solid"/></a:ln></p:spPr></p:sp><p:sp><p:nvSpPr><p:cNvPr id="18" name="Shape 16"></p:cNvPr><p:cNvSpPr/><p:nvPr></p:nvPr></p:nvSpPr><p:spPr><a:xfrm><a:off x="0" y="4800600"/><a:ext cx="12191695" cy="9144"/></a:xfrm><a:prstGeom prst="rect"><a:avLst></a:avLst></a:prstGeom><a:solidFill><a:srgbClr val="DDD8CF"/></a:solidFill><a:ln w="12700"><a:solidFill><a:srgbClr val="DDD8CF"/></a:solidFill><a:prstDash val="solid"/></a:ln></p:spPr></p:sp><p:sp><p:nvSpPr><p:cNvPr id="19" name="Shape 17"></p:cNvPr><p:cNvSpPr/><p:nvPr></p:nvPr></p:nvSpPr><p:spPr><a:xfrm><a:off x="0" y="5760720"/><a:ext cx="12191695" cy="9144"/></a:xfrm><a:prstGeom prst="rect"><a:avLst></a:avLst></a:prstGeom><a:solidFill><a:srgbClr val="DDD8CF"/></a:solidFill><a:ln w="12700"><a:solidFill><a:srgbClr val="DDD8CF"/></a:solidFill><a:prstDash val="solid"/></a:ln></p:spPr></p:sp><p:sp><p:nvSpPr><p:cNvPr id="20" name="Shape 18"></p:cNvPr><p:cNvSpPr/><p:nvPr></p:nvPr></p:nvSpPr><p:spPr><a:xfrm><a:off x="411480" y="320040"/><a:ext cx="2377440" cy="292608"/></a:xfrm><a:prstGeom prst="roundRect"><a:avLst><a:gd name="adj" fmla="val 50000"/></a:avLst></a:prstGeom><a:solidFill><a:srgbClr val="111827"/></a:solidFill><a:ln w="12700"><a:solidFill><a:srgbClr val="111827"/></a:solidFill><a:prstDash val="solid"/></a:ln></p:spPr></p:sp><p:sp><p:nvSpPr><p:cNvPr id="21" name="Text 19"></p:cNvPr><p:cNvSpPr/><p:nvPr></p:nvPr></p:nvSpPr><p:spPr><a:xfrm><a:off x="502920" y="320040"/><a:ext cx="2194560" cy="292608"/></a:xfrm><a:prstGeom prst="rect"><a:avLst></a:avLst></a:prstGeom><a:noFill/><a:ln></a:ln></p:spPr><p:txBody><a:bodyPr wrap="square" rtlCol="0" anchor="ctr"></a:bodyPr><a:lstStyle/><a:p><a:pPr indent="0" marL="0"><a:buNone/></a:pPr><a:r><a:rPr lang="en-US" sz="900" b="1" spc="200" kern="0" dirty="0"><a:solidFill><a:srgbClr val="FFD147"/></a:solidFill><a:latin typeface=""JetBrains Mono", "Courier New", monospace" pitchFamily="34" charset="0"/><a:ea typeface=""JetBrains Mono", "Courier New", monospace" pitchFamily="34" charset="-122"/><a:cs typeface=""JetBrains Mono", "Courier New", monospace" pitchFamily="34" charset="-120"/></a:rPr><a:t>PART 03</a:t></a:r><a:endParaRPr lang="en-US" sz="900" dirty="0"/></a:p></p:txBody></p:sp><p:sp><p:nvSpPr><p:cNvPr id="22" name="Text 20"></p:cNvPr><p:cNvSpPr/><p:nvPr></p:nvPr></p:nvSpPr><p:spPr><a:xfrm><a:off x="411480" y="777240"/><a:ext cx="10972800" cy="731520"/></a:xfrm><a:prstGeom prst="rect"><a:avLst></a:avLst></a:prstGeom><a:noFill/><a:ln></a:ln></p:spPr><p:txBody><a:bodyPr wrap="square" rtlCol="0" anchor="ctr"></a:bodyPr><a:lstStyle/><a:p><a:pPr indent="0" marL="0"><a:buNone/></a:pPr><a:r><a:rPr lang="en-US" sz="4200" b="1" spc="-300" kern="0" dirty="0"><a:solidFill><a:srgbClr val="111827"/></a:solidFill><a:latin typeface="Arial Black, "Trebuchet MS", "Helvetica Neue", sans-serif" pitchFamily="34" charset="0"/><a:ea typeface="Arial Black, "Trebuchet MS", "Helvetica Neue", sans-serif" pitchFamily="34" charset="-122"/><a:cs typeface="Arial Black, "Trebuchet MS", "Helvetica Neue", sans-serif" pitchFamily="34" charset="-120"/></a:rPr><a:t>The SparseLU Paradox:</a:t></a:r><a:endParaRPr lang="en-US" sz="4200" dirty="0"/></a:p></p:txBody></p:sp><p:sp><p:nvSpPr><p:cNvPr id="23" name="Shape 21"></p:cNvPr><p:cNvSpPr/><p:nvPr></p:nvPr></p:nvSpPr><p:spPr><a:xfrm><a:off x="5943600" y="1417320"/><a:ext cx="5852160" cy="640080"/></a:xfrm><a:prstGeom prst="roundRect"><a:avLst><a:gd name="adj" fmla="val 11429"/></a:avLst></a:prstGeom><a:solidFill><a:srgbClr val="FFD147"/></a:solidFill><a:ln w="31750"><a:solidFill><a:srgbClr val="111827"/></a:solidFill><a:prstDash val="solid"/></a:ln></p:spPr></p:sp><p:sp><p:nvSpPr><p:cNvPr id="24" name="Text 22"></p:cNvPr><p:cNvSpPr/><p:nvPr></p:nvPr></p:nvSpPr><p:spPr><a:xfrm><a:off x="6035040" y="1463040"/><a:ext cx="5669280" cy="548640"/></a:xfrm><a:prstGeom prst="rect"><a:avLst></a:avLst></a:prstGeom><a:noFill/><a:ln></a:ln></p:spPr><p:txBody><a:bodyPr wrap="square" rtlCol="0" anchor="ctr"></a:bodyPr><a:lstStyle/><a:p><a:pPr indent="0" marL="0"><a:buNone/></a:pPr><a:r><a:rPr lang="en-US" sz="3000" b="1" spc="-200" kern="0" dirty="0"><a:solidFill><a:srgbClr val="111827"/></a:solidFill><a:latin typeface="Arial Black, "Trebuchet MS", "Helvetica Neue", sans-serif" pitchFamily="34" charset="0"/><a:ea typeface="Arial Black, "Trebuchet MS", "Helvetica Neue", sans-serif" pitchFamily="34" charset="-122"/><a:cs typeface="Arial Black, "Trebuchet MS", "Helvetica Neue", sans-serif" pitchFamily="34" charset="-120"/></a:rPr><a:t>When Locality Slows Down</a:t></a:r><a:endParaRPr lang="en-US" sz="3000" dirty="0"/></a:p></p:txBody></p:sp><p:sp><p:nvSpPr><p:cNvPr id="25" name="Text 23"></p:cNvPr><p:cNvSpPr/><p:nvPr></p:nvPr></p:nvSpPr><p:spPr><a:xfrm><a:off x="411480" y="2148840"/><a:ext cx="10972800" cy="274320"/></a:xfrm><a:prstGeom prst="rect"><a:avLst></a:avLst></a:prstGeom><a:noFill/><a:ln></a:ln></p:spPr><p:txBody><a:bodyPr wrap="square" rtlCol="0" anchor="ctr"></a:bodyPr><a:lstStyle/><a:p><a:pPr indent="0" marL="0"><a:buNone/></a:pPr><a:r><a:rPr lang="en-US" sz="1400" i="1" dirty="0"><a:solidFill><a:srgbClr val="4B5563"/></a:solidFill><a:latin typeface="Inter, "Segoe UI", sans-serif" pitchFamily="34" charset="0"/><a:ea typeface="Inter, "Segoe UI", sans-serif" pitchFamily="34" charset="-122"/><a:cs typeface="Inter, "Segoe UI", sans-serif" pitchFamily="34" charset="-120"/></a:rPr><a:t>100 NUMA runs (8-node Opteron) + 56 TILEPro64 mesh configurations</a:t></a:r><a:endParaRPr lang="en-US" sz="1400" dirty="0"/></a:p></p:txBody></p:sp><p:sp><p:nvSpPr><p:cNvPr id="26" name="Shape 24"></p:cNvPr><p:cNvSpPr/><p:nvPr></p:nvPr></p:nvSpPr><p:spPr><a:xfrm><a:off x="411480" y="2606040"/><a:ext cx="6583680" cy="3383280"/></a:xfrm><a:prstGeom prst="roundRect"><a:avLst><a:gd name="adj" fmla="val 2162"/></a:avLst></a:prstGeom><a:solidFill><a:srgbClr val="F4F0EA"/></a:solidFill><a:ln w="31750"><a:solidFill><a:srgbClr val="111827"/></a:solidFill><a:prstDash val="solid"/></a:ln><a:effectLst> <a:outerShdw sx="100000" sy="100000" kx="0" ky="0" algn="bl" rotWithShape="0" blurRad="50800" dist="50800" dir="16200000"> <a:srgbClr val="C8C6BF"> <a:alpha val="75000"/></a:srgbClr> </a:outerShdw></a:effectLst></p:spPr></p:sp><p:sp><p:nvSpPr><p:cNvPr id="27" name="Text 25"></p:cNvPr><p:cNvSpPr/><p:nvPr></p:nvPr></p:nvSpPr><p:spPr><a:xfrm><a:off x="685800" y="2743200"/><a:ext cx="6035040" cy="274320"/></a:xfrm><a:prstGeom prst="rect"><a:avLst></a:avLst></a:prstGeom><a:noFill/><a:ln></a:ln></p:spPr><p:txBody><a:bodyPr wrap="square" rtlCol="0" anchor="ctr"></a:bodyPr><a:lstStyle/><a:p><a:pPr indent="0" marL="0"><a:buNone/></a:pPr><a:r><a:rPr lang="en-US" sz="1500" b="1" dirty="0"><a:solidFill><a:srgbClr val="111827"/></a:solidFill><a:latin typeface="Arial Black, "Trebuchet MS", "Helvetica Neue", sans-serif" pitchFamily="34" charset="0"/><a:ea typeface="Arial Black, "Trebuchet MS", "Helvetica Neue", sans-serif" pitchFamily="34" charset="-122"/><a:cs typeface="Arial Black, "Trebuchet MS", "Helvetica Neue", sans-serif" pitchFamily="34" charset="-120"/></a:rPr><a:t>AMD Opteron Reproduction (100 Runs · 100% Verification)</a:t></a:r><a:endParaRPr lang="en-US" sz="1500" dirty="0"/></a:p></p:txBody></p:sp><p:pic>  <p:nvPicPr><p:cNvPr id="28" name="Image 0" descr="./results/numa/fig7_reproduction.png">    </p:cNvPr>    <p:cNvPicPr><a:picLocks noChangeAspect="1"/></p:cNvPicPr>    <p:nvPr></p:nvPr>  </p:nvPicPr><p:blipFill><a:blip r:embed="rId1"></a:blip>  <a:stretch><a:fillRect/></a:stretch></p:blipFill><p:spPr> <a:xfrm>  <a:off x="685800" y="3063240"/>  <a:ext cx="5852160" cy="2103120"/> </a:xfrm> <a:prstGeom prst="rect"><a:avLst/></a:prstGeom></p:spPr></p:pic><p:sp><p:nvSpPr><p:cNvPr id="29" name="Shape 26"></p:cNvPr><p:cNvSpPr/><p:nvPr></p:nvPr></p:nvSpPr><p:spPr><a:xfrm><a:off x="685800" y="5303520"/><a:ext cx="6035040" cy="548640"/></a:xfrm><a:prstGeom prst="roundRect"><a:avLst><a:gd name="adj" fmla="val 10000"/></a:avLst></a:prstGeom><a:solidFill><a:srgbClr val="EFEAE3"/></a:solidFill><a:ln w="12700"><a:solidFill><a:srgbClr val="111827"/></a:solidFill><a:prstDash val="solid"/></a:ln></p:spPr></p:sp><p:sp><p:nvSpPr><p:cNvPr id="30" name="Text 27"></p:cNvPr><p:cNvSpPr/><p:nvPr></p:nvPr></p:nvSpPr><p:spPr><a:xfrm><a:off x="822960" y="5349240"/><a:ext cx="5760720" cy="457200"/></a:xfrm><a:prstGeom prst="rect"><a:avLst></a:avLst></a:prstGeom><a:noFill/><a:ln></a:ln></p:spPr><p:txBody><a:bodyPr wrap="square" rtlCol="0" anchor="ctr"></a:bodyPr><a:lstStyle/><a:p><a:pPr indent="0" marL="0"><a:buNone/></a:pPr><a:r><a:rPr lang="en-US" sz="1000" dirty="0"><a:solidFill><a:srgbClr val="111827"/></a:solidFill><a:latin typeface=""JetBrains Mono", "Courier New", monospace" pitchFamily="34" charset="0"/><a:ea typeface=""JetBrains Mono", "Courier New", monospace" pitchFamily="34" charset="-122"/><a:cs typeface=""JetBrains Mono", "Courier New", monospace" pitchFamily="34" charset="-120"/></a:rPr><a:t>•  Map: −45.1% Comm (0.55×) · −19.0% Cycles (0.81×)    •  Matmul: −22.5% Comm (0.78×) · Parity    •  SparseLU: −26.7% Comm BUT +15.1% SLOWER!</a:t></a:r><a:endParaRPr lang="en-US" sz="1000" dirty="0"/></a:p></p:txBody></p:sp><p:sp><p:nvSpPr><p:cNvPr id="31" name="Shape 28"></p:cNvPr><p:cNvSpPr/><p:nvPr></p:nvPr></p:nvSpPr><p:spPr><a:xfrm><a:off x="7223760" y="2606040"/><a:ext cx="4572000" cy="1828800"/></a:xfrm><a:prstGeom prst="roundRect"><a:avLst><a:gd name="adj" fmla="val 4000"/></a:avLst></a:prstGeom><a:solidFill><a:srgbClr val="111827"/></a:solidFill><a:ln w="31750"><a:solidFill><a:srgbClr val="111827"/></a:solidFill><a:prstDash val="solid"/></a:ln></p:spPr></p:sp><p:sp><p:nvSpPr><p:cNvPr id="32" name="Text 29"></p:cNvPr><p:cNvSpPr/><p:nvPr></p:nvPr></p:nvSpPr><p:spPr><a:xfrm><a:off x="7452360" y="2743200"/><a:ext cx="4114800" cy="274320"/></a:xfrm><a:prstGeom prst="rect"><a:avLst></a:avLst></a:prstGeom><a:noFill/><a:ln></a:ln></p:spPr><p:txBody><a:bodyPr wrap="square" rtlCol="0" anchor="ctr"></a:bodyPr><a:lstStyle/><a:p><a:pPr indent="0" marL="0"><a:buNone/></a:pPr><a:r><a:rPr lang="en-US" sz="1400" b="1" spc="200" kern="0" dirty="0"><a:solidFill><a:srgbClr val="FFD147"/></a:solidFill><a:latin typeface=""JetBrains Mono", "Courier New", monospace" pitchFamily="34" charset="0"/><a:ea typeface=""JetBrains Mono", "Courier New", monospace" pitchFamily="34" charset="-122"/><a:cs typeface=""JetBrains Mono", "Courier New", monospace" pitchFamily="34" charset="-120"/></a:rPr><a:t>THE PARADOX EXPLAINED</a:t></a:r><a:endParaRPr lang="en-US" sz="1400" dirty="0"/></a:p></p:txBody></p:sp><p:sp><p:nvSpPr><p:cNvPr id="33" name="Text 30"></p:cNvPr><p:cNvSpPr/><p:nvPr></p:nvPr></p:nvSpPr><p:spPr><a:xfrm><a:off x="7452360" y="3063240"/><a:ext cx="4114800" cy="274320"/></a:xfrm><a:prstGeom prst="rect"><a:avLst></a:avLst></a:prstGeom><a:noFill/><a:ln></a:ln></p:spPr><p:txBody><a:bodyPr wrap="square" rtlCol="0" anchor="ctr"></a:bodyPr><a:lstStyle/><a:p><a:pPr indent="0" marL="0"><a:buNone/></a:pPr><a:r><a:rPr lang="en-US" sz="1100" dirty="0"><a:solidFill><a:srgbClr val="F4F0EA"/></a:solidFill><a:latin typeface=""JetBrains Mono", "Courier New", monospace" pitchFamily="34" charset="0"/><a:ea typeface=""JetBrains Mono", "Courier New", monospace" pitchFamily="34" charset="-122"/><a:cs typeface=""JetBrains Mono", "Courier New", monospace" pitchFamily="34" charset="-120"/></a:rPr><a:t>1. Irregular DAG: tasks have skewed input dependencies.</a:t></a:r><a:endParaRPr lang="en-US" sz="1100" dirty="0"/></a:p></p:txBody></p:sp><p:sp><p:nvSpPr><p:cNvPr id="34" name="Text 31"></p:cNvPr><p:cNvSpPr/><p:nvPr></p:nvPr></p:nvSpPr><p:spPr><a:xfrm><a:off x="7452360" y="3355848"/><a:ext cx="4114800" cy="274320"/></a:xfrm><a:prstGeom prst="rect"><a:avLst></a:avLst></a:prstGeom><a:noFill/><a:ln></a:ln></p:spPr><p:txBody><a:bodyPr wrap="square" rtlCol="0" anchor="ctr"></a:bodyPr><a:lstStyle/><a:p><a:pPr indent="0" marL="0"><a:buNone/></a:pPr><a:r><a:rPr lang="en-US" sz="1100" dirty="0"><a:solidFill><a:srgbClr val="F4F0EA"/></a:solidFill><a:latin typeface=""JetBrains Mono", "Courier New", monospace" pitchFamily="34" charset="0"/><a:ea typeface=""JetBrains Mono", "Courier New", monospace" pitchFamily="34" charset="-122"/><a:cs typeface=""JetBrains Mono", "Courier New", monospace" pitchFamily="34" charset="-120"/></a:rPr><a:t>2. Load-blind dealer sends critical tasks to Node 0.</a:t></a:r><a:endParaRPr lang="en-US" sz="1100" dirty="0"/></a:p></p:txBody></p:sp><p:sp><p:nvSpPr><p:cNvPr id="35" name="Text 32"></p:cNvPr><p:cNvSpPr/><p:nvPr></p:nvPr></p:nvSpPr><p:spPr><a:xfrm><a:off x="7452360" y="3648456"/><a:ext cx="4114800" cy="274320"/></a:xfrm><a:prstGeom prst="rect"><a:avLst></a:avLst></a:prstGeom><a:noFill/><a:ln></a:ln></p:spPr><p:txBody><a:bodyPr wrap="square" rtlCol="0" anchor="ctr"></a:bodyPr><a:lstStyle/><a:p><a:pPr indent="0" marL="0"><a:buNone/></a:pPr><a:r><a:rPr lang="en-US" sz="1100" dirty="0"><a:solidFill><a:srgbClr val="F4F0EA"/></a:solidFill><a:latin typeface=""JetBrains Mono", "Courier New", monospace" pitchFamily="34" charset="0"/><a:ea typeface=""JetBrains Mono", "Courier New", monospace" pitchFamily="34" charset="-122"/><a:cs typeface=""JetBrains Mono", "Courier New", monospace" pitchFamily="34" charset="-120"/></a:rPr><a:t>3. Queue 0: 20 tasks  ·  Queues 1–7: EMPTY.</a:t></a:r><a:endParaRPr lang="en-US" sz="1100" dirty="0"/></a:p></p:txBody></p:sp><p:sp><p:nvSpPr><p:cNvPr id="36" name="Text 33"></p:cNvPr><p:cNvSpPr/><p:nvPr></p:nvPr></p:nvSpPr><p:spPr><a:xfrm><a:off x="7452360" y="3941064"/><a:ext cx="4114800" cy="274320"/></a:xfrm><a:prstGeom prst="rect"><a:avLst></a:avLst></a:prstGeom><a:noFill/><a:ln></a:ln></p:spPr><p:txBody><a:bodyPr wrap="square" rtlCol="0" anchor="ctr"></a:bodyPr><a:lstStyle/><a:p><a:pPr indent="0" marL="0"><a:buNone/></a:pPr><a:r><a:rPr lang="en-US" sz="1100" dirty="0"><a:solidFill><a:srgbClr val="F4F0EA"/></a:solidFill><a:latin typeface=""JetBrains Mono", "Courier New", monospace" pitchFamily="34" charset="0"/><a:ea typeface=""JetBrains Mono", "Courier New", monospace" pitchFamily="34" charset="-122"/><a:cs typeface=""JetBrains Mono", "Courier New", monospace" pitchFamily="34" charset="-120"/></a:rPr><a:t>4. 23 cores idle — comm win wiped by starvation.</a:t></a:r><a:endParaRPr lang="en-US" sz="1100" dirty="0"/></a:p></p:txBody></p:sp><p:sp><p:nvSpPr><p:cNvPr id="37" name="Shape 34"></p:cNvPr><p:cNvSpPr/><p:nvPr></p:nvPr></p:nvSpPr><p:spPr><a:xfrm><a:off x="7223760" y="4572000"/><a:ext cx="4572000" cy="1097280"/></a:xfrm><a:prstGeom prst="roundRect"><a:avLst><a:gd name="adj" fmla="val 6667"/></a:avLst></a:prstGeom><a:solidFill><a:srgbClr val="EFEAE3"/></a:solidFill><a:ln w="31750"><a:solidFill><a:srgbClr val="111827"/></a:solidFill><a:prstDash val="solid"/></a:ln></p:spPr></p:sp><p:sp><p:nvSpPr><p:cNvPr id="38" name="Text 35"></p:cNvPr><p:cNvSpPr/><p:nvPr></p:nvPr></p:nvSpPr><p:spPr><a:xfrm><a:off x="7452360" y="4663440"/><a:ext cx="4114800" cy="274320"/></a:xfrm><a:prstGeom prst="rect"><a:avLst></a:avLst></a:prstGeom><a:noFill/><a:ln></a:ln></p:spPr><p:txBody><a:bodyPr wrap="square" rtlCol="0" anchor="ctr"></a:bodyPr><a:lstStyle/><a:p><a:pPr indent="0" marL="0"><a:buNone/></a:pPr><a:r><a:rPr lang="en-US" sz="1600" b="1" dirty="0"><a:solidFill><a:srgbClr val="111827"/></a:solidFill><a:latin typeface="Arial Black, "Trebuchet MS", "Helvetica Neue", sans-serif" pitchFamily="34" charset="0"/><a:ea typeface="Arial Black, "Trebuchet MS", "Helvetica Neue", sans-serif" pitchFamily="34" charset="-122"/><a:cs typeface="Arial Black, "Trebuchet MS", "Helvetica Neue", sans-serif" pitchFamily="34" charset="-120"/></a:rPr><a:t>TILEPro64 8×8 Mesh</a:t></a:r><a:endParaRPr lang="en-US" sz="1600" dirty="0"/></a:p></p:txBody></p:sp><p:sp><p:nvSpPr><p:cNvPr id="39" name="Text 36"></p:cNvPr><p:cNvSpPr/><p:nvPr></p:nvPr></p:nvSpPr><p:spPr><a:xfrm><a:off x="7452360" y="4892040"/><a:ext cx="4114800" cy="457200"/></a:xfrm><a:prstGeom prst="rect"><a:avLst></a:avLst></a:prstGeom><a:noFill/><a:ln></a:ln></p:spPr><p:txBody><a:bodyPr wrap="square" rtlCol="0" anchor="ctr"></a:bodyPr><a:lstStyle/><a:p><a:pPr indent="0" marL="0"><a:lnSpc><a:spcPts val="1200"/></a:lnSpc><a:buNone/></a:pPr><a:r><a:rPr lang="en-US" sz="1000" dirty="0"><a:solidFill><a:srgbClr val="111827"/></a:solidFill><a:latin typeface="Inter, "Segoe UI", sans-serif" pitchFamily="34" charset="0"/><a:ea typeface="Inter, "Segoe UI", sans-serif" pitchFamily="34" charset="-122"/><a:cs typeface="Inter, "Segoe UI", sans-serif" pitchFamily="34" charset="-120"/></a:rPr><a:t>• 80.3% comm reduction (6.67M → 1.31M)  ·  • 39.3% speedup (281K → 170K)  ·  • 0 steals (63 → 0)</a:t></a:r><a:endParaRPr lang="en-US" sz="1000" dirty="0"/></a:p></p:txBody></p:sp><p:pic>  <p:nvPicPr><p:cNvPr id="40" name="Image 1" descr="./tilepro64/results/tilepro64_results.png">    </p:cNvPr>    <p:cNvPicPr><a:picLocks noChangeAspect="1"/></p:cNvPicPr>    <p:nvPr></p:nvPr>  </p:nvPicPr><p:blipFill><a:blip r:embed="rId2"></a:blip>  <a:stretch><a:fillRect/></a:stretch></p:blipFill><p:spPr> <a:xfrm>  <a:off x="7223760" y="5486400"/>  <a:ext cx="4572000" cy="502920"/> </a:xfrm> <a:prstGeom prst="rect"><a:avLst/></a:prstGeom></p:spPr></p:pic><p:pic>  <p:nvPicPr><p:cNvPr id="41" name="Image 2" descr="./tilepro64/results/tilepro64_results.png">    </p:cNvPr>    <p:cNvPicPr><a:picLocks noChangeAspect="1"/></p:cNvPicPr>    <p:nvPr></p:nvPr>  </p:nvPicPr><p:blipFill><a:blip r:embed="rId3"></a:blip>  <a:stretch><a:fillRect/></a:stretch></p:blipFill><p:spPr> <a:xfrm>  <a:off x="7223760" y="5989320"/>  <a:ext cx="4572000" cy="502920"/> </a:xfrm> <a:prstGeom prst="rect"><a:avLst/></a:prstGeom></p:spPr></p:pic><p:sp><p:nvSpPr><p:cNvPr id="42" name="Shape 37"></p:cNvPr><p:cNvSpPr/><p:nvPr></p:nvPr></p:nvSpPr><p:spPr><a:xfrm><a:off x="7223760" y="5623560"/><a:ext cx="4572000" cy="320040"/></a:xfrm><a:prstGeom prst="roundRect"><a:avLst><a:gd name="adj" fmla="val 17143"/></a:avLst></a:prstGeom><a:solidFill><a:srgbClr val="B91C1C"/></a:solidFill><a:ln w="12700"><a:solidFill><a:srgbClr val="111827"/></a:solidFill><a:prstDash val="solid"/></a:ln></p:spPr></p:sp><p:sp><p:nvSpPr><p:cNvPr id="43" name="Text 38"></p:cNvPr><p:cNvSpPr/><p:nvPr></p:nvPr></p:nvSpPr><p:spPr><a:xfrm><a:off x="7315200" y="5641848"/><a:ext cx="4389120" cy="274320"/></a:xfrm><a:prstGeom prst="rect"><a:avLst></a:avLst></a:prstGeom><a:noFill/><a:ln></a:ln></p:spPr><p:txBody><a:bodyPr wrap="square" rtlCol="0" anchor="ctr"></a:bodyPr><a:lstStyle/><a:p><a:pPr algn="ctr" indent="0" marL="0"><a:buNone/></a:pPr><a:r><a:rPr lang="en-US" sz="900" b="1" dirty="0"><a:solidFill><a:srgbClr val="F4F0EA"/></a:solidFill><a:latin typeface=""JetBrains Mono", "Courier New", monospace" pitchFamily="34" charset="0"/><a:ea typeface=""JetBrains Mono", "Courier New", monospace" pitchFamily="34" charset="-122"/><a:cs typeface=""JetBrains Mono", "Courier New", monospace" pitchFamily="34" charset="-120"/></a:rPr><a:t>+15.1% slowdown vs −26.7% comm drop — THE PARADOX</a:t></a:r><a:endParaRPr lang="en-US" sz="900" dirty="0"/></a:p></p:txBody></p:sp><p:sp><p:nvSpPr><p:cNvPr id="44" name="Text 39"></p:cNvPr><p:cNvSpPr/><p:nvPr></p:nvPr></p:nvSpPr><p:spPr><a:xfrm><a:off x="411480" y="6537960"/><a:ext cx="11338560" cy="182880"/></a:xfrm><a:prstGeom prst="rect"><a:avLst></a:avLst></a:prstGeom><a:noFill/><a:ln></a:ln></p:spPr><p:txBody><a:bodyPr wrap="square" rtlCol="0" anchor="ctr"></a:bodyPr><a:lstStyle/><a:p><a:pPr indent="0" marL="0"><a:buNone/></a:pPr><a:r><a:rPr lang="en-US" sz="900" dirty="0"><a:solidFill><a:srgbClr val="6B6B6B"/></a:solidFill><a:latin typeface=""JetBrains Mono", "Courier New", monospace" pitchFamily="34" charset="0"/><a:ea typeface=""JetBrains Mono", "Courier New", monospace" pitchFamily="34" charset="-122"/><a:cs typeface=""JetBrains Mono", "Courier New", monospace" pitchFamily="34" charset="-120"/></a:rPr><a:t>Empirical Reproduction: AMD Opteron NUMA &amp; TILEPro64 Manycore Mesh  ·  04 / 05</a:t></a:r><a:endParaRPr lang="en-US" sz="900" dirty="0"/></a:p></p:txBody></p:sp></p:spTree></p:cSld><p:clrMapOvr><a:masterClrMapping/></p:clrMapOvr></p:sld>
+<p:sld xmlns:a="http://schemas.openxmlformats.org/drawingml/2006/main" xmlns:r="http://schemas.openxmlformats.org/officeDocument/2006/relationships" xmlns:p="http://schemas.openxmlformats.org/presentationml/2006/main"><p:cSld name="Slide 4"><p:spTree><p:nvGrpSpPr><p:cNvPr id="1" name=""/><p:cNvGrpSpPr/><p:nvPr/></p:nvGrpSpPr><p:grpSpPr><a:xfrm><a:off x="0" y="0"/><a:ext cx="0" cy="0"/><a:chOff x="0" y="0"/><a:chExt cx="0" cy="0"/></a:xfrm></p:grpSpPr><p:sp><p:nvSpPr><p:cNvPr id="2" name="Shape 0"></p:cNvPr><p:cNvSpPr/><p:nvPr></p:nvPr></p:nvSpPr><p:spPr><a:xfrm><a:off x="0" y="0"/><a:ext cx="12191695" cy="6858000"/></a:xfrm><a:prstGeom prst="rect"><a:avLst></a:avLst></a:prstGeom><a:solidFill><a:srgbClr val="F4F0EA"/></a:solidFill><a:ln w="12700"><a:solidFill><a:srgbClr val="F4F0EA"/></a:solidFill><a:prstDash val="solid"/></a:ln></p:spPr></p:sp><p:sp><p:nvSpPr><p:cNvPr id="3" name="Shape 1"></p:cNvPr><p:cNvSpPr/><p:nvPr></p:nvPr></p:nvSpPr><p:spPr><a:xfrm><a:off x="960120" y="0"/><a:ext cx="9144" cy="6858000"/></a:xfrm><a:prstGeom prst="rect"><a:avLst></a:avLst></a:prstGeom><a:solidFill><a:srgbClr val="DDD8CF"/></a:solidFill><a:ln w="12700"><a:solidFill><a:srgbClr val="DDD8CF"/></a:solidFill><a:prstDash val="solid"/></a:ln></p:spPr></p:sp><p:sp><p:nvSpPr><p:cNvPr id="4" name="Shape 2"></p:cNvPr><p:cNvSpPr/><p:nvPr></p:nvPr></p:nvSpPr><p:spPr><a:xfrm><a:off x="1920240" y="0"/><a:ext cx="9144" cy="6858000"/></a:xfrm><a:prstGeom prst="rect"><a:avLst></a:avLst></a:prstGeom><a:solidFill><a:srgbClr val="DDD8CF"/></a:solidFill><a:ln w="12700"><a:solidFill><a:srgbClr val="DDD8CF"/></a:solidFill><a:prstDash val="solid"/></a:ln></p:spPr></p:sp><p:sp><p:nvSpPr><p:cNvPr id="5" name="Shape 3"></p:cNvPr><p:cNvSpPr/><p:nvPr></p:nvPr></p:nvSpPr><p:spPr><a:xfrm><a:off x="2880360" y="0"/><a:ext cx="9144" cy="6858000"/></a:xfrm><a:prstGeom prst="rect"><a:avLst></a:avLst></a:prstGeom><a:solidFill><a:srgbClr val="DDD8CF"/></a:solidFill><a:ln w="12700"><a:solidFill><a:srgbClr val="DDD8CF"/></a:solidFill><a:prstDash val="solid"/></a:ln></p:spPr></p:sp><p:sp><p:nvSpPr><p:cNvPr id="6" name="Shape 4"></p:cNvPr><p:cNvSpPr/><p:nvPr></p:nvPr></p:nvSpPr><p:spPr><a:xfrm><a:off x="3840480" y="0"/><a:ext cx="9144" cy="6858000"/></a:xfrm><a:prstGeom prst="rect"><a:avLst></a:avLst></a:prstGeom><a:solidFill><a:srgbClr val="DDD8CF"/></a:solidFill><a:ln w="12700"><a:solidFill><a:srgbClr val="DDD8CF"/></a:solidFill><a:prstDash val="solid"/></a:ln></p:spPr></p:sp><p:sp><p:nvSpPr><p:cNvPr id="7" name="Shape 5"></p:cNvPr><p:cNvSpPr/><p:nvPr></p:nvPr></p:nvSpPr><p:spPr><a:xfrm><a:off x="4800600" y="0"/><a:ext cx="9144" cy="6858000"/></a:xfrm><a:prstGeom prst="rect"><a:avLst></a:avLst></a:prstGeom><a:solidFill><a:srgbClr val="DDD8CF"/></a:solidFill><a:ln w="12700"><a:solidFill><a:srgbClr val="DDD8CF"/></a:solidFill><a:prstDash val="solid"/></a:ln></p:spPr></p:sp><p:sp><p:nvSpPr><p:cNvPr id="8" name="Shape 6"></p:cNvPr><p:cNvSpPr/><p:nvPr></p:nvPr></p:nvSpPr><p:spPr><a:xfrm><a:off x="5760720" y="0"/><a:ext cx="9144" cy="6858000"/></a:xfrm><a:prstGeom prst="rect"><a:avLst></a:avLst></a:prstGeom><a:solidFill><a:srgbClr val="DDD8CF"/></a:solidFill><a:ln w="12700"><a:solidFill><a:srgbClr val="DDD8CF"/></a:solidFill><a:prstDash val="solid"/></a:ln></p:spPr></p:sp><p:sp><p:nvSpPr><p:cNvPr id="9" name="Shape 7"></p:cNvPr><p:cNvSpPr/><p:nvPr></p:nvPr></p:nvSpPr><p:spPr><a:xfrm><a:off x="6720840" y="0"/><a:ext cx="9144" cy="6858000"/></a:xfrm><a:prstGeom prst="rect"><a:avLst></a:avLst></a:prstGeom><a:solidFill><a:srgbClr val="DDD8CF"/></a:solidFill><a:ln w="12700"><a:solidFill><a:srgbClr val="DDD8CF"/></a:solidFill><a:prstDash val="solid"/></a:ln></p:spPr></p:sp><p:sp><p:nvSpPr><p:cNvPr id="10" name="Shape 8"></p:cNvPr><p:cNvSpPr/><p:nvPr></p:nvPr></p:nvSpPr><p:spPr><a:xfrm><a:off x="7680960" y="0"/><a:ext cx="9144" cy="6858000"/></a:xfrm><a:prstGeom prst="rect"><a:avLst></a:avLst></a:prstGeom><a:solidFill><a:srgbClr val="DDD8CF"/></a:solidFill><a:ln w="12700"><a:solidFill><a:srgbClr val="DDD8CF"/></a:solidFill><a:prstDash val="solid"/></a:ln></p:spPr></p:sp><p:sp><p:nvSpPr><p:cNvPr id="11" name="Shape 9"></p:cNvPr><p:cNvSpPr/><p:nvPr></p:nvPr></p:nvSpPr><p:spPr><a:xfrm><a:off x="8641080" y="0"/><a:ext cx="9144" cy="6858000"/></a:xfrm><a:prstGeom prst="rect"><a:avLst></a:avLst></a:prstGeom><a:solidFill><a:srgbClr val="DDD8CF"/></a:solidFill><a:ln w="12700"><a:solidFill><a:srgbClr val="DDD8CF"/></a:solidFill><a:prstDash val="solid"/></a:ln></p:spPr></p:sp><p:sp><p:nvSpPr><p:cNvPr id="12" name="Shape 10"></p:cNvPr><p:cNvSpPr/><p:nvPr></p:nvPr></p:nvSpPr><p:spPr><a:xfrm><a:off x="9601200" y="0"/><a:ext cx="9144" cy="6858000"/></a:xfrm><a:prstGeom prst="rect"><a:avLst></a:avLst></a:prstGeom><a:solidFill><a:srgbClr val="DDD8CF"/></a:solidFill><a:ln w="12700"><a:solidFill><a:srgbClr val="DDD8CF"/></a:solidFill><a:prstDash val="solid"/></a:ln></p:spPr></p:sp><p:sp><p:nvSpPr><p:cNvPr id="13" name="Shape 11"></p:cNvPr><p:cNvSpPr/><p:nvPr></p:nvPr></p:nvSpPr><p:spPr><a:xfrm><a:off x="10561320" y="0"/><a:ext cx="9144" cy="6858000"/></a:xfrm><a:prstGeom prst="rect"><a:avLst></a:avLst></a:prstGeom><a:solidFill><a:srgbClr val="DDD8CF"/></a:solidFill><a:ln w="12700"><a:solidFill><a:srgbClr val="DDD8CF"/></a:solidFill><a:prstDash val="solid"/></a:ln></p:spPr></p:sp><p:sp><p:nvSpPr><p:cNvPr id="14" name="Shape 12"></p:cNvPr><p:cNvSpPr/><p:nvPr></p:nvPr></p:nvSpPr><p:spPr><a:xfrm><a:off x="0" y="960120"/><a:ext cx="12191695" cy="9144"/></a:xfrm><a:prstGeom prst="rect"><a:avLst></a:avLst></a:prstGeom><a:solidFill><a:srgbClr val="DDD8CF"/></a:solidFill><a:ln w="12700"><a:solidFill><a:srgbClr val="DDD8CF"/></a:solidFill><a:prstDash val="solid"/></a:ln></p:spPr></p:sp><p:sp><p:nvSpPr><p:cNvPr id="15" name="Shape 13"></p:cNvPr><p:cNvSpPr/><p:nvPr></p:nvPr></p:nvSpPr><p:spPr><a:xfrm><a:off x="0" y="1920240"/><a:ext cx="12191695" cy="9144"/></a:xfrm><a:prstGeom prst="rect"><a:avLst></a:avLst></a:prstGeom><a:solidFill><a:srgbClr val="DDD8CF"/></a:solidFill><a:ln w="12700"><a:solidFill><a:srgbClr val="DDD8CF"/></a:solidFill><a:prstDash val="solid"/></a:ln></p:spPr></p:sp><p:sp><p:nvSpPr><p:cNvPr id="16" name="Shape 14"></p:cNvPr><p:cNvSpPr/><p:nvPr></p:nvPr></p:nvSpPr><p:spPr><a:xfrm><a:off x="0" y="2880360"/><a:ext cx="12191695" cy="9144"/></a:xfrm><a:prstGeom prst="rect"><a:avLst></a:avLst></a:prstGeom><a:solidFill><a:srgbClr val="DDD8CF"/></a:solidFill><a:ln w="12700"><a:solidFill><a:srgbClr val="DDD8CF"/></a:solidFill><a:prstDash val="solid"/></a:ln></p:spPr></p:sp><p:sp><p:nvSpPr><p:cNvPr id="17" name="Shape 15"></p:cNvPr><p:cNvSpPr/><p:nvPr></p:nvPr></p:nvSpPr><p:spPr><a:xfrm><a:off x="0" y="3840480"/><a:ext cx="12191695" cy="9144"/></a:xfrm><a:prstGeom prst="rect"><a:avLst></a:avLst></a:prstGeom><a:solidFill><a:srgbClr val="DDD8CF"/></a:solidFill><a:ln w="12700"><a:solidFill><a:srgbClr val="DDD8CF"/></a:solidFill><a:prstDash val="solid"/></a:ln></p:spPr></p:sp><p:sp><p:nvSpPr><p:cNvPr id="18" name="Shape 16"></p:cNvPr><p:cNvSpPr/><p:nvPr></p:nvPr></p:nvSpPr><p:spPr><a:xfrm><a:off x="0" y="4800600"/><a:ext cx="12191695" cy="9144"/></a:xfrm><a:prstGeom prst="rect"><a:avLst></a:avLst></a:prstGeom><a:solidFill><a:srgbClr val="DDD8CF"/></a:solidFill><a:ln w="12700"><a:solidFill><a:srgbClr val="DDD8CF"/></a:solidFill><a:prstDash val="solid"/></a:ln></p:spPr></p:sp><p:sp><p:nvSpPr><p:cNvPr id="19" name="Shape 17"></p:cNvPr><p:cNvSpPr/><p:nvPr></p:nvPr></p:nvSpPr><p:spPr><a:xfrm><a:off x="0" y="5760720"/><a:ext cx="12191695" cy="9144"/></a:xfrm><a:prstGeom prst="rect"><a:avLst></a:avLst></a:prstGeom><a:solidFill><a:srgbClr val="DDD8CF"/></a:solidFill><a:ln w="12700"><a:solidFill><a:srgbClr val="DDD8CF"/></a:solidFill><a:prstDash val="solid"/></a:ln></p:spPr></p:sp><p:sp><p:nvSpPr><p:cNvPr id="20" name="Shape 18"></p:cNvPr><p:cNvSpPr/><p:nvPr></p:nvPr></p:nvSpPr><p:spPr><a:xfrm><a:off x="411480" y="320040"/><a:ext cx="2377440" cy="292608"/></a:xfrm><a:prstGeom prst="roundRect"><a:avLst><a:gd name="adj" fmla="val 50000"/></a:avLst></a:prstGeom><a:solidFill><a:srgbClr val="111827"/></a:solidFill><a:ln w="12700"><a:solidFill><a:srgbClr val="111827"/></a:solidFill><a:prstDash val="solid"/></a:ln></p:spPr></p:sp><p:sp><p:nvSpPr><p:cNvPr id="21" name="Text 19"></p:cNvPr><p:cNvSpPr/><p:nvPr></p:nvPr></p:nvSpPr><p:spPr><a:xfrm><a:off x="502920" y="320040"/><a:ext cx="2194560" cy="292608"/></a:xfrm><a:prstGeom prst="rect"><a:avLst></a:avLst></a:prstGeom><a:noFill/><a:ln></a:ln></p:spPr><p:txBody><a:bodyPr wrap="square" rtlCol="0" anchor="ctr"></a:bodyPr><a:lstStyle/><a:p><a:pPr indent="0" marL="0"><a:buNone/></a:pPr><a:r><a:rPr lang="en-US" sz="900" b="1" spc="200" kern="0" dirty="0"><a:solidFill><a:srgbClr val="FFD147"/></a:solidFill><a:latin typeface=""JetBrains Mono", "Courier New", monospace" pitchFamily="34" charset="0"/><a:ea typeface=""JetBrains Mono", "Courier New", monospace" pitchFamily="34" charset="-122"/><a:cs typeface=""JetBrains Mono", "Courier New", monospace" pitchFamily="34" charset="-120"/></a:rPr><a:t>PART 03</a:t></a:r><a:endParaRPr lang="en-US" sz="900" dirty="0"/></a:p></p:txBody></p:sp><p:sp><p:nvSpPr><p:cNvPr id="22" name="Text 20"></p:cNvPr><p:cNvSpPr/><p:nvPr></p:nvPr></p:nvSpPr><p:spPr><a:xfrm><a:off x="411480" y="777240"/><a:ext cx="10972800" cy="731520"/></a:xfrm><a:prstGeom prst="rect"><a:avLst></a:avLst></a:prstGeom><a:noFill/><a:ln></a:ln></p:spPr><p:txBody><a:bodyPr wrap="square" rtlCol="0" anchor="ctr"></a:bodyPr><a:lstStyle/><a:p><a:pPr indent="0" marL="0"><a:buNone/></a:pPr><a:r><a:rPr lang="en-US" sz="4200" b="1" spc="-300" kern="0" dirty="0"><a:solidFill><a:srgbClr val="111827"/></a:solidFill><a:latin typeface="Arial Black, "Trebuchet MS", "Helvetica Neue", sans-serif" pitchFamily="34" charset="0"/><a:ea typeface="Arial Black, "Trebuchet MS", "Helvetica Neue", sans-serif" pitchFamily="34" charset="-122"/><a:cs typeface="Arial Black, "Trebuchet MS", "Helvetica Neue", sans-serif" pitchFamily="34" charset="-120"/></a:rPr><a:t>The SparseLU Paradox:</a:t></a:r><a:endParaRPr lang="en-US" sz="4200" dirty="0"/></a:p></p:txBody></p:sp><p:sp><p:nvSpPr><p:cNvPr id="23" name="Shape 21"></p:cNvPr><p:cNvSpPr/><p:nvPr></p:nvPr></p:nvSpPr><p:spPr><a:xfrm><a:off x="5943600" y="1417320"/><a:ext cx="5852160" cy="640080"/></a:xfrm><a:prstGeom prst="roundRect"><a:avLst><a:gd name="adj" fmla="val 11429"/></a:avLst></a:prstGeom><a:solidFill><a:srgbClr val="FFD147"/></a:solidFill><a:ln w="31750"><a:solidFill><a:srgbClr val="111827"/></a:solidFill><a:prstDash val="solid"/></a:ln></p:spPr></p:sp><p:sp><p:nvSpPr><p:cNvPr id="24" name="Text 22"></p:cNvPr><p:cNvSpPr/><p:nvPr></p:nvPr></p:nvSpPr><p:spPr><a:xfrm><a:off x="6035040" y="1463040"/><a:ext cx="5669280" cy="548640"/></a:xfrm><a:prstGeom prst="rect"><a:avLst></a:avLst></a:prstGeom><a:noFill/><a:ln></a:ln></p:spPr><p:txBody><a:bodyPr wrap="square" rtlCol="0" anchor="ctr"></a:bodyPr><a:lstStyle/><a:p><a:pPr indent="0" marL="0"><a:buNone/></a:pPr><a:r><a:rPr lang="en-US" sz="3000" b="1" spc="-200" kern="0" dirty="0"><a:solidFill><a:srgbClr val="111827"/></a:solidFill><a:latin typeface="Arial Black, "Trebuchet MS", "Helvetica Neue", sans-serif" pitchFamily="34" charset="0"/><a:ea typeface="Arial Black, "Trebuchet MS", "Helvetica Neue", sans-serif" pitchFamily="34" charset="-122"/><a:cs typeface="Arial Black, "Trebuchet MS", "Helvetica Neue", sans-serif" pitchFamily="34" charset="-120"/></a:rPr><a:t>When Locality Slows Down</a:t></a:r><a:endParaRPr lang="en-US" sz="3000" dirty="0"/></a:p></p:txBody></p:sp><p:sp><p:nvSpPr><p:cNvPr id="25" name="Text 23"></p:cNvPr><p:cNvSpPr/><p:nvPr></p:nvPr></p:nvSpPr><p:spPr><a:xfrm><a:off x="411480" y="2148840"/><a:ext cx="10972800" cy="274320"/></a:xfrm><a:prstGeom prst="rect"><a:avLst></a:avLst></a:prstGeom><a:noFill/><a:ln></a:ln></p:spPr><p:txBody><a:bodyPr wrap="square" rtlCol="0" anchor="ctr"></a:bodyPr><a:lstStyle/><a:p><a:pPr indent="0" marL="0"><a:buNone/></a:pPr><a:r><a:rPr lang="en-US" sz="1400" i="1" dirty="0"><a:solidFill><a:srgbClr val="4B5563"/></a:solidFill><a:latin typeface="Inter, "Segoe UI", sans-serif" pitchFamily="34" charset="0"/><a:ea typeface="Inter, "Segoe UI", sans-serif" pitchFamily="34" charset="-122"/><a:cs typeface="Inter, "Segoe UI", sans-serif" pitchFamily="34" charset="-120"/></a:rPr><a:t>100 NUMA runs (8-node Opteron) + 56 TILEPro64 mesh configurations</a:t></a:r><a:endParaRPr lang="en-US" sz="1400" dirty="0"/></a:p></p:txBody></p:sp><p:sp><p:nvSpPr><p:cNvPr id="26" name="Shape 24"></p:cNvPr><p:cNvSpPr/><p:nvPr></p:nvPr></p:nvSpPr><p:spPr><a:xfrm><a:off x="411480" y="2468880"/><a:ext cx="5440680" cy="3520440"/></a:xfrm><a:prstGeom prst="roundRect"><a:avLst><a:gd name="adj" fmla="val 2078"/></a:avLst></a:prstGeom><a:solidFill><a:srgbClr val="F4F0EA"/></a:solidFill><a:ln w="31750"><a:solidFill><a:srgbClr val="111827"/></a:solidFill><a:prstDash val="solid"/></a:ln><a:effectLst> <a:outerShdw sx="100000" sy="100000" kx="0" ky="0" algn="bl" rotWithShape="0" blurRad="50800" dist="50800" dir="16200000"> <a:srgbClr val="C8C6BF"> <a:alpha val="75000"/></a:srgbClr> </a:outerShdw></a:effectLst></p:spPr></p:sp><p:sp><p:nvSpPr><p:cNvPr id="27" name="Text 25"></p:cNvPr><p:cNvSpPr/><p:nvPr></p:nvPr></p:nvSpPr><p:spPr><a:xfrm><a:off x="594360" y="2606040"/><a:ext cx="5074920" cy="320040"/></a:xfrm><a:prstGeom prst="rect"><a:avLst></a:avLst></a:prstGeom><a:noFill/><a:ln></a:ln></p:spPr><p:txBody><a:bodyPr wrap="square" rtlCol="0" anchor="ctr"></a:bodyPr><a:lstStyle/><a:p><a:pPr indent="0" marL="0"><a:buNone/></a:pPr><a:r><a:rPr lang="en-US" sz="1600" b="1" dirty="0"><a:solidFill><a:srgbClr val="111827"/></a:solidFill><a:latin typeface="Arial Black, "Trebuchet MS", "Helvetica Neue", sans-serif" pitchFamily="34" charset="0"/><a:ea typeface="Arial Black, "Trebuchet MS", "Helvetica Neue", sans-serif" pitchFamily="34" charset="-122"/><a:cs typeface="Arial Black, "Trebuchet MS", "Helvetica Neue", sans-serif" pitchFamily="34" charset="-120"/></a:rPr><a:t>1. AMD Opteron NUMA Reproduction (100 Runs)</a:t></a:r><a:endParaRPr lang="en-US" sz="1600" dirty="0"/></a:p></p:txBody></p:sp><p:pic>  <p:nvPicPr><p:cNvPr id="28" name="Image 0" descr="./results/numa/fig7_reproduction.png">    </p:cNvPr>    <p:cNvPicPr><a:picLocks noChangeAspect="1"/></p:cNvPicPr>    <p:nvPr></p:nvPr>  </p:nvPicPr><p:blipFill><a:blip r:embed="rId1"></a:blip>  <a:stretch><a:fillRect/></a:stretch></p:blipFill><p:spPr> <a:xfrm>  <a:off x="594360" y="2971800"/>  <a:ext cx="5074920" cy="2240280"/> </a:xfrm> <a:prstGeom prst="rect"><a:avLst/></a:prstGeom></p:spPr></p:pic><p:sp><p:nvSpPr><p:cNvPr id="29" name="Shape 26"></p:cNvPr><p:cNvSpPr/><p:nvPr></p:nvPr></p:nvSpPr><p:spPr><a:xfrm><a:off x="594360" y="5349240"/><a:ext cx="5074920" cy="502920"/></a:xfrm><a:prstGeom prst="roundRect"><a:avLst><a:gd name="adj" fmla="val 10909"/></a:avLst></a:prstGeom><a:solidFill><a:srgbClr val="EFEAE3"/></a:solidFill><a:ln w="15240"><a:solidFill><a:srgbClr val="111827"/></a:solidFill><a:prstDash val="solid"/></a:ln></p:spPr></p:sp><p:sp><p:nvSpPr><p:cNvPr id="30" name="Text 27"></p:cNvPr><p:cNvSpPr/><p:nvPr></p:nvPr></p:nvSpPr><p:spPr><a:xfrm><a:off x="685800" y="5376672"/><a:ext cx="4892040" cy="438912"/></a:xfrm><a:prstGeom prst="rect"><a:avLst></a:avLst></a:prstGeom><a:noFill/><a:ln></a:ln></p:spPr><p:txBody><a:bodyPr wrap="square" rtlCol="0" anchor="ctr"></a:bodyPr><a:lstStyle/><a:p><a:pPr indent="0" marL="0"><a:buNone/></a:pPr><a:r><a:rPr lang="en-US" sz="1000" b="1" dirty="0"><a:solidFill><a:srgbClr val="111827"/></a:solidFill><a:latin typeface=""JetBrains Mono", "Courier New", monospace" pitchFamily="34" charset="0"/><a:ea typeface=""JetBrains Mono", "Courier New", monospace" pitchFamily="34" charset="-122"/><a:cs typeface=""JetBrains Mono", "Courier New", monospace" pitchFamily="34" charset="-120"/></a:rPr><a:t>• Map: −45.1% Comm · −19.0% Cycles    • SparseLU: +15.1% SLOWER (Paradox!)</a:t></a:r><a:endParaRPr lang="en-US" sz="1000" dirty="0"/></a:p></p:txBody></p:sp><p:sp><p:nvSpPr><p:cNvPr id="31" name="Shape 28"></p:cNvPr><p:cNvSpPr/><p:nvPr></p:nvPr></p:nvSpPr><p:spPr><a:xfrm><a:off x="6263640" y="2468880"/><a:ext cx="5440680" cy="3520440"/></a:xfrm><a:prstGeom prst="roundRect"><a:avLst><a:gd name="adj" fmla="val 2078"/></a:avLst></a:prstGeom><a:solidFill><a:srgbClr val="F4F0EA"/></a:solidFill><a:ln w="31750"><a:solidFill><a:srgbClr val="111827"/></a:solidFill><a:prstDash val="solid"/></a:ln><a:effectLst> <a:outerShdw sx="100000" sy="100000" kx="0" ky="0" algn="bl" rotWithShape="0" blurRad="50800" dist="50800" dir="16200000"> <a:srgbClr val="C8C6BF"> <a:alpha val="75000"/></a:srgbClr> </a:outerShdw></a:effectLst></p:spPr></p:sp><p:sp><p:nvSpPr><p:cNvPr id="32" name="Text 29"></p:cNvPr><p:cNvSpPr/><p:nvPr></p:nvPr></p:nvSpPr><p:spPr><a:xfrm><a:off x="6446520" y="2606040"/><a:ext cx="5074920" cy="320040"/></a:xfrm><a:prstGeom prst="rect"><a:avLst></a:avLst></a:prstGeom><a:noFill/><a:ln></a:ln></p:spPr><p:txBody><a:bodyPr wrap="square" rtlCol="0" anchor="ctr"></a:bodyPr><a:lstStyle/><a:p><a:pPr indent="0" marL="0"><a:buNone/></a:pPr><a:r><a:rPr lang="en-US" sz="1600" b="1" dirty="0"><a:solidFill><a:srgbClr val="111827"/></a:solidFill><a:latin typeface="Arial Black, "Trebuchet MS", "Helvetica Neue", sans-serif" pitchFamily="34" charset="0"/><a:ea typeface="Arial Black, "Trebuchet MS", "Helvetica Neue", sans-serif" pitchFamily="34" charset="-122"/><a:cs typeface="Arial Black, "Trebuchet MS", "Helvetica Neue", sans-serif" pitchFamily="34" charset="-120"/></a:rPr><a:t>2. TILEPro64 8×8 Mesh Simulation (64 Cores)</a:t></a:r><a:endParaRPr lang="en-US" sz="1600" dirty="0"/></a:p></p:txBody></p:sp><p:pic>  <p:nvPicPr><p:cNvPr id="33" name="Image 1" descr="./tilepro64/results/tilepro64_results.png">    </p:cNvPr>    <p:cNvPicPr><a:picLocks noChangeAspect="1"/></p:cNvPicPr>    <p:nvPr></p:nvPr>  </p:nvPicPr><p:blipFill><a:blip r:embed="rId2"></a:blip>  <a:stretch><a:fillRect/></a:stretch></p:blipFill><p:spPr> <a:xfrm>  <a:off x="6446520" y="2971800"/>  <a:ext cx="5074920" cy="2240280"/> </a:xfrm> <a:prstGeom prst="rect"><a:avLst/></a:prstGeom></p:spPr></p:pic><p:sp><p:nvSpPr><p:cNvPr id="34" name="Shape 30"></p:cNvPr><p:cNvSpPr/><p:nvPr></p:nvPr></p:nvSpPr><p:spPr><a:xfrm><a:off x="6446520" y="5349240"/><a:ext cx="5074920" cy="502920"/></a:xfrm><a:prstGeom prst="roundRect"><a:avLst><a:gd name="adj" fmla="val 10909"/></a:avLst></a:prstGeom><a:solidFill><a:srgbClr val="EFEAE3"/></a:solidFill><a:ln w="15240"><a:solidFill><a:srgbClr val="111827"/></a:solidFill><a:prstDash val="solid"/></a:ln></p:spPr></p:sp><p:sp><p:nvSpPr><p:cNvPr id="35" name="Text 31"></p:cNvPr><p:cNvSpPr/><p:nvPr></p:nvPr></p:nvSpPr><p:spPr><a:xfrm><a:off x="6537960" y="5376672"/><a:ext cx="4892040" cy="438912"/></a:xfrm><a:prstGeom prst="rect"><a:avLst></a:avLst></a:prstGeom><a:noFill/><a:ln></a:ln></p:spPr><p:txBody><a:bodyPr wrap="square" rtlCol="0" anchor="ctr"></a:bodyPr><a:lstStyle/><a:p><a:pPr indent="0" marL="0"><a:buNone/></a:pPr><a:r><a:rPr lang="en-US" sz="1000" b="1" dirty="0"><a:solidFill><a:srgbClr val="111827"/></a:solidFill><a:latin typeface=""JetBrains Mono", "Courier New", monospace" pitchFamily="34" charset="0"/><a:ea typeface=""JetBrains Mono", "Courier New", monospace" pitchFamily="34" charset="-122"/><a:cs typeface=""JetBrains Mono", "Courier New", monospace" pitchFamily="34" charset="-120"/></a:rPr><a:t>• Map: −80.3% Comm Drop · 39.3% Speedup · 0 Steals vs 63 in WS baseline</a:t></a:r><a:endParaRPr lang="en-US" sz="1000" dirty="0"/></a:p></p:txBody></p:sp><p:sp><p:nvSpPr><p:cNvPr id="36" name="Shape 32"></p:cNvPr><p:cNvSpPr/><p:nvPr></p:nvPr></p:nvSpPr><p:spPr><a:xfrm><a:off x="411480" y="6080760"/><a:ext cx="11292840" cy="411480"/></a:xfrm><a:prstGeom prst="roundRect"><a:avLst><a:gd name="adj" fmla="val 13333"/></a:avLst></a:prstGeom><a:solidFill><a:srgbClr val="FFD147"/></a:solidFill><a:ln w="25400"><a:solidFill><a:srgbClr val="111827"/></a:solidFill><a:prstDash val="solid"/></a:ln></p:spPr></p:sp><p:sp><p:nvSpPr><p:cNvPr id="37" name="Text 33"></p:cNvPr><p:cNvSpPr/><p:nvPr></p:nvPr></p:nvSpPr><p:spPr><a:xfrm><a:off x="594360" y="6080760"/><a:ext cx="10927080" cy="411480"/></a:xfrm><a:prstGeom prst="rect"><a:avLst></a:avLst></a:prstGeom><a:noFill/><a:ln></a:ln></p:spPr><p:txBody><a:bodyPr wrap="square" rtlCol="0" anchor="ctr"></a:bodyPr><a:lstStyle/><a:p><a:pPr algn="ctr" indent="0" marL="0"><a:buNone/></a:pPr><a:r><a:rPr lang="en-US" sz="1150" b="1" dirty="0"><a:solidFill><a:srgbClr val="111827"/></a:solidFill><a:latin typeface="Inter, "Segoe UI", sans-serif" pitchFamily="34" charset="0"/><a:ea typeface="Inter, "Segoe UI", sans-serif" pitchFamily="34" charset="-122"/><a:cs typeface="Inter, "Segoe UI", sans-serif" pitchFamily="34" charset="-120"/></a:rPr><a:t>THE EMPIRICAL LAW: Locality dealing cuts comm cost by up to 80.3%, but causes a +15.1% slowdown on irregular DAGs without load balancing.</a:t></a:r><a:endParaRPr lang="en-US" sz="1150" dirty="0"/></a:p></p:txBody></p:sp><p:sp><p:nvSpPr><p:cNvPr id="38" name="Text 34"></p:cNvPr><p:cNvSpPr/><p:nvPr></p:nvPr></p:nvSpPr><p:spPr><a:xfrm><a:off x="411480" y="6537960"/><a:ext cx="11338560" cy="182880"/></a:xfrm><a:prstGeom prst="rect"><a:avLst></a:avLst></a:prstGeom><a:noFill/><a:ln></a:ln></p:spPr><p:txBody><a:bodyPr wrap="square" rtlCol="0" anchor="ctr"></a:bodyPr><a:lstStyle/><a:p><a:pPr indent="0" marL="0"><a:buNone/></a:pPr><a:r><a:rPr lang="en-US" sz="900" dirty="0"><a:solidFill><a:srgbClr val="6B6B6B"/></a:solidFill><a:latin typeface=""JetBrains Mono", "Courier New", monospace" pitchFamily="34" charset="0"/><a:ea typeface=""JetBrains Mono", "Courier New", monospace" pitchFamily="34" charset="-122"/><a:cs typeface=""JetBrains Mono", "Courier New", monospace" pitchFamily="34" charset="-120"/></a:rPr><a:t>Empirical Reproduction: AMD Opteron NUMA &amp; TILEPro64 Manycore Mesh  ·  04 / 05</a:t></a:r><a:endParaRPr lang="en-US" sz="900" dirty="0"/></a:p></p:txBody></p:sp></p:spTree></p:cSld><p:clrMapOvr><a:masterClrMapping/></p:clrMapOvr></p:sld>
 </file>
 
 <file path=ppt/slides/slide5.xml><?xml version="1.0" encoding="UTF-8" standalone="yes"?>

--- a/output/HPC_Locality_Scheduling_Presentation.pptx
+++ b/output/HPC_Locality_Scheduling_Presentation.pptx
@@ -10,9 +10,10 @@
     <p:sldId id="258" r:id="rId4"/>
     <p:sldId id="259" r:id="rId5"/>
     <p:sldId id="260" r:id="rId6"/>
+    <p:sldId id="261" r:id="rId7"/>
   </p:sldIdLst>
   <p:notesMasterIdLst>
-    <p:notesMasterId r:id="rId7"/>
+    <p:notesMasterId r:id="rId8"/>
   </p:notesMasterIdLst>
   <p:sldSz cx="12191695" cy="6858000"/>
   <p:notesSz cx="6858000" cy="12191695"/>
@@ -900,6 +901,94 @@
 </p:notes>
 </file>
 
+<file path=ppt/notesSlides/notesSlide6.xml><?xml version="1.0" encoding="utf-8"?>
+<p:notes xmlns:a="http://schemas.openxmlformats.org/drawingml/2006/main" xmlns:r="http://schemas.openxmlformats.org/officeDocument/2006/relationships" xmlns:p="http://schemas.openxmlformats.org/presentationml/2006/main">
+  <p:cSld>
+    <p:spTree>
+      <p:nvGrpSpPr>
+        <p:cNvPr id="1" name=""/>
+        <p:cNvGrpSpPr/>
+        <p:nvPr/>
+      </p:nvGrpSpPr>
+      <p:grpSpPr>
+        <a:xfrm>
+          <a:off x="0" y="0"/>
+          <a:ext cx="0" cy="0"/>
+          <a:chOff x="0" y="0"/>
+          <a:chExt cx="0" cy="0"/>
+        </a:xfrm>
+      </p:grpSpPr>
+      <p:sp>
+        <p:nvSpPr>
+          <p:cNvPr id="2" name="Slide Image Placeholder 1"/>
+          <p:cNvSpPr>
+            <a:spLocks noGrp="1" noRot="1" noChangeAspect="1"/>
+          </p:cNvSpPr>
+          <p:nvPr>
+            <p:ph type="sldImg"/>
+          </p:nvPr>
+        </p:nvSpPr>
+        <p:spPr/>
+      </p:sp>
+      <p:sp>
+        <p:nvSpPr>
+          <p:cNvPr id="3" name="Notes Placeholder 2"/>
+          <p:cNvSpPr>
+            <a:spLocks noGrp="1"/>
+          </p:cNvSpPr>
+          <p:nvPr>
+            <p:ph type="body" idx="1"/>
+          </p:nvPr>
+        </p:nvSpPr>
+        <p:spPr/>
+        <p:txBody>
+          <a:bodyPr/>
+          <a:lstStyle/>
+          <a:p>
+            <a:r>
+              <a:rPr lang="en-US" dirty="0"/>
+              <a:t/>
+            </a:r>
+            <a:endParaRPr lang="en-US" dirty="0"/>
+          </a:p>
+        </p:txBody>
+      </p:sp>
+      <p:sp>
+        <p:nvSpPr>
+          <p:cNvPr id="4" name="Slide Number Placeholder 3"/>
+          <p:cNvSpPr>
+            <a:spLocks noGrp="1"/>
+          </p:cNvSpPr>
+          <p:nvPr>
+            <p:ph type="sldNum" sz="quarter" idx="10"/>
+          </p:nvPr>
+        </p:nvSpPr>
+        <p:spPr/>
+        <p:txBody>
+          <a:bodyPr/>
+          <a:lstStyle/>
+          <a:p>
+            <a:fld id="{F7021451-1387-4CA6-816F-3879F97B5CBC}" type="slidenum">
+              <a:rPr lang="en-US"/>
+              <a:t>6</a:t>
+            </a:fld>
+            <a:endParaRPr lang="en-US"/>
+          </a:p>
+        </p:txBody>
+      </p:sp>
+    </p:spTree>
+    <p:extLst>
+      <p:ext uri="{BB962C8B-B14F-4D97-AF65-F5344CB8AC3E}">
+        <p14:creationId xmlns:p14="http://schemas.microsoft.com/office/powerpoint/2010/main" val="1024086991"/>
+      </p:ext>
+    </p:extLst>
+  </p:cSld>
+  <p:clrMapOvr>
+    <a:masterClrMapping/>
+  </p:clrMapOvr>
+</p:notes>
+</file>
+
 <file path=ppt/slideLayouts/slideLayout1.xml><?xml version="1.0" encoding="utf-8"?>
 <p:sldLayout xmlns:a="http://schemas.openxmlformats.org/drawingml/2006/main" xmlns:r="http://schemas.openxmlformats.org/officeDocument/2006/relationships" xmlns:p="http://schemas.openxmlformats.org/presentationml/2006/main" preserve="1">
   <p:cSld name="DEFAULT">
@@ -1207,24 +1296,9796 @@
 </p:sldMaster>
 </file>
 
-<file path=ppt/slides/slide1.xml><?xml version="1.0" encoding="UTF-8" standalone="yes"?>
-<p:sld xmlns:a="http://schemas.openxmlformats.org/drawingml/2006/main" xmlns:r="http://schemas.openxmlformats.org/officeDocument/2006/relationships" xmlns:p="http://schemas.openxmlformats.org/presentationml/2006/main"><p:cSld name="Slide 1"><p:spTree><p:nvGrpSpPr><p:cNvPr id="1" name=""/><p:cNvGrpSpPr/><p:nvPr/></p:nvGrpSpPr><p:grpSpPr><a:xfrm><a:off x="0" y="0"/><a:ext cx="0" cy="0"/><a:chOff x="0" y="0"/><a:chExt cx="0" cy="0"/></a:xfrm></p:grpSpPr><p:sp><p:nvSpPr><p:cNvPr id="2" name="Shape 0"></p:cNvPr><p:cNvSpPr/><p:nvPr></p:nvPr></p:nvSpPr><p:spPr><a:xfrm><a:off x="0" y="0"/><a:ext cx="12191695" cy="6858000"/></a:xfrm><a:prstGeom prst="rect"><a:avLst></a:avLst></a:prstGeom><a:solidFill><a:srgbClr val="F4F0EA"/></a:solidFill><a:ln w="12700"><a:solidFill><a:srgbClr val="F4F0EA"/></a:solidFill><a:prstDash val="solid"/></a:ln></p:spPr></p:sp><p:sp><p:nvSpPr><p:cNvPr id="3" name="Shape 1"></p:cNvPr><p:cNvSpPr/><p:nvPr></p:nvPr></p:nvSpPr><p:spPr><a:xfrm><a:off x="960120" y="0"/><a:ext cx="9144" cy="6858000"/></a:xfrm><a:prstGeom prst="rect"><a:avLst></a:avLst></a:prstGeom><a:solidFill><a:srgbClr val="DDD8CF"/></a:solidFill><a:ln w="12700"><a:solidFill><a:srgbClr val="DDD8CF"/></a:solidFill><a:prstDash val="solid"/></a:ln></p:spPr></p:sp><p:sp><p:nvSpPr><p:cNvPr id="4" name="Shape 2"></p:cNvPr><p:cNvSpPr/><p:nvPr></p:nvPr></p:nvSpPr><p:spPr><a:xfrm><a:off x="1920240" y="0"/><a:ext cx="9144" cy="6858000"/></a:xfrm><a:prstGeom prst="rect"><a:avLst></a:avLst></a:prstGeom><a:solidFill><a:srgbClr val="DDD8CF"/></a:solidFill><a:ln w="12700"><a:solidFill><a:srgbClr val="DDD8CF"/></a:solidFill><a:prstDash val="solid"/></a:ln></p:spPr></p:sp><p:sp><p:nvSpPr><p:cNvPr id="5" name="Shape 3"></p:cNvPr><p:cNvSpPr/><p:nvPr></p:nvPr></p:nvSpPr><p:spPr><a:xfrm><a:off x="2880360" y="0"/><a:ext cx="9144" cy="6858000"/></a:xfrm><a:prstGeom prst="rect"><a:avLst></a:avLst></a:prstGeom><a:solidFill><a:srgbClr val="DDD8CF"/></a:solidFill><a:ln w="12700"><a:solidFill><a:srgbClr val="DDD8CF"/></a:solidFill><a:prstDash val="solid"/></a:ln></p:spPr></p:sp><p:sp><p:nvSpPr><p:cNvPr id="6" name="Shape 4"></p:cNvPr><p:cNvSpPr/><p:nvPr></p:nvPr></p:nvSpPr><p:spPr><a:xfrm><a:off x="3840480" y="0"/><a:ext cx="9144" cy="6858000"/></a:xfrm><a:prstGeom prst="rect"><a:avLst></a:avLst></a:prstGeom><a:solidFill><a:srgbClr val="DDD8CF"/></a:solidFill><a:ln w="12700"><a:solidFill><a:srgbClr val="DDD8CF"/></a:solidFill><a:prstDash val="solid"/></a:ln></p:spPr></p:sp><p:sp><p:nvSpPr><p:cNvPr id="7" name="Shape 5"></p:cNvPr><p:cNvSpPr/><p:nvPr></p:nvPr></p:nvSpPr><p:spPr><a:xfrm><a:off x="4800600" y="0"/><a:ext cx="9144" cy="6858000"/></a:xfrm><a:prstGeom prst="rect"><a:avLst></a:avLst></a:prstGeom><a:solidFill><a:srgbClr val="DDD8CF"/></a:solidFill><a:ln w="12700"><a:solidFill><a:srgbClr val="DDD8CF"/></a:solidFill><a:prstDash val="solid"/></a:ln></p:spPr></p:sp><p:sp><p:nvSpPr><p:cNvPr id="8" name="Shape 6"></p:cNvPr><p:cNvSpPr/><p:nvPr></p:nvPr></p:nvSpPr><p:spPr><a:xfrm><a:off x="5760720" y="0"/><a:ext cx="9144" cy="6858000"/></a:xfrm><a:prstGeom prst="rect"><a:avLst></a:avLst></a:prstGeom><a:solidFill><a:srgbClr val="DDD8CF"/></a:solidFill><a:ln w="12700"><a:solidFill><a:srgbClr val="DDD8CF"/></a:solidFill><a:prstDash val="solid"/></a:ln></p:spPr></p:sp><p:sp><p:nvSpPr><p:cNvPr id="9" name="Shape 7"></p:cNvPr><p:cNvSpPr/><p:nvPr></p:nvPr></p:nvSpPr><p:spPr><a:xfrm><a:off x="6720840" y="0"/><a:ext cx="9144" cy="6858000"/></a:xfrm><a:prstGeom prst="rect"><a:avLst></a:avLst></a:prstGeom><a:solidFill><a:srgbClr val="DDD8CF"/></a:solidFill><a:ln w="12700"><a:solidFill><a:srgbClr val="DDD8CF"/></a:solidFill><a:prstDash val="solid"/></a:ln></p:spPr></p:sp><p:sp><p:nvSpPr><p:cNvPr id="10" name="Shape 8"></p:cNvPr><p:cNvSpPr/><p:nvPr></p:nvPr></p:nvSpPr><p:spPr><a:xfrm><a:off x="7680960" y="0"/><a:ext cx="9144" cy="6858000"/></a:xfrm><a:prstGeom prst="rect"><a:avLst></a:avLst></a:prstGeom><a:solidFill><a:srgbClr val="DDD8CF"/></a:solidFill><a:ln w="12700"><a:solidFill><a:srgbClr val="DDD8CF"/></a:solidFill><a:prstDash val="solid"/></a:ln></p:spPr></p:sp><p:sp><p:nvSpPr><p:cNvPr id="11" name="Shape 9"></p:cNvPr><p:cNvSpPr/><p:nvPr></p:nvPr></p:nvSpPr><p:spPr><a:xfrm><a:off x="8641080" y="0"/><a:ext cx="9144" cy="6858000"/></a:xfrm><a:prstGeom prst="rect"><a:avLst></a:avLst></a:prstGeom><a:solidFill><a:srgbClr val="DDD8CF"/></a:solidFill><a:ln w="12700"><a:solidFill><a:srgbClr val="DDD8CF"/></a:solidFill><a:prstDash val="solid"/></a:ln></p:spPr></p:sp><p:sp><p:nvSpPr><p:cNvPr id="12" name="Shape 10"></p:cNvPr><p:cNvSpPr/><p:nvPr></p:nvPr></p:nvSpPr><p:spPr><a:xfrm><a:off x="9601200" y="0"/><a:ext cx="9144" cy="6858000"/></a:xfrm><a:prstGeom prst="rect"><a:avLst></a:avLst></a:prstGeom><a:solidFill><a:srgbClr val="DDD8CF"/></a:solidFill><a:ln w="12700"><a:solidFill><a:srgbClr val="DDD8CF"/></a:solidFill><a:prstDash val="solid"/></a:ln></p:spPr></p:sp><p:sp><p:nvSpPr><p:cNvPr id="13" name="Shape 11"></p:cNvPr><p:cNvSpPr/><p:nvPr></p:nvPr></p:nvSpPr><p:spPr><a:xfrm><a:off x="10561320" y="0"/><a:ext cx="9144" cy="6858000"/></a:xfrm><a:prstGeom prst="rect"><a:avLst></a:avLst></a:prstGeom><a:solidFill><a:srgbClr val="DDD8CF"/></a:solidFill><a:ln w="12700"><a:solidFill><a:srgbClr val="DDD8CF"/></a:solidFill><a:prstDash val="solid"/></a:ln></p:spPr></p:sp><p:sp><p:nvSpPr><p:cNvPr id="14" name="Shape 12"></p:cNvPr><p:cNvSpPr/><p:nvPr></p:nvPr></p:nvSpPr><p:spPr><a:xfrm><a:off x="0" y="960120"/><a:ext cx="12191695" cy="9144"/></a:xfrm><a:prstGeom prst="rect"><a:avLst></a:avLst></a:prstGeom><a:solidFill><a:srgbClr val="DDD8CF"/></a:solidFill><a:ln w="12700"><a:solidFill><a:srgbClr val="DDD8CF"/></a:solidFill><a:prstDash val="solid"/></a:ln></p:spPr></p:sp><p:sp><p:nvSpPr><p:cNvPr id="15" name="Shape 13"></p:cNvPr><p:cNvSpPr/><p:nvPr></p:nvPr></p:nvSpPr><p:spPr><a:xfrm><a:off x="0" y="1920240"/><a:ext cx="12191695" cy="9144"/></a:xfrm><a:prstGeom prst="rect"><a:avLst></a:avLst></a:prstGeom><a:solidFill><a:srgbClr val="DDD8CF"/></a:solidFill><a:ln w="12700"><a:solidFill><a:srgbClr val="DDD8CF"/></a:solidFill><a:prstDash val="solid"/></a:ln></p:spPr></p:sp><p:sp><p:nvSpPr><p:cNvPr id="16" name="Shape 14"></p:cNvPr><p:cNvSpPr/><p:nvPr></p:nvPr></p:nvSpPr><p:spPr><a:xfrm><a:off x="0" y="2880360"/><a:ext cx="12191695" cy="9144"/></a:xfrm><a:prstGeom prst="rect"><a:avLst></a:avLst></a:prstGeom><a:solidFill><a:srgbClr val="DDD8CF"/></a:solidFill><a:ln w="12700"><a:solidFill><a:srgbClr val="DDD8CF"/></a:solidFill><a:prstDash val="solid"/></a:ln></p:spPr></p:sp><p:sp><p:nvSpPr><p:cNvPr id="17" name="Shape 15"></p:cNvPr><p:cNvSpPr/><p:nvPr></p:nvPr></p:nvSpPr><p:spPr><a:xfrm><a:off x="0" y="3840480"/><a:ext cx="12191695" cy="9144"/></a:xfrm><a:prstGeom prst="rect"><a:avLst></a:avLst></a:prstGeom><a:solidFill><a:srgbClr val="DDD8CF"/></a:solidFill><a:ln w="12700"><a:solidFill><a:srgbClr val="DDD8CF"/></a:solidFill><a:prstDash val="solid"/></a:ln></p:spPr></p:sp><p:sp><p:nvSpPr><p:cNvPr id="18" name="Shape 16"></p:cNvPr><p:cNvSpPr/><p:nvPr></p:nvPr></p:nvSpPr><p:spPr><a:xfrm><a:off x="0" y="4800600"/><a:ext cx="12191695" cy="9144"/></a:xfrm><a:prstGeom prst="rect"><a:avLst></a:avLst></a:prstGeom><a:solidFill><a:srgbClr val="DDD8CF"/></a:solidFill><a:ln w="12700"><a:solidFill><a:srgbClr val="DDD8CF"/></a:solidFill><a:prstDash val="solid"/></a:ln></p:spPr></p:sp><p:sp><p:nvSpPr><p:cNvPr id="19" name="Shape 17"></p:cNvPr><p:cNvSpPr/><p:nvPr></p:nvPr></p:nvSpPr><p:spPr><a:xfrm><a:off x="0" y="5760720"/><a:ext cx="12191695" cy="9144"/></a:xfrm><a:prstGeom prst="rect"><a:avLst></a:avLst></a:prstGeom><a:solidFill><a:srgbClr val="DDD8CF"/></a:solidFill><a:ln w="12700"><a:solidFill><a:srgbClr val="DDD8CF"/></a:solidFill><a:prstDash val="solid"/></a:ln></p:spPr></p:sp><p:sp><p:nvSpPr><p:cNvPr id="20" name="Shape 18"></p:cNvPr><p:cNvSpPr/><p:nvPr></p:nvPr></p:nvSpPr><p:spPr><a:xfrm><a:off x="411480" y="320040"/><a:ext cx="2377440" cy="292608"/></a:xfrm><a:prstGeom prst="roundRect"><a:avLst><a:gd name="adj" fmla="val 50000"/></a:avLst></a:prstGeom><a:solidFill><a:srgbClr val="111827"/></a:solidFill><a:ln w="12700"><a:solidFill><a:srgbClr val="111827"/></a:solidFill><a:prstDash val="solid"/></a:ln></p:spPr></p:sp><p:sp><p:nvSpPr><p:cNvPr id="21" name="Text 19"></p:cNvPr><p:cNvSpPr/><p:nvPr></p:nvPr></p:nvSpPr><p:spPr><a:xfrm><a:off x="502920" y="320040"/><a:ext cx="2194560" cy="292608"/></a:xfrm><a:prstGeom prst="rect"><a:avLst></a:avLst></a:prstGeom><a:noFill/><a:ln></a:ln></p:spPr><p:txBody><a:bodyPr wrap="square" rtlCol="0" anchor="ctr"></a:bodyPr><a:lstStyle/><a:p><a:pPr indent="0" marL="0"><a:buNone/></a:pPr><a:r><a:rPr lang="en-US" sz="900" b="1" spc="200" kern="0" dirty="0"><a:solidFill><a:srgbClr val="FFD147"/></a:solidFill><a:latin typeface=""JetBrains Mono", "Courier New", monospace" pitchFamily="34" charset="0"/><a:ea typeface=""JetBrains Mono", "Courier New", monospace" pitchFamily="34" charset="-122"/><a:cs typeface=""JetBrains Mono", "Courier New", monospace" pitchFamily="34" charset="-120"/></a:rPr><a:t>HPC SYSTEMS</a:t></a:r><a:endParaRPr lang="en-US" sz="900" dirty="0"/></a:p></p:txBody></p:sp><p:sp><p:nvSpPr><p:cNvPr id="22" name="Shape 20"></p:cNvPr><p:cNvSpPr/><p:nvPr></p:nvPr></p:nvSpPr><p:spPr><a:xfrm><a:off x="2926080" y="320040"/><a:ext cx="2377440" cy="292608"/></a:xfrm><a:prstGeom prst="roundRect"><a:avLst><a:gd name="adj" fmla="val 50000"/></a:avLst></a:prstGeom><a:solidFill><a:srgbClr val="F4F0EA"/></a:solidFill><a:ln w="19050"><a:solidFill><a:srgbClr val="111827"/></a:solidFill><a:prstDash val="solid"/></a:ln></p:spPr></p:sp><p:sp><p:nvSpPr><p:cNvPr id="23" name="Text 21"></p:cNvPr><p:cNvSpPr/><p:nvPr></p:nvPr></p:nvSpPr><p:spPr><a:xfrm><a:off x="3017520" y="320040"/><a:ext cx="2194560" cy="292608"/></a:xfrm><a:prstGeom prst="rect"><a:avLst></a:avLst></a:prstGeom><a:noFill/><a:ln></a:ln></p:spPr><p:txBody><a:bodyPr wrap="square" rtlCol="0" anchor="ctr"></a:bodyPr><a:lstStyle/><a:p><a:pPr indent="0" marL="0"><a:buNone/></a:pPr><a:r><a:rPr lang="en-US" sz="900" b="1" spc="200" kern="0" dirty="0"><a:solidFill><a:srgbClr val="111827"/></a:solidFill><a:latin typeface=""JetBrains Mono", "Courier New", monospace" pitchFamily="34" charset="0"/><a:ea typeface=""JetBrains Mono", "Courier New", monospace" pitchFamily="34" charset="-122"/><a:cs typeface=""JetBrains Mono", "Courier New", monospace" pitchFamily="34" charset="-120"/></a:rPr><a:t>RESEARCH REPRODUCTION</a:t></a:r><a:endParaRPr lang="en-US" sz="900" dirty="0"/></a:p></p:txBody></p:sp><p:sp><p:nvSpPr><p:cNvPr id="24" name="Text 22"></p:cNvPr><p:cNvSpPr/><p:nvPr></p:nvPr></p:nvSpPr><p:spPr><a:xfrm><a:off x="411480" y="914400"/><a:ext cx="6858000" cy="2377440"/></a:xfrm><a:prstGeom prst="rect"><a:avLst></a:avLst></a:prstGeom><a:noFill/><a:ln></a:ln></p:spPr><p:txBody><a:bodyPr wrap="square" rtlCol="0" anchor="ctr"></a:bodyPr><a:lstStyle/><a:p><a:pPr indent="0" marL="0"><a:lnSpc><a:spcPts val="5200"/></a:lnSpc><a:buNone/></a:pPr><a:r><a:rPr lang="en-US" sz="5600" b="1" spc="-300" kern="0" dirty="0"><a:solidFill><a:srgbClr val="111827"/></a:solidFill><a:latin typeface="Arial Black, "Trebuchet MS", "Helvetica Neue", sans-serif" pitchFamily="34" charset="0"/><a:ea typeface="Arial Black, "Trebuchet MS", "Helvetica Neue", sans-serif" pitchFamily="34" charset="-122"/><a:cs typeface="Arial Black, "Trebuchet MS", "Helvetica Neue", sans-serif" pitchFamily="34" charset="-120"/></a:rPr><a:t>Locality-Aware</a:t></a:r><a:endParaRPr lang="en-US" sz="5600" dirty="0"/></a:p><a:p><a:pPr indent="0" marL="0"><a:lnSpc><a:spcPts val="5200"/></a:lnSpc><a:buNone/></a:pPr><a:r><a:rPr lang="en-US" sz="5600" b="1" spc="-300" kern="0" dirty="0"><a:solidFill><a:srgbClr val="111827"/></a:solidFill><a:latin typeface="Arial Black, "Trebuchet MS", "Helvetica Neue", sans-serif" pitchFamily="34" charset="0"/><a:ea typeface="Arial Black, "Trebuchet MS", "Helvetica Neue", sans-serif" pitchFamily="34" charset="-122"/><a:cs typeface="Arial Black, "Trebuchet MS", "Helvetica Neue", sans-serif" pitchFamily="34" charset="-120"/></a:rPr><a:t>Task Scheduling</a:t></a:r><a:endParaRPr lang="en-US" sz="5600" dirty="0"/></a:p></p:txBody></p:sp><p:sp><p:nvSpPr><p:cNvPr id="25" name="Shape 23"></p:cNvPr><p:cNvSpPr/><p:nvPr></p:nvPr></p:nvSpPr><p:spPr><a:xfrm><a:off x="411480" y="3246120"/><a:ext cx="6858000" cy="777240"/></a:xfrm><a:prstGeom prst="roundRect"><a:avLst><a:gd name="adj" fmla="val 9412"/></a:avLst></a:prstGeom><a:solidFill><a:srgbClr val="FFD147"/></a:solidFill><a:ln w="31750"><a:solidFill><a:srgbClr val="111827"/></a:solidFill><a:prstDash val="solid"/></a:ln></p:spPr></p:sp><p:sp><p:nvSpPr><p:cNvPr id="26" name="Text 24"></p:cNvPr><p:cNvSpPr/><p:nvPr></p:nvPr></p:nvSpPr><p:spPr><a:xfrm><a:off x="594360" y="3291840"/><a:ext cx="6492240" cy="685800"/></a:xfrm><a:prstGeom prst="rect"><a:avLst></a:avLst></a:prstGeom><a:noFill/><a:ln></a:ln></p:spPr><p:txBody><a:bodyPr wrap="square" rtlCol="0" anchor="ctr"></a:bodyPr><a:lstStyle/><a:p><a:pPr indent="0" marL="0"><a:buNone/></a:pPr><a:r><a:rPr lang="en-US" sz="3600" b="1" spc="-200" kern="0" dirty="0"><a:solidFill><a:srgbClr val="111827"/></a:solidFill><a:latin typeface="Arial Black, "Trebuchet MS", "Helvetica Neue", sans-serif" pitchFamily="34" charset="0"/><a:ea typeface="Arial Black, "Trebuchet MS", "Helvetica Neue", sans-serif" pitchFamily="34" charset="-122"/><a:cs typeface="Arial Black, "Trebuchet MS", "Helvetica Neue", sans-serif" pitchFamily="34" charset="-120"/></a:rPr><a:t>on Heterogeneous Architectures</a:t></a:r><a:endParaRPr lang="en-US" sz="3600" dirty="0"/></a:p></p:txBody></p:sp><p:sp><p:nvSpPr><p:cNvPr id="27" name="Shape 25"></p:cNvPr><p:cNvSpPr/><p:nvPr></p:nvPr></p:nvSpPr><p:spPr><a:xfrm><a:off x="411480" y="4343400"/><a:ext cx="2286000" cy="365760"/></a:xfrm><a:prstGeom prst="roundRect"><a:avLst><a:gd name="adj" fmla="val 50000"/></a:avLst></a:prstGeom><a:solidFill><a:srgbClr val="EFEAE3"/></a:solidFill><a:ln w="19050"><a:solidFill><a:srgbClr val="111827"/></a:solidFill><a:prstDash val="solid"/></a:ln></p:spPr></p:sp><p:sp><p:nvSpPr><p:cNvPr id="28" name="Text 26"></p:cNvPr><p:cNvSpPr/><p:nvPr></p:nvPr></p:nvSpPr><p:spPr><a:xfrm><a:off x="502920" y="4343400"/><a:ext cx="2103120" cy="365760"/></a:xfrm><a:prstGeom prst="rect"><a:avLst></a:avLst></a:prstGeom><a:noFill/><a:ln></a:ln></p:spPr><p:txBody><a:bodyPr wrap="square" rtlCol="0" anchor="ctr"></a:bodyPr><a:lstStyle/><a:p><a:pPr algn="ctr" indent="0" marL="0"><a:buNone/></a:pPr><a:r><a:rPr lang="en-US" sz="1100" b="1" dirty="0"><a:solidFill><a:srgbClr val="111827"/></a:solidFill><a:latin typeface="Inter, "Segoe UI", sans-serif" pitchFamily="34" charset="0"/><a:ea typeface="Inter, "Segoe UI", sans-serif" pitchFamily="34" charset="-122"/><a:cs typeface="Inter, "Segoe UI", sans-serif" pitchFamily="34" charset="-120"/></a:rPr><a:t>AMD Opteron 8-Node NUMA</a:t></a:r><a:endParaRPr lang="en-US" sz="1100" dirty="0"/></a:p></p:txBody></p:sp><p:sp><p:nvSpPr><p:cNvPr id="29" name="Shape 27"></p:cNvPr><p:cNvSpPr/><p:nvPr></p:nvPr></p:nvSpPr><p:spPr><a:xfrm><a:off x="2880360" y="4343400"/><a:ext cx="2286000" cy="365760"/></a:xfrm><a:prstGeom prst="roundRect"><a:avLst><a:gd name="adj" fmla="val 50000"/></a:avLst></a:prstGeom><a:solidFill><a:srgbClr val="EFEAE3"/></a:solidFill><a:ln w="19050"><a:solidFill><a:srgbClr val="111827"/></a:solidFill><a:prstDash val="solid"/></a:ln></p:spPr></p:sp><p:sp><p:nvSpPr><p:cNvPr id="30" name="Text 28"></p:cNvPr><p:cNvSpPr/><p:nvPr></p:nvPr></p:nvSpPr><p:spPr><a:xfrm><a:off x="2971800" y="4343400"/><a:ext cx="2103120" cy="365760"/></a:xfrm><a:prstGeom prst="rect"><a:avLst></a:avLst></a:prstGeom><a:noFill/><a:ln></a:ln></p:spPr><p:txBody><a:bodyPr wrap="square" rtlCol="0" anchor="ctr"></a:bodyPr><a:lstStyle/><a:p><a:pPr algn="ctr" indent="0" marL="0"><a:buNone/></a:pPr><a:r><a:rPr lang="en-US" sz="1100" b="1" dirty="0"><a:solidFill><a:srgbClr val="111827"/></a:solidFill><a:latin typeface="Inter, "Segoe UI", sans-serif" pitchFamily="34" charset="0"/><a:ea typeface="Inter, "Segoe UI", sans-serif" pitchFamily="34" charset="-122"/><a:cs typeface="Inter, "Segoe UI", sans-serif" pitchFamily="34" charset="-120"/></a:rPr><a:t>TILEPro64 8×8 Mesh</a:t></a:r><a:endParaRPr lang="en-US" sz="1100" dirty="0"/></a:p></p:txBody></p:sp><p:sp><p:nvSpPr><p:cNvPr id="31" name="Shape 29"></p:cNvPr><p:cNvSpPr/><p:nvPr></p:nvPr></p:nvSpPr><p:spPr><a:xfrm><a:off x="5349240" y="4343400"/><a:ext cx="2286000" cy="365760"/></a:xfrm><a:prstGeom prst="roundRect"><a:avLst><a:gd name="adj" fmla="val 50000"/></a:avLst></a:prstGeom><a:solidFill><a:srgbClr val="EFEAE3"/></a:solidFill><a:ln w="19050"><a:solidFill><a:srgbClr val="111827"/></a:solidFill><a:prstDash val="solid"/></a:ln></p:spPr></p:sp><p:sp><p:nvSpPr><p:cNvPr id="32" name="Text 30"></p:cNvPr><p:cNvSpPr/><p:nvPr></p:nvPr></p:nvSpPr><p:spPr><a:xfrm><a:off x="5440680" y="4343400"/><a:ext cx="2103120" cy="365760"/></a:xfrm><a:prstGeom prst="rect"><a:avLst></a:avLst></a:prstGeom><a:noFill/><a:ln></a:ln></p:spPr><p:txBody><a:bodyPr wrap="square" rtlCol="0" anchor="ctr"></a:bodyPr><a:lstStyle/><a:p><a:pPr algn="ctr" indent="0" marL="0"><a:buNone/></a:pPr><a:r><a:rPr lang="en-US" sz="1100" b="1" dirty="0"><a:solidFill><a:srgbClr val="111827"/></a:solidFill><a:latin typeface="Inter, "Segoe UI", sans-serif" pitchFamily="34" charset="0"/><a:ea typeface="Inter, "Segoe UI", sans-serif" pitchFamily="34" charset="-122"/><a:cs typeface="Inter, "Segoe UI", sans-serif" pitchFamily="34" charset="-120"/></a:rPr><a:t>NOVA / ALLoC</a:t></a:r><a:endParaRPr lang="en-US" sz="1100" dirty="0"/></a:p></p:txBody></p:sp><p:sp><p:nvSpPr><p:cNvPr id="33" name="Shape 31"></p:cNvPr><p:cNvSpPr/><p:nvPr></p:nvPr></p:nvSpPr><p:spPr><a:xfrm><a:off x="8229600" y="914400"/><a:ext cx="3474720" cy="3657600"/></a:xfrm><a:prstGeom prst="roundRect"><a:avLst><a:gd name="adj" fmla="val 2632"/></a:avLst></a:prstGeom><a:solidFill><a:srgbClr val="EFEAE3"/></a:solidFill><a:ln w="25400"><a:solidFill><a:srgbClr val="111827"/></a:solidFill><a:prstDash val="solid"/></a:ln></p:spPr></p:sp><p:sp><p:nvSpPr><p:cNvPr id="34" name="Text 32"></p:cNvPr><p:cNvSpPr/><p:nvPr></p:nvPr></p:nvSpPr><p:spPr><a:xfrm><a:off x="8366760" y="1051560"/><a:ext cx="3200400" cy="274320"/></a:xfrm><a:prstGeom prst="rect"><a:avLst></a:avLst></a:prstGeom><a:noFill/><a:ln></a:ln></p:spPr><p:txBody><a:bodyPr wrap="square" rtlCol="0" anchor="ctr"></a:bodyPr><a:lstStyle/><a:p><a:pPr indent="0" marL="0"><a:buNone/></a:pPr><a:r><a:rPr lang="en-US" sz="1000" b="1" spc="200" kern="0" dirty="0"><a:solidFill><a:srgbClr val="111827"/></a:solidFill><a:latin typeface=""JetBrains Mono", "Courier New", monospace" pitchFamily="34" charset="0"/><a:ea typeface=""JetBrains Mono", "Courier New", monospace" pitchFamily="34" charset="-122"/><a:cs typeface=""JetBrains Mono", "Courier New", monospace" pitchFamily="34" charset="-120"/></a:rPr><a:t>DUAL ARCHITECTURE</a:t></a:r><a:endParaRPr lang="en-US" sz="1000" dirty="0"/></a:p></p:txBody></p:sp><p:sp><p:nvSpPr><p:cNvPr id="35" name="Shape 33"></p:cNvPr><p:cNvSpPr/><p:nvPr></p:nvPr></p:nvSpPr><p:spPr><a:xfrm><a:off x="8503920" y="1645920"/><a:ext cx="914400" cy="640080"/></a:xfrm><a:prstGeom prst="ellipse"><a:avLst></a:avLst></a:prstGeom><a:solidFill><a:srgbClr val="111827"/></a:solidFill><a:ln w="12700"><a:solidFill><a:srgbClr val="111827"/></a:solidFill><a:prstDash val="solid"/></a:ln></p:spPr></p:sp><p:sp><p:nvSpPr><p:cNvPr id="36" name="Text 34"></p:cNvPr><p:cNvSpPr/><p:nvPr></p:nvPr></p:nvSpPr><p:spPr><a:xfrm><a:off x="8503920" y="1737360"/><a:ext cx="914400" cy="457200"/></a:xfrm><a:prstGeom prst="rect"><a:avLst></a:avLst></a:prstGeom><a:noFill/><a:ln></a:ln></p:spPr><p:txBody><a:bodyPr wrap="square" rtlCol="0" anchor="ctr"></a:bodyPr><a:lstStyle/><a:p><a:pPr algn="ctr" indent="0" marL="0"><a:buNone/></a:pPr><a:r><a:rPr lang="en-US" sz="900" b="1" dirty="0"><a:solidFill><a:srgbClr val="FFD147"/></a:solidFill><a:latin typeface=""JetBrains Mono", "Courier New", monospace" pitchFamily="34" charset="0"/><a:ea typeface=""JetBrains Mono", "Courier New", monospace" pitchFamily="34" charset="-122"/><a:cs typeface=""JetBrains Mono", "Courier New", monospace" pitchFamily="34" charset="-120"/></a:rPr><a:t>NUMA</a:t></a:r><a:endParaRPr lang="en-US" sz="900" dirty="0"/></a:p><a:p><a:pPr algn="ctr" indent="0" marL="0"><a:buNone/></a:pPr><a:r><a:rPr lang="en-US" sz="900" b="1" dirty="0"><a:solidFill><a:srgbClr val="FFD147"/></a:solidFill><a:latin typeface=""JetBrains Mono", "Courier New", monospace" pitchFamily="34" charset="0"/><a:ea typeface=""JetBrains Mono", "Courier New", monospace" pitchFamily="34" charset="-122"/><a:cs typeface=""JetBrains Mono", "Courier New", monospace" pitchFamily="34" charset="-120"/></a:rPr><a:t>8-node</a:t></a:r><a:endParaRPr lang="en-US" sz="900" dirty="0"/></a:p></p:txBody></p:sp><p:sp><p:nvSpPr><p:cNvPr id="37" name="Shape 35"></p:cNvPr><p:cNvSpPr/><p:nvPr></p:nvPr></p:nvSpPr><p:spPr><a:xfrm><a:off x="10058400" y="1645920"/><a:ext cx="1371600" cy="914400"/></a:xfrm><a:prstGeom prst="rect"><a:avLst></a:avLst></a:prstGeom><a:solidFill><a:srgbClr val="F4F0EA"/></a:solidFill><a:ln w="19050"><a:solidFill><a:srgbClr val="111827"/></a:solidFill><a:prstDash val="solid"/></a:ln></p:spPr></p:sp><p:sp><p:nvSpPr><p:cNvPr id="38" name="Text 36"></p:cNvPr><p:cNvSpPr/><p:nvPr></p:nvPr></p:nvSpPr><p:spPr><a:xfrm><a:off x="10058400" y="1828800"/><a:ext cx="1371600" cy="548640"/></a:xfrm><a:prstGeom prst="rect"><a:avLst></a:avLst></a:prstGeom><a:noFill/><a:ln></a:ln></p:spPr><p:txBody><a:bodyPr wrap="square" rtlCol="0" anchor="ctr"></a:bodyPr><a:lstStyle/><a:p><a:pPr algn="ctr" indent="0" marL="0"><a:buNone/></a:pPr><a:r><a:rPr lang="en-US" sz="900" b="1" dirty="0"><a:solidFill><a:srgbClr val="111827"/></a:solidFill><a:latin typeface=""JetBrains Mono", "Courier New", monospace" pitchFamily="34" charset="0"/><a:ea typeface=""JetBrains Mono", "Courier New", monospace" pitchFamily="34" charset="-122"/><a:cs typeface=""JetBrains Mono", "Courier New", monospace" pitchFamily="34" charset="-120"/></a:rPr><a:t>MESH</a:t></a:r><a:endParaRPr lang="en-US" sz="900" dirty="0"/></a:p><a:p><a:pPr algn="ctr" indent="0" marL="0"><a:buNone/></a:pPr><a:r><a:rPr lang="en-US" sz="900" b="1" dirty="0"><a:solidFill><a:srgbClr val="111827"/></a:solidFill><a:latin typeface=""JetBrains Mono", "Courier New", monospace" pitchFamily="34" charset="0"/><a:ea typeface=""JetBrains Mono", "Courier New", monospace" pitchFamily="34" charset="-122"/><a:cs typeface=""JetBrains Mono", "Courier New", monospace" pitchFamily="34" charset="-120"/></a:rPr><a:t>8×8</a:t></a:r><a:endParaRPr lang="en-US" sz="900" dirty="0"/></a:p></p:txBody></p:sp><p:sp><p:nvSpPr><p:cNvPr id="39" name="Text 37"></p:cNvPr><p:cNvSpPr/><p:nvPr></p:nvPr></p:nvSpPr><p:spPr><a:xfrm><a:off x="8503920" y="2926080"/><a:ext cx="2926080" cy="365760"/></a:xfrm><a:prstGeom prst="rect"><a:avLst></a:avLst></a:prstGeom><a:noFill/><a:ln></a:ln></p:spPr><p:txBody><a:bodyPr wrap="square" rtlCol="0" anchor="ctr"></a:bodyPr><a:lstStyle/><a:p><a:pPr indent="0" marL="0"><a:buNone/></a:pPr><a:r><a:rPr lang="en-US" sz="1000" dirty="0"><a:solidFill><a:srgbClr val="111827"/></a:solidFill><a:latin typeface="Inter, "Segoe UI", sans-serif" pitchFamily="34" charset="0"/><a:ea typeface="Inter, "Segoe UI", sans-serif" pitchFamily="34" charset="-122"/><a:cs typeface="Inter, "Segoe UI", sans-serif" pitchFamily="34" charset="-120"/></a:rPr><a:t>Local ~40 cyc  ·  Remote 240–340 cyc</a:t></a:r><a:endParaRPr lang="en-US" sz="1000" dirty="0"/></a:p></p:txBody></p:sp><p:sp><p:nvSpPr><p:cNvPr id="40" name="Text 38"></p:cNvPr><p:cNvSpPr/><p:nvPr></p:nvPr></p:nvSpPr><p:spPr><a:xfrm><a:off x="8503920" y="3383280"/><a:ext cx="2926080" cy="365760"/></a:xfrm><a:prstGeom prst="rect"><a:avLst></a:avLst></a:prstGeom><a:noFill/><a:ln></a:ln></p:spPr><p:txBody><a:bodyPr wrap="square" rtlCol="0" anchor="ctr"></a:bodyPr><a:lstStyle/><a:p><a:pPr indent="0" marL="0"><a:buNone/></a:pPr><a:r><a:rPr lang="en-US" sz="1000" dirty="0"><a:solidFill><a:srgbClr val="111827"/></a:solidFill><a:latin typeface="Inter, "Segoe UI", sans-serif" pitchFamily="34" charset="0"/><a:ea typeface="Inter, "Segoe UI", sans-serif" pitchFamily="34" charset="-122"/><a:cs typeface="Inter, "Segoe UI", sans-serif" pitchFamily="34" charset="-120"/></a:rPr><a:t>Local 10 cyc  ·  Remote 38+2·h cyc</a:t></a:r><a:endParaRPr lang="en-US" sz="1000" dirty="0"/></a:p></p:txBody></p:sp><p:sp><p:nvSpPr><p:cNvPr id="41" name="Text 39"></p:cNvPr><p:cNvSpPr/><p:nvPr></p:nvPr></p:nvSpPr><p:spPr><a:xfrm><a:off x="411480" y="5486400"/><a:ext cx="7498080" cy="640080"/></a:xfrm><a:prstGeom prst="rect"><a:avLst></a:avLst></a:prstGeom><a:noFill/><a:ln></a:ln></p:spPr><p:txBody><a:bodyPr wrap="square" rtlCol="0" anchor="ctr"></a:bodyPr><a:lstStyle/><a:p><a:pPr indent="0" marL="0"><a:buNone/></a:pPr><a:r><a:rPr lang="en-US" sz="1300" i="1" dirty="0"><a:solidFill><a:srgbClr val="111827"/></a:solidFill><a:latin typeface="Inter, "Segoe UI", sans-serif" pitchFamily="34" charset="0"/><a:ea typeface="Inter, "Segoe UI", sans-serif" pitchFamily="34" charset="-122"/><a:cs typeface="Inter, "Segoe UI", sans-serif" pitchFamily="34" charset="-120"/></a:rPr><a:t>Reproducing Muddukrishna et al. (Scientific Programming 2015) — uncovering the SparseLU paradox and delivering NOVA co-scheduling.</a:t></a:r><a:endParaRPr lang="en-US" sz="1300" dirty="0"/></a:p></p:txBody></p:sp><p:sp><p:nvSpPr><p:cNvPr id="42" name="Text 40"></p:cNvPr><p:cNvSpPr/><p:nvPr></p:nvPr></p:nvSpPr><p:spPr><a:xfrm><a:off x="411480" y="6537960"/><a:ext cx="11338560" cy="182880"/></a:xfrm><a:prstGeom prst="rect"><a:avLst></a:avLst></a:prstGeom><a:noFill/><a:ln></a:ln></p:spPr><p:txBody><a:bodyPr wrap="square" rtlCol="0" anchor="ctr"></a:bodyPr><a:lstStyle/><a:p><a:pPr indent="0" marL="0"><a:buNone/></a:pPr><a:r><a:rPr lang="en-US" sz="900" dirty="0"><a:solidFill><a:srgbClr val="6B6B6B"/></a:solidFill><a:latin typeface=""JetBrains Mono", "Courier New", monospace" pitchFamily="34" charset="0"/><a:ea typeface=""JetBrains Mono", "Courier New", monospace" pitchFamily="34" charset="-122"/><a:cs typeface=""JetBrains Mono", "Courier New", monospace" pitchFamily="34" charset="-120"/></a:rPr><a:t>Locality-Aware Task Scheduling on Heterogeneous HPC Architectures  ·  01 / 05</a:t></a:r><a:endParaRPr lang="en-US" sz="900" dirty="0"/></a:p></p:txBody></p:sp></p:spTree></p:cSld><p:clrMapOvr><a:masterClrMapping/></p:clrMapOvr></p:sld>
+<file path=ppt/slides/slide1.xml><?xml version="1.0" encoding="utf-8"?>
+<p:sld xmlns:a="http://schemas.openxmlformats.org/drawingml/2006/main" xmlns:r="http://schemas.openxmlformats.org/officeDocument/2006/relationships" xmlns:p="http://schemas.openxmlformats.org/presentationml/2006/main">
+  <p:cSld name="Slide 1">
+    <p:bg>
+      <p:bgPr>
+        <a:blipFill dpi="0" rotWithShape="1">
+          <a:blip r:embed="rId1">
+            <a:lum/>
+          </a:blip>
+          <a:srcRect/>
+          <a:stretch>
+            <a:fillRect/>
+          </a:stretch>
+        </a:blipFill>
+        <a:effectLst/>
+      </p:bgPr>
+    </p:bg>
+    <p:spTree>
+      <p:nvGrpSpPr>
+        <p:cNvPr id="1" name=""/>
+        <p:cNvGrpSpPr/>
+        <p:nvPr/>
+      </p:nvGrpSpPr>
+      <p:grpSpPr>
+        <a:xfrm>
+          <a:off x="0" y="0"/>
+          <a:ext cx="0" cy="0"/>
+          <a:chOff x="0" y="0"/>
+          <a:chExt cx="0" cy="0"/>
+        </a:xfrm>
+      </p:grpSpPr>
+      <p:sp>
+        <p:nvSpPr>
+          <p:cNvPr id="2" name="Shape 0"/>
+          <p:cNvSpPr/>
+          <p:nvPr/>
+        </p:nvSpPr>
+        <p:spPr>
+          <a:xfrm>
+            <a:off x="731520" y="411480"/>
+            <a:ext cx="1664208" cy="292608"/>
+          </a:xfrm>
+          <a:prstGeom prst="roundRect">
+            <a:avLst>
+              <a:gd name="adj" fmla="val 50000"/>
+            </a:avLst>
+          </a:prstGeom>
+          <a:solidFill>
+            <a:srgbClr val="111827"/>
+          </a:solidFill>
+          <a:ln w="12700">
+            <a:solidFill>
+              <a:srgbClr val="111827"/>
+            </a:solidFill>
+            <a:prstDash val="solid"/>
+          </a:ln>
+        </p:spPr>
+      </p:sp>
+      <p:sp>
+        <p:nvSpPr>
+          <p:cNvPr id="3" name="Text 1"/>
+          <p:cNvSpPr/>
+          <p:nvPr/>
+        </p:nvSpPr>
+        <p:spPr>
+          <a:xfrm>
+            <a:off x="731520" y="411480"/>
+            <a:ext cx="1664208" cy="292608"/>
+          </a:xfrm>
+          <a:prstGeom prst="rect">
+            <a:avLst/>
+          </a:prstGeom>
+          <a:noFill/>
+          <a:ln/>
+        </p:spPr>
+        <p:txBody>
+          <a:bodyPr wrap="square" rtlCol="0" anchor="ctr"/>
+          <a:lstStyle/>
+          <a:p>
+            <a:pPr algn="ctr" indent="0" marL="0">
+              <a:buNone/>
+            </a:pPr>
+            <a:r>
+              <a:rPr lang="en-US" sz="900" b="1" dirty="0">
+                <a:solidFill>
+                  <a:srgbClr val="FFFFFF"/>
+                </a:solidFill>
+                <a:latin typeface="Courier New" pitchFamily="34" charset="0"/>
+                <a:ea typeface="Courier New" pitchFamily="34" charset="-122"/>
+                <a:cs typeface="Courier New" pitchFamily="34" charset="-120"/>
+              </a:rPr>
+              <a:t>HPC SYSTEMS</a:t>
+            </a:r>
+            <a:endParaRPr lang="en-US" sz="900" dirty="0"/>
+          </a:p>
+        </p:txBody>
+      </p:sp>
+      <p:sp>
+        <p:nvSpPr>
+          <p:cNvPr id="4" name="Shape 2"/>
+          <p:cNvSpPr/>
+          <p:nvPr/>
+        </p:nvSpPr>
+        <p:spPr>
+          <a:xfrm>
+            <a:off x="2532888" y="411480"/>
+            <a:ext cx="3323844" cy="292608"/>
+          </a:xfrm>
+          <a:prstGeom prst="roundRect">
+            <a:avLst>
+              <a:gd name="adj" fmla="val 50000"/>
+            </a:avLst>
+          </a:prstGeom>
+          <a:solidFill>
+            <a:srgbClr val="FFFFFF"/>
+          </a:solidFill>
+          <a:ln w="19050">
+            <a:solidFill>
+              <a:srgbClr val="111827"/>
+            </a:solidFill>
+            <a:prstDash val="solid"/>
+          </a:ln>
+        </p:spPr>
+      </p:sp>
+      <p:sp>
+        <p:nvSpPr>
+          <p:cNvPr id="5" name="Text 3"/>
+          <p:cNvSpPr/>
+          <p:nvPr/>
+        </p:nvSpPr>
+        <p:spPr>
+          <a:xfrm>
+            <a:off x="2532888" y="411480"/>
+            <a:ext cx="3323844" cy="292608"/>
+          </a:xfrm>
+          <a:prstGeom prst="rect">
+            <a:avLst/>
+          </a:prstGeom>
+          <a:noFill/>
+          <a:ln/>
+        </p:spPr>
+        <p:txBody>
+          <a:bodyPr wrap="square" rtlCol="0" anchor="ctr"/>
+          <a:lstStyle/>
+          <a:p>
+            <a:pPr algn="ctr" indent="0" marL="0">
+              <a:buNone/>
+            </a:pPr>
+            <a:r>
+              <a:rPr lang="en-US" sz="900" b="1" dirty="0">
+                <a:solidFill>
+                  <a:srgbClr val="111827"/>
+                </a:solidFill>
+                <a:latin typeface="Courier New" pitchFamily="34" charset="0"/>
+                <a:ea typeface="Courier New" pitchFamily="34" charset="-122"/>
+                <a:cs typeface="Courier New" pitchFamily="34" charset="-120"/>
+              </a:rPr>
+              <a:t>RESEARCH REPRODUCTION &amp; EXTENSION</a:t>
+            </a:r>
+            <a:endParaRPr lang="en-US" sz="900" dirty="0"/>
+          </a:p>
+        </p:txBody>
+      </p:sp>
+      <p:sp>
+        <p:nvSpPr>
+          <p:cNvPr id="6" name="Text 4"/>
+          <p:cNvSpPr/>
+          <p:nvPr/>
+        </p:nvSpPr>
+        <p:spPr>
+          <a:xfrm>
+            <a:off x="731520" y="868680"/>
+            <a:ext cx="5212080" cy="1143000"/>
+          </a:xfrm>
+          <a:prstGeom prst="rect">
+            <a:avLst/>
+          </a:prstGeom>
+          <a:noFill/>
+          <a:ln/>
+        </p:spPr>
+        <p:txBody>
+          <a:bodyPr wrap="square" rtlCol="0" anchor="ctr"/>
+          <a:lstStyle/>
+          <a:p>
+            <a:pPr indent="0" marL="0">
+              <a:lnSpc>
+                <a:spcPts val="4000"/>
+              </a:lnSpc>
+              <a:buNone/>
+            </a:pPr>
+            <a:r>
+              <a:rPr lang="en-US" sz="3800" b="1" dirty="0">
+                <a:solidFill>
+                  <a:srgbClr val="111827"/>
+                </a:solidFill>
+                <a:latin typeface="Arial Black" pitchFamily="34" charset="0"/>
+                <a:ea typeface="Arial Black" pitchFamily="34" charset="-122"/>
+                <a:cs typeface="Arial Black" pitchFamily="34" charset="-120"/>
+              </a:rPr>
+              <a:t>Locality-Aware</a:t>
+            </a:r>
+            <a:endParaRPr lang="en-US" sz="3800" dirty="0"/>
+          </a:p>
+          <a:p>
+            <a:pPr indent="0" marL="0">
+              <a:lnSpc>
+                <a:spcPts val="4000"/>
+              </a:lnSpc>
+              <a:buNone/>
+            </a:pPr>
+            <a:r>
+              <a:rPr lang="en-US" sz="3800" b="1" dirty="0">
+                <a:solidFill>
+                  <a:srgbClr val="111827"/>
+                </a:solidFill>
+                <a:latin typeface="Arial Black" pitchFamily="34" charset="0"/>
+                <a:ea typeface="Arial Black" pitchFamily="34" charset="-122"/>
+                <a:cs typeface="Arial Black" pitchFamily="34" charset="-120"/>
+              </a:rPr>
+              <a:t>Task Scheduling</a:t>
+            </a:r>
+            <a:endParaRPr lang="en-US" sz="3800" dirty="0"/>
+          </a:p>
+        </p:txBody>
+      </p:sp>
+      <p:sp>
+        <p:nvSpPr>
+          <p:cNvPr id="7" name="Shape 5"/>
+          <p:cNvSpPr/>
+          <p:nvPr/>
+        </p:nvSpPr>
+        <p:spPr>
+          <a:xfrm>
+            <a:off x="731520" y="2066544"/>
+            <a:ext cx="4754880" cy="566928"/>
+          </a:xfrm>
+          <a:prstGeom prst="roundRect">
+            <a:avLst>
+              <a:gd name="adj" fmla="val 16129"/>
+            </a:avLst>
+          </a:prstGeom>
+          <a:solidFill>
+            <a:srgbClr val="FFD147"/>
+          </a:solidFill>
+          <a:ln w="19050">
+            <a:solidFill>
+              <a:srgbClr val="111827"/>
+            </a:solidFill>
+            <a:prstDash val="solid"/>
+          </a:ln>
+        </p:spPr>
+      </p:sp>
+      <p:sp>
+        <p:nvSpPr>
+          <p:cNvPr id="8" name="Text 6"/>
+          <p:cNvSpPr/>
+          <p:nvPr/>
+        </p:nvSpPr>
+        <p:spPr>
+          <a:xfrm>
+            <a:off x="822960" y="2066544"/>
+            <a:ext cx="4572000" cy="566928"/>
+          </a:xfrm>
+          <a:prstGeom prst="rect">
+            <a:avLst/>
+          </a:prstGeom>
+          <a:noFill/>
+          <a:ln/>
+        </p:spPr>
+        <p:txBody>
+          <a:bodyPr wrap="square" rtlCol="0" anchor="ctr"/>
+          <a:lstStyle/>
+          <a:p>
+            <a:pPr algn="ctr" indent="0" marL="0">
+              <a:buNone/>
+            </a:pPr>
+            <a:r>
+              <a:rPr lang="en-US" sz="2600" b="1" dirty="0">
+                <a:solidFill>
+                  <a:srgbClr val="111827"/>
+                </a:solidFill>
+                <a:latin typeface="Arial Black" pitchFamily="34" charset="0"/>
+                <a:ea typeface="Arial Black" pitchFamily="34" charset="-122"/>
+                <a:cs typeface="Arial Black" pitchFamily="34" charset="-120"/>
+              </a:rPr>
+              <a:t>on Heterogeneous HPC</a:t>
+            </a:r>
+            <a:endParaRPr lang="en-US" sz="2600" dirty="0"/>
+          </a:p>
+        </p:txBody>
+      </p:sp>
+      <p:sp>
+        <p:nvSpPr>
+          <p:cNvPr id="9" name="Shape 7"/>
+          <p:cNvSpPr/>
+          <p:nvPr/>
+        </p:nvSpPr>
+        <p:spPr>
+          <a:xfrm>
+            <a:off x="731520" y="2724912"/>
+            <a:ext cx="1828800" cy="274320"/>
+          </a:xfrm>
+          <a:prstGeom prst="roundRect">
+            <a:avLst>
+              <a:gd name="adj" fmla="val 50000"/>
+            </a:avLst>
+          </a:prstGeom>
+          <a:solidFill>
+            <a:srgbClr val="FFFFFF"/>
+          </a:solidFill>
+          <a:ln w="15240">
+            <a:solidFill>
+              <a:srgbClr val="111827"/>
+            </a:solidFill>
+            <a:prstDash val="solid"/>
+          </a:ln>
+        </p:spPr>
+      </p:sp>
+      <p:sp>
+        <p:nvSpPr>
+          <p:cNvPr id="10" name="Text 8"/>
+          <p:cNvSpPr/>
+          <p:nvPr/>
+        </p:nvSpPr>
+        <p:spPr>
+          <a:xfrm>
+            <a:off x="731520" y="2724912"/>
+            <a:ext cx="1828800" cy="274320"/>
+          </a:xfrm>
+          <a:prstGeom prst="rect">
+            <a:avLst/>
+          </a:prstGeom>
+          <a:noFill/>
+          <a:ln/>
+        </p:spPr>
+        <p:txBody>
+          <a:bodyPr wrap="square" rtlCol="0" anchor="ctr"/>
+          <a:lstStyle/>
+          <a:p>
+            <a:pPr algn="ctr" indent="0" marL="0">
+              <a:buNone/>
+            </a:pPr>
+            <a:r>
+              <a:rPr lang="en-US" sz="850" b="1" dirty="0">
+                <a:solidFill>
+                  <a:srgbClr val="111827"/>
+                </a:solidFill>
+                <a:latin typeface="Arial" pitchFamily="34" charset="0"/>
+                <a:ea typeface="Arial" pitchFamily="34" charset="-122"/>
+                <a:cs typeface="Arial" pitchFamily="34" charset="-120"/>
+              </a:rPr>
+              <a:t>AMD Opteron 8-Node NUMA</a:t>
+            </a:r>
+            <a:endParaRPr lang="en-US" sz="850" dirty="0"/>
+          </a:p>
+        </p:txBody>
+      </p:sp>
+      <p:sp>
+        <p:nvSpPr>
+          <p:cNvPr id="11" name="Shape 9"/>
+          <p:cNvSpPr/>
+          <p:nvPr/>
+        </p:nvSpPr>
+        <p:spPr>
+          <a:xfrm>
+            <a:off x="2651760" y="2724912"/>
+            <a:ext cx="1554480" cy="274320"/>
+          </a:xfrm>
+          <a:prstGeom prst="roundRect">
+            <a:avLst>
+              <a:gd name="adj" fmla="val 50000"/>
+            </a:avLst>
+          </a:prstGeom>
+          <a:solidFill>
+            <a:srgbClr val="DCE4FF"/>
+          </a:solidFill>
+          <a:ln w="15240">
+            <a:solidFill>
+              <a:srgbClr val="111827"/>
+            </a:solidFill>
+            <a:prstDash val="solid"/>
+          </a:ln>
+        </p:spPr>
+      </p:sp>
+      <p:sp>
+        <p:nvSpPr>
+          <p:cNvPr id="12" name="Text 10"/>
+          <p:cNvSpPr/>
+          <p:nvPr/>
+        </p:nvSpPr>
+        <p:spPr>
+          <a:xfrm>
+            <a:off x="2651760" y="2724912"/>
+            <a:ext cx="1554480" cy="274320"/>
+          </a:xfrm>
+          <a:prstGeom prst="rect">
+            <a:avLst/>
+          </a:prstGeom>
+          <a:noFill/>
+          <a:ln/>
+        </p:spPr>
+        <p:txBody>
+          <a:bodyPr wrap="square" rtlCol="0" anchor="ctr"/>
+          <a:lstStyle/>
+          <a:p>
+            <a:pPr algn="ctr" indent="0" marL="0">
+              <a:buNone/>
+            </a:pPr>
+            <a:r>
+              <a:rPr lang="en-US" sz="850" b="1" dirty="0">
+                <a:solidFill>
+                  <a:srgbClr val="111827"/>
+                </a:solidFill>
+                <a:latin typeface="Arial" pitchFamily="34" charset="0"/>
+                <a:ea typeface="Arial" pitchFamily="34" charset="-122"/>
+                <a:cs typeface="Arial" pitchFamily="34" charset="-120"/>
+              </a:rPr>
+              <a:t>TILEPro64 8×8 Mesh</a:t>
+            </a:r>
+            <a:endParaRPr lang="en-US" sz="850" dirty="0"/>
+          </a:p>
+        </p:txBody>
+      </p:sp>
+      <p:sp>
+        <p:nvSpPr>
+          <p:cNvPr id="13" name="Shape 11"/>
+          <p:cNvSpPr/>
+          <p:nvPr/>
+        </p:nvSpPr>
+        <p:spPr>
+          <a:xfrm>
+            <a:off x="4297680" y="2724912"/>
+            <a:ext cx="1554480" cy="274320"/>
+          </a:xfrm>
+          <a:prstGeom prst="roundRect">
+            <a:avLst>
+              <a:gd name="adj" fmla="val 50000"/>
+            </a:avLst>
+          </a:prstGeom>
+          <a:solidFill>
+            <a:srgbClr val="FFE5D9"/>
+          </a:solidFill>
+          <a:ln w="15240">
+            <a:solidFill>
+              <a:srgbClr val="111827"/>
+            </a:solidFill>
+            <a:prstDash val="solid"/>
+          </a:ln>
+        </p:spPr>
+      </p:sp>
+      <p:sp>
+        <p:nvSpPr>
+          <p:cNvPr id="14" name="Text 12"/>
+          <p:cNvSpPr/>
+          <p:nvPr/>
+        </p:nvSpPr>
+        <p:spPr>
+          <a:xfrm>
+            <a:off x="4297680" y="2724912"/>
+            <a:ext cx="1554480" cy="274320"/>
+          </a:xfrm>
+          <a:prstGeom prst="rect">
+            <a:avLst/>
+          </a:prstGeom>
+          <a:noFill/>
+          <a:ln/>
+        </p:spPr>
+        <p:txBody>
+          <a:bodyPr wrap="square" rtlCol="0" anchor="ctr"/>
+          <a:lstStyle/>
+          <a:p>
+            <a:pPr algn="ctr" indent="0" marL="0">
+              <a:buNone/>
+            </a:pPr>
+            <a:r>
+              <a:rPr lang="en-US" sz="850" b="1" dirty="0">
+                <a:solidFill>
+                  <a:srgbClr val="111827"/>
+                </a:solidFill>
+                <a:latin typeface="Arial" pitchFamily="34" charset="0"/>
+                <a:ea typeface="Arial" pitchFamily="34" charset="-122"/>
+                <a:cs typeface="Arial" pitchFamily="34" charset="-120"/>
+              </a:rPr>
+              <a:t>NOVA Co-Scheduler</a:t>
+            </a:r>
+            <a:endParaRPr lang="en-US" sz="850" dirty="0"/>
+          </a:p>
+        </p:txBody>
+      </p:sp>
+      <p:sp>
+        <p:nvSpPr>
+          <p:cNvPr id="15" name="Text 13"/>
+          <p:cNvSpPr/>
+          <p:nvPr/>
+        </p:nvSpPr>
+        <p:spPr>
+          <a:xfrm>
+            <a:off x="731520" y="3035808"/>
+            <a:ext cx="5212080" cy="768096"/>
+          </a:xfrm>
+          <a:prstGeom prst="rect">
+            <a:avLst/>
+          </a:prstGeom>
+          <a:noFill/>
+          <a:ln/>
+        </p:spPr>
+        <p:txBody>
+          <a:bodyPr wrap="square" rtlCol="0" anchor="t"/>
+          <a:lstStyle/>
+          <a:p>
+            <a:pPr indent="0" marL="0">
+              <a:lnSpc>
+                <a:spcPts val="1500"/>
+              </a:lnSpc>
+              <a:buNone/>
+            </a:pPr>
+            <a:r>
+              <a:rPr lang="en-US" sz="1050" dirty="0">
+                <a:solidFill>
+                  <a:srgbClr val="374151"/>
+                </a:solidFill>
+                <a:latin typeface="Arial" pitchFamily="34" charset="0"/>
+                <a:ea typeface="Arial" pitchFamily="34" charset="-122"/>
+                <a:cs typeface="Arial" pitchFamily="34" charset="-120"/>
+              </a:rPr>
+              <a:t>An empirical reproduction of Muddukrishna et al. (Scientific Programming 2015), uncovering the SparseLU locality paradox (+15.1% slowdown), and delivering the NOVA co-scheduling runtime architecture for multi-socket servers and 2D mesh manycores.</a:t>
+            </a:r>
+            <a:endParaRPr lang="en-US" sz="1050" dirty="0"/>
+          </a:p>
+        </p:txBody>
+      </p:sp>
+      <p:sp>
+        <p:nvSpPr>
+          <p:cNvPr id="16" name="Shape 14"/>
+          <p:cNvSpPr/>
+          <p:nvPr/>
+        </p:nvSpPr>
+        <p:spPr>
+          <a:xfrm>
+            <a:off x="731520" y="3931920"/>
+            <a:ext cx="2560320" cy="749808"/>
+          </a:xfrm>
+          <a:prstGeom prst="roundRect">
+            <a:avLst>
+              <a:gd name="adj" fmla="val 9756"/>
+            </a:avLst>
+          </a:prstGeom>
+          <a:solidFill>
+            <a:srgbClr val="FFFFFF"/>
+          </a:solidFill>
+          <a:ln w="15240">
+            <a:solidFill>
+              <a:srgbClr val="111827"/>
+            </a:solidFill>
+            <a:prstDash val="solid"/>
+          </a:ln>
+        </p:spPr>
+      </p:sp>
+      <p:sp>
+        <p:nvSpPr>
+          <p:cNvPr id="17" name="Text 15"/>
+          <p:cNvSpPr/>
+          <p:nvPr/>
+        </p:nvSpPr>
+        <p:spPr>
+          <a:xfrm>
+            <a:off x="822960" y="4005072"/>
+            <a:ext cx="2377440" cy="237744"/>
+          </a:xfrm>
+          <a:prstGeom prst="rect">
+            <a:avLst/>
+          </a:prstGeom>
+          <a:noFill/>
+          <a:ln/>
+        </p:spPr>
+        <p:txBody>
+          <a:bodyPr wrap="square" rtlCol="0" anchor="ctr"/>
+          <a:lstStyle/>
+          <a:p>
+            <a:pPr indent="0" marL="0">
+              <a:buNone/>
+            </a:pPr>
+            <a:r>
+              <a:rPr lang="en-US" sz="1050" dirty="0">
+                <a:solidFill>
+                  <a:srgbClr val="111827"/>
+                </a:solidFill>
+                <a:latin typeface="Arial Black" pitchFamily="34" charset="0"/>
+                <a:ea typeface="Arial Black" pitchFamily="34" charset="-122"/>
+                <a:cs typeface="Arial Black" pitchFamily="34" charset="-120"/>
+              </a:rPr>
+              <a:t>100 NUMA Runs</a:t>
+            </a:r>
+            <a:endParaRPr lang="en-US" sz="1050" dirty="0"/>
+          </a:p>
+        </p:txBody>
+      </p:sp>
+      <p:sp>
+        <p:nvSpPr>
+          <p:cNvPr id="18" name="Text 16"/>
+          <p:cNvSpPr/>
+          <p:nvPr/>
+        </p:nvSpPr>
+        <p:spPr>
+          <a:xfrm>
+            <a:off x="822960" y="4261104"/>
+            <a:ext cx="2377440" cy="365760"/>
+          </a:xfrm>
+          <a:prstGeom prst="rect">
+            <a:avLst/>
+          </a:prstGeom>
+          <a:noFill/>
+          <a:ln/>
+        </p:spPr>
+        <p:txBody>
+          <a:bodyPr wrap="square" rtlCol="0" anchor="ctr"/>
+          <a:lstStyle/>
+          <a:p>
+            <a:pPr indent="0" marL="0">
+              <a:buNone/>
+            </a:pPr>
+            <a:r>
+              <a:rPr lang="en-US" sz="800" dirty="0">
+                <a:solidFill>
+                  <a:srgbClr val="4B5563"/>
+                </a:solidFill>
+                <a:latin typeface="Courier New" pitchFamily="34" charset="0"/>
+                <a:ea typeface="Courier New" pitchFamily="34" charset="-122"/>
+                <a:cs typeface="Courier New" pitchFamily="34" charset="-120"/>
+              </a:rPr>
+              <a:t>100% verification of Fig. 7 across 5 benchmarks on 48 cores</a:t>
+            </a:r>
+            <a:endParaRPr lang="en-US" sz="800" dirty="0"/>
+          </a:p>
+        </p:txBody>
+      </p:sp>
+      <p:sp>
+        <p:nvSpPr>
+          <p:cNvPr id="19" name="Shape 17"/>
+          <p:cNvSpPr/>
+          <p:nvPr/>
+        </p:nvSpPr>
+        <p:spPr>
+          <a:xfrm>
+            <a:off x="3429000" y="3931920"/>
+            <a:ext cx="2560320" cy="749808"/>
+          </a:xfrm>
+          <a:prstGeom prst="roundRect">
+            <a:avLst>
+              <a:gd name="adj" fmla="val 9756"/>
+            </a:avLst>
+          </a:prstGeom>
+          <a:solidFill>
+            <a:srgbClr val="FFFFFF"/>
+          </a:solidFill>
+          <a:ln w="15240">
+            <a:solidFill>
+              <a:srgbClr val="111827"/>
+            </a:solidFill>
+            <a:prstDash val="solid"/>
+          </a:ln>
+        </p:spPr>
+      </p:sp>
+      <p:sp>
+        <p:nvSpPr>
+          <p:cNvPr id="20" name="Text 18"/>
+          <p:cNvSpPr/>
+          <p:nvPr/>
+        </p:nvSpPr>
+        <p:spPr>
+          <a:xfrm>
+            <a:off x="3520440" y="4005072"/>
+            <a:ext cx="2377440" cy="237744"/>
+          </a:xfrm>
+          <a:prstGeom prst="rect">
+            <a:avLst/>
+          </a:prstGeom>
+          <a:noFill/>
+          <a:ln/>
+        </p:spPr>
+        <p:txBody>
+          <a:bodyPr wrap="square" rtlCol="0" anchor="ctr"/>
+          <a:lstStyle/>
+          <a:p>
+            <a:pPr indent="0" marL="0">
+              <a:buNone/>
+            </a:pPr>
+            <a:r>
+              <a:rPr lang="en-US" sz="1050" dirty="0">
+                <a:solidFill>
+                  <a:srgbClr val="111827"/>
+                </a:solidFill>
+                <a:latin typeface="Arial Black" pitchFamily="34" charset="0"/>
+                <a:ea typeface="Arial Black" pitchFamily="34" charset="-122"/>
+                <a:cs typeface="Arial Black" pitchFamily="34" charset="-120"/>
+              </a:rPr>
+              <a:t>64-Tile Mesh Simulator</a:t>
+            </a:r>
+            <a:endParaRPr lang="en-US" sz="1050" dirty="0"/>
+          </a:p>
+        </p:txBody>
+      </p:sp>
+      <p:sp>
+        <p:nvSpPr>
+          <p:cNvPr id="21" name="Text 19"/>
+          <p:cNvSpPr/>
+          <p:nvPr/>
+        </p:nvSpPr>
+        <p:spPr>
+          <a:xfrm>
+            <a:off x="3520440" y="4261104"/>
+            <a:ext cx="2377440" cy="365760"/>
+          </a:xfrm>
+          <a:prstGeom prst="rect">
+            <a:avLst/>
+          </a:prstGeom>
+          <a:noFill/>
+          <a:ln/>
+        </p:spPr>
+        <p:txBody>
+          <a:bodyPr wrap="square" rtlCol="0" anchor="ctr"/>
+          <a:lstStyle/>
+          <a:p>
+            <a:pPr indent="0" marL="0">
+              <a:buNone/>
+            </a:pPr>
+            <a:r>
+              <a:rPr lang="en-US" sz="800" dirty="0">
+                <a:solidFill>
+                  <a:srgbClr val="4B5563"/>
+                </a:solidFill>
+                <a:latin typeface="Courier New" pitchFamily="34" charset="0"/>
+                <a:ea typeface="Courier New" pitchFamily="34" charset="-122"/>
+                <a:cs typeface="Courier New" pitchFamily="34" charset="-120"/>
+              </a:rPr>
+              <a:t>Cycle-accurate 2D Manhattan latency model (11/11 tests)</a:t>
+            </a:r>
+            <a:endParaRPr lang="en-US" sz="800" dirty="0"/>
+          </a:p>
+        </p:txBody>
+      </p:sp>
+      <p:sp>
+        <p:nvSpPr>
+          <p:cNvPr id="22" name="Shape 20"/>
+          <p:cNvSpPr/>
+          <p:nvPr/>
+        </p:nvSpPr>
+        <p:spPr>
+          <a:xfrm>
+            <a:off x="731520" y="4754880"/>
+            <a:ext cx="2560320" cy="749808"/>
+          </a:xfrm>
+          <a:prstGeom prst="roundRect">
+            <a:avLst>
+              <a:gd name="adj" fmla="val 9756"/>
+            </a:avLst>
+          </a:prstGeom>
+          <a:solidFill>
+            <a:srgbClr val="FFFFFF"/>
+          </a:solidFill>
+          <a:ln w="15240">
+            <a:solidFill>
+              <a:srgbClr val="111827"/>
+            </a:solidFill>
+            <a:prstDash val="solid"/>
+          </a:ln>
+        </p:spPr>
+      </p:sp>
+      <p:sp>
+        <p:nvSpPr>
+          <p:cNvPr id="23" name="Text 21"/>
+          <p:cNvSpPr/>
+          <p:nvPr/>
+        </p:nvSpPr>
+        <p:spPr>
+          <a:xfrm>
+            <a:off x="822960" y="4828032"/>
+            <a:ext cx="2377440" cy="237744"/>
+          </a:xfrm>
+          <a:prstGeom prst="rect">
+            <a:avLst/>
+          </a:prstGeom>
+          <a:noFill/>
+          <a:ln/>
+        </p:spPr>
+        <p:txBody>
+          <a:bodyPr wrap="square" rtlCol="0" anchor="ctr"/>
+          <a:lstStyle/>
+          <a:p>
+            <a:pPr indent="0" marL="0">
+              <a:buNone/>
+            </a:pPr>
+            <a:r>
+              <a:rPr lang="en-US" sz="1050" dirty="0">
+                <a:solidFill>
+                  <a:srgbClr val="B91C1C"/>
+                </a:solidFill>
+                <a:latin typeface="Arial Black" pitchFamily="34" charset="0"/>
+                <a:ea typeface="Arial Black" pitchFamily="34" charset="-122"/>
+                <a:cs typeface="Arial Black" pitchFamily="34" charset="-120"/>
+              </a:rPr>
+              <a:t>SparseLU Paradox Discovered</a:t>
+            </a:r>
+            <a:endParaRPr lang="en-US" sz="1050" dirty="0"/>
+          </a:p>
+        </p:txBody>
+      </p:sp>
+      <p:sp>
+        <p:nvSpPr>
+          <p:cNvPr id="24" name="Text 22"/>
+          <p:cNvSpPr/>
+          <p:nvPr/>
+        </p:nvSpPr>
+        <p:spPr>
+          <a:xfrm>
+            <a:off x="822960" y="5084064"/>
+            <a:ext cx="2377440" cy="365760"/>
+          </a:xfrm>
+          <a:prstGeom prst="rect">
+            <a:avLst/>
+          </a:prstGeom>
+          <a:noFill/>
+          <a:ln/>
+        </p:spPr>
+        <p:txBody>
+          <a:bodyPr wrap="square" rtlCol="0" anchor="ctr"/>
+          <a:lstStyle/>
+          <a:p>
+            <a:pPr indent="0" marL="0">
+              <a:buNone/>
+            </a:pPr>
+            <a:r>
+              <a:rPr lang="en-US" sz="800" dirty="0">
+                <a:solidFill>
+                  <a:srgbClr val="4B5563"/>
+                </a:solidFill>
+                <a:latin typeface="Courier New" pitchFamily="34" charset="0"/>
+                <a:ea typeface="Courier New" pitchFamily="34" charset="-122"/>
+                <a:cs typeface="Courier New" pitchFamily="34" charset="-120"/>
+              </a:rPr>
+              <a:t>+15.1% slowdown under naive locality dealing proven</a:t>
+            </a:r>
+            <a:endParaRPr lang="en-US" sz="800" dirty="0"/>
+          </a:p>
+        </p:txBody>
+      </p:sp>
+      <p:sp>
+        <p:nvSpPr>
+          <p:cNvPr id="25" name="Shape 23"/>
+          <p:cNvSpPr/>
+          <p:nvPr/>
+        </p:nvSpPr>
+        <p:spPr>
+          <a:xfrm>
+            <a:off x="3429000" y="4754880"/>
+            <a:ext cx="2560320" cy="749808"/>
+          </a:xfrm>
+          <a:prstGeom prst="roundRect">
+            <a:avLst>
+              <a:gd name="adj" fmla="val 9756"/>
+            </a:avLst>
+          </a:prstGeom>
+          <a:solidFill>
+            <a:srgbClr val="FFFFFF"/>
+          </a:solidFill>
+          <a:ln w="15240">
+            <a:solidFill>
+              <a:srgbClr val="111827"/>
+            </a:solidFill>
+            <a:prstDash val="solid"/>
+          </a:ln>
+        </p:spPr>
+      </p:sp>
+      <p:sp>
+        <p:nvSpPr>
+          <p:cNvPr id="26" name="Text 24"/>
+          <p:cNvSpPr/>
+          <p:nvPr/>
+        </p:nvSpPr>
+        <p:spPr>
+          <a:xfrm>
+            <a:off x="3520440" y="4828032"/>
+            <a:ext cx="2377440" cy="237744"/>
+          </a:xfrm>
+          <a:prstGeom prst="rect">
+            <a:avLst/>
+          </a:prstGeom>
+          <a:noFill/>
+          <a:ln/>
+        </p:spPr>
+        <p:txBody>
+          <a:bodyPr wrap="square" rtlCol="0" anchor="ctr"/>
+          <a:lstStyle/>
+          <a:p>
+            <a:pPr indent="0" marL="0">
+              <a:buNone/>
+            </a:pPr>
+            <a:r>
+              <a:rPr lang="en-US" sz="1050" dirty="0">
+                <a:solidFill>
+                  <a:srgbClr val="047857"/>
+                </a:solidFill>
+                <a:latin typeface="Arial Black" pitchFamily="34" charset="0"/>
+                <a:ea typeface="Arial Black" pitchFamily="34" charset="-122"/>
+                <a:cs typeface="Arial Black" pitchFamily="34" charset="-120"/>
+              </a:rPr>
+              <a:t>NOVA Co-Scheduler</a:t>
+            </a:r>
+            <a:endParaRPr lang="en-US" sz="1050" dirty="0"/>
+          </a:p>
+        </p:txBody>
+      </p:sp>
+      <p:sp>
+        <p:nvSpPr>
+          <p:cNvPr id="27" name="Text 25"/>
+          <p:cNvSpPr/>
+          <p:nvPr/>
+        </p:nvSpPr>
+        <p:spPr>
+          <a:xfrm>
+            <a:off x="3520440" y="5084064"/>
+            <a:ext cx="2377440" cy="365760"/>
+          </a:xfrm>
+          <a:prstGeom prst="rect">
+            <a:avLst/>
+          </a:prstGeom>
+          <a:noFill/>
+          <a:ln/>
+        </p:spPr>
+        <p:txBody>
+          <a:bodyPr wrap="square" rtlCol="0" anchor="ctr"/>
+          <a:lstStyle/>
+          <a:p>
+            <a:pPr indent="0" marL="0">
+              <a:buNone/>
+            </a:pPr>
+            <a:r>
+              <a:rPr lang="en-US" sz="800" dirty="0">
+                <a:solidFill>
+                  <a:srgbClr val="4B5563"/>
+                </a:solidFill>
+                <a:latin typeface="Courier New" pitchFamily="34" charset="0"/>
+                <a:ea typeface="Courier New" pitchFamily="34" charset="-122"/>
+                <a:cs typeface="Courier New" pitchFamily="34" charset="-120"/>
+              </a:rPr>
+              <a:t>Adaptive co-scheduling combining affinity with queue balance</a:t>
+            </a:r>
+            <a:endParaRPr lang="en-US" sz="800" dirty="0"/>
+          </a:p>
+        </p:txBody>
+      </p:sp>
+      <p:sp>
+        <p:nvSpPr>
+          <p:cNvPr id="28" name="Shape 26"/>
+          <p:cNvSpPr/>
+          <p:nvPr/>
+        </p:nvSpPr>
+        <p:spPr>
+          <a:xfrm>
+            <a:off x="6272784" y="923544"/>
+            <a:ext cx="5212080" cy="4709160"/>
+          </a:xfrm>
+          <a:prstGeom prst="roundRect">
+            <a:avLst>
+              <a:gd name="adj" fmla="val 3495"/>
+            </a:avLst>
+          </a:prstGeom>
+          <a:solidFill>
+            <a:srgbClr val="111827"/>
+          </a:solidFill>
+          <a:ln w="12700">
+            <a:solidFill>
+              <a:srgbClr val="111827"/>
+            </a:solidFill>
+            <a:prstDash val="solid"/>
+          </a:ln>
+        </p:spPr>
+      </p:sp>
+      <p:sp>
+        <p:nvSpPr>
+          <p:cNvPr id="29" name="Shape 27"/>
+          <p:cNvSpPr/>
+          <p:nvPr/>
+        </p:nvSpPr>
+        <p:spPr>
+          <a:xfrm>
+            <a:off x="6217920" y="868680"/>
+            <a:ext cx="5212080" cy="4709160"/>
+          </a:xfrm>
+          <a:prstGeom prst="roundRect">
+            <a:avLst>
+              <a:gd name="adj" fmla="val 3495"/>
+            </a:avLst>
+          </a:prstGeom>
+          <a:solidFill>
+            <a:srgbClr val="FFFFFF"/>
+          </a:solidFill>
+          <a:ln w="19050">
+            <a:solidFill>
+              <a:srgbClr val="111827"/>
+            </a:solidFill>
+            <a:prstDash val="solid"/>
+          </a:ln>
+        </p:spPr>
+      </p:sp>
+      <p:sp>
+        <p:nvSpPr>
+          <p:cNvPr id="30" name="Text 28"/>
+          <p:cNvSpPr/>
+          <p:nvPr/>
+        </p:nvSpPr>
+        <p:spPr>
+          <a:xfrm>
+            <a:off x="6446520" y="1005840"/>
+            <a:ext cx="4754880" cy="274320"/>
+          </a:xfrm>
+          <a:prstGeom prst="rect">
+            <a:avLst/>
+          </a:prstGeom>
+          <a:noFill/>
+          <a:ln/>
+        </p:spPr>
+        <p:txBody>
+          <a:bodyPr wrap="square" rtlCol="0" anchor="ctr"/>
+          <a:lstStyle/>
+          <a:p>
+            <a:pPr indent="0" marL="0">
+              <a:buNone/>
+            </a:pPr>
+            <a:r>
+              <a:rPr lang="en-US" sz="1800" dirty="0">
+                <a:solidFill>
+                  <a:srgbClr val="111827"/>
+                </a:solidFill>
+                <a:latin typeface="Arial Black" pitchFamily="34" charset="0"/>
+                <a:ea typeface="Arial Black" pitchFamily="34" charset="-122"/>
+                <a:cs typeface="Arial Black" pitchFamily="34" charset="-120"/>
+              </a:rPr>
+              <a:t>Dual-Architecture Latency Cliffs</a:t>
+            </a:r>
+            <a:endParaRPr lang="en-US" sz="1800" dirty="0"/>
+          </a:p>
+        </p:txBody>
+      </p:sp>
+      <p:sp>
+        <p:nvSpPr>
+          <p:cNvPr id="31" name="Text 29"/>
+          <p:cNvSpPr/>
+          <p:nvPr/>
+        </p:nvSpPr>
+        <p:spPr>
+          <a:xfrm>
+            <a:off x="6446520" y="1280160"/>
+            <a:ext cx="4754880" cy="182880"/>
+          </a:xfrm>
+          <a:prstGeom prst="rect">
+            <a:avLst/>
+          </a:prstGeom>
+          <a:noFill/>
+          <a:ln/>
+        </p:spPr>
+        <p:txBody>
+          <a:bodyPr wrap="square" rtlCol="0" anchor="ctr"/>
+          <a:lstStyle/>
+          <a:p>
+            <a:pPr indent="0" marL="0">
+              <a:buNone/>
+            </a:pPr>
+            <a:r>
+              <a:rPr lang="en-US" sz="900" dirty="0">
+                <a:solidFill>
+                  <a:srgbClr val="4B5563"/>
+                </a:solidFill>
+                <a:latin typeface="Courier New" pitchFamily="34" charset="0"/>
+                <a:ea typeface="Courier New" pitchFamily="34" charset="-122"/>
+                <a:cs typeface="Courier New" pitchFamily="34" charset="-120"/>
+              </a:rPr>
+              <a:t>Empirical memory hierarchies &amp; interconnect penalty profiles</a:t>
+            </a:r>
+            <a:endParaRPr lang="en-US" sz="900" dirty="0"/>
+          </a:p>
+        </p:txBody>
+      </p:sp>
+      <p:sp>
+        <p:nvSpPr>
+          <p:cNvPr id="32" name="Shape 30"/>
+          <p:cNvSpPr/>
+          <p:nvPr/>
+        </p:nvSpPr>
+        <p:spPr>
+          <a:xfrm>
+            <a:off x="6446520" y="1536192"/>
+            <a:ext cx="2286000" cy="2423160"/>
+          </a:xfrm>
+          <a:prstGeom prst="roundRect">
+            <a:avLst>
+              <a:gd name="adj" fmla="val 4800"/>
+            </a:avLst>
+          </a:prstGeom>
+          <a:solidFill>
+            <a:srgbClr val="EEF2FF"/>
+          </a:solidFill>
+          <a:ln w="19050">
+            <a:solidFill>
+              <a:srgbClr val="111827"/>
+            </a:solidFill>
+            <a:prstDash val="solid"/>
+          </a:ln>
+        </p:spPr>
+      </p:sp>
+      <p:sp>
+        <p:nvSpPr>
+          <p:cNvPr id="33" name="Text 31"/>
+          <p:cNvSpPr/>
+          <p:nvPr/>
+        </p:nvSpPr>
+        <p:spPr>
+          <a:xfrm>
+            <a:off x="6537960" y="1609344"/>
+            <a:ext cx="2103120" cy="201168"/>
+          </a:xfrm>
+          <a:prstGeom prst="rect">
+            <a:avLst/>
+          </a:prstGeom>
+          <a:noFill/>
+          <a:ln/>
+        </p:spPr>
+        <p:txBody>
+          <a:bodyPr wrap="square" rtlCol="0" anchor="ctr"/>
+          <a:lstStyle/>
+          <a:p>
+            <a:pPr indent="0" marL="0">
+              <a:buNone/>
+            </a:pPr>
+            <a:r>
+              <a:rPr lang="en-US" sz="1100" dirty="0">
+                <a:solidFill>
+                  <a:srgbClr val="111827"/>
+                </a:solidFill>
+                <a:latin typeface="Arial Black" pitchFamily="34" charset="0"/>
+                <a:ea typeface="Arial Black" pitchFamily="34" charset="-122"/>
+                <a:cs typeface="Arial Black" pitchFamily="34" charset="-120"/>
+              </a:rPr>
+              <a:t>AMD Opteron (NUMA)</a:t>
+            </a:r>
+            <a:endParaRPr lang="en-US" sz="1100" dirty="0"/>
+          </a:p>
+        </p:txBody>
+      </p:sp>
+      <p:sp>
+        <p:nvSpPr>
+          <p:cNvPr id="34" name="Text 32"/>
+          <p:cNvSpPr/>
+          <p:nvPr/>
+        </p:nvSpPr>
+        <p:spPr>
+          <a:xfrm>
+            <a:off x="6537960" y="1810512"/>
+            <a:ext cx="2103120" cy="146304"/>
+          </a:xfrm>
+          <a:prstGeom prst="rect">
+            <a:avLst/>
+          </a:prstGeom>
+          <a:noFill/>
+          <a:ln/>
+        </p:spPr>
+        <p:txBody>
+          <a:bodyPr wrap="square" rtlCol="0" anchor="ctr"/>
+          <a:lstStyle/>
+          <a:p>
+            <a:pPr indent="0" marL="0">
+              <a:buNone/>
+            </a:pPr>
+            <a:r>
+              <a:rPr lang="en-US" sz="800" dirty="0">
+                <a:solidFill>
+                  <a:srgbClr val="4B5563"/>
+                </a:solidFill>
+                <a:latin typeface="Courier New" pitchFamily="34" charset="0"/>
+                <a:ea typeface="Courier New" pitchFamily="34" charset="-122"/>
+                <a:cs typeface="Courier New" pitchFamily="34" charset="-120"/>
+              </a:rPr>
+              <a:t>8 Sockets · 48 Cores</a:t>
+            </a:r>
+            <a:endParaRPr lang="en-US" sz="800" dirty="0"/>
+          </a:p>
+        </p:txBody>
+      </p:sp>
+      <p:sp>
+        <p:nvSpPr>
+          <p:cNvPr id="35" name="Shape 33"/>
+          <p:cNvSpPr/>
+          <p:nvPr/>
+        </p:nvSpPr>
+        <p:spPr>
+          <a:xfrm>
+            <a:off x="6537960" y="1993392"/>
+            <a:ext cx="2103120" cy="438912"/>
+          </a:xfrm>
+          <a:prstGeom prst="roundRect">
+            <a:avLst>
+              <a:gd name="adj" fmla="val 12500"/>
+            </a:avLst>
+          </a:prstGeom>
+          <a:solidFill>
+            <a:srgbClr val="FFFFFF"/>
+          </a:solidFill>
+          <a:ln w="12700">
+            <a:solidFill>
+              <a:srgbClr val="111827"/>
+            </a:solidFill>
+            <a:prstDash val="solid"/>
+          </a:ln>
+        </p:spPr>
+      </p:sp>
+      <p:sp>
+        <p:nvSpPr>
+          <p:cNvPr id="36" name="Text 34"/>
+          <p:cNvSpPr/>
+          <p:nvPr/>
+        </p:nvSpPr>
+        <p:spPr>
+          <a:xfrm>
+            <a:off x="6583680" y="2011680"/>
+            <a:ext cx="2011680" cy="402336"/>
+          </a:xfrm>
+          <a:prstGeom prst="rect">
+            <a:avLst/>
+          </a:prstGeom>
+          <a:noFill/>
+          <a:ln/>
+        </p:spPr>
+        <p:txBody>
+          <a:bodyPr wrap="square" rtlCol="0" anchor="ctr"/>
+          <a:lstStyle/>
+          <a:p>
+            <a:pPr indent="0" marL="0">
+              <a:buNone/>
+            </a:pPr>
+            <a:r>
+              <a:rPr lang="en-US" sz="800" b="1" dirty="0">
+                <a:solidFill>
+                  <a:srgbClr val="047857"/>
+                </a:solidFill>
+                <a:latin typeface="Courier New" pitchFamily="34" charset="0"/>
+                <a:ea typeface="Courier New" pitchFamily="34" charset="-122"/>
+                <a:cs typeface="Courier New" pitchFamily="34" charset="-120"/>
+              </a:rPr>
+              <a:t>Local Node DRAM:</a:t>
+            </a:r>
+            <a:endParaRPr lang="en-US" sz="800" dirty="0"/>
+          </a:p>
+          <a:p>
+            <a:pPr indent="0" marL="0">
+              <a:buNone/>
+            </a:pPr>
+            <a:r>
+              <a:rPr lang="en-US" sz="800" b="1" dirty="0">
+                <a:solidFill>
+                  <a:srgbClr val="047857"/>
+                </a:solidFill>
+                <a:latin typeface="Courier New" pitchFamily="34" charset="0"/>
+                <a:ea typeface="Courier New" pitchFamily="34" charset="-122"/>
+                <a:cs typeface="Courier New" pitchFamily="34" charset="-120"/>
+              </a:rPr>
+              <a:t>~40 cycles (1.0× baseline)</a:t>
+            </a:r>
+            <a:endParaRPr lang="en-US" sz="800" dirty="0"/>
+          </a:p>
+        </p:txBody>
+      </p:sp>
+      <p:sp>
+        <p:nvSpPr>
+          <p:cNvPr id="37" name="Shape 35"/>
+          <p:cNvSpPr/>
+          <p:nvPr/>
+        </p:nvSpPr>
+        <p:spPr>
+          <a:xfrm>
+            <a:off x="6537960" y="2487168"/>
+            <a:ext cx="2103120" cy="530352"/>
+          </a:xfrm>
+          <a:prstGeom prst="roundRect">
+            <a:avLst>
+              <a:gd name="adj" fmla="val 10345"/>
+            </a:avLst>
+          </a:prstGeom>
+          <a:solidFill>
+            <a:srgbClr val="FEE2E2"/>
+          </a:solidFill>
+          <a:ln w="12700">
+            <a:solidFill>
+              <a:srgbClr val="111827"/>
+            </a:solidFill>
+            <a:prstDash val="solid"/>
+          </a:ln>
+        </p:spPr>
+      </p:sp>
+      <p:sp>
+        <p:nvSpPr>
+          <p:cNvPr id="38" name="Text 36"/>
+          <p:cNvSpPr/>
+          <p:nvPr/>
+        </p:nvSpPr>
+        <p:spPr>
+          <a:xfrm>
+            <a:off x="6583680" y="2505456"/>
+            <a:ext cx="2011680" cy="493776"/>
+          </a:xfrm>
+          <a:prstGeom prst="rect">
+            <a:avLst/>
+          </a:prstGeom>
+          <a:noFill/>
+          <a:ln/>
+        </p:spPr>
+        <p:txBody>
+          <a:bodyPr wrap="square" rtlCol="0" anchor="ctr"/>
+          <a:lstStyle/>
+          <a:p>
+            <a:pPr indent="0" marL="0">
+              <a:buNone/>
+            </a:pPr>
+            <a:r>
+              <a:rPr lang="en-US" sz="780" b="1" dirty="0">
+                <a:solidFill>
+                  <a:srgbClr val="B91C1C"/>
+                </a:solidFill>
+                <a:latin typeface="Courier New" pitchFamily="34" charset="0"/>
+                <a:ea typeface="Courier New" pitchFamily="34" charset="-122"/>
+                <a:cs typeface="Courier New" pitchFamily="34" charset="-120"/>
+              </a:rPr>
+              <a:t>Cross-Socket HT Link:</a:t>
+            </a:r>
+            <a:endParaRPr lang="en-US" sz="780" dirty="0"/>
+          </a:p>
+          <a:p>
+            <a:pPr indent="0" marL="0">
+              <a:buNone/>
+            </a:pPr>
+            <a:r>
+              <a:rPr lang="en-US" sz="780" b="1" dirty="0">
+                <a:solidFill>
+                  <a:srgbClr val="B91C1C"/>
+                </a:solidFill>
+                <a:latin typeface="Courier New" pitchFamily="34" charset="0"/>
+                <a:ea typeface="Courier New" pitchFamily="34" charset="-122"/>
+                <a:cs typeface="Courier New" pitchFamily="34" charset="-120"/>
+              </a:rPr>
+              <a:t>240–340 cycles (6×–8.5× Cliff)</a:t>
+            </a:r>
+            <a:endParaRPr lang="en-US" sz="780" dirty="0"/>
+          </a:p>
+        </p:txBody>
+      </p:sp>
+      <p:sp>
+        <p:nvSpPr>
+          <p:cNvPr id="39" name="Text 37"/>
+          <p:cNvSpPr/>
+          <p:nvPr/>
+        </p:nvSpPr>
+        <p:spPr>
+          <a:xfrm>
+            <a:off x="6537960" y="3072384"/>
+            <a:ext cx="2103120" cy="822960"/>
+          </a:xfrm>
+          <a:prstGeom prst="rect">
+            <a:avLst/>
+          </a:prstGeom>
+          <a:noFill/>
+          <a:ln/>
+        </p:spPr>
+        <p:txBody>
+          <a:bodyPr wrap="square" rtlCol="0" anchor="ctr"/>
+          <a:lstStyle/>
+          <a:p>
+            <a:pPr indent="0" marL="0">
+              <a:lnSpc>
+                <a:spcPts val="1000"/>
+              </a:lnSpc>
+              <a:buNone/>
+            </a:pPr>
+            <a:r>
+              <a:rPr lang="en-US" sz="750" dirty="0">
+                <a:solidFill>
+                  <a:srgbClr val="374151"/>
+                </a:solidFill>
+                <a:latin typeface="Courier New" pitchFamily="34" charset="0"/>
+                <a:ea typeface="Courier New" pitchFamily="34" charset="-122"/>
+                <a:cs typeface="Courier New" pitchFamily="34" charset="-120"/>
+              </a:rPr>
+              <a:t>• HyperTransport 3.0 (6.4 GT/s)</a:t>
+            </a:r>
+            <a:endParaRPr lang="en-US" sz="750" dirty="0"/>
+          </a:p>
+          <a:p>
+            <a:pPr indent="0" marL="0">
+              <a:lnSpc>
+                <a:spcPts val="1000"/>
+              </a:lnSpc>
+              <a:buNone/>
+            </a:pPr>
+            <a:r>
+              <a:rPr lang="en-US" sz="750" dirty="0">
+                <a:solidFill>
+                  <a:srgbClr val="374151"/>
+                </a:solidFill>
+                <a:latin typeface="Courier New" pitchFamily="34" charset="0"/>
+                <a:ea typeface="Courier New" pitchFamily="34" charset="-122"/>
+                <a:cs typeface="Courier New" pitchFamily="34" charset="-120"/>
+              </a:rPr>
+              <a:t>• CC-NUMA cache coherence</a:t>
+            </a:r>
+            <a:endParaRPr lang="en-US" sz="750" dirty="0"/>
+          </a:p>
+          <a:p>
+            <a:pPr indent="0" marL="0">
+              <a:lnSpc>
+                <a:spcPts val="1000"/>
+              </a:lnSpc>
+              <a:buNone/>
+            </a:pPr>
+            <a:r>
+              <a:rPr lang="en-US" sz="750" dirty="0">
+                <a:solidFill>
+                  <a:srgbClr val="374151"/>
+                </a:solidFill>
+                <a:latin typeface="Courier New" pitchFamily="34" charset="0"/>
+                <a:ea typeface="Courier New" pitchFamily="34" charset="-122"/>
+                <a:cs typeface="Courier New" pitchFamily="34" charset="-120"/>
+              </a:rPr>
+              <a:t>• 3 hops max across sockets</a:t>
+            </a:r>
+            <a:endParaRPr lang="en-US" sz="750" dirty="0"/>
+          </a:p>
+          <a:p>
+            <a:pPr indent="0" marL="0">
+              <a:lnSpc>
+                <a:spcPts val="1000"/>
+              </a:lnSpc>
+              <a:buNone/>
+            </a:pPr>
+            <a:r>
+              <a:rPr lang="en-US" sz="750" dirty="0">
+                <a:solidFill>
+                  <a:srgbClr val="374151"/>
+                </a:solidFill>
+                <a:latin typeface="Courier New" pitchFamily="34" charset="0"/>
+                <a:ea typeface="Courier New" pitchFamily="34" charset="-122"/>
+                <a:cs typeface="Courier New" pitchFamily="34" charset="-120"/>
+              </a:rPr>
+              <a:t>• Bus saturation on naive steals</a:t>
+            </a:r>
+            <a:endParaRPr lang="en-US" sz="750" dirty="0"/>
+          </a:p>
+        </p:txBody>
+      </p:sp>
+      <p:sp>
+        <p:nvSpPr>
+          <p:cNvPr id="40" name="Shape 38"/>
+          <p:cNvSpPr/>
+          <p:nvPr/>
+        </p:nvSpPr>
+        <p:spPr>
+          <a:xfrm>
+            <a:off x="8869680" y="1536192"/>
+            <a:ext cx="2286000" cy="2423160"/>
+          </a:xfrm>
+          <a:prstGeom prst="roundRect">
+            <a:avLst>
+              <a:gd name="adj" fmla="val 4800"/>
+            </a:avLst>
+          </a:prstGeom>
+          <a:solidFill>
+            <a:srgbClr val="FFF1EB"/>
+          </a:solidFill>
+          <a:ln w="19050">
+            <a:solidFill>
+              <a:srgbClr val="111827"/>
+            </a:solidFill>
+            <a:prstDash val="solid"/>
+          </a:ln>
+        </p:spPr>
+      </p:sp>
+      <p:sp>
+        <p:nvSpPr>
+          <p:cNvPr id="41" name="Text 39"/>
+          <p:cNvSpPr/>
+          <p:nvPr/>
+        </p:nvSpPr>
+        <p:spPr>
+          <a:xfrm>
+            <a:off x="8961120" y="1609344"/>
+            <a:ext cx="2103120" cy="201168"/>
+          </a:xfrm>
+          <a:prstGeom prst="rect">
+            <a:avLst/>
+          </a:prstGeom>
+          <a:noFill/>
+          <a:ln/>
+        </p:spPr>
+        <p:txBody>
+          <a:bodyPr wrap="square" rtlCol="0" anchor="ctr"/>
+          <a:lstStyle/>
+          <a:p>
+            <a:pPr indent="0" marL="0">
+              <a:buNone/>
+            </a:pPr>
+            <a:r>
+              <a:rPr lang="en-US" sz="1100" dirty="0">
+                <a:solidFill>
+                  <a:srgbClr val="111827"/>
+                </a:solidFill>
+                <a:latin typeface="Arial Black" pitchFamily="34" charset="0"/>
+                <a:ea typeface="Arial Black" pitchFamily="34" charset="-122"/>
+                <a:cs typeface="Arial Black" pitchFamily="34" charset="-120"/>
+              </a:rPr>
+              <a:t>TILEPro64 (Mesh)</a:t>
+            </a:r>
+            <a:endParaRPr lang="en-US" sz="1100" dirty="0"/>
+          </a:p>
+        </p:txBody>
+      </p:sp>
+      <p:sp>
+        <p:nvSpPr>
+          <p:cNvPr id="42" name="Text 40"/>
+          <p:cNvSpPr/>
+          <p:nvPr/>
+        </p:nvSpPr>
+        <p:spPr>
+          <a:xfrm>
+            <a:off x="8961120" y="1810512"/>
+            <a:ext cx="2103120" cy="146304"/>
+          </a:xfrm>
+          <a:prstGeom prst="rect">
+            <a:avLst/>
+          </a:prstGeom>
+          <a:noFill/>
+          <a:ln/>
+        </p:spPr>
+        <p:txBody>
+          <a:bodyPr wrap="square" rtlCol="0" anchor="ctr"/>
+          <a:lstStyle/>
+          <a:p>
+            <a:pPr indent="0" marL="0">
+              <a:buNone/>
+            </a:pPr>
+            <a:r>
+              <a:rPr lang="en-US" sz="800" dirty="0">
+                <a:solidFill>
+                  <a:srgbClr val="4B5563"/>
+                </a:solidFill>
+                <a:latin typeface="Courier New" pitchFamily="34" charset="0"/>
+                <a:ea typeface="Courier New" pitchFamily="34" charset="-122"/>
+                <a:cs typeface="Courier New" pitchFamily="34" charset="-120"/>
+              </a:rPr>
+              <a:t>8×8 Grid · 64 Cores</a:t>
+            </a:r>
+            <a:endParaRPr lang="en-US" sz="800" dirty="0"/>
+          </a:p>
+        </p:txBody>
+      </p:sp>
+      <p:sp>
+        <p:nvSpPr>
+          <p:cNvPr id="43" name="Shape 41"/>
+          <p:cNvSpPr/>
+          <p:nvPr/>
+        </p:nvSpPr>
+        <p:spPr>
+          <a:xfrm>
+            <a:off x="8961120" y="1993392"/>
+            <a:ext cx="2103120" cy="438912"/>
+          </a:xfrm>
+          <a:prstGeom prst="roundRect">
+            <a:avLst>
+              <a:gd name="adj" fmla="val 12500"/>
+            </a:avLst>
+          </a:prstGeom>
+          <a:solidFill>
+            <a:srgbClr val="FFFFFF"/>
+          </a:solidFill>
+          <a:ln w="12700">
+            <a:solidFill>
+              <a:srgbClr val="111827"/>
+            </a:solidFill>
+            <a:prstDash val="solid"/>
+          </a:ln>
+        </p:spPr>
+      </p:sp>
+      <p:sp>
+        <p:nvSpPr>
+          <p:cNvPr id="44" name="Text 42"/>
+          <p:cNvSpPr/>
+          <p:nvPr/>
+        </p:nvSpPr>
+        <p:spPr>
+          <a:xfrm>
+            <a:off x="9006840" y="2011680"/>
+            <a:ext cx="2011680" cy="402336"/>
+          </a:xfrm>
+          <a:prstGeom prst="rect">
+            <a:avLst/>
+          </a:prstGeom>
+          <a:noFill/>
+          <a:ln/>
+        </p:spPr>
+        <p:txBody>
+          <a:bodyPr wrap="square" rtlCol="0" anchor="ctr"/>
+          <a:lstStyle/>
+          <a:p>
+            <a:pPr indent="0" marL="0">
+              <a:buNone/>
+            </a:pPr>
+            <a:r>
+              <a:rPr lang="en-US" sz="800" b="1" dirty="0">
+                <a:solidFill>
+                  <a:srgbClr val="047857"/>
+                </a:solidFill>
+                <a:latin typeface="Courier New" pitchFamily="34" charset="0"/>
+                <a:ea typeface="Courier New" pitchFamily="34" charset="-122"/>
+                <a:cs typeface="Courier New" pitchFamily="34" charset="-120"/>
+              </a:rPr>
+              <a:t>Local Tile L2 Bank:</a:t>
+            </a:r>
+            <a:endParaRPr lang="en-US" sz="800" dirty="0"/>
+          </a:p>
+          <a:p>
+            <a:pPr indent="0" marL="0">
+              <a:buNone/>
+            </a:pPr>
+            <a:r>
+              <a:rPr lang="en-US" sz="800" b="1" dirty="0">
+                <a:solidFill>
+                  <a:srgbClr val="047857"/>
+                </a:solidFill>
+                <a:latin typeface="Courier New" pitchFamily="34" charset="0"/>
+                <a:ea typeface="Courier New" pitchFamily="34" charset="-122"/>
+                <a:cs typeface="Courier New" pitchFamily="34" charset="-120"/>
+              </a:rPr>
+              <a:t>10 cycles (1.0× baseline)</a:t>
+            </a:r>
+            <a:endParaRPr lang="en-US" sz="800" dirty="0"/>
+          </a:p>
+        </p:txBody>
+      </p:sp>
+      <p:sp>
+        <p:nvSpPr>
+          <p:cNvPr id="45" name="Shape 43"/>
+          <p:cNvSpPr/>
+          <p:nvPr/>
+        </p:nvSpPr>
+        <p:spPr>
+          <a:xfrm>
+            <a:off x="8961120" y="2487168"/>
+            <a:ext cx="2103120" cy="530352"/>
+          </a:xfrm>
+          <a:prstGeom prst="roundRect">
+            <a:avLst>
+              <a:gd name="adj" fmla="val 10345"/>
+            </a:avLst>
+          </a:prstGeom>
+          <a:solidFill>
+            <a:srgbClr val="FEE2E2"/>
+          </a:solidFill>
+          <a:ln w="12700">
+            <a:solidFill>
+              <a:srgbClr val="111827"/>
+            </a:solidFill>
+            <a:prstDash val="solid"/>
+          </a:ln>
+        </p:spPr>
+      </p:sp>
+      <p:sp>
+        <p:nvSpPr>
+          <p:cNvPr id="46" name="Text 44"/>
+          <p:cNvSpPr/>
+          <p:nvPr/>
+        </p:nvSpPr>
+        <p:spPr>
+          <a:xfrm>
+            <a:off x="9006840" y="2505456"/>
+            <a:ext cx="2011680" cy="493776"/>
+          </a:xfrm>
+          <a:prstGeom prst="rect">
+            <a:avLst/>
+          </a:prstGeom>
+          <a:noFill/>
+          <a:ln/>
+        </p:spPr>
+        <p:txBody>
+          <a:bodyPr wrap="square" rtlCol="0" anchor="ctr"/>
+          <a:lstStyle/>
+          <a:p>
+            <a:pPr indent="0" marL="0">
+              <a:buNone/>
+            </a:pPr>
+            <a:r>
+              <a:rPr lang="en-US" sz="780" b="1" dirty="0">
+                <a:solidFill>
+                  <a:srgbClr val="B91C1C"/>
+                </a:solidFill>
+                <a:latin typeface="Courier New" pitchFamily="34" charset="0"/>
+                <a:ea typeface="Courier New" pitchFamily="34" charset="-122"/>
+                <a:cs typeface="Courier New" pitchFamily="34" charset="-120"/>
+              </a:rPr>
+              <a:t>Remote Mesh Manhattan Hop:</a:t>
+            </a:r>
+            <a:endParaRPr lang="en-US" sz="780" dirty="0"/>
+          </a:p>
+          <a:p>
+            <a:pPr indent="0" marL="0">
+              <a:buNone/>
+            </a:pPr>
+            <a:r>
+              <a:rPr lang="en-US" sz="780" b="1" dirty="0">
+                <a:solidFill>
+                  <a:srgbClr val="B91C1C"/>
+                </a:solidFill>
+                <a:latin typeface="Courier New" pitchFamily="34" charset="0"/>
+                <a:ea typeface="Courier New" pitchFamily="34" charset="-122"/>
+                <a:cs typeface="Courier New" pitchFamily="34" charset="-120"/>
+              </a:rPr>
+              <a:t>38 + 2·h cycles (Up to 66 cyc / 6.6×)</a:t>
+            </a:r>
+            <a:endParaRPr lang="en-US" sz="780" dirty="0"/>
+          </a:p>
+        </p:txBody>
+      </p:sp>
+      <p:sp>
+        <p:nvSpPr>
+          <p:cNvPr id="47" name="Text 45"/>
+          <p:cNvSpPr/>
+          <p:nvPr/>
+        </p:nvSpPr>
+        <p:spPr>
+          <a:xfrm>
+            <a:off x="8961120" y="3072384"/>
+            <a:ext cx="2103120" cy="822960"/>
+          </a:xfrm>
+          <a:prstGeom prst="rect">
+            <a:avLst/>
+          </a:prstGeom>
+          <a:noFill/>
+          <a:ln/>
+        </p:spPr>
+        <p:txBody>
+          <a:bodyPr wrap="square" rtlCol="0" anchor="ctr"/>
+          <a:lstStyle/>
+          <a:p>
+            <a:pPr indent="0" marL="0">
+              <a:lnSpc>
+                <a:spcPts val="1000"/>
+              </a:lnSpc>
+              <a:buNone/>
+            </a:pPr>
+            <a:r>
+              <a:rPr lang="en-US" sz="750" dirty="0">
+                <a:solidFill>
+                  <a:srgbClr val="374151"/>
+                </a:solidFill>
+                <a:latin typeface="Courier New" pitchFamily="34" charset="0"/>
+                <a:ea typeface="Courier New" pitchFamily="34" charset="-122"/>
+                <a:cs typeface="Courier New" pitchFamily="34" charset="-120"/>
+              </a:rPr>
+              <a:t>• 2D dynamic packet NoC</a:t>
+            </a:r>
+            <a:endParaRPr lang="en-US" sz="750" dirty="0"/>
+          </a:p>
+          <a:p>
+            <a:pPr indent="0" marL="0">
+              <a:lnSpc>
+                <a:spcPts val="1000"/>
+              </a:lnSpc>
+              <a:buNone/>
+            </a:pPr>
+            <a:r>
+              <a:rPr lang="en-US" sz="750" dirty="0">
+                <a:solidFill>
+                  <a:srgbClr val="374151"/>
+                </a:solidFill>
+                <a:latin typeface="Courier New" pitchFamily="34" charset="0"/>
+                <a:ea typeface="Courier New" pitchFamily="34" charset="-122"/>
+                <a:cs typeface="Courier New" pitchFamily="34" charset="-120"/>
+              </a:rPr>
+              <a:t>• 3 networks (UDI, IDN, MDN)</a:t>
+            </a:r>
+            <a:endParaRPr lang="en-US" sz="750" dirty="0"/>
+          </a:p>
+          <a:p>
+            <a:pPr indent="0" marL="0">
+              <a:lnSpc>
+                <a:spcPts val="1000"/>
+              </a:lnSpc>
+              <a:buNone/>
+            </a:pPr>
+            <a:r>
+              <a:rPr lang="en-US" sz="750" dirty="0">
+                <a:solidFill>
+                  <a:srgbClr val="374151"/>
+                </a:solidFill>
+                <a:latin typeface="Courier New" pitchFamily="34" charset="0"/>
+                <a:ea typeface="Courier New" pitchFamily="34" charset="-122"/>
+                <a:cs typeface="Courier New" pitchFamily="34" charset="-120"/>
+              </a:rPr>
+              <a:t>• Distributed shared L2 homing</a:t>
+            </a:r>
+            <a:endParaRPr lang="en-US" sz="750" dirty="0"/>
+          </a:p>
+          <a:p>
+            <a:pPr indent="0" marL="0">
+              <a:lnSpc>
+                <a:spcPts val="1000"/>
+              </a:lnSpc>
+              <a:buNone/>
+            </a:pPr>
+            <a:r>
+              <a:rPr lang="en-US" sz="750" dirty="0">
+                <a:solidFill>
+                  <a:srgbClr val="374151"/>
+                </a:solidFill>
+                <a:latin typeface="Courier New" pitchFamily="34" charset="0"/>
+                <a:ea typeface="Courier New" pitchFamily="34" charset="-122"/>
+                <a:cs typeface="Courier New" pitchFamily="34" charset="-120"/>
+              </a:rPr>
+              <a:t>• Center bisection contention</a:t>
+            </a:r>
+            <a:endParaRPr lang="en-US" sz="750" dirty="0"/>
+          </a:p>
+        </p:txBody>
+      </p:sp>
+      <p:sp>
+        <p:nvSpPr>
+          <p:cNvPr id="48" name="Shape 46"/>
+          <p:cNvSpPr/>
+          <p:nvPr/>
+        </p:nvSpPr>
+        <p:spPr>
+          <a:xfrm>
+            <a:off x="6446520" y="4069080"/>
+            <a:ext cx="4709160" cy="1417320"/>
+          </a:xfrm>
+          <a:prstGeom prst="roundRect">
+            <a:avLst>
+              <a:gd name="adj" fmla="val 6452"/>
+            </a:avLst>
+          </a:prstGeom>
+          <a:solidFill>
+            <a:srgbClr val="0F172A"/>
+          </a:solidFill>
+          <a:ln w="19050">
+            <a:solidFill>
+              <a:srgbClr val="111827"/>
+            </a:solidFill>
+            <a:prstDash val="solid"/>
+          </a:ln>
+        </p:spPr>
+      </p:sp>
+      <p:sp>
+        <p:nvSpPr>
+          <p:cNvPr id="49" name="Text 47"/>
+          <p:cNvSpPr/>
+          <p:nvPr/>
+        </p:nvSpPr>
+        <p:spPr>
+          <a:xfrm>
+            <a:off x="6537960" y="4114800"/>
+            <a:ext cx="4526280" cy="1325880"/>
+          </a:xfrm>
+          <a:prstGeom prst="rect">
+            <a:avLst/>
+          </a:prstGeom>
+          <a:noFill/>
+          <a:ln/>
+        </p:spPr>
+        <p:txBody>
+          <a:bodyPr wrap="square" rtlCol="0" anchor="ctr"/>
+          <a:lstStyle/>
+          <a:p>
+            <a:pPr indent="0" marL="0">
+              <a:buNone/>
+            </a:pPr>
+            <a:r>
+              <a:rPr lang="en-US" sz="800" dirty="0">
+                <a:solidFill>
+                  <a:srgbClr val="94A3B8"/>
+                </a:solidFill>
+                <a:latin typeface="Courier New" pitchFamily="34" charset="0"/>
+                <a:ea typeface="Courier New" pitchFamily="34" charset="-122"/>
+                <a:cs typeface="Courier New" pitchFamily="34" charset="-120"/>
+              </a:rPr>
+              <a:t>// The Locality vs Load Balance Fundamental Conflict:
+</a:t>
+            </a:r>
+            <a:pPr indent="0" marL="0">
+              <a:buNone/>
+            </a:pPr>
+            <a:r>
+              <a:rPr lang="en-US" sz="850" b="1" dirty="0">
+                <a:solidFill>
+                  <a:srgbClr val="FFD147"/>
+                </a:solidFill>
+                <a:latin typeface="Courier New" pitchFamily="34" charset="0"/>
+                <a:ea typeface="Courier New" pitchFamily="34" charset="-122"/>
+                <a:cs typeface="Courier New" pitchFamily="34" charset="-120"/>
+              </a:rPr>
+              <a:t>cost(Task, Target) = Σ (Footprint[i] / LineSize) × Latency(Target, i)
+</a:t>
+            </a:r>
+            <a:pPr indent="0" marL="0">
+              <a:buNone/>
+            </a:pPr>
+            <a:r>
+              <a:rPr lang="en-US" sz="800" dirty="0">
+                <a:solidFill>
+                  <a:srgbClr val="38BDF8"/>
+                </a:solidFill>
+                <a:latin typeface="Courier New" pitchFamily="34" charset="0"/>
+                <a:ea typeface="Courier New" pitchFamily="34" charset="-122"/>
+                <a:cs typeface="Courier New" pitchFamily="34" charset="-120"/>
+              </a:rPr>
+              <a:t>• Pure Locality Dealing: Cuts comm stalls by up to 80% (Map: 6.67M -&gt; 1.31M cyc)
+</a:t>
+            </a:r>
+            <a:pPr indent="0" marL="0">
+              <a:buNone/>
+            </a:pPr>
+            <a:r>
+              <a:rPr lang="en-US" sz="800" dirty="0">
+                <a:solidFill>
+                  <a:srgbClr val="CBD5E1"/>
+                </a:solidFill>
+                <a:latin typeface="Courier New" pitchFamily="34" charset="0"/>
+                <a:ea typeface="Courier New" pitchFamily="34" charset="-122"/>
+                <a:cs typeface="Courier New" pitchFamily="34" charset="-120"/>
+              </a:rPr>
+              <a:t>• Naive Work-Stealing:   Wipes out cache affinity with 4x-6x bus penalty
+</a:t>
+            </a:r>
+            <a:pPr indent="0" marL="0">
+              <a:buNone/>
+            </a:pPr>
+            <a:r>
+              <a:rPr lang="en-US" sz="800" b="1" dirty="0">
+                <a:solidFill>
+                  <a:srgbClr val="F87171"/>
+                </a:solidFill>
+                <a:latin typeface="Courier New" pitchFamily="34" charset="0"/>
+                <a:ea typeface="Courier New" pitchFamily="34" charset="-122"/>
+                <a:cs typeface="Courier New" pitchFamily="34" charset="-120"/>
+              </a:rPr>
+              <a:t>• The SparseLU Paradox:  Dealing ignores backlog -&gt; 23 idle cores (+15.1% loss!)
+</a:t>
+            </a:r>
+            <a:pPr indent="0" marL="0">
+              <a:buNone/>
+            </a:pPr>
+            <a:r>
+              <a:rPr lang="en-US" sz="800" b="1" dirty="0">
+                <a:solidFill>
+                  <a:srgbClr val="4ADE80"/>
+                </a:solidFill>
+                <a:latin typeface="Courier New" pitchFamily="34" charset="0"/>
+                <a:ea typeface="Courier New" pitchFamily="34" charset="-122"/>
+                <a:cs typeface="Courier New" pitchFamily="34" charset="-120"/>
+              </a:rPr>
+              <a:t>• The NOVA Solution:     Dynamic co-scheduling balances locality with queue backlog</a:t>
+            </a:r>
+            <a:endParaRPr lang="en-US" sz="800" dirty="0"/>
+          </a:p>
+        </p:txBody>
+      </p:sp>
+      <p:sp>
+        <p:nvSpPr>
+          <p:cNvPr id="50" name="Shape 48"/>
+          <p:cNvSpPr/>
+          <p:nvPr/>
+        </p:nvSpPr>
+        <p:spPr>
+          <a:xfrm>
+            <a:off x="777240" y="5760720"/>
+            <a:ext cx="10744200" cy="502920"/>
+          </a:xfrm>
+          <a:prstGeom prst="roundRect">
+            <a:avLst>
+              <a:gd name="adj" fmla="val 18182"/>
+            </a:avLst>
+          </a:prstGeom>
+          <a:solidFill>
+            <a:srgbClr val="111827"/>
+          </a:solidFill>
+          <a:ln w="12700">
+            <a:solidFill>
+              <a:srgbClr val="111827"/>
+            </a:solidFill>
+            <a:prstDash val="solid"/>
+          </a:ln>
+        </p:spPr>
+      </p:sp>
+      <p:sp>
+        <p:nvSpPr>
+          <p:cNvPr id="51" name="Shape 49"/>
+          <p:cNvSpPr/>
+          <p:nvPr/>
+        </p:nvSpPr>
+        <p:spPr>
+          <a:xfrm>
+            <a:off x="731520" y="5715000"/>
+            <a:ext cx="10744200" cy="502920"/>
+          </a:xfrm>
+          <a:prstGeom prst="roundRect">
+            <a:avLst>
+              <a:gd name="adj" fmla="val 18182"/>
+            </a:avLst>
+          </a:prstGeom>
+          <a:solidFill>
+            <a:srgbClr val="FFD147"/>
+          </a:solidFill>
+          <a:ln w="19050">
+            <a:solidFill>
+              <a:srgbClr val="111827"/>
+            </a:solidFill>
+            <a:prstDash val="solid"/>
+          </a:ln>
+        </p:spPr>
+      </p:sp>
+      <p:sp>
+        <p:nvSpPr>
+          <p:cNvPr id="52" name="Text 50"/>
+          <p:cNvSpPr/>
+          <p:nvPr/>
+        </p:nvSpPr>
+        <p:spPr>
+          <a:xfrm>
+            <a:off x="914400" y="5715000"/>
+            <a:ext cx="10378440" cy="502920"/>
+          </a:xfrm>
+          <a:prstGeom prst="rect">
+            <a:avLst/>
+          </a:prstGeom>
+          <a:noFill/>
+          <a:ln/>
+        </p:spPr>
+        <p:txBody>
+          <a:bodyPr wrap="square" rtlCol="0" anchor="ctr"/>
+          <a:lstStyle/>
+          <a:p>
+            <a:pPr indent="0" marL="0">
+              <a:buNone/>
+            </a:pPr>
+            <a:r>
+              <a:rPr lang="en-US" sz="1100" b="1" dirty="0">
+                <a:solidFill>
+                  <a:srgbClr val="111827"/>
+                </a:solidFill>
+                <a:latin typeface="Arial Black" pitchFamily="34" charset="0"/>
+                <a:ea typeface="Arial Black" pitchFamily="34" charset="-122"/>
+                <a:cs typeface="Arial Black" pitchFamily="34" charset="-120"/>
+              </a:rPr>
+              <a:t>Executive Summary: </a:t>
+            </a:r>
+            <a:pPr indent="0" marL="0">
+              <a:buNone/>
+            </a:pPr>
+            <a:r>
+              <a:rPr lang="en-US" sz="1050" dirty="0">
+                <a:solidFill>
+                  <a:srgbClr val="111827"/>
+                </a:solidFill>
+                <a:latin typeface="Arial" pitchFamily="34" charset="0"/>
+                <a:ea typeface="Arial" pitchFamily="34" charset="-122"/>
+                <a:cs typeface="Arial" pitchFamily="34" charset="-120"/>
+              </a:rPr>
+              <a:t>Pure locality scheduling cuts communication stalls by up to 80%, but causes severe core starvation on irregular graphs (+15.1% loss). NOVA resolves this trade-off.</a:t>
+            </a:r>
+            <a:endParaRPr lang="en-US" sz="1100" dirty="0"/>
+          </a:p>
+        </p:txBody>
+      </p:sp>
+      <p:sp>
+        <p:nvSpPr>
+          <p:cNvPr id="53" name="Text 51"/>
+          <p:cNvSpPr/>
+          <p:nvPr/>
+        </p:nvSpPr>
+        <p:spPr>
+          <a:xfrm>
+            <a:off x="731520" y="6355080"/>
+            <a:ext cx="8229600" cy="320040"/>
+          </a:xfrm>
+          <a:prstGeom prst="rect">
+            <a:avLst/>
+          </a:prstGeom>
+          <a:noFill/>
+          <a:ln/>
+        </p:spPr>
+        <p:txBody>
+          <a:bodyPr wrap="square" rtlCol="0" anchor="ctr"/>
+          <a:lstStyle/>
+          <a:p>
+            <a:pPr indent="0" marL="0">
+              <a:buNone/>
+            </a:pPr>
+            <a:r>
+              <a:rPr lang="en-US" sz="950" dirty="0">
+                <a:solidFill>
+                  <a:srgbClr val="4B5563"/>
+                </a:solidFill>
+                <a:latin typeface="Courier New" pitchFamily="34" charset="0"/>
+                <a:ea typeface="Courier New" pitchFamily="34" charset="-122"/>
+                <a:cs typeface="Courier New" pitchFamily="34" charset="-120"/>
+              </a:rPr>
+              <a:t>Locality-Aware Task Scheduling on Heterogeneous HPC Architectures</a:t>
+            </a:r>
+            <a:endParaRPr lang="en-US" sz="950" dirty="0"/>
+          </a:p>
+        </p:txBody>
+      </p:sp>
+      <p:sp>
+        <p:nvSpPr>
+          <p:cNvPr id="54" name="Text 52"/>
+          <p:cNvSpPr/>
+          <p:nvPr/>
+        </p:nvSpPr>
+        <p:spPr>
+          <a:xfrm>
+            <a:off x="10058400" y="6355080"/>
+            <a:ext cx="1399032" cy="320040"/>
+          </a:xfrm>
+          <a:prstGeom prst="rect">
+            <a:avLst/>
+          </a:prstGeom>
+          <a:noFill/>
+          <a:ln/>
+        </p:spPr>
+        <p:txBody>
+          <a:bodyPr wrap="square" rtlCol="0" anchor="ctr"/>
+          <a:lstStyle/>
+          <a:p>
+            <a:pPr algn="r" indent="0" marL="0">
+              <a:buNone/>
+            </a:pPr>
+            <a:r>
+              <a:rPr lang="en-US" sz="950" dirty="0">
+                <a:solidFill>
+                  <a:srgbClr val="4B5563"/>
+                </a:solidFill>
+                <a:latin typeface="Courier New" pitchFamily="34" charset="0"/>
+                <a:ea typeface="Courier New" pitchFamily="34" charset="-122"/>
+                <a:cs typeface="Courier New" pitchFamily="34" charset="-120"/>
+              </a:rPr>
+              <a:t>01 / 06</a:t>
+            </a:r>
+            <a:endParaRPr lang="en-US" sz="950" dirty="0"/>
+          </a:p>
+        </p:txBody>
+      </p:sp>
+    </p:spTree>
+  </p:cSld>
+  <p:clrMapOvr>
+    <a:masterClrMapping/>
+  </p:clrMapOvr>
+</p:sld>
 </file>
 
-<file path=ppt/slides/slide2.xml><?xml version="1.0" encoding="UTF-8" standalone="yes"?>
-<p:sld xmlns:a="http://schemas.openxmlformats.org/drawingml/2006/main" xmlns:r="http://schemas.openxmlformats.org/officeDocument/2006/relationships" xmlns:p="http://schemas.openxmlformats.org/presentationml/2006/main"><p:cSld name="Slide 2"><p:spTree><p:nvGrpSpPr><p:cNvPr id="1" name=""/><p:cNvGrpSpPr/><p:nvPr/></p:nvGrpSpPr><p:grpSpPr><a:xfrm><a:off x="0" y="0"/><a:ext cx="0" cy="0"/><a:chOff x="0" y="0"/><a:chExt cx="0" cy="0"/></a:xfrm></p:grpSpPr><p:sp><p:nvSpPr><p:cNvPr id="2" name="Shape 0"></p:cNvPr><p:cNvSpPr/><p:nvPr></p:nvPr></p:nvSpPr><p:spPr><a:xfrm><a:off x="0" y="0"/><a:ext cx="12191695" cy="6858000"/></a:xfrm><a:prstGeom prst="rect"><a:avLst></a:avLst></a:prstGeom><a:solidFill><a:srgbClr val="F4F0EA"/></a:solidFill><a:ln w="12700"><a:solidFill><a:srgbClr val="F4F0EA"/></a:solidFill><a:prstDash val="solid"/></a:ln></p:spPr></p:sp><p:sp><p:nvSpPr><p:cNvPr id="3" name="Shape 1"></p:cNvPr><p:cNvSpPr/><p:nvPr></p:nvPr></p:nvSpPr><p:spPr><a:xfrm><a:off x="960120" y="0"/><a:ext cx="9144" cy="6858000"/></a:xfrm><a:prstGeom prst="rect"><a:avLst></a:avLst></a:prstGeom><a:solidFill><a:srgbClr val="DDD8CF"/></a:solidFill><a:ln w="12700"><a:solidFill><a:srgbClr val="DDD8CF"/></a:solidFill><a:prstDash val="solid"/></a:ln></p:spPr></p:sp><p:sp><p:nvSpPr><p:cNvPr id="4" name="Shape 2"></p:cNvPr><p:cNvSpPr/><p:nvPr></p:nvPr></p:nvSpPr><p:spPr><a:xfrm><a:off x="1920240" y="0"/><a:ext cx="9144" cy="6858000"/></a:xfrm><a:prstGeom prst="rect"><a:avLst></a:avLst></a:prstGeom><a:solidFill><a:srgbClr val="DDD8CF"/></a:solidFill><a:ln w="12700"><a:solidFill><a:srgbClr val="DDD8CF"/></a:solidFill><a:prstDash val="solid"/></a:ln></p:spPr></p:sp><p:sp><p:nvSpPr><p:cNvPr id="5" name="Shape 3"></p:cNvPr><p:cNvSpPr/><p:nvPr></p:nvPr></p:nvSpPr><p:spPr><a:xfrm><a:off x="2880360" y="0"/><a:ext cx="9144" cy="6858000"/></a:xfrm><a:prstGeom prst="rect"><a:avLst></a:avLst></a:prstGeom><a:solidFill><a:srgbClr val="DDD8CF"/></a:solidFill><a:ln w="12700"><a:solidFill><a:srgbClr val="DDD8CF"/></a:solidFill><a:prstDash val="solid"/></a:ln></p:spPr></p:sp><p:sp><p:nvSpPr><p:cNvPr id="6" name="Shape 4"></p:cNvPr><p:cNvSpPr/><p:nvPr></p:nvPr></p:nvSpPr><p:spPr><a:xfrm><a:off x="3840480" y="0"/><a:ext cx="9144" cy="6858000"/></a:xfrm><a:prstGeom prst="rect"><a:avLst></a:avLst></a:prstGeom><a:solidFill><a:srgbClr val="DDD8CF"/></a:solidFill><a:ln w="12700"><a:solidFill><a:srgbClr val="DDD8CF"/></a:solidFill><a:prstDash val="solid"/></a:ln></p:spPr></p:sp><p:sp><p:nvSpPr><p:cNvPr id="7" name="Shape 5"></p:cNvPr><p:cNvSpPr/><p:nvPr></p:nvPr></p:nvSpPr><p:spPr><a:xfrm><a:off x="4800600" y="0"/><a:ext cx="9144" cy="6858000"/></a:xfrm><a:prstGeom prst="rect"><a:avLst></a:avLst></a:prstGeom><a:solidFill><a:srgbClr val="DDD8CF"/></a:solidFill><a:ln w="12700"><a:solidFill><a:srgbClr val="DDD8CF"/></a:solidFill><a:prstDash val="solid"/></a:ln></p:spPr></p:sp><p:sp><p:nvSpPr><p:cNvPr id="8" name="Shape 6"></p:cNvPr><p:cNvSpPr/><p:nvPr></p:nvPr></p:nvSpPr><p:spPr><a:xfrm><a:off x="5760720" y="0"/><a:ext cx="9144" cy="6858000"/></a:xfrm><a:prstGeom prst="rect"><a:avLst></a:avLst></a:prstGeom><a:solidFill><a:srgbClr val="DDD8CF"/></a:solidFill><a:ln w="12700"><a:solidFill><a:srgbClr val="DDD8CF"/></a:solidFill><a:prstDash val="solid"/></a:ln></p:spPr></p:sp><p:sp><p:nvSpPr><p:cNvPr id="9" name="Shape 7"></p:cNvPr><p:cNvSpPr/><p:nvPr></p:nvPr></p:nvSpPr><p:spPr><a:xfrm><a:off x="6720840" y="0"/><a:ext cx="9144" cy="6858000"/></a:xfrm><a:prstGeom prst="rect"><a:avLst></a:avLst></a:prstGeom><a:solidFill><a:srgbClr val="DDD8CF"/></a:solidFill><a:ln w="12700"><a:solidFill><a:srgbClr val="DDD8CF"/></a:solidFill><a:prstDash val="solid"/></a:ln></p:spPr></p:sp><p:sp><p:nvSpPr><p:cNvPr id="10" name="Shape 8"></p:cNvPr><p:cNvSpPr/><p:nvPr></p:nvPr></p:nvSpPr><p:spPr><a:xfrm><a:off x="7680960" y="0"/><a:ext cx="9144" cy="6858000"/></a:xfrm><a:prstGeom prst="rect"><a:avLst></a:avLst></a:prstGeom><a:solidFill><a:srgbClr val="DDD8CF"/></a:solidFill><a:ln w="12700"><a:solidFill><a:srgbClr val="DDD8CF"/></a:solidFill><a:prstDash val="solid"/></a:ln></p:spPr></p:sp><p:sp><p:nvSpPr><p:cNvPr id="11" name="Shape 9"></p:cNvPr><p:cNvSpPr/><p:nvPr></p:nvPr></p:nvSpPr><p:spPr><a:xfrm><a:off x="8641080" y="0"/><a:ext cx="9144" cy="6858000"/></a:xfrm><a:prstGeom prst="rect"><a:avLst></a:avLst></a:prstGeom><a:solidFill><a:srgbClr val="DDD8CF"/></a:solidFill><a:ln w="12700"><a:solidFill><a:srgbClr val="DDD8CF"/></a:solidFill><a:prstDash val="solid"/></a:ln></p:spPr></p:sp><p:sp><p:nvSpPr><p:cNvPr id="12" name="Shape 10"></p:cNvPr><p:cNvSpPr/><p:nvPr></p:nvPr></p:nvSpPr><p:spPr><a:xfrm><a:off x="9601200" y="0"/><a:ext cx="9144" cy="6858000"/></a:xfrm><a:prstGeom prst="rect"><a:avLst></a:avLst></a:prstGeom><a:solidFill><a:srgbClr val="DDD8CF"/></a:solidFill><a:ln w="12700"><a:solidFill><a:srgbClr val="DDD8CF"/></a:solidFill><a:prstDash val="solid"/></a:ln></p:spPr></p:sp><p:sp><p:nvSpPr><p:cNvPr id="13" name="Shape 11"></p:cNvPr><p:cNvSpPr/><p:nvPr></p:nvPr></p:nvSpPr><p:spPr><a:xfrm><a:off x="10561320" y="0"/><a:ext cx="9144" cy="6858000"/></a:xfrm><a:prstGeom prst="rect"><a:avLst></a:avLst></a:prstGeom><a:solidFill><a:srgbClr val="DDD8CF"/></a:solidFill><a:ln w="12700"><a:solidFill><a:srgbClr val="DDD8CF"/></a:solidFill><a:prstDash val="solid"/></a:ln></p:spPr></p:sp><p:sp><p:nvSpPr><p:cNvPr id="14" name="Shape 12"></p:cNvPr><p:cNvSpPr/><p:nvPr></p:nvPr></p:nvSpPr><p:spPr><a:xfrm><a:off x="0" y="960120"/><a:ext cx="12191695" cy="9144"/></a:xfrm><a:prstGeom prst="rect"><a:avLst></a:avLst></a:prstGeom><a:solidFill><a:srgbClr val="DDD8CF"/></a:solidFill><a:ln w="12700"><a:solidFill><a:srgbClr val="DDD8CF"/></a:solidFill><a:prstDash val="solid"/></a:ln></p:spPr></p:sp><p:sp><p:nvSpPr><p:cNvPr id="15" name="Shape 13"></p:cNvPr><p:cNvSpPr/><p:nvPr></p:nvPr></p:nvSpPr><p:spPr><a:xfrm><a:off x="0" y="1920240"/><a:ext cx="12191695" cy="9144"/></a:xfrm><a:prstGeom prst="rect"><a:avLst></a:avLst></a:prstGeom><a:solidFill><a:srgbClr val="DDD8CF"/></a:solidFill><a:ln w="12700"><a:solidFill><a:srgbClr val="DDD8CF"/></a:solidFill><a:prstDash val="solid"/></a:ln></p:spPr></p:sp><p:sp><p:nvSpPr><p:cNvPr id="16" name="Shape 14"></p:cNvPr><p:cNvSpPr/><p:nvPr></p:nvPr></p:nvSpPr><p:spPr><a:xfrm><a:off x="0" y="2880360"/><a:ext cx="12191695" cy="9144"/></a:xfrm><a:prstGeom prst="rect"><a:avLst></a:avLst></a:prstGeom><a:solidFill><a:srgbClr val="DDD8CF"/></a:solidFill><a:ln w="12700"><a:solidFill><a:srgbClr val="DDD8CF"/></a:solidFill><a:prstDash val="solid"/></a:ln></p:spPr></p:sp><p:sp><p:nvSpPr><p:cNvPr id="17" name="Shape 15"></p:cNvPr><p:cNvSpPr/><p:nvPr></p:nvPr></p:nvSpPr><p:spPr><a:xfrm><a:off x="0" y="3840480"/><a:ext cx="12191695" cy="9144"/></a:xfrm><a:prstGeom prst="rect"><a:avLst></a:avLst></a:prstGeom><a:solidFill><a:srgbClr val="DDD8CF"/></a:solidFill><a:ln w="12700"><a:solidFill><a:srgbClr val="DDD8CF"/></a:solidFill><a:prstDash val="solid"/></a:ln></p:spPr></p:sp><p:sp><p:nvSpPr><p:cNvPr id="18" name="Shape 16"></p:cNvPr><p:cNvSpPr/><p:nvPr></p:nvPr></p:nvSpPr><p:spPr><a:xfrm><a:off x="0" y="4800600"/><a:ext cx="12191695" cy="9144"/></a:xfrm><a:prstGeom prst="rect"><a:avLst></a:avLst></a:prstGeom><a:solidFill><a:srgbClr val="DDD8CF"/></a:solidFill><a:ln w="12700"><a:solidFill><a:srgbClr val="DDD8CF"/></a:solidFill><a:prstDash val="solid"/></a:ln></p:spPr></p:sp><p:sp><p:nvSpPr><p:cNvPr id="19" name="Shape 17"></p:cNvPr><p:cNvSpPr/><p:nvPr></p:nvPr></p:nvSpPr><p:spPr><a:xfrm><a:off x="0" y="5760720"/><a:ext cx="12191695" cy="9144"/></a:xfrm><a:prstGeom prst="rect"><a:avLst></a:avLst></a:prstGeom><a:solidFill><a:srgbClr val="DDD8CF"/></a:solidFill><a:ln w="12700"><a:solidFill><a:srgbClr val="DDD8CF"/></a:solidFill><a:prstDash val="solid"/></a:ln></p:spPr></p:sp><p:sp><p:nvSpPr><p:cNvPr id="20" name="Shape 18"></p:cNvPr><p:cNvSpPr/><p:nvPr></p:nvPr></p:nvSpPr><p:spPr><a:xfrm><a:off x="411480" y="320040"/><a:ext cx="2377440" cy="292608"/></a:xfrm><a:prstGeom prst="roundRect"><a:avLst><a:gd name="adj" fmla="val 50000"/></a:avLst></a:prstGeom><a:solidFill><a:srgbClr val="111827"/></a:solidFill><a:ln w="12700"><a:solidFill><a:srgbClr val="111827"/></a:solidFill><a:prstDash val="solid"/></a:ln></p:spPr></p:sp><p:sp><p:nvSpPr><p:cNvPr id="21" name="Text 19"></p:cNvPr><p:cNvSpPr/><p:nvPr></p:nvPr></p:nvSpPr><p:spPr><a:xfrm><a:off x="502920" y="320040"/><a:ext cx="2194560" cy="292608"/></a:xfrm><a:prstGeom prst="rect"><a:avLst></a:avLst></a:prstGeom><a:noFill/><a:ln></a:ln></p:spPr><p:txBody><a:bodyPr wrap="square" rtlCol="0" anchor="ctr"></a:bodyPr><a:lstStyle/><a:p><a:pPr indent="0" marL="0"><a:buNone/></a:pPr><a:r><a:rPr lang="en-US" sz="900" b="1" spc="200" kern="0" dirty="0"><a:solidFill><a:srgbClr val="FFD147"/></a:solidFill><a:latin typeface=""JetBrains Mono", "Courier New", monospace" pitchFamily="34" charset="0"/><a:ea typeface=""JetBrains Mono", "Courier New", monospace" pitchFamily="34" charset="-122"/><a:cs typeface=""JetBrains Mono", "Courier New", monospace" pitchFamily="34" charset="-120"/></a:rPr><a:t>PART 01</a:t></a:r><a:endParaRPr lang="en-US" sz="900" dirty="0"/></a:p></p:txBody></p:sp><p:sp><p:nvSpPr><p:cNvPr id="22" name="Text 20"></p:cNvPr><p:cNvSpPr/><p:nvPr></p:nvPr></p:nvSpPr><p:spPr><a:xfrm><a:off x="411480" y="822960"/><a:ext cx="10972800" cy="822960"/></a:xfrm><a:prstGeom prst="rect"><a:avLst></a:avLst></a:prstGeom><a:noFill/><a:ln></a:ln></p:spPr><p:txBody><a:bodyPr wrap="square" rtlCol="0" anchor="ctr"></a:bodyPr><a:lstStyle/><a:p><a:pPr indent="0" marL="0"><a:buNone/></a:pPr><a:r><a:rPr lang="en-US" sz="4800" b="1" spc="-300" kern="0" dirty="0"><a:solidFill><a:srgbClr val="111827"/></a:solidFill><a:latin typeface="Arial Black, "Trebuchet MS", "Helvetica Neue", sans-serif" pitchFamily="34" charset="0"/><a:ea typeface="Arial Black, "Trebuchet MS", "Helvetica Neue", sans-serif" pitchFamily="34" charset="-122"/><a:cs typeface="Arial Black, "Trebuchet MS", "Helvetica Neue", sans-serif" pitchFamily="34" charset="-120"/></a:rPr><a:t>Two Memory Models,</a:t></a:r><a:endParaRPr lang="en-US" sz="4800" dirty="0"/></a:p></p:txBody></p:sp><p:sp><p:nvSpPr><p:cNvPr id="23" name="Shape 21"></p:cNvPr><p:cNvSpPr/><p:nvPr></p:nvPr></p:nvSpPr><p:spPr><a:xfrm><a:off x="5394960" y="1554480"/><a:ext cx="6035040" cy="640080"/></a:xfrm><a:prstGeom prst="roundRect"><a:avLst><a:gd name="adj" fmla="val 14286"/></a:avLst></a:prstGeom><a:solidFill><a:srgbClr val="FFD147"/></a:solidFill><a:ln w="31750"><a:solidFill><a:srgbClr val="111827"/></a:solidFill><a:prstDash val="solid"/></a:ln></p:spPr></p:sp><p:sp><p:nvSpPr><p:cNvPr id="24" name="Text 22"></p:cNvPr><p:cNvSpPr/><p:nvPr></p:nvPr></p:nvSpPr><p:spPr><a:xfrm><a:off x="5486400" y="1600200"/><a:ext cx="5852160" cy="548640"/></a:xfrm><a:prstGeom prst="rect"><a:avLst></a:avLst></a:prstGeom><a:noFill/><a:ln></a:ln></p:spPr><p:txBody><a:bodyPr wrap="square" rtlCol="0" anchor="ctr"></a:bodyPr><a:lstStyle/><a:p><a:pPr indent="0" marL="0"><a:buNone/></a:pPr><a:r><a:rPr lang="en-US" sz="3600" b="1" spc="-200" kern="0" dirty="0"><a:solidFill><a:srgbClr val="111827"/></a:solidFill><a:latin typeface="Arial Black, "Trebuchet MS", "Helvetica Neue", sans-serif" pitchFamily="34" charset="0"/><a:ea typeface="Arial Black, "Trebuchet MS", "Helvetica Neue", sans-serif" pitchFamily="34" charset="-122"/><a:cs typeface="Arial Black, "Trebuchet MS", "Helvetica Neue", sans-serif" pitchFamily="34" charset="-120"/></a:rPr><a:t>Two Latency Cliffs</a:t></a:r><a:endParaRPr lang="en-US" sz="3600" dirty="0"/></a:p></p:txBody></p:sp><p:sp><p:nvSpPr><p:cNvPr id="25" name="Text 23"></p:cNvPr><p:cNvSpPr/><p:nvPr></p:nvPr></p:nvSpPr><p:spPr><a:xfrm><a:off x="411480" y="2377440"/><a:ext cx="10972800" cy="365760"/></a:xfrm><a:prstGeom prst="rect"><a:avLst></a:avLst></a:prstGeom><a:noFill/><a:ln></a:ln></p:spPr><p:txBody><a:bodyPr wrap="square" rtlCol="0" anchor="ctr"></a:bodyPr><a:lstStyle/><a:p><a:pPr indent="0" marL="0"><a:buNone/></a:pPr><a:r><a:rPr lang="en-US" sz="1400" i="1" dirty="0"><a:solidFill><a:srgbClr val="4B5563"/></a:solidFill><a:latin typeface="Inter, "Segoe UI", sans-serif" pitchFamily="34" charset="0"/><a:ea typeface="Inter, "Segoe UI", sans-serif" pitchFamily="34" charset="-122"/><a:cs typeface="Inter, "Segoe UI", sans-serif" pitchFamily="34" charset="-120"/></a:rPr><a:t>Discrete socket memory hierarchies vs. distributed shared L2 cache on an 8×8 mesh</a:t></a:r><a:endParaRPr lang="en-US" sz="1400" dirty="0"/></a:p></p:txBody></p:sp><p:sp><p:nvSpPr><p:cNvPr id="26" name="Shape 24"></p:cNvPr><p:cNvSpPr/><p:nvPr></p:nvPr></p:nvSpPr><p:spPr><a:xfrm><a:off x="411480" y="2880360"/><a:ext cx="5394960" cy="3108960"/></a:xfrm><a:prstGeom prst="roundRect"><a:avLst><a:gd name="adj" fmla="val 2353"/></a:avLst></a:prstGeom><a:solidFill><a:srgbClr val="F4F0EA"/></a:solidFill><a:ln w="31750"><a:solidFill><a:srgbClr val="111827"/></a:solidFill><a:prstDash val="solid"/></a:ln><a:effectLst> <a:outerShdw sx="100000" sy="100000" kx="0" ky="0" algn="bl" rotWithShape="0" blurRad="50800" dist="50800" dir="16200000"> <a:srgbClr val="C8C6BF"> <a:alpha val="75000"/></a:srgbClr> </a:outerShdw></a:effectLst></p:spPr></p:sp><p:sp><p:nvSpPr><p:cNvPr id="27" name="Text 25"></p:cNvPr><p:cNvSpPr/><p:nvPr></p:nvPr></p:nvSpPr><p:spPr><a:xfrm><a:off x="685800" y="3017520"/><a:ext cx="4846320" cy="365760"/></a:xfrm><a:prstGeom prst="rect"><a:avLst></a:avLst></a:prstGeom><a:noFill/><a:ln></a:ln></p:spPr><p:txBody><a:bodyPr wrap="square" rtlCol="0" anchor="ctr"></a:bodyPr><a:lstStyle/><a:p><a:pPr indent="0" marL="0"><a:buNone/></a:pPr><a:r><a:rPr lang="en-US" sz="2000" b="1" dirty="0"><a:solidFill><a:srgbClr val="111827"/></a:solidFill><a:latin typeface="Arial Black, "Trebuchet MS", "Helvetica Neue", sans-serif" pitchFamily="34" charset="0"/><a:ea typeface="Arial Black, "Trebuchet MS", "Helvetica Neue", sans-serif" pitchFamily="34" charset="-122"/><a:cs typeface="Arial Black, "Trebuchet MS", "Helvetica Neue", sans-serif" pitchFamily="34" charset="-120"/></a:rPr><a:t>AMD Opteron 8-Node NUMA</a:t></a:r><a:endParaRPr lang="en-US" sz="2000" dirty="0"/></a:p></p:txBody></p:sp><p:sp><p:nvSpPr><p:cNvPr id="28" name="Text 26"></p:cNvPr><p:cNvSpPr/><p:nvPr></p:nvPr></p:nvSpPr><p:spPr><a:xfrm><a:off x="685800" y="3429000"/><a:ext cx="4846320" cy="274320"/></a:xfrm><a:prstGeom prst="rect"><a:avLst></a:avLst></a:prstGeom><a:noFill/><a:ln></a:ln></p:spPr><p:txBody><a:bodyPr wrap="square" rtlCol="0" anchor="ctr"></a:bodyPr><a:lstStyle/><a:p><a:pPr indent="0" marL="0"><a:buNone/></a:pPr><a:r><a:rPr lang="en-US" sz="1100" dirty="0"><a:solidFill><a:srgbClr val="374151"/></a:solidFill><a:latin typeface="Inter, "Segoe UI", sans-serif" pitchFamily="34" charset="0"/><a:ea typeface="Inter, "Segoe UI", sans-serif" pitchFamily="34" charset="-122"/><a:cs typeface="Inter, "Segoe UI", sans-serif" pitchFamily="34" charset="-120"/></a:rPr><a:t>HyperTransport Interconnect  ·  3–6 cores/node  ·  First-touch allocation</a:t></a:r><a:endParaRPr lang="en-US" sz="1100" dirty="0"/></a:p></p:txBody></p:sp><p:sp><p:nvSpPr><p:cNvPr id="29" name="Shape 27"></p:cNvPr><p:cNvSpPr/><p:nvPr></p:nvPr></p:nvSpPr><p:spPr><a:xfrm><a:off x="685800" y="3794760"/><a:ext cx="4846320" cy="292608"/></a:xfrm><a:prstGeom prst="roundRect"><a:avLst><a:gd name="adj" fmla="val 18750"/></a:avLst></a:prstGeom><a:solidFill><a:srgbClr val="EFEAE3"/></a:solidFill><a:ln w="12700"><a:solidFill><a:srgbClr val="DDD8CF"/></a:solidFill><a:prstDash val="solid"/></a:ln></p:spPr></p:sp><p:sp><p:nvSpPr><p:cNvPr id="30" name="Text 28"></p:cNvPr><p:cNvSpPr/><p:nvPr></p:nvPr></p:nvSpPr><p:spPr><a:xfrm><a:off x="822960" y="3794760"/><a:ext cx="4572000" cy="292608"/></a:xfrm><a:prstGeom prst="rect"><a:avLst></a:avLst></a:prstGeom><a:noFill/><a:ln></a:ln></p:spPr><p:txBody><a:bodyPr wrap="square" rtlCol="0" anchor="ctr"></a:bodyPr><a:lstStyle/><a:p><a:pPr indent="0" marL="0"><a:buNone/></a:pPr><a:r><a:rPr lang="en-US" sz="1100" dirty="0"><a:solidFill><a:srgbClr val="111827"/></a:solidFill><a:latin typeface="Inter, "Segoe UI", sans-serif" pitchFamily="34" charset="0"/><a:ea typeface="Inter, "Segoe UI", sans-serif" pitchFamily="34" charset="-122"/><a:cs typeface="Inter, "Segoe UI", sans-serif" pitchFamily="34" charset="-120"/></a:rPr><a:t>Topology: 8 sockets · 24–48 cores total</a:t></a:r><a:endParaRPr lang="en-US" sz="1100" dirty="0"/></a:p></p:txBody></p:sp><p:sp><p:nvSpPr><p:cNvPr id="31" name="Shape 29"></p:cNvPr><p:cNvSpPr/><p:nvPr></p:nvPr></p:nvSpPr><p:spPr><a:xfrm><a:off x="685800" y="4178808"/><a:ext cx="4846320" cy="292608"/></a:xfrm><a:prstGeom prst="roundRect"><a:avLst><a:gd name="adj" fmla="val 18750"/></a:avLst></a:prstGeom><a:solidFill><a:srgbClr val="EFEAE3"/></a:solidFill><a:ln w="12700"><a:solidFill><a:srgbClr val="DDD8CF"/></a:solidFill><a:prstDash val="solid"/></a:ln></p:spPr></p:sp><p:sp><p:nvSpPr><p:cNvPr id="32" name="Text 30"></p:cNvPr><p:cNvSpPr/><p:nvPr></p:nvPr></p:nvSpPr><p:spPr><a:xfrm><a:off x="822960" y="4178808"/><a:ext cx="4572000" cy="292608"/></a:xfrm><a:prstGeom prst="rect"><a:avLst></a:avLst></a:prstGeom><a:noFill/><a:ln></a:ln></p:spPr><p:txBody><a:bodyPr wrap="square" rtlCol="0" anchor="ctr"></a:bodyPr><a:lstStyle/><a:p><a:pPr indent="0" marL="0"><a:buNone/></a:pPr><a:r><a:rPr lang="en-US" sz="1100" dirty="0"><a:solidFill><a:srgbClr val="111827"/></a:solidFill><a:latin typeface="Inter, "Segoe UI", sans-serif" pitchFamily="34" charset="0"/><a:ea typeface="Inter, "Segoe UI", sans-serif" pitchFamily="34" charset="-122"/><a:cs typeface="Inter, "Segoe UI", sans-serif" pitchFamily="34" charset="-120"/></a:rPr><a:t>Local DRAM: ~40 CPU cycles (integrated IMC)</a:t></a:r><a:endParaRPr lang="en-US" sz="1100" dirty="0"/></a:p></p:txBody></p:sp><p:sp><p:nvSpPr><p:cNvPr id="33" name="Shape 31"></p:cNvPr><p:cNvSpPr/><p:nvPr></p:nvPr></p:nvSpPr><p:spPr><a:xfrm><a:off x="685800" y="4562856"/><a:ext cx="4846320" cy="292608"/></a:xfrm><a:prstGeom prst="roundRect"><a:avLst><a:gd name="adj" fmla="val 18750"/></a:avLst></a:prstGeom><a:solidFill><a:srgbClr val="EFEAE3"/></a:solidFill><a:ln w="12700"><a:solidFill><a:srgbClr val="DDD8CF"/></a:solidFill><a:prstDash val="solid"/></a:ln></p:spPr></p:sp><p:sp><p:nvSpPr><p:cNvPr id="34" name="Text 32"></p:cNvPr><p:cNvSpPr/><p:nvPr></p:nvPr></p:nvSpPr><p:spPr><a:xfrm><a:off x="822960" y="4562856"/><a:ext cx="4572000" cy="292608"/></a:xfrm><a:prstGeom prst="rect"><a:avLst></a:avLst></a:prstGeom><a:noFill/><a:ln></a:ln></p:spPr><p:txBody><a:bodyPr wrap="square" rtlCol="0" anchor="ctr"></a:bodyPr><a:lstStyle/><a:p><a:pPr indent="0" marL="0"><a:buNone/></a:pPr><a:r><a:rPr lang="en-US" sz="1100" dirty="0"><a:solidFill><a:srgbClr val="111827"/></a:solidFill><a:latin typeface="Inter, "Segoe UI", sans-serif" pitchFamily="34" charset="0"/><a:ea typeface="Inter, "Segoe UI", sans-serif" pitchFamily="34" charset="-122"/><a:cs typeface="Inter, "Segoe UI", sans-serif" pitchFamily="34" charset="-120"/></a:rPr><a:t>Remote Bus: 240–340 CPU cycles (6×–8× stall)</a:t></a:r><a:endParaRPr lang="en-US" sz="1100" dirty="0"/></a:p></p:txBody></p:sp><p:sp><p:nvSpPr><p:cNvPr id="35" name="Shape 33"></p:cNvPr><p:cNvSpPr/><p:nvPr></p:nvPr></p:nvSpPr><p:spPr><a:xfrm><a:off x="685800" y="4946904"/><a:ext cx="4846320" cy="292608"/></a:xfrm><a:prstGeom prst="roundRect"><a:avLst><a:gd name="adj" fmla="val 18750"/></a:avLst></a:prstGeom><a:solidFill><a:srgbClr val="EFEAE3"/></a:solidFill><a:ln w="12700"><a:solidFill><a:srgbClr val="DDD8CF"/></a:solidFill><a:prstDash val="solid"/></a:ln></p:spPr></p:sp><p:sp><p:nvSpPr><p:cNvPr id="36" name="Text 34"></p:cNvPr><p:cNvSpPr/><p:nvPr></p:nvPr></p:nvSpPr><p:spPr><a:xfrm><a:off x="822960" y="4946904"/><a:ext cx="4572000" cy="292608"/></a:xfrm><a:prstGeom prst="rect"><a:avLst></a:avLst></a:prstGeom><a:noFill/><a:ln></a:ln></p:spPr><p:txBody><a:bodyPr wrap="square" rtlCol="0" anchor="ctr"></a:bodyPr><a:lstStyle/><a:p><a:pPr indent="0" marL="0"><a:buNone/></a:pPr><a:r><a:rPr lang="en-US" sz="1100" dirty="0"><a:solidFill><a:srgbClr val="111827"/></a:solidFill><a:latin typeface="Inter, "Segoe UI", sans-serif" pitchFamily="34" charset="0"/><a:ea typeface="Inter, "Segoe UI", sans-serif" pitchFamily="34" charset="-122"/><a:cs typeface="Inter, "Segoe UI", sans-serif" pitchFamily="34" charset="-120"/></a:rPr><a:t>Diameter: 3 hops max  ·  Failure: bus saturation</a:t></a:r><a:endParaRPr lang="en-US" sz="1100" dirty="0"/></a:p></p:txBody></p:sp><p:sp><p:nvSpPr><p:cNvPr id="37" name="Shape 35"></p:cNvPr><p:cNvSpPr/><p:nvPr></p:nvPr></p:nvSpPr><p:spPr><a:xfrm><a:off x="6217920" y="2880360"/><a:ext cx="5394960" cy="3108960"/></a:xfrm><a:prstGeom prst="roundRect"><a:avLst><a:gd name="adj" fmla="val 2353"/></a:avLst></a:prstGeom><a:solidFill><a:srgbClr val="111827"/></a:solidFill><a:ln w="31750"><a:solidFill><a:srgbClr val="111827"/></a:solidFill><a:prstDash val="solid"/></a:ln><a:effectLst> <a:outerShdw sx="100000" sy="100000" kx="0" ky="0" algn="bl" rotWithShape="0" blurRad="50800" dist="50800" dir="16200000"> <a:srgbClr val="C8C6BF"> <a:alpha val="75000"/></a:srgbClr> </a:outerShdw></a:effectLst></p:spPr></p:sp><p:sp><p:nvSpPr><p:cNvPr id="38" name="Text 36"></p:cNvPr><p:cNvSpPr/><p:nvPr></p:nvPr></p:nvSpPr><p:spPr><a:xfrm><a:off x="6492240" y="3017520"/><a:ext cx="4846320" cy="365760"/></a:xfrm><a:prstGeom prst="rect"><a:avLst></a:avLst></a:prstGeom><a:noFill/><a:ln></a:ln></p:spPr><p:txBody><a:bodyPr wrap="square" rtlCol="0" anchor="ctr"></a:bodyPr><a:lstStyle/><a:p><a:pPr indent="0" marL="0"><a:buNone/></a:pPr><a:r><a:rPr lang="en-US" sz="2000" b="1" dirty="0"><a:solidFill><a:srgbClr val="FFD147"/></a:solidFill><a:latin typeface="Arial Black, "Trebuchet MS", "Helvetica Neue", sans-serif" pitchFamily="34" charset="0"/><a:ea typeface="Arial Black, "Trebuchet MS", "Helvetica Neue", sans-serif" pitchFamily="34" charset="-122"/><a:cs typeface="Arial Black, "Trebuchet MS", "Helvetica Neue", sans-serif" pitchFamily="34" charset="-120"/></a:rPr><a:t>TILEPro64 8×8 Mesh</a:t></a:r><a:endParaRPr lang="en-US" sz="2000" dirty="0"/></a:p></p:txBody></p:sp><p:sp><p:nvSpPr><p:cNvPr id="39" name="Text 37"></p:cNvPr><p:cNvSpPr/><p:nvPr></p:nvPr></p:nvSpPr><p:spPr><a:xfrm><a:off x="6492240" y="3429000"/><a:ext cx="4846320" cy="274320"/></a:xfrm><a:prstGeom prst="rect"><a:avLst></a:avLst></a:prstGeom><a:noFill/><a:ln></a:ln></p:spPr><p:txBody><a:bodyPr wrap="square" rtlCol="0" anchor="ctr"></a:bodyPr><a:lstStyle/><a:p><a:pPr indent="0" marL="0"><a:buNone/></a:pPr><a:r><a:rPr lang="en-US" sz="1100" dirty="0"><a:solidFill><a:srgbClr val="AAB2C7"/></a:solidFill><a:latin typeface="Inter, "Segoe UI", sans-serif" pitchFamily="34" charset="0"/><a:ea typeface="Inter, "Segoe UI", sans-serif" pitchFamily="34" charset="-122"/><a:cs typeface="Inter, "Segoe UI", sans-serif" pitchFamily="34" charset="-120"/></a:rPr><a:t>Manhattan hop distance  ·  64 tiles  ·  2D dynamic mesh</a:t></a:r><a:endParaRPr lang="en-US" sz="1100" dirty="0"/></a:p></p:txBody></p:sp><p:sp><p:nvSpPr><p:cNvPr id="40" name="Shape 38"></p:cNvPr><p:cNvSpPr/><p:nvPr></p:nvPr></p:nvSpPr><p:spPr><a:xfrm><a:off x="6492240" y="3794760"/><a:ext cx="4846320" cy="292608"/></a:xfrm><a:prstGeom prst="roundRect"><a:avLst><a:gd name="adj" fmla="val 18750"/></a:avLst></a:prstGeom><a:solidFill><a:srgbClr val="1A2230"/></a:solidFill><a:ln w="12700"><a:solidFill><a:srgbClr val="334155"/></a:solidFill><a:prstDash val="solid"/></a:ln></p:spPr></p:sp><p:sp><p:nvSpPr><p:cNvPr id="41" name="Text 39"></p:cNvPr><p:cNvSpPr/><p:nvPr></p:nvPr></p:nvSpPr><p:spPr><a:xfrm><a:off x="6629400" y="3794760"/><a:ext cx="4572000" cy="292608"/></a:xfrm><a:prstGeom prst="rect"><a:avLst></a:avLst></a:prstGeom><a:noFill/><a:ln></a:ln></p:spPr><p:txBody><a:bodyPr wrap="square" rtlCol="0" anchor="ctr"></a:bodyPr><a:lstStyle/><a:p><a:pPr indent="0" marL="0"><a:buNone/></a:pPr><a:r><a:rPr lang="en-US" sz="1100" dirty="0"><a:solidFill><a:srgbClr val="F4F0EA"/></a:solidFill><a:latin typeface="Inter, "Segoe UI", sans-serif" pitchFamily="34" charset="0"/><a:ea typeface="Inter, "Segoe UI", sans-serif" pitchFamily="34" charset="-122"/><a:cs typeface="Inter, "Segoe UI", sans-serif" pitchFamily="34" charset="-120"/></a:rPr><a:t>Topology: 8×8 grid · 1 VLIW core per tile</a:t></a:r><a:endParaRPr lang="en-US" sz="1100" dirty="0"/></a:p></p:txBody></p:sp><p:sp><p:nvSpPr><p:cNvPr id="42" name="Shape 40"></p:cNvPr><p:cNvSpPr/><p:nvPr></p:nvPr></p:nvSpPr><p:spPr><a:xfrm><a:off x="6492240" y="4178808"/><a:ext cx="4846320" cy="292608"/></a:xfrm><a:prstGeom prst="roundRect"><a:avLst><a:gd name="adj" fmla="val 18750"/></a:avLst></a:prstGeom><a:solidFill><a:srgbClr val="1A2230"/></a:solidFill><a:ln w="12700"><a:solidFill><a:srgbClr val="334155"/></a:solidFill><a:prstDash val="solid"/></a:ln></p:spPr></p:sp><p:sp><p:nvSpPr><p:cNvPr id="43" name="Text 41"></p:cNvPr><p:cNvSpPr/><p:nvPr></p:nvPr></p:nvSpPr><p:spPr><a:xfrm><a:off x="6629400" y="4178808"/><a:ext cx="4572000" cy="292608"/></a:xfrm><a:prstGeom prst="rect"><a:avLst></a:avLst></a:prstGeom><a:noFill/><a:ln></a:ln></p:spPr><p:txBody><a:bodyPr wrap="square" rtlCol="0" anchor="ctr"></a:bodyPr><a:lstStyle/><a:p><a:pPr indent="0" marL="0"><a:buNone/></a:pPr><a:r><a:rPr lang="en-US" sz="1100" dirty="0"><a:solidFill><a:srgbClr val="F4F0EA"/></a:solidFill><a:latin typeface="Inter, "Segoe UI", sans-serif" pitchFamily="34" charset="0"/><a:ea typeface="Inter, "Segoe UI", sans-serif" pitchFamily="34" charset="-122"/><a:cs typeface="Inter, "Segoe UI", sans-serif" pitchFamily="34" charset="-120"/></a:rPr><a:t>Local L2: 10 cycles  ·  Remote: 38 + 2·h</a:t></a:r><a:endParaRPr lang="en-US" sz="1100" dirty="0"/></a:p></p:txBody></p:sp><p:sp><p:nvSpPr><p:cNvPr id="44" name="Shape 42"></p:cNvPr><p:cNvSpPr/><p:nvPr></p:nvPr></p:nvSpPr><p:spPr><a:xfrm><a:off x="6492240" y="4562856"/><a:ext cx="4846320" cy="292608"/></a:xfrm><a:prstGeom prst="roundRect"><a:avLst><a:gd name="adj" fmla="val 18750"/></a:avLst></a:prstGeom><a:solidFill><a:srgbClr val="1A2230"/></a:solidFill><a:ln w="12700"><a:solidFill><a:srgbClr val="334155"/></a:solidFill><a:prstDash val="solid"/></a:ln></p:spPr></p:sp><p:sp><p:nvSpPr><p:cNvPr id="45" name="Text 43"></p:cNvPr><p:cNvSpPr/><p:nvPr></p:nvPr></p:nvSpPr><p:spPr><a:xfrm><a:off x="6629400" y="4562856"/><a:ext cx="4572000" cy="292608"/></a:xfrm><a:prstGeom prst="rect"><a:avLst></a:avLst></a:prstGeom><a:noFill/><a:ln></a:ln></p:spPr><p:txBody><a:bodyPr wrap="square" rtlCol="0" anchor="ctr"></a:bodyPr><a:lstStyle/><a:p><a:pPr indent="0" marL="0"><a:buNone/></a:pPr><a:r><a:rPr lang="en-US" sz="1100" dirty="0"><a:solidFill><a:srgbClr val="F4F0EA"/></a:solidFill><a:latin typeface="Inter, "Segoe UI", sans-serif" pitchFamily="34" charset="0"/><a:ea typeface="Inter, "Segoe UI", sans-serif" pitchFamily="34" charset="-122"/><a:cs typeface="Inter, "Segoe UI", sans-serif" pitchFamily="34" charset="-120"/></a:rPr><a:t>Diameter: 14 hops = 66 cycles (opposite corner)</a:t></a:r><a:endParaRPr lang="en-US" sz="1100" dirty="0"/></a:p></p:txBody></p:sp><p:sp><p:nvSpPr><p:cNvPr id="46" name="Shape 44"></p:cNvPr><p:cNvSpPr/><p:nvPr></p:nvPr></p:nvSpPr><p:spPr><a:xfrm><a:off x="6492240" y="4946904"/><a:ext cx="4846320" cy="292608"/></a:xfrm><a:prstGeom prst="roundRect"><a:avLst><a:gd name="adj" fmla="val 18750"/></a:avLst></a:prstGeom><a:solidFill><a:srgbClr val="1A2230"/></a:solidFill><a:ln w="12700"><a:solidFill><a:srgbClr val="334155"/></a:solidFill><a:prstDash val="solid"/></a:ln></p:spPr></p:sp><p:sp><p:nvSpPr><p:cNvPr id="47" name="Text 45"></p:cNvPr><p:cNvSpPr/><p:nvPr></p:nvPr></p:nvSpPr><p:spPr><a:xfrm><a:off x="6629400" y="4946904"/><a:ext cx="4572000" cy="292608"/></a:xfrm><a:prstGeom prst="rect"><a:avLst></a:avLst></a:prstGeom><a:noFill/><a:ln></a:ln></p:spPr><p:txBody><a:bodyPr wrap="square" rtlCol="0" anchor="ctr"></a:bodyPr><a:lstStyle/><a:p><a:pPr indent="0" marL="0"><a:buNone/></a:pPr><a:r><a:rPr lang="en-US" sz="1100" dirty="0"><a:solidFill><a:srgbClr val="F4F0EA"/></a:solidFill><a:latin typeface="Inter, "Segoe UI", sans-serif" pitchFamily="34" charset="0"/><a:ea typeface="Inter, "Segoe UI", sans-serif" pitchFamily="34" charset="-122"/><a:cs typeface="Inter, "Segoe UI", sans-serif" pitchFamily="34" charset="-120"/></a:rPr><a:t>Failure: center bisection contention / home trap</a:t></a:r><a:endParaRPr lang="en-US" sz="1100" dirty="0"/></a:p></p:txBody></p:sp><p:sp><p:nvSpPr><p:cNvPr id="48" name="Shape 46"></p:cNvPr><p:cNvSpPr/><p:nvPr></p:nvPr></p:nvSpPr><p:spPr><a:xfrm><a:off x="411480" y="5989320"/><a:ext cx="11338560" cy="502920"/></a:xfrm><a:prstGeom prst="roundRect"><a:avLst><a:gd name="adj" fmla="val 10909"/></a:avLst></a:prstGeom><a:solidFill><a:srgbClr val="111827"/></a:solidFill><a:ln w="19050"><a:solidFill><a:srgbClr val="111827"/></a:solidFill><a:prstDash val="solid"/></a:ln></p:spPr></p:sp><p:sp><p:nvSpPr><p:cNvPr id="49" name="Text 47"></p:cNvPr><p:cNvSpPr/><p:nvPr></p:nvPr></p:nvSpPr><p:spPr><a:xfrm><a:off x="685800" y="6035040"/><a:ext cx="10789920" cy="411480"/></a:xfrm><a:prstGeom prst="rect"><a:avLst></a:avLst></a:prstGeom><a:noFill/><a:ln></a:ln></p:spPr><p:txBody><a:bodyPr wrap="square" rtlCol="0" anchor="ctr"></a:bodyPr><a:lstStyle/><a:p><a:pPr indent="0" marL="0"><a:buNone/></a:pPr><a:r><a:rPr lang="en-US" sz="1100" dirty="0"><a:solidFill><a:srgbClr val="FFD147"/></a:solidFill><a:latin typeface=""JetBrains Mono", "Courier New", monospace" pitchFamily="34" charset="0"/><a:ea typeface=""JetBrains Mono", "Courier New", monospace" pitchFamily="34" charset="-122"/><a:cs typeface=""JetBrains Mono", "Courier New", monospace" pitchFamily="34" charset="-120"/></a:rPr><a:t>cost(X) = Σ (D[i] / line_size) × latency(X, i)  ·  locality dealing cuts stalls up to 80% — but starves idle cores when backlog is ignored!</a:t></a:r><a:endParaRPr lang="en-US" sz="1100" dirty="0"/></a:p></p:txBody></p:sp><p:sp><p:nvSpPr><p:cNvPr id="50" name="Text 48"></p:cNvPr><p:cNvSpPr/><p:nvPr></p:nvPr></p:nvSpPr><p:spPr><a:xfrm><a:off x="411480" y="6537960"/><a:ext cx="11338560" cy="182880"/></a:xfrm><a:prstGeom prst="rect"><a:avLst></a:avLst></a:prstGeom><a:noFill/><a:ln></a:ln></p:spPr><p:txBody><a:bodyPr wrap="square" rtlCol="0" anchor="ctr"></a:bodyPr><a:lstStyle/><a:p><a:pPr indent="0" marL="0"><a:buNone/></a:pPr><a:r><a:rPr lang="en-US" sz="900" dirty="0"><a:solidFill><a:srgbClr val="6B6B6B"/></a:solidFill><a:latin typeface=""JetBrains Mono", "Courier New", monospace" pitchFamily="34" charset="0"/><a:ea typeface=""JetBrains Mono", "Courier New", monospace" pitchFamily="34" charset="-122"/><a:cs typeface=""JetBrains Mono", "Courier New", monospace" pitchFamily="34" charset="-120"/></a:rPr><a:t>Locality-Aware Task Scheduling · Hardware Topology &amp; Latency Models  ·  02 / 05</a:t></a:r><a:endParaRPr lang="en-US" sz="900" dirty="0"/></a:p></p:txBody></p:sp></p:spTree></p:cSld><p:clrMapOvr><a:masterClrMapping/></p:clrMapOvr></p:sld>
+<file path=ppt/slides/slide2.xml><?xml version="1.0" encoding="utf-8"?>
+<p:sld xmlns:a="http://schemas.openxmlformats.org/drawingml/2006/main" xmlns:r="http://schemas.openxmlformats.org/officeDocument/2006/relationships" xmlns:p="http://schemas.openxmlformats.org/presentationml/2006/main">
+  <p:cSld name="Slide 2">
+    <p:bg>
+      <p:bgPr>
+        <a:blipFill dpi="0" rotWithShape="1">
+          <a:blip r:embed="rId1">
+            <a:lum/>
+          </a:blip>
+          <a:srcRect/>
+          <a:stretch>
+            <a:fillRect/>
+          </a:stretch>
+        </a:blipFill>
+        <a:effectLst/>
+      </p:bgPr>
+    </p:bg>
+    <p:spTree>
+      <p:nvGrpSpPr>
+        <p:cNvPr id="1" name=""/>
+        <p:cNvGrpSpPr/>
+        <p:nvPr/>
+      </p:nvGrpSpPr>
+      <p:grpSpPr>
+        <a:xfrm>
+          <a:off x="0" y="0"/>
+          <a:ext cx="0" cy="0"/>
+          <a:chOff x="0" y="0"/>
+          <a:chExt cx="0" cy="0"/>
+        </a:xfrm>
+      </p:grpSpPr>
+      <p:sp>
+        <p:nvSpPr>
+          <p:cNvPr id="2" name="Shape 0"/>
+          <p:cNvSpPr/>
+          <p:nvPr/>
+        </p:nvSpPr>
+        <p:spPr>
+          <a:xfrm>
+            <a:off x="731520" y="411480"/>
+            <a:ext cx="1115568" cy="292608"/>
+          </a:xfrm>
+          <a:prstGeom prst="roundRect">
+            <a:avLst>
+              <a:gd name="adj" fmla="val 50000"/>
+            </a:avLst>
+          </a:prstGeom>
+          <a:solidFill>
+            <a:srgbClr val="111827"/>
+          </a:solidFill>
+          <a:ln w="12700">
+            <a:solidFill>
+              <a:srgbClr val="111827"/>
+            </a:solidFill>
+            <a:prstDash val="solid"/>
+          </a:ln>
+        </p:spPr>
+      </p:sp>
+      <p:sp>
+        <p:nvSpPr>
+          <p:cNvPr id="3" name="Text 1"/>
+          <p:cNvSpPr/>
+          <p:nvPr/>
+        </p:nvSpPr>
+        <p:spPr>
+          <a:xfrm>
+            <a:off x="731520" y="411480"/>
+            <a:ext cx="1115568" cy="292608"/>
+          </a:xfrm>
+          <a:prstGeom prst="rect">
+            <a:avLst/>
+          </a:prstGeom>
+          <a:noFill/>
+          <a:ln/>
+        </p:spPr>
+        <p:txBody>
+          <a:bodyPr wrap="square" rtlCol="0" anchor="ctr"/>
+          <a:lstStyle/>
+          <a:p>
+            <a:pPr algn="ctr" indent="0" marL="0">
+              <a:buNone/>
+            </a:pPr>
+            <a:r>
+              <a:rPr lang="en-US" sz="900" b="1" dirty="0">
+                <a:solidFill>
+                  <a:srgbClr val="FFFFFF"/>
+                </a:solidFill>
+                <a:latin typeface="Courier New" pitchFamily="34" charset="0"/>
+                <a:ea typeface="Courier New" pitchFamily="34" charset="-122"/>
+                <a:cs typeface="Courier New" pitchFamily="34" charset="-120"/>
+              </a:rPr>
+              <a:t>PART 1</a:t>
+            </a:r>
+            <a:endParaRPr lang="en-US" sz="900" dirty="0"/>
+          </a:p>
+        </p:txBody>
+      </p:sp>
+      <p:sp>
+        <p:nvSpPr>
+          <p:cNvPr id="4" name="Shape 2"/>
+          <p:cNvSpPr/>
+          <p:nvPr/>
+        </p:nvSpPr>
+        <p:spPr>
+          <a:xfrm>
+            <a:off x="1984248" y="411480"/>
+            <a:ext cx="3410712" cy="292608"/>
+          </a:xfrm>
+          <a:prstGeom prst="roundRect">
+            <a:avLst>
+              <a:gd name="adj" fmla="val 50000"/>
+            </a:avLst>
+          </a:prstGeom>
+          <a:solidFill>
+            <a:srgbClr val="FFFFFF"/>
+          </a:solidFill>
+          <a:ln w="19050">
+            <a:solidFill>
+              <a:srgbClr val="111827"/>
+            </a:solidFill>
+            <a:prstDash val="solid"/>
+          </a:ln>
+        </p:spPr>
+      </p:sp>
+      <p:sp>
+        <p:nvSpPr>
+          <p:cNvPr id="5" name="Text 3"/>
+          <p:cNvSpPr/>
+          <p:nvPr/>
+        </p:nvSpPr>
+        <p:spPr>
+          <a:xfrm>
+            <a:off x="1984248" y="411480"/>
+            <a:ext cx="3410712" cy="292608"/>
+          </a:xfrm>
+          <a:prstGeom prst="rect">
+            <a:avLst/>
+          </a:prstGeom>
+          <a:noFill/>
+          <a:ln/>
+        </p:spPr>
+        <p:txBody>
+          <a:bodyPr wrap="square" rtlCol="0" anchor="ctr"/>
+          <a:lstStyle/>
+          <a:p>
+            <a:pPr algn="ctr" indent="0" marL="0">
+              <a:buNone/>
+            </a:pPr>
+            <a:r>
+              <a:rPr lang="en-US" sz="900" b="1" dirty="0">
+                <a:solidFill>
+                  <a:srgbClr val="111827"/>
+                </a:solidFill>
+                <a:latin typeface="Courier New" pitchFamily="34" charset="0"/>
+                <a:ea typeface="Courier New" pitchFamily="34" charset="-122"/>
+                <a:cs typeface="Courier New" pitchFamily="34" charset="-120"/>
+              </a:rPr>
+              <a:t>HARDWARE TOPOLOGY &amp; LATENCY MODELS</a:t>
+            </a:r>
+            <a:endParaRPr lang="en-US" sz="900" dirty="0"/>
+          </a:p>
+        </p:txBody>
+      </p:sp>
+      <p:sp>
+        <p:nvSpPr>
+          <p:cNvPr id="6" name="Text 4"/>
+          <p:cNvSpPr/>
+          <p:nvPr/>
+        </p:nvSpPr>
+        <p:spPr>
+          <a:xfrm>
+            <a:off x="731520" y="868680"/>
+            <a:ext cx="5029200" cy="502920"/>
+          </a:xfrm>
+          <a:prstGeom prst="rect">
+            <a:avLst/>
+          </a:prstGeom>
+          <a:noFill/>
+          <a:ln/>
+        </p:spPr>
+        <p:txBody>
+          <a:bodyPr wrap="square" rtlCol="0" anchor="ctr"/>
+          <a:lstStyle/>
+          <a:p>
+            <a:pPr indent="0" marL="0">
+              <a:buNone/>
+            </a:pPr>
+            <a:r>
+              <a:rPr lang="en-US" sz="3000" b="1" dirty="0">
+                <a:solidFill>
+                  <a:srgbClr val="111827"/>
+                </a:solidFill>
+                <a:latin typeface="Arial Black" pitchFamily="34" charset="0"/>
+                <a:ea typeface="Arial Black" pitchFamily="34" charset="-122"/>
+                <a:cs typeface="Arial Black" pitchFamily="34" charset="-120"/>
+              </a:rPr>
+              <a:t>Two Memory Models, </a:t>
+            </a:r>
+            <a:endParaRPr lang="en-US" sz="3000" dirty="0"/>
+          </a:p>
+        </p:txBody>
+      </p:sp>
+      <p:sp>
+        <p:nvSpPr>
+          <p:cNvPr id="7" name="Shape 5"/>
+          <p:cNvSpPr/>
+          <p:nvPr/>
+        </p:nvSpPr>
+        <p:spPr>
+          <a:xfrm>
+            <a:off x="5669280" y="822960"/>
+            <a:ext cx="4206240" cy="594360"/>
+          </a:xfrm>
+          <a:prstGeom prst="roundRect">
+            <a:avLst>
+              <a:gd name="adj" fmla="val 15385"/>
+            </a:avLst>
+          </a:prstGeom>
+          <a:solidFill>
+            <a:srgbClr val="FFD147"/>
+          </a:solidFill>
+          <a:ln w="19050">
+            <a:solidFill>
+              <a:srgbClr val="111827"/>
+            </a:solidFill>
+            <a:prstDash val="solid"/>
+          </a:ln>
+        </p:spPr>
+      </p:sp>
+      <p:sp>
+        <p:nvSpPr>
+          <p:cNvPr id="8" name="Text 6"/>
+          <p:cNvSpPr/>
+          <p:nvPr/>
+        </p:nvSpPr>
+        <p:spPr>
+          <a:xfrm>
+            <a:off x="5760720" y="822960"/>
+            <a:ext cx="4023360" cy="594360"/>
+          </a:xfrm>
+          <a:prstGeom prst="rect">
+            <a:avLst/>
+          </a:prstGeom>
+          <a:noFill/>
+          <a:ln/>
+        </p:spPr>
+        <p:txBody>
+          <a:bodyPr wrap="square" rtlCol="0" anchor="ctr"/>
+          <a:lstStyle/>
+          <a:p>
+            <a:pPr algn="ctr" indent="0" marL="0">
+              <a:buNone/>
+            </a:pPr>
+            <a:r>
+              <a:rPr lang="en-US" sz="2800" b="1" dirty="0">
+                <a:solidFill>
+                  <a:srgbClr val="111827"/>
+                </a:solidFill>
+                <a:latin typeface="Arial Black" pitchFamily="34" charset="0"/>
+                <a:ea typeface="Arial Black" pitchFamily="34" charset="-122"/>
+                <a:cs typeface="Arial Black" pitchFamily="34" charset="-120"/>
+              </a:rPr>
+              <a:t>Two Latency Cliffs</a:t>
+            </a:r>
+            <a:endParaRPr lang="en-US" sz="2800" dirty="0"/>
+          </a:p>
+        </p:txBody>
+      </p:sp>
+      <p:sp>
+        <p:nvSpPr>
+          <p:cNvPr id="9" name="Text 7"/>
+          <p:cNvSpPr/>
+          <p:nvPr/>
+        </p:nvSpPr>
+        <p:spPr>
+          <a:xfrm>
+            <a:off x="731520" y="1463040"/>
+            <a:ext cx="9144000" cy="228600"/>
+          </a:xfrm>
+          <a:prstGeom prst="rect">
+            <a:avLst/>
+          </a:prstGeom>
+          <a:noFill/>
+          <a:ln/>
+        </p:spPr>
+        <p:txBody>
+          <a:bodyPr wrap="square" rtlCol="0" anchor="ctr"/>
+          <a:lstStyle/>
+          <a:p>
+            <a:pPr indent="0" marL="0">
+              <a:buNone/>
+            </a:pPr>
+            <a:r>
+              <a:rPr lang="en-US" sz="1000" dirty="0">
+                <a:solidFill>
+                  <a:srgbClr val="4B5563"/>
+                </a:solidFill>
+                <a:latin typeface="Courier New" pitchFamily="34" charset="0"/>
+                <a:ea typeface="Courier New" pitchFamily="34" charset="-122"/>
+                <a:cs typeface="Courier New" pitchFamily="34" charset="-120"/>
+              </a:rPr>
+              <a:t>Discrete socket memory hierarchies vs. distributed shared L2 cache on an 8×8 mesh</a:t>
+            </a:r>
+            <a:endParaRPr lang="en-US" sz="1000" dirty="0"/>
+          </a:p>
+        </p:txBody>
+      </p:sp>
+      <p:sp>
+        <p:nvSpPr>
+          <p:cNvPr id="10" name="Shape 8"/>
+          <p:cNvSpPr/>
+          <p:nvPr/>
+        </p:nvSpPr>
+        <p:spPr>
+          <a:xfrm>
+            <a:off x="786384" y="1837944"/>
+            <a:ext cx="5257800" cy="3886200"/>
+          </a:xfrm>
+          <a:prstGeom prst="roundRect">
+            <a:avLst>
+              <a:gd name="adj" fmla="val 3765"/>
+            </a:avLst>
+          </a:prstGeom>
+          <a:solidFill>
+            <a:srgbClr val="111827"/>
+          </a:solidFill>
+          <a:ln w="12700">
+            <a:solidFill>
+              <a:srgbClr val="111827"/>
+            </a:solidFill>
+            <a:prstDash val="solid"/>
+          </a:ln>
+        </p:spPr>
+      </p:sp>
+      <p:sp>
+        <p:nvSpPr>
+          <p:cNvPr id="11" name="Shape 9"/>
+          <p:cNvSpPr/>
+          <p:nvPr/>
+        </p:nvSpPr>
+        <p:spPr>
+          <a:xfrm>
+            <a:off x="731520" y="1783080"/>
+            <a:ext cx="5257800" cy="3886200"/>
+          </a:xfrm>
+          <a:prstGeom prst="roundRect">
+            <a:avLst>
+              <a:gd name="adj" fmla="val 3765"/>
+            </a:avLst>
+          </a:prstGeom>
+          <a:solidFill>
+            <a:srgbClr val="EEF2FF"/>
+          </a:solidFill>
+          <a:ln w="19050">
+            <a:solidFill>
+              <a:srgbClr val="111827"/>
+            </a:solidFill>
+            <a:prstDash val="solid"/>
+          </a:ln>
+        </p:spPr>
+      </p:sp>
+      <p:sp>
+        <p:nvSpPr>
+          <p:cNvPr id="12" name="Text 10"/>
+          <p:cNvSpPr/>
+          <p:nvPr/>
+        </p:nvSpPr>
+        <p:spPr>
+          <a:xfrm>
+            <a:off x="1005840" y="1901952"/>
+            <a:ext cx="4663440" cy="320040"/>
+          </a:xfrm>
+          <a:prstGeom prst="rect">
+            <a:avLst/>
+          </a:prstGeom>
+          <a:noFill/>
+          <a:ln/>
+        </p:spPr>
+        <p:txBody>
+          <a:bodyPr wrap="square" rtlCol="0" anchor="ctr"/>
+          <a:lstStyle/>
+          <a:p>
+            <a:pPr indent="0" marL="0">
+              <a:buNone/>
+            </a:pPr>
+            <a:r>
+              <a:rPr lang="en-US" sz="1600" dirty="0">
+                <a:solidFill>
+                  <a:srgbClr val="111827"/>
+                </a:solidFill>
+                <a:latin typeface="Arial Black" pitchFamily="34" charset="0"/>
+                <a:ea typeface="Arial Black" pitchFamily="34" charset="-122"/>
+                <a:cs typeface="Arial Black" pitchFamily="34" charset="-120"/>
+              </a:rPr>
+              <a:t>AMD Opteron 8-Node NUMA</a:t>
+            </a:r>
+            <a:endParaRPr lang="en-US" sz="1600" dirty="0"/>
+          </a:p>
+        </p:txBody>
+      </p:sp>
+      <p:sp>
+        <p:nvSpPr>
+          <p:cNvPr id="13" name="Shape 11"/>
+          <p:cNvSpPr/>
+          <p:nvPr/>
+        </p:nvSpPr>
+        <p:spPr>
+          <a:xfrm>
+            <a:off x="1005840" y="2240280"/>
+            <a:ext cx="2560320" cy="237744"/>
+          </a:xfrm>
+          <a:prstGeom prst="roundRect">
+            <a:avLst>
+              <a:gd name="adj" fmla="val 50000"/>
+            </a:avLst>
+          </a:prstGeom>
+          <a:solidFill>
+            <a:srgbClr val="FFFFFF"/>
+          </a:solidFill>
+          <a:ln w="15240">
+            <a:solidFill>
+              <a:srgbClr val="111827"/>
+            </a:solidFill>
+            <a:prstDash val="solid"/>
+          </a:ln>
+        </p:spPr>
+      </p:sp>
+      <p:sp>
+        <p:nvSpPr>
+          <p:cNvPr id="14" name="Text 12"/>
+          <p:cNvSpPr/>
+          <p:nvPr/>
+        </p:nvSpPr>
+        <p:spPr>
+          <a:xfrm>
+            <a:off x="1005840" y="2240280"/>
+            <a:ext cx="2560320" cy="237744"/>
+          </a:xfrm>
+          <a:prstGeom prst="rect">
+            <a:avLst/>
+          </a:prstGeom>
+          <a:noFill/>
+          <a:ln/>
+        </p:spPr>
+        <p:txBody>
+          <a:bodyPr wrap="square" rtlCol="0" anchor="ctr"/>
+          <a:lstStyle/>
+          <a:p>
+            <a:pPr algn="ctr" indent="0" marL="0">
+              <a:buNone/>
+            </a:pPr>
+            <a:r>
+              <a:rPr lang="en-US" sz="800" b="1" dirty="0">
+                <a:solidFill>
+                  <a:srgbClr val="111827"/>
+                </a:solidFill>
+                <a:latin typeface="Courier New" pitchFamily="34" charset="0"/>
+                <a:ea typeface="Courier New" pitchFamily="34" charset="-122"/>
+                <a:cs typeface="Courier New" pitchFamily="34" charset="-120"/>
+              </a:rPr>
+              <a:t>Hierarchical HyperTransport Bus</a:t>
+            </a:r>
+            <a:endParaRPr lang="en-US" sz="800" dirty="0"/>
+          </a:p>
+        </p:txBody>
+      </p:sp>
+      <p:sp>
+        <p:nvSpPr>
+          <p:cNvPr id="15" name="Text 13"/>
+          <p:cNvSpPr/>
+          <p:nvPr/>
+        </p:nvSpPr>
+        <p:spPr>
+          <a:xfrm>
+            <a:off x="1005840" y="2560320"/>
+            <a:ext cx="4663440" cy="2194560"/>
+          </a:xfrm>
+          <a:prstGeom prst="rect">
+            <a:avLst/>
+          </a:prstGeom>
+          <a:noFill/>
+          <a:ln/>
+        </p:spPr>
+        <p:txBody>
+          <a:bodyPr wrap="square" rtlCol="0" anchor="ctr"/>
+          <a:lstStyle/>
+          <a:p>
+            <a:pPr indent="0" marL="0">
+              <a:lnSpc>
+                <a:spcPts val="1600"/>
+              </a:lnSpc>
+              <a:buNone/>
+            </a:pPr>
+            <a:r>
+              <a:rPr lang="en-US" sz="980" dirty="0">
+                <a:solidFill>
+                  <a:srgbClr val="374151"/>
+                </a:solidFill>
+                <a:latin typeface="Arial" pitchFamily="34" charset="0"/>
+                <a:ea typeface="Arial" pitchFamily="34" charset="-122"/>
+                <a:cs typeface="Arial" pitchFamily="34" charset="-120"/>
+              </a:rPr>
+              <a:t>• Topology: 8 discrete sockets (3–6 cores/node, 24–48 cores total)</a:t>
+            </a:r>
+            <a:endParaRPr lang="en-US" sz="980" dirty="0"/>
+          </a:p>
+          <a:p>
+            <a:pPr indent="0" marL="0">
+              <a:lnSpc>
+                <a:spcPts val="1600"/>
+              </a:lnSpc>
+              <a:buNone/>
+            </a:pPr>
+            <a:r>
+              <a:rPr lang="en-US" sz="980" dirty="0">
+                <a:solidFill>
+                  <a:srgbClr val="374151"/>
+                </a:solidFill>
+                <a:latin typeface="Arial" pitchFamily="34" charset="0"/>
+                <a:ea typeface="Arial" pitchFamily="34" charset="-122"/>
+                <a:cs typeface="Arial" pitchFamily="34" charset="-120"/>
+              </a:rPr>
+              <a:t>• Memory: Dedicated physical DRAM channels per socket (discrete banks)</a:t>
+            </a:r>
+            <a:endParaRPr lang="en-US" sz="980" dirty="0"/>
+          </a:p>
+          <a:p>
+            <a:pPr indent="0" marL="0">
+              <a:lnSpc>
+                <a:spcPts val="1600"/>
+              </a:lnSpc>
+              <a:buNone/>
+            </a:pPr>
+            <a:r>
+              <a:rPr lang="en-US" sz="980" dirty="0">
+                <a:solidFill>
+                  <a:srgbClr val="374151"/>
+                </a:solidFill>
+                <a:latin typeface="Arial" pitchFamily="34" charset="0"/>
+                <a:ea typeface="Arial" pitchFamily="34" charset="-122"/>
+                <a:cs typeface="Arial" pitchFamily="34" charset="-120"/>
+              </a:rPr>
+              <a:t>• Local Access: ~40 CPU cycles (Node RAM via integrated memory controller)</a:t>
+            </a:r>
+            <a:endParaRPr lang="en-US" sz="980" dirty="0"/>
+          </a:p>
+          <a:p>
+            <a:pPr indent="0" marL="0">
+              <a:lnSpc>
+                <a:spcPts val="1600"/>
+              </a:lnSpc>
+              <a:buNone/>
+            </a:pPr>
+            <a:r>
+              <a:rPr lang="en-US" sz="980" dirty="0">
+                <a:solidFill>
+                  <a:srgbClr val="374151"/>
+                </a:solidFill>
+                <a:latin typeface="Arial" pitchFamily="34" charset="0"/>
+                <a:ea typeface="Arial" pitchFamily="34" charset="-122"/>
+                <a:cs typeface="Arial" pitchFamily="34" charset="-120"/>
+              </a:rPr>
+              <a:t>• Remote Access: 240 – 340 CPU cycles (Cross-socket HyperTransport bus)</a:t>
+            </a:r>
+            <a:endParaRPr lang="en-US" sz="980" dirty="0"/>
+          </a:p>
+          <a:p>
+            <a:pPr indent="0" marL="0">
+              <a:lnSpc>
+                <a:spcPts val="1600"/>
+              </a:lnSpc>
+              <a:buNone/>
+            </a:pPr>
+            <a:r>
+              <a:rPr lang="en-US" sz="980" dirty="0">
+                <a:solidFill>
+                  <a:srgbClr val="374151"/>
+                </a:solidFill>
+                <a:latin typeface="Arial" pitchFamily="34" charset="0"/>
+                <a:ea typeface="Arial" pitchFamily="34" charset="-122"/>
+                <a:cs typeface="Arial" pitchFamily="34" charset="-120"/>
+              </a:rPr>
+              <a:t>• Diameter: 3 hops maximum between opposing sockets</a:t>
+            </a:r>
+            <a:endParaRPr lang="en-US" sz="980" dirty="0"/>
+          </a:p>
+          <a:p>
+            <a:pPr indent="0" marL="0">
+              <a:lnSpc>
+                <a:spcPts val="1600"/>
+              </a:lnSpc>
+              <a:buNone/>
+            </a:pPr>
+            <a:r>
+              <a:rPr lang="en-US" sz="980" dirty="0">
+                <a:solidFill>
+                  <a:srgbClr val="374151"/>
+                </a:solidFill>
+                <a:latin typeface="Arial" pitchFamily="34" charset="0"/>
+                <a:ea typeface="Arial" pitchFamily="34" charset="-122"/>
+                <a:cs typeface="Arial" pitchFamily="34" charset="-120"/>
+              </a:rPr>
+              <a:t>• Distribution: First-touch page allocation (4 KB page granularity)</a:t>
+            </a:r>
+            <a:endParaRPr lang="en-US" sz="980" dirty="0"/>
+          </a:p>
+          <a:p>
+            <a:pPr indent="0" marL="0">
+              <a:lnSpc>
+                <a:spcPts val="1600"/>
+              </a:lnSpc>
+              <a:buNone/>
+            </a:pPr>
+            <a:r>
+              <a:rPr lang="en-US" sz="980" dirty="0">
+                <a:solidFill>
+                  <a:srgbClr val="374151"/>
+                </a:solidFill>
+                <a:latin typeface="Arial" pitchFamily="34" charset="0"/>
+                <a:ea typeface="Arial" pitchFamily="34" charset="-122"/>
+                <a:cs typeface="Arial" pitchFamily="34" charset="-120"/>
+              </a:rPr>
+              <a:t>• Pathology: Bus congestion under work-stealing drags 6×–8× stall penalty</a:t>
+            </a:r>
+            <a:endParaRPr lang="en-US" sz="980" dirty="0"/>
+          </a:p>
+        </p:txBody>
+      </p:sp>
+      <p:sp>
+        <p:nvSpPr>
+          <p:cNvPr id="16" name="Shape 14"/>
+          <p:cNvSpPr/>
+          <p:nvPr/>
+        </p:nvSpPr>
+        <p:spPr>
+          <a:xfrm>
+            <a:off x="1005840" y="4828032"/>
+            <a:ext cx="4709160" cy="731520"/>
+          </a:xfrm>
+          <a:prstGeom prst="roundRect">
+            <a:avLst>
+              <a:gd name="adj" fmla="val 10000"/>
+            </a:avLst>
+          </a:prstGeom>
+          <a:solidFill>
+            <a:srgbClr val="FFFFFF"/>
+          </a:solidFill>
+          <a:ln w="15240">
+            <a:solidFill>
+              <a:srgbClr val="111827"/>
+            </a:solidFill>
+            <a:prstDash val="solid"/>
+          </a:ln>
+        </p:spPr>
+      </p:sp>
+      <p:sp>
+        <p:nvSpPr>
+          <p:cNvPr id="17" name="Text 15"/>
+          <p:cNvSpPr/>
+          <p:nvPr/>
+        </p:nvSpPr>
+        <p:spPr>
+          <a:xfrm>
+            <a:off x="1097280" y="4846320"/>
+            <a:ext cx="4526280" cy="676656"/>
+          </a:xfrm>
+          <a:prstGeom prst="rect">
+            <a:avLst/>
+          </a:prstGeom>
+          <a:noFill/>
+          <a:ln/>
+        </p:spPr>
+        <p:txBody>
+          <a:bodyPr wrap="square" rtlCol="0" anchor="ctr"/>
+          <a:lstStyle/>
+          <a:p>
+            <a:pPr indent="0" marL="0">
+              <a:buNone/>
+            </a:pPr>
+            <a:r>
+              <a:rPr lang="en-US" sz="850" dirty="0">
+                <a:solidFill>
+                  <a:srgbClr val="111827"/>
+                </a:solidFill>
+                <a:latin typeface="Courier New" pitchFamily="34" charset="0"/>
+                <a:ea typeface="Courier New" pitchFamily="34" charset="-122"/>
+                <a:cs typeface="Courier New" pitchFamily="34" charset="-120"/>
+              </a:rPr>
+              <a:t>Hardware Interconnect Spec: HyperTransport 3.0 (6.4 GT/s per link) · 6.0×–8.5× remote access penalty · Coherent CC-NUMA cache protocol · Hardware IMC on-die</a:t>
+            </a:r>
+            <a:endParaRPr lang="en-US" sz="850" dirty="0"/>
+          </a:p>
+        </p:txBody>
+      </p:sp>
+      <p:sp>
+        <p:nvSpPr>
+          <p:cNvPr id="18" name="Shape 16"/>
+          <p:cNvSpPr/>
+          <p:nvPr/>
+        </p:nvSpPr>
+        <p:spPr>
+          <a:xfrm>
+            <a:off x="6272784" y="1837944"/>
+            <a:ext cx="5257800" cy="3886200"/>
+          </a:xfrm>
+          <a:prstGeom prst="roundRect">
+            <a:avLst>
+              <a:gd name="adj" fmla="val 3765"/>
+            </a:avLst>
+          </a:prstGeom>
+          <a:solidFill>
+            <a:srgbClr val="111827"/>
+          </a:solidFill>
+          <a:ln w="12700">
+            <a:solidFill>
+              <a:srgbClr val="111827"/>
+            </a:solidFill>
+            <a:prstDash val="solid"/>
+          </a:ln>
+        </p:spPr>
+      </p:sp>
+      <p:sp>
+        <p:nvSpPr>
+          <p:cNvPr id="19" name="Shape 17"/>
+          <p:cNvSpPr/>
+          <p:nvPr/>
+        </p:nvSpPr>
+        <p:spPr>
+          <a:xfrm>
+            <a:off x="6217920" y="1783080"/>
+            <a:ext cx="5257800" cy="3886200"/>
+          </a:xfrm>
+          <a:prstGeom prst="roundRect">
+            <a:avLst>
+              <a:gd name="adj" fmla="val 3765"/>
+            </a:avLst>
+          </a:prstGeom>
+          <a:solidFill>
+            <a:srgbClr val="FFF1EB"/>
+          </a:solidFill>
+          <a:ln w="19050">
+            <a:solidFill>
+              <a:srgbClr val="111827"/>
+            </a:solidFill>
+            <a:prstDash val="solid"/>
+          </a:ln>
+        </p:spPr>
+      </p:sp>
+      <p:sp>
+        <p:nvSpPr>
+          <p:cNvPr id="20" name="Text 18"/>
+          <p:cNvSpPr/>
+          <p:nvPr/>
+        </p:nvSpPr>
+        <p:spPr>
+          <a:xfrm>
+            <a:off x="6492240" y="1901952"/>
+            <a:ext cx="4663440" cy="320040"/>
+          </a:xfrm>
+          <a:prstGeom prst="rect">
+            <a:avLst/>
+          </a:prstGeom>
+          <a:noFill/>
+          <a:ln/>
+        </p:spPr>
+        <p:txBody>
+          <a:bodyPr wrap="square" rtlCol="0" anchor="ctr"/>
+          <a:lstStyle/>
+          <a:p>
+            <a:pPr indent="0" marL="0">
+              <a:buNone/>
+            </a:pPr>
+            <a:r>
+              <a:rPr lang="en-US" sz="1600" dirty="0">
+                <a:solidFill>
+                  <a:srgbClr val="111827"/>
+                </a:solidFill>
+                <a:latin typeface="Arial Black" pitchFamily="34" charset="0"/>
+                <a:ea typeface="Arial Black" pitchFamily="34" charset="-122"/>
+                <a:cs typeface="Arial Black" pitchFamily="34" charset="-120"/>
+              </a:rPr>
+              <a:t>TILEPro64 64-Tile Manycore Mesh</a:t>
+            </a:r>
+            <a:endParaRPr lang="en-US" sz="1600" dirty="0"/>
+          </a:p>
+        </p:txBody>
+      </p:sp>
+      <p:sp>
+        <p:nvSpPr>
+          <p:cNvPr id="21" name="Shape 19"/>
+          <p:cNvSpPr/>
+          <p:nvPr/>
+        </p:nvSpPr>
+        <p:spPr>
+          <a:xfrm>
+            <a:off x="6492240" y="2240280"/>
+            <a:ext cx="2560320" cy="237744"/>
+          </a:xfrm>
+          <a:prstGeom prst="roundRect">
+            <a:avLst>
+              <a:gd name="adj" fmla="val 50000"/>
+            </a:avLst>
+          </a:prstGeom>
+          <a:solidFill>
+            <a:srgbClr val="FFFFFF"/>
+          </a:solidFill>
+          <a:ln w="15240">
+            <a:solidFill>
+              <a:srgbClr val="111827"/>
+            </a:solidFill>
+            <a:prstDash val="solid"/>
+          </a:ln>
+        </p:spPr>
+      </p:sp>
+      <p:sp>
+        <p:nvSpPr>
+          <p:cNvPr id="22" name="Text 20"/>
+          <p:cNvSpPr/>
+          <p:nvPr/>
+        </p:nvSpPr>
+        <p:spPr>
+          <a:xfrm>
+            <a:off x="6492240" y="2240280"/>
+            <a:ext cx="2560320" cy="237744"/>
+          </a:xfrm>
+          <a:prstGeom prst="rect">
+            <a:avLst/>
+          </a:prstGeom>
+          <a:noFill/>
+          <a:ln/>
+        </p:spPr>
+        <p:txBody>
+          <a:bodyPr wrap="square" rtlCol="0" anchor="ctr"/>
+          <a:lstStyle/>
+          <a:p>
+            <a:pPr algn="ctr" indent="0" marL="0">
+              <a:buNone/>
+            </a:pPr>
+            <a:r>
+              <a:rPr lang="en-US" sz="800" b="1" dirty="0">
+                <a:solidFill>
+                  <a:srgbClr val="111827"/>
+                </a:solidFill>
+                <a:latin typeface="Courier New" pitchFamily="34" charset="0"/>
+                <a:ea typeface="Courier New" pitchFamily="34" charset="-122"/>
+                <a:cs typeface="Courier New" pitchFamily="34" charset="-120"/>
+              </a:rPr>
+              <a:t>8×8 2D Dynamic Mesh Network</a:t>
+            </a:r>
+            <a:endParaRPr lang="en-US" sz="800" dirty="0"/>
+          </a:p>
+        </p:txBody>
+      </p:sp>
+      <p:sp>
+        <p:nvSpPr>
+          <p:cNvPr id="23" name="Text 21"/>
+          <p:cNvSpPr/>
+          <p:nvPr/>
+        </p:nvSpPr>
+        <p:spPr>
+          <a:xfrm>
+            <a:off x="6492240" y="2560320"/>
+            <a:ext cx="4663440" cy="2194560"/>
+          </a:xfrm>
+          <a:prstGeom prst="rect">
+            <a:avLst/>
+          </a:prstGeom>
+          <a:noFill/>
+          <a:ln/>
+        </p:spPr>
+        <p:txBody>
+          <a:bodyPr wrap="square" rtlCol="0" anchor="ctr"/>
+          <a:lstStyle/>
+          <a:p>
+            <a:pPr indent="0" marL="0">
+              <a:lnSpc>
+                <a:spcPts val="1600"/>
+              </a:lnSpc>
+              <a:buNone/>
+            </a:pPr>
+            <a:r>
+              <a:rPr lang="en-US" sz="980" dirty="0">
+                <a:solidFill>
+                  <a:srgbClr val="374151"/>
+                </a:solidFill>
+                <a:latin typeface="Arial" pitchFamily="34" charset="0"/>
+                <a:ea typeface="Arial" pitchFamily="34" charset="-122"/>
+                <a:cs typeface="Arial" pitchFamily="34" charset="-120"/>
+              </a:rPr>
+              <a:t>• Topology: 8×8 2D grid network (1 VLIW core per tile, 64 cores total)</a:t>
+            </a:r>
+            <a:endParaRPr lang="en-US" sz="980" dirty="0"/>
+          </a:p>
+          <a:p>
+            <a:pPr indent="0" marL="0">
+              <a:lnSpc>
+                <a:spcPts val="1600"/>
+              </a:lnSpc>
+              <a:buNone/>
+            </a:pPr>
+            <a:r>
+              <a:rPr lang="en-US" sz="980" dirty="0">
+                <a:solidFill>
+                  <a:srgbClr val="374151"/>
+                </a:solidFill>
+                <a:latin typeface="Arial" pitchFamily="34" charset="0"/>
+                <a:ea typeface="Arial" pitchFamily="34" charset="-122"/>
+                <a:cs typeface="Arial" pitchFamily="34" charset="-120"/>
+              </a:rPr>
+              <a:t>• Memory: Distributed shared L2 cache (64 KB slice homed per tile = 4 MB total)</a:t>
+            </a:r>
+            <a:endParaRPr lang="en-US" sz="980" dirty="0"/>
+          </a:p>
+          <a:p>
+            <a:pPr indent="0" marL="0">
+              <a:lnSpc>
+                <a:spcPts val="1600"/>
+              </a:lnSpc>
+              <a:buNone/>
+            </a:pPr>
+            <a:r>
+              <a:rPr lang="en-US" sz="980" dirty="0">
+                <a:solidFill>
+                  <a:srgbClr val="374151"/>
+                </a:solidFill>
+                <a:latin typeface="Arial" pitchFamily="34" charset="0"/>
+                <a:ea typeface="Arial" pitchFamily="34" charset="-122"/>
+                <a:cs typeface="Arial" pitchFamily="34" charset="-120"/>
+              </a:rPr>
+              <a:t>• Local Access: 10 CPU cycles (Local tile L2 cache bank)</a:t>
+            </a:r>
+            <a:endParaRPr lang="en-US" sz="980" dirty="0"/>
+          </a:p>
+          <a:p>
+            <a:pPr indent="0" marL="0">
+              <a:lnSpc>
+                <a:spcPts val="1600"/>
+              </a:lnSpc>
+              <a:buNone/>
+            </a:pPr>
+            <a:r>
+              <a:rPr lang="en-US" sz="980" dirty="0">
+                <a:solidFill>
+                  <a:srgbClr val="374151"/>
+                </a:solidFill>
+                <a:latin typeface="Arial" pitchFamily="34" charset="0"/>
+                <a:ea typeface="Arial" pitchFamily="34" charset="-122"/>
+                <a:cs typeface="Arial" pitchFamily="34" charset="-120"/>
+              </a:rPr>
+              <a:t>• Remote Access: 38 cycles base + 2 cycles per Manhattan hop (|Δx| + |Δy|)</a:t>
+            </a:r>
+            <a:endParaRPr lang="en-US" sz="980" dirty="0"/>
+          </a:p>
+          <a:p>
+            <a:pPr indent="0" marL="0">
+              <a:lnSpc>
+                <a:spcPts val="1600"/>
+              </a:lnSpc>
+              <a:buNone/>
+            </a:pPr>
+            <a:r>
+              <a:rPr lang="en-US" sz="980" dirty="0">
+                <a:solidFill>
+                  <a:srgbClr val="374151"/>
+                </a:solidFill>
+                <a:latin typeface="Arial" pitchFamily="34" charset="0"/>
+                <a:ea typeface="Arial" pitchFamily="34" charset="-122"/>
+                <a:cs typeface="Arial" pitchFamily="34" charset="-120"/>
+              </a:rPr>
+              <a:t>• Diameter: 14 hops between corners ((7-0) + (7-0) = 14 hops = 66 cycles)</a:t>
+            </a:r>
+            <a:endParaRPr lang="en-US" sz="980" dirty="0"/>
+          </a:p>
+          <a:p>
+            <a:pPr indent="0" marL="0">
+              <a:lnSpc>
+                <a:spcPts val="1600"/>
+              </a:lnSpc>
+              <a:buNone/>
+            </a:pPr>
+            <a:r>
+              <a:rPr lang="en-US" sz="980" dirty="0">
+                <a:solidFill>
+                  <a:srgbClr val="374151"/>
+                </a:solidFill>
+                <a:latin typeface="Arial" pitchFamily="34" charset="0"/>
+                <a:ea typeface="Arial" pitchFamily="34" charset="-122"/>
+                <a:cs typeface="Arial" pitchFamily="34" charset="-120"/>
+              </a:rPr>
+              <a:t>• Distribution: Coarse (entire buffer in 1 tile) vs Fine (striped cache lines)</a:t>
+            </a:r>
+            <a:endParaRPr lang="en-US" sz="980" dirty="0"/>
+          </a:p>
+          <a:p>
+            <a:pPr indent="0" marL="0">
+              <a:lnSpc>
+                <a:spcPts val="1600"/>
+              </a:lnSpc>
+              <a:buNone/>
+            </a:pPr>
+            <a:r>
+              <a:rPr lang="en-US" sz="980" dirty="0">
+                <a:solidFill>
+                  <a:srgbClr val="374151"/>
+                </a:solidFill>
+                <a:latin typeface="Arial" pitchFamily="34" charset="0"/>
+                <a:ea typeface="Arial" pitchFamily="34" charset="-122"/>
+                <a:cs typeface="Arial" pitchFamily="34" charset="-120"/>
+              </a:rPr>
+              <a:t>• Pathology: Center bisection link contention; static home cache trapping</a:t>
+            </a:r>
+            <a:endParaRPr lang="en-US" sz="980" dirty="0"/>
+          </a:p>
+        </p:txBody>
+      </p:sp>
+      <p:sp>
+        <p:nvSpPr>
+          <p:cNvPr id="24" name="Shape 22"/>
+          <p:cNvSpPr/>
+          <p:nvPr/>
+        </p:nvSpPr>
+        <p:spPr>
+          <a:xfrm>
+            <a:off x="6492240" y="4828032"/>
+            <a:ext cx="4709160" cy="731520"/>
+          </a:xfrm>
+          <a:prstGeom prst="roundRect">
+            <a:avLst>
+              <a:gd name="adj" fmla="val 10000"/>
+            </a:avLst>
+          </a:prstGeom>
+          <a:solidFill>
+            <a:srgbClr val="FFFFFF"/>
+          </a:solidFill>
+          <a:ln w="15240">
+            <a:solidFill>
+              <a:srgbClr val="111827"/>
+            </a:solidFill>
+            <a:prstDash val="solid"/>
+          </a:ln>
+        </p:spPr>
+      </p:sp>
+      <p:sp>
+        <p:nvSpPr>
+          <p:cNvPr id="25" name="Text 23"/>
+          <p:cNvSpPr/>
+          <p:nvPr/>
+        </p:nvSpPr>
+        <p:spPr>
+          <a:xfrm>
+            <a:off x="6583680" y="4846320"/>
+            <a:ext cx="4526280" cy="676656"/>
+          </a:xfrm>
+          <a:prstGeom prst="rect">
+            <a:avLst/>
+          </a:prstGeom>
+          <a:noFill/>
+          <a:ln/>
+        </p:spPr>
+        <p:txBody>
+          <a:bodyPr wrap="square" rtlCol="0" anchor="ctr"/>
+          <a:lstStyle/>
+          <a:p>
+            <a:pPr indent="0" marL="0">
+              <a:buNone/>
+            </a:pPr>
+            <a:r>
+              <a:rPr lang="en-US" sz="850" dirty="0">
+                <a:solidFill>
+                  <a:srgbClr val="111827"/>
+                </a:solidFill>
+                <a:latin typeface="Courier New" pitchFamily="34" charset="0"/>
+                <a:ea typeface="Courier New" pitchFamily="34" charset="-122"/>
+                <a:cs typeface="Courier New" pitchFamily="34" charset="-120"/>
+              </a:rPr>
+              <a:t>Mesh Interconnect Spec: 3 separate dynamic networks (UDI, IDN, MDN) · 16 unidirectional 32-bit channels · XY Dimension-Order Routing · No central crossbar</a:t>
+            </a:r>
+            <a:endParaRPr lang="en-US" sz="850" dirty="0"/>
+          </a:p>
+        </p:txBody>
+      </p:sp>
+      <p:sp>
+        <p:nvSpPr>
+          <p:cNvPr id="26" name="Shape 24"/>
+          <p:cNvSpPr/>
+          <p:nvPr/>
+        </p:nvSpPr>
+        <p:spPr>
+          <a:xfrm>
+            <a:off x="777240" y="5806440"/>
+            <a:ext cx="10744200" cy="502920"/>
+          </a:xfrm>
+          <a:prstGeom prst="roundRect">
+            <a:avLst>
+              <a:gd name="adj" fmla="val 18182"/>
+            </a:avLst>
+          </a:prstGeom>
+          <a:solidFill>
+            <a:srgbClr val="111827"/>
+          </a:solidFill>
+          <a:ln w="12700">
+            <a:solidFill>
+              <a:srgbClr val="111827"/>
+            </a:solidFill>
+            <a:prstDash val="solid"/>
+          </a:ln>
+        </p:spPr>
+      </p:sp>
+      <p:sp>
+        <p:nvSpPr>
+          <p:cNvPr id="27" name="Shape 25"/>
+          <p:cNvSpPr/>
+          <p:nvPr/>
+        </p:nvSpPr>
+        <p:spPr>
+          <a:xfrm>
+            <a:off x="731520" y="5760720"/>
+            <a:ext cx="10744200" cy="502920"/>
+          </a:xfrm>
+          <a:prstGeom prst="roundRect">
+            <a:avLst>
+              <a:gd name="adj" fmla="val 18182"/>
+            </a:avLst>
+          </a:prstGeom>
+          <a:solidFill>
+            <a:srgbClr val="FFD147"/>
+          </a:solidFill>
+          <a:ln w="19050">
+            <a:solidFill>
+              <a:srgbClr val="111827"/>
+            </a:solidFill>
+            <a:prstDash val="solid"/>
+          </a:ln>
+        </p:spPr>
+      </p:sp>
+      <p:sp>
+        <p:nvSpPr>
+          <p:cNvPr id="28" name="Text 26"/>
+          <p:cNvSpPr/>
+          <p:nvPr/>
+        </p:nvSpPr>
+        <p:spPr>
+          <a:xfrm>
+            <a:off x="914400" y="5760720"/>
+            <a:ext cx="10378440" cy="502920"/>
+          </a:xfrm>
+          <a:prstGeom prst="rect">
+            <a:avLst/>
+          </a:prstGeom>
+          <a:noFill/>
+          <a:ln/>
+        </p:spPr>
+        <p:txBody>
+          <a:bodyPr wrap="square" rtlCol="0" anchor="ctr"/>
+          <a:lstStyle/>
+          <a:p>
+            <a:pPr indent="0" marL="0">
+              <a:buNone/>
+            </a:pPr>
+            <a:r>
+              <a:rPr lang="en-US" sz="1100" b="1" dirty="0">
+                <a:solidFill>
+                  <a:srgbClr val="111827"/>
+                </a:solidFill>
+                <a:latin typeface="Arial Black" pitchFamily="34" charset="0"/>
+                <a:ea typeface="Arial Black" pitchFamily="34" charset="-122"/>
+                <a:cs typeface="Arial Black" pitchFamily="34" charset="-120"/>
+              </a:rPr>
+              <a:t>Architectural Lesson: </a:t>
+            </a:r>
+            <a:pPr indent="0" marL="0">
+              <a:buNone/>
+            </a:pPr>
+            <a:r>
+              <a:rPr lang="en-US" sz="1050" dirty="0">
+                <a:solidFill>
+                  <a:srgbClr val="111827"/>
+                </a:solidFill>
+                <a:latin typeface="Arial" pitchFamily="34" charset="0"/>
+                <a:ea typeface="Arial" pitchFamily="34" charset="-122"/>
+                <a:cs typeface="Arial" pitchFamily="34" charset="-120"/>
+              </a:rPr>
+              <a:t>In NUMA, memory latency is tied to physical socket boundaries. In TILEPro64, it scales continuously with 2D geometric Manhattan distance. Uniform task schedulers fail catastrophically on both.</a:t>
+            </a:r>
+            <a:endParaRPr lang="en-US" sz="1100" dirty="0"/>
+          </a:p>
+        </p:txBody>
+      </p:sp>
+      <p:sp>
+        <p:nvSpPr>
+          <p:cNvPr id="29" name="Text 27"/>
+          <p:cNvSpPr/>
+          <p:nvPr/>
+        </p:nvSpPr>
+        <p:spPr>
+          <a:xfrm>
+            <a:off x="731520" y="6355080"/>
+            <a:ext cx="8229600" cy="320040"/>
+          </a:xfrm>
+          <a:prstGeom prst="rect">
+            <a:avLst/>
+          </a:prstGeom>
+          <a:noFill/>
+          <a:ln/>
+        </p:spPr>
+        <p:txBody>
+          <a:bodyPr wrap="square" rtlCol="0" anchor="ctr"/>
+          <a:lstStyle/>
+          <a:p>
+            <a:pPr indent="0" marL="0">
+              <a:buNone/>
+            </a:pPr>
+            <a:r>
+              <a:rPr lang="en-US" sz="950" dirty="0">
+                <a:solidFill>
+                  <a:srgbClr val="4B5563"/>
+                </a:solidFill>
+                <a:latin typeface="Courier New" pitchFamily="34" charset="0"/>
+                <a:ea typeface="Courier New" pitchFamily="34" charset="-122"/>
+                <a:cs typeface="Courier New" pitchFamily="34" charset="-120"/>
+              </a:rPr>
+              <a:t>Locality-Aware Task Scheduling · Hardware Topology &amp; Latency Models</a:t>
+            </a:r>
+            <a:endParaRPr lang="en-US" sz="950" dirty="0"/>
+          </a:p>
+        </p:txBody>
+      </p:sp>
+      <p:sp>
+        <p:nvSpPr>
+          <p:cNvPr id="30" name="Text 28"/>
+          <p:cNvSpPr/>
+          <p:nvPr/>
+        </p:nvSpPr>
+        <p:spPr>
+          <a:xfrm>
+            <a:off x="10058400" y="6355080"/>
+            <a:ext cx="1399032" cy="320040"/>
+          </a:xfrm>
+          <a:prstGeom prst="rect">
+            <a:avLst/>
+          </a:prstGeom>
+          <a:noFill/>
+          <a:ln/>
+        </p:spPr>
+        <p:txBody>
+          <a:bodyPr wrap="square" rtlCol="0" anchor="ctr"/>
+          <a:lstStyle/>
+          <a:p>
+            <a:pPr algn="r" indent="0" marL="0">
+              <a:buNone/>
+            </a:pPr>
+            <a:r>
+              <a:rPr lang="en-US" sz="950" dirty="0">
+                <a:solidFill>
+                  <a:srgbClr val="4B5563"/>
+                </a:solidFill>
+                <a:latin typeface="Courier New" pitchFamily="34" charset="0"/>
+                <a:ea typeface="Courier New" pitchFamily="34" charset="-122"/>
+                <a:cs typeface="Courier New" pitchFamily="34" charset="-120"/>
+              </a:rPr>
+              <a:t>02 / 06</a:t>
+            </a:r>
+            <a:endParaRPr lang="en-US" sz="950" dirty="0"/>
+          </a:p>
+        </p:txBody>
+      </p:sp>
+    </p:spTree>
+  </p:cSld>
+  <p:clrMapOvr>
+    <a:masterClrMapping/>
+  </p:clrMapOvr>
+</p:sld>
 </file>
 
-<file path=ppt/slides/slide3.xml><?xml version="1.0" encoding="UTF-8" standalone="yes"?>
-<p:sld xmlns:a="http://schemas.openxmlformats.org/drawingml/2006/main" xmlns:r="http://schemas.openxmlformats.org/officeDocument/2006/relationships" xmlns:p="http://schemas.openxmlformats.org/presentationml/2006/main"><p:cSld name="Slide 3"><p:spTree><p:nvGrpSpPr><p:cNvPr id="1" name=""/><p:cNvGrpSpPr/><p:nvPr/></p:nvGrpSpPr><p:grpSpPr><a:xfrm><a:off x="0" y="0"/><a:ext cx="0" cy="0"/><a:chOff x="0" y="0"/><a:chExt cx="0" cy="0"/></a:xfrm></p:grpSpPr><p:sp><p:nvSpPr><p:cNvPr id="2" name="Shape 0"></p:cNvPr><p:cNvSpPr/><p:nvPr></p:nvPr></p:nvSpPr><p:spPr><a:xfrm><a:off x="0" y="0"/><a:ext cx="12191695" cy="6858000"/></a:xfrm><a:prstGeom prst="rect"><a:avLst></a:avLst></a:prstGeom><a:solidFill><a:srgbClr val="F4F0EA"/></a:solidFill><a:ln w="12700"><a:solidFill><a:srgbClr val="F4F0EA"/></a:solidFill><a:prstDash val="solid"/></a:ln></p:spPr></p:sp><p:sp><p:nvSpPr><p:cNvPr id="3" name="Shape 1"></p:cNvPr><p:cNvSpPr/><p:nvPr></p:nvPr></p:nvSpPr><p:spPr><a:xfrm><a:off x="960120" y="0"/><a:ext cx="9144" cy="6858000"/></a:xfrm><a:prstGeom prst="rect"><a:avLst></a:avLst></a:prstGeom><a:solidFill><a:srgbClr val="DDD8CF"/></a:solidFill><a:ln w="12700"><a:solidFill><a:srgbClr val="DDD8CF"/></a:solidFill><a:prstDash val="solid"/></a:ln></p:spPr></p:sp><p:sp><p:nvSpPr><p:cNvPr id="4" name="Shape 2"></p:cNvPr><p:cNvSpPr/><p:nvPr></p:nvPr></p:nvSpPr><p:spPr><a:xfrm><a:off x="1920240" y="0"/><a:ext cx="9144" cy="6858000"/></a:xfrm><a:prstGeom prst="rect"><a:avLst></a:avLst></a:prstGeom><a:solidFill><a:srgbClr val="DDD8CF"/></a:solidFill><a:ln w="12700"><a:solidFill><a:srgbClr val="DDD8CF"/></a:solidFill><a:prstDash val="solid"/></a:ln></p:spPr></p:sp><p:sp><p:nvSpPr><p:cNvPr id="5" name="Shape 3"></p:cNvPr><p:cNvSpPr/><p:nvPr></p:nvPr></p:nvSpPr><p:spPr><a:xfrm><a:off x="2880360" y="0"/><a:ext cx="9144" cy="6858000"/></a:xfrm><a:prstGeom prst="rect"><a:avLst></a:avLst></a:prstGeom><a:solidFill><a:srgbClr val="DDD8CF"/></a:solidFill><a:ln w="12700"><a:solidFill><a:srgbClr val="DDD8CF"/></a:solidFill><a:prstDash val="solid"/></a:ln></p:spPr></p:sp><p:sp><p:nvSpPr><p:cNvPr id="6" name="Shape 4"></p:cNvPr><p:cNvSpPr/><p:nvPr></p:nvPr></p:nvSpPr><p:spPr><a:xfrm><a:off x="3840480" y="0"/><a:ext cx="9144" cy="6858000"/></a:xfrm><a:prstGeom prst="rect"><a:avLst></a:avLst></a:prstGeom><a:solidFill><a:srgbClr val="DDD8CF"/></a:solidFill><a:ln w="12700"><a:solidFill><a:srgbClr val="DDD8CF"/></a:solidFill><a:prstDash val="solid"/></a:ln></p:spPr></p:sp><p:sp><p:nvSpPr><p:cNvPr id="7" name="Shape 5"></p:cNvPr><p:cNvSpPr/><p:nvPr></p:nvPr></p:nvSpPr><p:spPr><a:xfrm><a:off x="4800600" y="0"/><a:ext cx="9144" cy="6858000"/></a:xfrm><a:prstGeom prst="rect"><a:avLst></a:avLst></a:prstGeom><a:solidFill><a:srgbClr val="DDD8CF"/></a:solidFill><a:ln w="12700"><a:solidFill><a:srgbClr val="DDD8CF"/></a:solidFill><a:prstDash val="solid"/></a:ln></p:spPr></p:sp><p:sp><p:nvSpPr><p:cNvPr id="8" name="Shape 6"></p:cNvPr><p:cNvSpPr/><p:nvPr></p:nvPr></p:nvSpPr><p:spPr><a:xfrm><a:off x="5760720" y="0"/><a:ext cx="9144" cy="6858000"/></a:xfrm><a:prstGeom prst="rect"><a:avLst></a:avLst></a:prstGeom><a:solidFill><a:srgbClr val="DDD8CF"/></a:solidFill><a:ln w="12700"><a:solidFill><a:srgbClr val="DDD8CF"/></a:solidFill><a:prstDash val="solid"/></a:ln></p:spPr></p:sp><p:sp><p:nvSpPr><p:cNvPr id="9" name="Shape 7"></p:cNvPr><p:cNvSpPr/><p:nvPr></p:nvPr></p:nvSpPr><p:spPr><a:xfrm><a:off x="6720840" y="0"/><a:ext cx="9144" cy="6858000"/></a:xfrm><a:prstGeom prst="rect"><a:avLst></a:avLst></a:prstGeom><a:solidFill><a:srgbClr val="DDD8CF"/></a:solidFill><a:ln w="12700"><a:solidFill><a:srgbClr val="DDD8CF"/></a:solidFill><a:prstDash val="solid"/></a:ln></p:spPr></p:sp><p:sp><p:nvSpPr><p:cNvPr id="10" name="Shape 8"></p:cNvPr><p:cNvSpPr/><p:nvPr></p:nvPr></p:nvSpPr><p:spPr><a:xfrm><a:off x="7680960" y="0"/><a:ext cx="9144" cy="6858000"/></a:xfrm><a:prstGeom prst="rect"><a:avLst></a:avLst></a:prstGeom><a:solidFill><a:srgbClr val="DDD8CF"/></a:solidFill><a:ln w="12700"><a:solidFill><a:srgbClr val="DDD8CF"/></a:solidFill><a:prstDash val="solid"/></a:ln></p:spPr></p:sp><p:sp><p:nvSpPr><p:cNvPr id="11" name="Shape 9"></p:cNvPr><p:cNvSpPr/><p:nvPr></p:nvPr></p:nvSpPr><p:spPr><a:xfrm><a:off x="8641080" y="0"/><a:ext cx="9144" cy="6858000"/></a:xfrm><a:prstGeom prst="rect"><a:avLst></a:avLst></a:prstGeom><a:solidFill><a:srgbClr val="DDD8CF"/></a:solidFill><a:ln w="12700"><a:solidFill><a:srgbClr val="DDD8CF"/></a:solidFill><a:prstDash val="solid"/></a:ln></p:spPr></p:sp><p:sp><p:nvSpPr><p:cNvPr id="12" name="Shape 10"></p:cNvPr><p:cNvSpPr/><p:nvPr></p:nvPr></p:nvSpPr><p:spPr><a:xfrm><a:off x="9601200" y="0"/><a:ext cx="9144" cy="6858000"/></a:xfrm><a:prstGeom prst="rect"><a:avLst></a:avLst></a:prstGeom><a:solidFill><a:srgbClr val="DDD8CF"/></a:solidFill><a:ln w="12700"><a:solidFill><a:srgbClr val="DDD8CF"/></a:solidFill><a:prstDash val="solid"/></a:ln></p:spPr></p:sp><p:sp><p:nvSpPr><p:cNvPr id="13" name="Shape 11"></p:cNvPr><p:cNvSpPr/><p:nvPr></p:nvPr></p:nvSpPr><p:spPr><a:xfrm><a:off x="10561320" y="0"/><a:ext cx="9144" cy="6858000"/></a:xfrm><a:prstGeom prst="rect"><a:avLst></a:avLst></a:prstGeom><a:solidFill><a:srgbClr val="DDD8CF"/></a:solidFill><a:ln w="12700"><a:solidFill><a:srgbClr val="DDD8CF"/></a:solidFill><a:prstDash val="solid"/></a:ln></p:spPr></p:sp><p:sp><p:nvSpPr><p:cNvPr id="14" name="Shape 12"></p:cNvPr><p:cNvSpPr/><p:nvPr></p:nvPr></p:nvSpPr><p:spPr><a:xfrm><a:off x="0" y="960120"/><a:ext cx="12191695" cy="9144"/></a:xfrm><a:prstGeom prst="rect"><a:avLst></a:avLst></a:prstGeom><a:solidFill><a:srgbClr val="DDD8CF"/></a:solidFill><a:ln w="12700"><a:solidFill><a:srgbClr val="DDD8CF"/></a:solidFill><a:prstDash val="solid"/></a:ln></p:spPr></p:sp><p:sp><p:nvSpPr><p:cNvPr id="15" name="Shape 13"></p:cNvPr><p:cNvSpPr/><p:nvPr></p:nvPr></p:nvSpPr><p:spPr><a:xfrm><a:off x="0" y="1920240"/><a:ext cx="12191695" cy="9144"/></a:xfrm><a:prstGeom prst="rect"><a:avLst></a:avLst></a:prstGeom><a:solidFill><a:srgbClr val="DDD8CF"/></a:solidFill><a:ln w="12700"><a:solidFill><a:srgbClr val="DDD8CF"/></a:solidFill><a:prstDash val="solid"/></a:ln></p:spPr></p:sp><p:sp><p:nvSpPr><p:cNvPr id="16" name="Shape 14"></p:cNvPr><p:cNvSpPr/><p:nvPr></p:nvPr></p:nvSpPr><p:spPr><a:xfrm><a:off x="0" y="2880360"/><a:ext cx="12191695" cy="9144"/></a:xfrm><a:prstGeom prst="rect"><a:avLst></a:avLst></a:prstGeom><a:solidFill><a:srgbClr val="DDD8CF"/></a:solidFill><a:ln w="12700"><a:solidFill><a:srgbClr val="DDD8CF"/></a:solidFill><a:prstDash val="solid"/></a:ln></p:spPr></p:sp><p:sp><p:nvSpPr><p:cNvPr id="17" name="Shape 15"></p:cNvPr><p:cNvSpPr/><p:nvPr></p:nvPr></p:nvSpPr><p:spPr><a:xfrm><a:off x="0" y="3840480"/><a:ext cx="12191695" cy="9144"/></a:xfrm><a:prstGeom prst="rect"><a:avLst></a:avLst></a:prstGeom><a:solidFill><a:srgbClr val="DDD8CF"/></a:solidFill><a:ln w="12700"><a:solidFill><a:srgbClr val="DDD8CF"/></a:solidFill><a:prstDash val="solid"/></a:ln></p:spPr></p:sp><p:sp><p:nvSpPr><p:cNvPr id="18" name="Shape 16"></p:cNvPr><p:cNvSpPr/><p:nvPr></p:nvPr></p:nvSpPr><p:spPr><a:xfrm><a:off x="0" y="4800600"/><a:ext cx="12191695" cy="9144"/></a:xfrm><a:prstGeom prst="rect"><a:avLst></a:avLst></a:prstGeom><a:solidFill><a:srgbClr val="DDD8CF"/></a:solidFill><a:ln w="12700"><a:solidFill><a:srgbClr val="DDD8CF"/></a:solidFill><a:prstDash val="solid"/></a:ln></p:spPr></p:sp><p:sp><p:nvSpPr><p:cNvPr id="19" name="Shape 17"></p:cNvPr><p:cNvSpPr/><p:nvPr></p:nvPr></p:nvSpPr><p:spPr><a:xfrm><a:off x="0" y="5760720"/><a:ext cx="12191695" cy="9144"/></a:xfrm><a:prstGeom prst="rect"><a:avLst></a:avLst></a:prstGeom><a:solidFill><a:srgbClr val="DDD8CF"/></a:solidFill><a:ln w="12700"><a:solidFill><a:srgbClr val="DDD8CF"/></a:solidFill><a:prstDash val="solid"/></a:ln></p:spPr></p:sp><p:sp><p:nvSpPr><p:cNvPr id="20" name="Shape 18"></p:cNvPr><p:cNvSpPr/><p:nvPr></p:nvPr></p:nvSpPr><p:spPr><a:xfrm><a:off x="411480" y="320040"/><a:ext cx="2377440" cy="292608"/></a:xfrm><a:prstGeom prst="roundRect"><a:avLst><a:gd name="adj" fmla="val 50000"/></a:avLst></a:prstGeom><a:solidFill><a:srgbClr val="111827"/></a:solidFill><a:ln w="12700"><a:solidFill><a:srgbClr val="111827"/></a:solidFill><a:prstDash val="solid"/></a:ln></p:spPr></p:sp><p:sp><p:nvSpPr><p:cNvPr id="21" name="Text 19"></p:cNvPr><p:cNvSpPr/><p:nvPr></p:nvPr></p:nvSpPr><p:spPr><a:xfrm><a:off x="502920" y="320040"/><a:ext cx="2194560" cy="292608"/></a:xfrm><a:prstGeom prst="rect"><a:avLst></a:avLst></a:prstGeom><a:noFill/><a:ln></a:ln></p:spPr><p:txBody><a:bodyPr wrap="square" rtlCol="0" anchor="ctr"></a:bodyPr><a:lstStyle/><a:p><a:pPr indent="0" marL="0"><a:buNone/></a:pPr><a:r><a:rPr lang="en-US" sz="900" b="1" spc="200" kern="0" dirty="0"><a:solidFill><a:srgbClr val="FFD147"/></a:solidFill><a:latin typeface=""JetBrains Mono", "Courier New", monospace" pitchFamily="34" charset="0"/><a:ea typeface=""JetBrains Mono", "Courier New", monospace" pitchFamily="34" charset="-122"/><a:cs typeface=""JetBrains Mono", "Courier New", monospace" pitchFamily="34" charset="-120"/></a:rPr><a:t>PART 02</a:t></a:r><a:endParaRPr lang="en-US" sz="900" dirty="0"/></a:p></p:txBody></p:sp><p:sp><p:nvSpPr><p:cNvPr id="22" name="Text 20"></p:cNvPr><p:cNvSpPr/><p:nvPr></p:nvPr></p:nvSpPr><p:spPr><a:xfrm><a:off x="411480" y="777240"/><a:ext cx="10972800" cy="640080"/></a:xfrm><a:prstGeom prst="rect"><a:avLst></a:avLst></a:prstGeom><a:noFill/><a:ln></a:ln></p:spPr><p:txBody><a:bodyPr wrap="square" rtlCol="0" anchor="ctr"></a:bodyPr><a:lstStyle/><a:p><a:pPr indent="0" marL="0"><a:buNone/></a:pPr><a:r><a:rPr lang="en-US" sz="4200" b="1" spc="-300" kern="0" dirty="0"><a:solidFill><a:srgbClr val="111827"/></a:solidFill><a:latin typeface="Arial Black, "Trebuchet MS", "Helvetica Neue", sans-serif" pitchFamily="34" charset="0"/><a:ea typeface="Arial Black, "Trebuchet MS", "Helvetica Neue", sans-serif" pitchFamily="34" charset="-122"/><a:cs typeface="Arial Black, "Trebuchet MS", "Helvetica Neue", sans-serif" pitchFamily="34" charset="-120"/></a:rPr><a:t>Why Naive Locality Fails:</a:t></a:r><a:endParaRPr lang="en-US" sz="4200" dirty="0"/></a:p></p:txBody></p:sp><p:sp><p:nvSpPr><p:cNvPr id="23" name="Shape 21"></p:cNvPr><p:cNvSpPr/><p:nvPr></p:nvPr></p:nvSpPr><p:spPr><a:xfrm><a:off x="6583680" y="1371600"/><a:ext cx="5120640" cy="548640"/></a:xfrm><a:prstGeom prst="roundRect"><a:avLst><a:gd name="adj" fmla="val 13333"/></a:avLst></a:prstGeom><a:solidFill><a:srgbClr val="FFD147"/></a:solidFill><a:ln w="31750"><a:solidFill><a:srgbClr val="111827"/></a:solidFill><a:prstDash val="solid"/></a:ln></p:spPr></p:sp><p:sp><p:nvSpPr><p:cNvPr id="24" name="Text 22"></p:cNvPr><p:cNvSpPr/><p:nvPr></p:nvPr></p:nvSpPr><p:spPr><a:xfrm><a:off x="6675120" y="1417320"/><a:ext cx="4937760" cy="457200"/></a:xfrm><a:prstGeom prst="rect"><a:avLst></a:avLst></a:prstGeom><a:noFill/><a:ln></a:ln></p:spPr><p:txBody><a:bodyPr wrap="square" rtlCol="0" anchor="ctr"></a:bodyPr><a:lstStyle/><a:p><a:pPr indent="0" marL="0"><a:buNone/></a:pPr><a:r><a:rPr lang="en-US" sz="3200" b="1" spc="-200" kern="0" dirty="0"><a:solidFill><a:srgbClr val="111827"/></a:solidFill><a:latin typeface="Arial Black, "Trebuchet MS", "Helvetica Neue", sans-serif" pitchFamily="34" charset="0"/><a:ea typeface="Arial Black, "Trebuchet MS", "Helvetica Neue", sans-serif" pitchFamily="34" charset="-122"/><a:cs typeface="Arial Black, "Trebuchet MS", "Helvetica Neue", sans-serif" pitchFamily="34" charset="-120"/></a:rPr><a:t>The 10 Hotspots</a:t></a:r><a:endParaRPr lang="en-US" sz="3200" dirty="0"/></a:p></p:txBody></p:sp><p:sp><p:nvSpPr><p:cNvPr id="25" name="Text 23"></p:cNvPr><p:cNvSpPr/><p:nvPr></p:nvPr></p:nvSpPr><p:spPr><a:xfrm><a:off x="411480" y="2011680"/><a:ext cx="10972800" cy="274320"/></a:xfrm><a:prstGeom prst="rect"><a:avLst></a:avLst></a:prstGeom><a:noFill/><a:ln></a:ln></p:spPr><p:txBody><a:bodyPr wrap="square" rtlCol="0" anchor="ctr"></a:bodyPr><a:lstStyle/><a:p><a:pPr indent="0" marL="0"><a:buNone/></a:pPr><a:r><a:rPr lang="en-US" sz="1400" i="1" dirty="0"><a:solidFill><a:srgbClr val="4B5563"/></a:solidFill><a:latin typeface="Inter, "Segoe UI", sans-serif" pitchFamily="34" charset="0"/><a:ea typeface="Inter, "Segoe UI", sans-serif" pitchFamily="34" charset="-122"/><a:cs typeface="Inter, "Segoe UI", sans-serif" pitchFamily="34" charset="-120"/></a:rPr><a:t>Deep audit of Muddukrishna et al. (2015) — root causes of runtime regression</a:t></a:r><a:endParaRPr lang="en-US" sz="1400" dirty="0"/></a:p></p:txBody></p:sp><p:sp><p:nvSpPr><p:cNvPr id="26" name="Shape 24"></p:cNvPr><p:cNvSpPr/><p:nvPr></p:nvPr></p:nvSpPr><p:spPr><a:xfrm><a:off x="411480" y="2468880"/><a:ext cx="3566160" cy="3291840"/></a:xfrm><a:prstGeom prst="roundRect"><a:avLst><a:gd name="adj" fmla="val 2222"/></a:avLst></a:prstGeom><a:solidFill><a:srgbClr val="F4F0EA"/></a:solidFill><a:ln w="31750"><a:solidFill><a:srgbClr val="111827"/></a:solidFill><a:prstDash val="solid"/></a:ln><a:effectLst> <a:outerShdw sx="100000" sy="100000" kx="0" ky="0" algn="bl" rotWithShape="0" blurRad="50800" dist="50800" dir="16200000"> <a:srgbClr val="C8C6BF"> <a:alpha val="75000"/></a:srgbClr> </a:outerShdw></a:effectLst></p:spPr></p:sp><p:sp><p:nvSpPr><p:cNvPr id="27" name="Text 25"></p:cNvPr><p:cNvSpPr/><p:nvPr></p:nvPr></p:nvSpPr><p:spPr><a:xfrm><a:off x="594360" y="2651760"/><a:ext cx="3200400" cy="274320"/></a:xfrm><a:prstGeom prst="rect"><a:avLst></a:avLst></a:prstGeom><a:noFill/><a:ln></a:ln></p:spPr><p:txBody><a:bodyPr wrap="square" rtlCol="0" anchor="ctr"></a:bodyPr><a:lstStyle/><a:p><a:pPr indent="0" marL="0"><a:buNone/></a:pPr><a:r><a:rPr lang="en-US" sz="1800" b="1" dirty="0"><a:solidFill><a:srgbClr val="111827"/></a:solidFill><a:latin typeface="Arial Black, "Trebuchet MS", "Helvetica Neue", sans-serif" pitchFamily="34" charset="0"/><a:ea typeface="Arial Black, "Trebuchet MS", "Helvetica Neue", sans-serif" pitchFamily="34" charset="-122"/><a:cs typeface="Arial Black, "Trebuchet MS", "Helvetica Neue", sans-serif" pitchFamily="34" charset="-120"/></a:rPr><a:t>Stealing &amp; Placement</a:t></a:r><a:endParaRPr lang="en-US" sz="1800" dirty="0"/></a:p></p:txBody></p:sp><p:sp><p:nvSpPr><p:cNvPr id="28" name="Shape 26"></p:cNvPr><p:cNvSpPr/><p:nvPr></p:nvPr></p:nvSpPr><p:spPr><a:xfrm><a:off x="594360" y="2971800"/><a:ext cx="1097280" cy="256032"/></a:xfrm><a:prstGeom prst="roundRect"><a:avLst><a:gd name="adj" fmla="val 50000"/></a:avLst></a:prstGeom><a:solidFill><a:srgbClr val="1A6FB5"/></a:solidFill><a:ln w="12700"><a:solidFill><a:srgbClr val="1A6FB5"/></a:solidFill><a:prstDash val="solid"/></a:ln></p:spPr></p:sp><p:sp><p:nvSpPr><p:cNvPr id="29" name="Text 27"></p:cNvPr><p:cNvSpPr/><p:nvPr></p:nvPr></p:nvSpPr><p:spPr><a:xfrm><a:off x="594360" y="2971800"/><a:ext cx="1097280" cy="256032"/></a:xfrm><a:prstGeom prst="rect"><a:avLst></a:avLst></a:prstGeom><a:noFill/><a:ln></a:ln></p:spPr><p:txBody><a:bodyPr wrap="square" rtlCol="0" anchor="ctr"></a:bodyPr><a:lstStyle/><a:p><a:pPr algn="ctr" indent="0" marL="0"><a:buNone/></a:pPr><a:r><a:rPr lang="en-US" sz="900" b="1" dirty="0"><a:solidFill><a:srgbClr val="F4F0EA"/></a:solidFill><a:latin typeface=""JetBrains Mono", "Courier New", monospace" pitchFamily="34" charset="0"/><a:ea typeface=""JetBrains Mono", "Courier New", monospace" pitchFamily="34" charset="-122"/><a:cs typeface=""JetBrains Mono", "Courier New", monospace" pitchFamily="34" charset="-120"/></a:rPr><a:t>H1 – H4</a:t></a:r><a:endParaRPr lang="en-US" sz="900" dirty="0"/></a:p></p:txBody></p:sp><p:sp><p:nvSpPr><p:cNvPr id="30" name="Text 28"></p:cNvPr><p:cNvSpPr/><p:nvPr></p:nvPr></p:nvSpPr><p:spPr><a:xfrm><a:off x="594360" y="3383280"/><a:ext cx="3200400" cy="548640"/></a:xfrm><a:prstGeom prst="rect"><a:avLst></a:avLst></a:prstGeom><a:noFill/><a:ln></a:ln></p:spPr><p:txBody><a:bodyPr wrap="square" rtlCol="0" anchor="ctr"></a:bodyPr><a:lstStyle/><a:p><a:pPr indent="0" marL="0"><a:lnSpc><a:spcPts val="1100"/></a:lnSpc><a:buNone/></a:pPr><a:r><a:rPr lang="en-US" sz="1050" dirty="0"><a:solidFill><a:srgbClr val="111827"/></a:solidFill><a:latin typeface="Inter, "Segoe UI", sans-serif" pitchFamily="34" charset="0"/><a:ea typeface="Inter, "Segoe UI", sans-serif" pitchFamily="34" charset="-122"/><a:cs typeface="Inter, "Segoe UI", sans-serif" pitchFamily="34" charset="-120"/></a:rPr><a:t>•  H1 Static Steal Reach: hard-coded vicinity starves threads on Map or drags remote stalls.</a:t></a:r><a:endParaRPr lang="en-US" sz="1050" dirty="0"/></a:p></p:txBody></p:sp><p:sp><p:nvSpPr><p:cNvPr id="31" name="Text 29"></p:cNvPr><p:cNvSpPr/><p:nvPr></p:nvPr></p:nvSpPr><p:spPr><a:xfrm><a:off x="594360" y="3977640"/><a:ext cx="3200400" cy="548640"/></a:xfrm><a:prstGeom prst="rect"><a:avLst></a:avLst></a:prstGeom><a:noFill/><a:ln></a:ln></p:spPr><p:txBody><a:bodyPr wrap="square" rtlCol="0" anchor="ctr"></a:bodyPr><a:lstStyle/><a:p><a:pPr indent="0" marL="0"><a:lnSpc><a:spcPts val="1100"/></a:lnSpc><a:buNone/></a:pPr><a:r><a:rPr lang="en-US" sz="1050" dirty="0"><a:solidFill><a:srgbClr val="111827"/></a:solidFill><a:latin typeface="Inter, "Segoe UI", sans-serif" pitchFamily="34" charset="0"/><a:ea typeface="Inter, "Segoe UI", sans-serif" pitchFamily="34" charset="-122"/><a:cs typeface="Inter, "Segoe UI", sans-serif" pitchFamily="34" charset="-120"/></a:rPr><a:t>•  H2 Queue-Level Stealing: pops victim tail blindly — ignores local-data tasks in same queue.</a:t></a:r><a:endParaRPr lang="en-US" sz="1050" dirty="0"/></a:p></p:txBody></p:sp><p:sp><p:nvSpPr><p:cNvPr id="32" name="Text 30"></p:cNvPr><p:cNvSpPr/><p:nvPr></p:nvPr></p:nvSpPr><p:spPr><a:xfrm><a:off x="594360" y="4572000"/><a:ext cx="3200400" cy="548640"/></a:xfrm><a:prstGeom prst="rect"><a:avLst></a:avLst></a:prstGeom><a:noFill/><a:ln></a:ln></p:spPr><p:txBody><a:bodyPr wrap="square" rtlCol="0" anchor="ctr"></a:bodyPr><a:lstStyle/><a:p><a:pPr indent="0" marL="0"><a:lnSpc><a:spcPts val="1100"/></a:lnSpc><a:buNone/></a:pPr><a:r><a:rPr lang="en-US" sz="1050" dirty="0"><a:solidFill><a:srgbClr val="111827"/></a:solidFill><a:latin typeface="Inter, "Segoe UI", sans-serif" pitchFamily="34" charset="0"/><a:ea typeface="Inter, "Segoe UI", sans-serif" pitchFamily="34" charset="-122"/><a:cs typeface="Inter, "Segoe UI", sans-serif" pitchFamily="34" charset="-120"/></a:rPr><a:t>•  H3 Load-Blind Placement: dealer routes to argmin(comm) without reading queue length.</a:t></a:r><a:endParaRPr lang="en-US" sz="1050" dirty="0"/></a:p></p:txBody></p:sp><p:sp><p:nvSpPr><p:cNvPr id="33" name="Text 31"></p:cNvPr><p:cNvSpPr/><p:nvPr></p:nvPr></p:nvSpPr><p:spPr><a:xfrm><a:off x="594360" y="5166360"/><a:ext cx="3200400" cy="548640"/></a:xfrm><a:prstGeom prst="rect"><a:avLst></a:avLst></a:prstGeom><a:noFill/><a:ln></a:ln></p:spPr><p:txBody><a:bodyPr wrap="square" rtlCol="0" anchor="ctr"></a:bodyPr><a:lstStyle/><a:p><a:pPr indent="0" marL="0"><a:lnSpc><a:spcPts val="1100"/></a:lnSpc><a:buNone/></a:pPr><a:r><a:rPr lang="en-US" sz="1050" dirty="0"><a:solidFill><a:srgbClr val="111827"/></a:solidFill><a:latin typeface="Inter, "Segoe UI", sans-serif" pitchFamily="34" charset="0"/><a:ea typeface="Inter, "Segoe UI", sans-serif" pitchFamily="34" charset="-122"/><a:cs typeface="Inter, "Segoe UI", sans-serif" pitchFamily="34" charset="-120"/></a:rPr><a:t>•  H4 Binary Threshold Cliffs: hard gates trigger O(N²) path with no calibration.</a:t></a:r><a:endParaRPr lang="en-US" sz="1050" dirty="0"/></a:p></p:txBody></p:sp><p:sp><p:nvSpPr><p:cNvPr id="34" name="Shape 32"></p:cNvPr><p:cNvSpPr/><p:nvPr></p:nvPr></p:nvSpPr><p:spPr><a:xfrm><a:off x="4206240" y="2468880"/><a:ext cx="3566160" cy="3291840"/></a:xfrm><a:prstGeom prst="roundRect"><a:avLst><a:gd name="adj" fmla="val 2222"/></a:avLst></a:prstGeom><a:solidFill><a:srgbClr val="F4F0EA"/></a:solidFill><a:ln w="31750"><a:solidFill><a:srgbClr val="111827"/></a:solidFill><a:prstDash val="solid"/></a:ln><a:effectLst> <a:outerShdw sx="100000" sy="100000" kx="0" ky="0" algn="bl" rotWithShape="0" blurRad="50800" dist="50800" dir="16200000"> <a:srgbClr val="C8C6BF"> <a:alpha val="75000"/></a:srgbClr> </a:outerShdw></a:effectLst></p:spPr></p:sp><p:sp><p:nvSpPr><p:cNvPr id="35" name="Text 33"></p:cNvPr><p:cNvSpPr/><p:nvPr></p:nvPr></p:nvSpPr><p:spPr><a:xfrm><a:off x="4389120" y="2651760"/><a:ext cx="3200400" cy="274320"/></a:xfrm><a:prstGeom prst="rect"><a:avLst></a:avLst></a:prstGeom><a:noFill/><a:ln></a:ln></p:spPr><p:txBody><a:bodyPr wrap="square" rtlCol="0" anchor="ctr"></a:bodyPr><a:lstStyle/><a:p><a:pPr indent="0" marL="0"><a:buNone/></a:pPr><a:r><a:rPr lang="en-US" sz="1800" b="1" dirty="0"><a:solidFill><a:srgbClr val="111827"/></a:solidFill><a:latin typeface="Arial Black, "Trebuchet MS", "Helvetica Neue", sans-serif" pitchFamily="34" charset="0"/><a:ea typeface="Arial Black, "Trebuchet MS", "Helvetica Neue", sans-serif" pitchFamily="34" charset="-122"/><a:cs typeface="Arial Black, "Trebuchet MS", "Helvetica Neue", sans-serif" pitchFamily="34" charset="-120"/></a:rPr><a:t>Data Model &amp; Feedback</a:t></a:r><a:endParaRPr lang="en-US" sz="1800" dirty="0"/></a:p></p:txBody></p:sp><p:sp><p:nvSpPr><p:cNvPr id="36" name="Shape 34"></p:cNvPr><p:cNvSpPr/><p:nvPr></p:nvPr></p:nvSpPr><p:spPr><a:xfrm><a:off x="4389120" y="2971800"/><a:ext cx="1097280" cy="256032"/></a:xfrm><a:prstGeom prst="roundRect"><a:avLst><a:gd name="adj" fmla="val 50000"/></a:avLst></a:prstGeom><a:solidFill><a:srgbClr val="1A6FB5"/></a:solidFill><a:ln w="12700"><a:solidFill><a:srgbClr val="1A6FB5"/></a:solidFill><a:prstDash val="solid"/></a:ln></p:spPr></p:sp><p:sp><p:nvSpPr><p:cNvPr id="37" name="Text 35"></p:cNvPr><p:cNvSpPr/><p:nvPr></p:nvPr></p:nvSpPr><p:spPr><a:xfrm><a:off x="4389120" y="2971800"/><a:ext cx="1097280" cy="256032"/></a:xfrm><a:prstGeom prst="rect"><a:avLst></a:avLst></a:prstGeom><a:noFill/><a:ln></a:ln></p:spPr><p:txBody><a:bodyPr wrap="square" rtlCol="0" anchor="ctr"></a:bodyPr><a:lstStyle/><a:p><a:pPr algn="ctr" indent="0" marL="0"><a:buNone/></a:pPr><a:r><a:rPr lang="en-US" sz="900" b="1" dirty="0"><a:solidFill><a:srgbClr val="F4F0EA"/></a:solidFill><a:latin typeface=""JetBrains Mono", "Courier New", monospace" pitchFamily="34" charset="0"/><a:ea typeface=""JetBrains Mono", "Courier New", monospace" pitchFamily="34" charset="-122"/><a:cs typeface=""JetBrains Mono", "Courier New", monospace" pitchFamily="34" charset="-120"/></a:rPr><a:t>H5 – H7</a:t></a:r><a:endParaRPr lang="en-US" sz="900" dirty="0"/></a:p></p:txBody></p:sp><p:sp><p:nvSpPr><p:cNvPr id="38" name="Text 36"></p:cNvPr><p:cNvSpPr/><p:nvPr></p:nvPr></p:nvSpPr><p:spPr><a:xfrm><a:off x="4389120" y="3383280"/><a:ext cx="3200400" cy="548640"/></a:xfrm><a:prstGeom prst="rect"><a:avLst></a:avLst></a:prstGeom><a:noFill/><a:ln></a:ln></p:spPr><p:txBody><a:bodyPr wrap="square" rtlCol="0" anchor="ctr"></a:bodyPr><a:lstStyle/><a:p><a:pPr indent="0" marL="0"><a:lnSpc><a:spcPts val="1100"/></a:lnSpc><a:buNone/></a:pPr><a:r><a:rPr lang="en-US" sz="1050" dirty="0"><a:solidFill><a:srgbClr val="111827"/></a:solidFill><a:latin typeface="Inter, "Segoe UI", sans-serif" pitchFamily="34" charset="0"/><a:ea typeface="Inter, "Segoe UI", sans-serif" pitchFamily="34" charset="-122"/><a:cs typeface="Inter, "Segoe UI", sans-serif" pitchFamily="34" charset="-120"/></a:rPr><a:t>•  H5 Fragile Footprints: D relies on OpenMP depend clauses; incomplete clauses ruin placement.</a:t></a:r><a:endParaRPr lang="en-US" sz="1050" dirty="0"/></a:p></p:txBody></p:sp><p:sp><p:nvSpPr><p:cNvPr id="39" name="Text 37"></p:cNvPr><p:cNvSpPr/><p:nvPr></p:nvPr></p:nvSpPr><p:spPr><a:xfrm><a:off x="4389120" y="3977640"/><a:ext cx="3200400" cy="548640"/></a:xfrm><a:prstGeom prst="rect"><a:avLst></a:avLst></a:prstGeom><a:noFill/><a:ln></a:ln></p:spPr><p:txBody><a:bodyPr wrap="square" rtlCol="0" anchor="ctr"></a:bodyPr><a:lstStyle/><a:p><a:pPr indent="0" marL="0"><a:lnSpc><a:spcPts val="1100"/></a:lnSpc><a:buNone/></a:pPr><a:r><a:rPr lang="en-US" sz="1050" dirty="0"><a:solidFill><a:srgbClr val="111827"/></a:solidFill><a:latin typeface="Inter, "Segoe UI", sans-serif" pitchFamily="34" charset="0"/><a:ea typeface="Inter, "Segoe UI", sans-serif" pitchFamily="34" charset="-122"/><a:cs typeface="Inter, "Segoe UI", sans-serif" pitchFamily="34" charset="-120"/></a:rPr><a:t>•  H6 No Feedback Loop: data frozen at omp_malloc; runtime never migrates hot mis-placed pages.</a:t></a:r><a:endParaRPr lang="en-US" sz="1050" dirty="0"/></a:p></p:txBody></p:sp><p:sp><p:nvSpPr><p:cNvPr id="40" name="Text 38"></p:cNvPr><p:cNvSpPr/><p:nvPr></p:nvPr></p:nvSpPr><p:spPr><a:xfrm><a:off x="4389120" y="4572000"/><a:ext cx="3200400" cy="548640"/></a:xfrm><a:prstGeom prst="rect"><a:avLst></a:avLst></a:prstGeom><a:noFill/><a:ln></a:ln></p:spPr><p:txBody><a:bodyPr wrap="square" rtlCol="0" anchor="ctr"></a:bodyPr><a:lstStyle/><a:p><a:pPr indent="0" marL="0"><a:lnSpc><a:spcPts val="1100"/></a:lnSpc><a:buNone/></a:pPr><a:r><a:rPr lang="en-US" sz="1050" dirty="0"><a:solidFill><a:srgbClr val="111827"/></a:solidFill><a:latin typeface="Inter, "Segoe UI", sans-serif" pitchFamily="34" charset="0"/><a:ea typeface="Inter, "Segoe UI", sans-serif" pitchFamily="34" charset="-122"/><a:cs typeface="Inter, "Segoe UI", sans-serif" pitchFamily="34" charset="-120"/></a:rPr><a:t>•  H7 Coarse/Fine Menu Blind: rigid 2-item menu fails on irregular SparseLU blocks.</a:t></a:r><a:endParaRPr lang="en-US" sz="1050" dirty="0"/></a:p></p:txBody></p:sp><p:sp><p:nvSpPr><p:cNvPr id="41" name="Shape 39"></p:cNvPr><p:cNvSpPr/><p:nvPr></p:nvPr></p:nvSpPr><p:spPr><a:xfrm><a:off x="8001000" y="2468880"/><a:ext cx="3566160" cy="3291840"/></a:xfrm><a:prstGeom prst="roundRect"><a:avLst><a:gd name="adj" fmla="val 2222"/></a:avLst></a:prstGeom><a:solidFill><a:srgbClr val="111827"/></a:solidFill><a:ln w="31750"><a:solidFill><a:srgbClr val="111827"/></a:solidFill><a:prstDash val="solid"/></a:ln><a:effectLst> <a:outerShdw sx="100000" sy="100000" kx="0" ky="0" algn="bl" rotWithShape="0" blurRad="50800" dist="50800" dir="16200000"> <a:srgbClr val="C8C6BF"> <a:alpha val="75000"/></a:srgbClr> </a:outerShdw></a:effectLst></p:spPr></p:sp><p:sp><p:nvSpPr><p:cNvPr id="42" name="Text 40"></p:cNvPr><p:cNvSpPr/><p:nvPr></p:nvPr></p:nvSpPr><p:spPr><a:xfrm><a:off x="8183880" y="2651760"/><a:ext cx="3200400" cy="274320"/></a:xfrm><a:prstGeom prst="rect"><a:avLst></a:avLst></a:prstGeom><a:noFill/><a:ln></a:ln></p:spPr><p:txBody><a:bodyPr wrap="square" rtlCol="0" anchor="ctr"></a:bodyPr><a:lstStyle/><a:p><a:pPr indent="0" marL="0"><a:buNone/></a:pPr><a:r><a:rPr lang="en-US" sz="1800" b="1" dirty="0"><a:solidFill><a:srgbClr val="F4F0EA"/></a:solidFill><a:latin typeface="Arial Black, "Trebuchet MS", "Helvetica Neue", sans-serif" pitchFamily="34" charset="0"/><a:ea typeface="Arial Black, "Trebuchet MS", "Helvetica Neue", sans-serif" pitchFamily="34" charset="-122"/><a:cs typeface="Arial Black, "Trebuchet MS", "Helvetica Neue", sans-serif" pitchFamily="34" charset="-120"/></a:rPr><a:t>Mesh Bottlenecks</a:t></a:r><a:endParaRPr lang="en-US" sz="1800" dirty="0"/></a:p></p:txBody></p:sp><p:sp><p:nvSpPr><p:cNvPr id="43" name="Shape 41"></p:cNvPr><p:cNvSpPr/><p:nvPr></p:nvPr></p:nvSpPr><p:spPr><a:xfrm><a:off x="8183880" y="2971800"/><a:ext cx="1097280" cy="256032"/></a:xfrm><a:prstGeom prst="roundRect"><a:avLst><a:gd name="adj" fmla="val 50000"/></a:avLst></a:prstGeom><a:solidFill><a:srgbClr val="FFD147"/></a:solidFill><a:ln w="12700"><a:solidFill><a:srgbClr val="FFD147"/></a:solidFill><a:prstDash val="solid"/></a:ln></p:spPr></p:sp><p:sp><p:nvSpPr><p:cNvPr id="44" name="Text 42"></p:cNvPr><p:cNvSpPr/><p:nvPr></p:nvPr></p:nvSpPr><p:spPr><a:xfrm><a:off x="8183880" y="2971800"/><a:ext cx="1097280" cy="256032"/></a:xfrm><a:prstGeom prst="rect"><a:avLst></a:avLst></a:prstGeom><a:noFill/><a:ln></a:ln></p:spPr><p:txBody><a:bodyPr wrap="square" rtlCol="0" anchor="ctr"></a:bodyPr><a:lstStyle/><a:p><a:pPr algn="ctr" indent="0" marL="0"><a:buNone/></a:pPr><a:r><a:rPr lang="en-US" sz="900" b="1" dirty="0"><a:solidFill><a:srgbClr val="111827"/></a:solidFill><a:latin typeface=""JetBrains Mono", "Courier New", monospace" pitchFamily="34" charset="0"/><a:ea typeface=""JetBrains Mono", "Courier New", monospace" pitchFamily="34" charset="-122"/><a:cs typeface=""JetBrains Mono", "Courier New", monospace" pitchFamily="34" charset="-120"/></a:rPr><a:t>H8 – H10</a:t></a:r><a:endParaRPr lang="en-US" sz="900" dirty="0"/></a:p></p:txBody></p:sp><p:sp><p:nvSpPr><p:cNvPr id="45" name="Text 43"></p:cNvPr><p:cNvSpPr/><p:nvPr></p:nvPr></p:nvSpPr><p:spPr><a:xfrm><a:off x="8183880" y="3383280"/><a:ext cx="3200400" cy="548640"/></a:xfrm><a:prstGeom prst="rect"><a:avLst></a:avLst></a:prstGeom><a:noFill/><a:ln></a:ln></p:spPr><p:txBody><a:bodyPr wrap="square" rtlCol="0" anchor="ctr"></a:bodyPr><a:lstStyle/><a:p><a:pPr indent="0" marL="0"><a:lnSpc><a:spcPts val="1100"/></a:lnSpc><a:buNone/></a:pPr><a:r><a:rPr lang="en-US" sz="1050" dirty="0"><a:solidFill><a:srgbClr val="F4F0EA"/></a:solidFill><a:latin typeface="Inter, "Segoe UI", sans-serif" pitchFamily="34" charset="0"/><a:ea typeface="Inter, "Segoe UI", sans-serif" pitchFamily="34" charset="-122"/><a:cs typeface="Inter, "Segoe UI", sans-serif" pitchFamily="34" charset="-120"/></a:rPr><a:t>•  H8 Static Home-Cache Trapping: data locked to initial tile — brutal locality vs load trade-off.</a:t></a:r><a:endParaRPr lang="en-US" sz="1050" dirty="0"/></a:p></p:txBody></p:sp><p:sp><p:nvSpPr><p:cNvPr id="46" name="Text 44"></p:cNvPr><p:cNvSpPr/><p:nvPr></p:nvPr></p:nvSpPr><p:spPr><a:xfrm><a:off x="8183880" y="3977640"/><a:ext cx="3200400" cy="548640"/></a:xfrm><a:prstGeom prst="rect"><a:avLst></a:avLst></a:prstGeom><a:noFill/><a:ln></a:ln></p:spPr><p:txBody><a:bodyPr wrap="square" rtlCol="0" anchor="ctr"></a:bodyPr><a:lstStyle/><a:p><a:pPr indent="0" marL="0"><a:lnSpc><a:spcPts val="1100"/></a:lnSpc><a:buNone/></a:pPr><a:r><a:rPr lang="en-US" sz="1050" dirty="0"><a:solidFill><a:srgbClr val="F4F0EA"/></a:solidFill><a:latin typeface="Inter, "Segoe UI", sans-serif" pitchFamily="34" charset="0"/><a:ea typeface="Inter, "Segoe UI", sans-serif" pitchFamily="34" charset="-122"/><a:cs typeface="Inter, "Segoe UI", sans-serif" pitchFamily="34" charset="-120"/></a:rPr><a:t>•  H9 Center Bisection Contention: XY routing concentrates traffic at tiles 3,3 → 4,4.</a:t></a:r><a:endParaRPr lang="en-US" sz="1050" dirty="0"/></a:p></p:txBody></p:sp><p:sp><p:nvSpPr><p:cNvPr id="47" name="Text 45"></p:cNvPr><p:cNvSpPr/><p:nvPr></p:nvPr></p:nvSpPr><p:spPr><a:xfrm><a:off x="8183880" y="4572000"/><a:ext cx="3200400" cy="548640"/></a:xfrm><a:prstGeom prst="rect"><a:avLst></a:avLst></a:prstGeom><a:noFill/><a:ln></a:ln></p:spPr><p:txBody><a:bodyPr wrap="square" rtlCol="0" anchor="ctr"></a:bodyPr><a:lstStyle/><a:p><a:pPr indent="0" marL="0"><a:lnSpc><a:spcPts val="1100"/></a:lnSpc><a:buNone/></a:pPr><a:r><a:rPr lang="en-US" sz="1050" dirty="0"><a:solidFill><a:srgbClr val="F4F0EA"/></a:solidFill><a:latin typeface="Inter, "Segoe UI", sans-serif" pitchFamily="34" charset="0"/><a:ea typeface="Inter, "Segoe UI", sans-serif" pitchFamily="34" charset="-122"/><a:cs typeface="Inter, "Segoe UI", sans-serif" pitchFamily="34" charset="-120"/></a:rPr><a:t>•  H10 2D Coarse/Fine Mismatch: 1D line striping destroys 2D spatial locality for block solvers.</a:t></a:r><a:endParaRPr lang="en-US" sz="1050" dirty="0"/></a:p></p:txBody></p:sp><p:sp><p:nvSpPr><p:cNvPr id="48" name="Shape 46"></p:cNvPr><p:cNvSpPr/><p:nvPr></p:nvPr></p:nvSpPr><p:spPr><a:xfrm><a:off x="411480" y="5897880"/><a:ext cx="11338560" cy="594360"/></a:xfrm><a:prstGeom prst="roundRect"><a:avLst><a:gd name="adj" fmla="val 9231"/></a:avLst></a:prstGeom><a:solidFill><a:srgbClr val="FFD147"/></a:solidFill><a:ln w="31750"><a:solidFill><a:srgbClr val="111827"/></a:solidFill><a:prstDash val="solid"/></a:ln><a:effectLst> <a:outerShdw sx="100000" sy="100000" kx="0" ky="0" algn="bl" rotWithShape="0" blurRad="50800" dist="50800" dir="16200000"> <a:srgbClr val="#111827"> <a:alpha val="75000"/></a:srgbClr> </a:outerShdw></a:effectLst></p:spPr></p:sp><p:sp><p:nvSpPr><p:cNvPr id="49" name="Text 47"></p:cNvPr><p:cNvSpPr/><p:nvPr></p:nvPr></p:nvSpPr><p:spPr><a:xfrm><a:off x="640080" y="5943600"/><a:ext cx="10881360" cy="502920"/></a:xfrm><a:prstGeom prst="rect"><a:avLst></a:avLst></a:prstGeom><a:noFill/><a:ln></a:ln></p:spPr><p:txBody><a:bodyPr wrap="square" rtlCol="0" anchor="ctr"></a:bodyPr><a:lstStyle/><a:p><a:pPr algn="ctr" indent="0" marL="0"><a:buNone/></a:pPr><a:r><a:rPr lang="en-US" sz="1400" b="1" dirty="0"><a:solidFill><a:srgbClr val="111827"/></a:solidFill><a:latin typeface="Inter, "Segoe UI", sans-serif" pitchFamily="34" charset="0"/><a:ea typeface="Inter, "Segoe UI", sans-serif" pitchFamily="34" charset="-122"/><a:cs typeface="Inter, "Segoe UI", sans-serif" pitchFamily="34" charset="-120"/></a:rPr><a:t>AUDIT DISCOVERY  ·  Optimizing memory locality while ignoring queue backlog and interconnect contention is mathematically self-defeating on irregular task graphs.</a:t></a:r><a:endParaRPr lang="en-US" sz="1400" dirty="0"/></a:p></p:txBody></p:sp><p:sp><p:nvSpPr><p:cNvPr id="50" name="Text 48"></p:cNvPr><p:cNvSpPr/><p:nvPr></p:nvPr></p:nvSpPr><p:spPr><a:xfrm><a:off x="411480" y="6537960"/><a:ext cx="11338560" cy="182880"/></a:xfrm><a:prstGeom prst="rect"><a:avLst></a:avLst></a:prstGeom><a:noFill/><a:ln></a:ln></p:spPr><p:txBody><a:bodyPr wrap="square" rtlCol="0" anchor="ctr"></a:bodyPr><a:lstStyle/><a:p><a:pPr indent="0" marL="0"><a:buNone/></a:pPr><a:r><a:rPr lang="en-US" sz="900" dirty="0"><a:solidFill><a:srgbClr val="6B6B6B"/></a:solidFill><a:latin typeface=""JetBrains Mono", "Courier New", monospace" pitchFamily="34" charset="0"/><a:ea typeface=""JetBrains Mono", "Courier New", monospace" pitchFamily="34" charset="-122"/><a:cs typeface=""JetBrains Mono", "Courier New", monospace" pitchFamily="34" charset="-120"/></a:rPr><a:t>Auditing Muddukrishna et al. (2015) · 10 Hotspots Taxonomy H1–H10  ·  03 / 05</a:t></a:r><a:endParaRPr lang="en-US" sz="900" dirty="0"/></a:p></p:txBody></p:sp></p:spTree></p:cSld><p:clrMapOvr><a:masterClrMapping/></p:clrMapOvr></p:sld>
+<file path=ppt/slides/slide3.xml><?xml version="1.0" encoding="utf-8"?>
+<p:sld xmlns:a="http://schemas.openxmlformats.org/drawingml/2006/main" xmlns:r="http://schemas.openxmlformats.org/officeDocument/2006/relationships" xmlns:p="http://schemas.openxmlformats.org/presentationml/2006/main">
+  <p:cSld name="Slide 3">
+    <p:bg>
+      <p:bgPr>
+        <a:blipFill dpi="0" rotWithShape="1">
+          <a:blip r:embed="rId1">
+            <a:lum/>
+          </a:blip>
+          <a:srcRect/>
+          <a:stretch>
+            <a:fillRect/>
+          </a:stretch>
+        </a:blipFill>
+        <a:effectLst/>
+      </p:bgPr>
+    </p:bg>
+    <p:spTree>
+      <p:nvGrpSpPr>
+        <p:cNvPr id="1" name=""/>
+        <p:cNvGrpSpPr/>
+        <p:nvPr/>
+      </p:nvGrpSpPr>
+      <p:grpSpPr>
+        <a:xfrm>
+          <a:off x="0" y="0"/>
+          <a:ext cx="0" cy="0"/>
+          <a:chOff x="0" y="0"/>
+          <a:chExt cx="0" cy="0"/>
+        </a:xfrm>
+      </p:grpSpPr>
+      <p:sp>
+        <p:nvSpPr>
+          <p:cNvPr id="2" name="Shape 0"/>
+          <p:cNvSpPr/>
+          <p:nvPr/>
+        </p:nvSpPr>
+        <p:spPr>
+          <a:xfrm>
+            <a:off x="731520" y="411480"/>
+            <a:ext cx="1115568" cy="292608"/>
+          </a:xfrm>
+          <a:prstGeom prst="roundRect">
+            <a:avLst>
+              <a:gd name="adj" fmla="val 50000"/>
+            </a:avLst>
+          </a:prstGeom>
+          <a:solidFill>
+            <a:srgbClr val="111827"/>
+          </a:solidFill>
+          <a:ln w="12700">
+            <a:solidFill>
+              <a:srgbClr val="111827"/>
+            </a:solidFill>
+            <a:prstDash val="solid"/>
+          </a:ln>
+        </p:spPr>
+      </p:sp>
+      <p:sp>
+        <p:nvSpPr>
+          <p:cNvPr id="3" name="Text 1"/>
+          <p:cNvSpPr/>
+          <p:nvPr/>
+        </p:nvSpPr>
+        <p:spPr>
+          <a:xfrm>
+            <a:off x="731520" y="411480"/>
+            <a:ext cx="1115568" cy="292608"/>
+          </a:xfrm>
+          <a:prstGeom prst="rect">
+            <a:avLst/>
+          </a:prstGeom>
+          <a:noFill/>
+          <a:ln/>
+        </p:spPr>
+        <p:txBody>
+          <a:bodyPr wrap="square" rtlCol="0" anchor="ctr"/>
+          <a:lstStyle/>
+          <a:p>
+            <a:pPr algn="ctr" indent="0" marL="0">
+              <a:buNone/>
+            </a:pPr>
+            <a:r>
+              <a:rPr lang="en-US" sz="900" b="1" dirty="0">
+                <a:solidFill>
+                  <a:srgbClr val="FFFFFF"/>
+                </a:solidFill>
+                <a:latin typeface="Courier New" pitchFamily="34" charset="0"/>
+                <a:ea typeface="Courier New" pitchFamily="34" charset="-122"/>
+                <a:cs typeface="Courier New" pitchFamily="34" charset="-120"/>
+              </a:rPr>
+              <a:t>PART 2</a:t>
+            </a:r>
+            <a:endParaRPr lang="en-US" sz="900" dirty="0"/>
+          </a:p>
+        </p:txBody>
+      </p:sp>
+      <p:sp>
+        <p:nvSpPr>
+          <p:cNvPr id="4" name="Shape 2"/>
+          <p:cNvSpPr/>
+          <p:nvPr/>
+        </p:nvSpPr>
+        <p:spPr>
+          <a:xfrm>
+            <a:off x="1984248" y="411480"/>
+            <a:ext cx="2455164" cy="292608"/>
+          </a:xfrm>
+          <a:prstGeom prst="roundRect">
+            <a:avLst>
+              <a:gd name="adj" fmla="val 50000"/>
+            </a:avLst>
+          </a:prstGeom>
+          <a:solidFill>
+            <a:srgbClr val="FFFFFF"/>
+          </a:solidFill>
+          <a:ln w="19050">
+            <a:solidFill>
+              <a:srgbClr val="111827"/>
+            </a:solidFill>
+            <a:prstDash val="solid"/>
+          </a:ln>
+        </p:spPr>
+      </p:sp>
+      <p:sp>
+        <p:nvSpPr>
+          <p:cNvPr id="5" name="Text 3"/>
+          <p:cNvSpPr/>
+          <p:nvPr/>
+        </p:nvSpPr>
+        <p:spPr>
+          <a:xfrm>
+            <a:off x="1984248" y="411480"/>
+            <a:ext cx="2455164" cy="292608"/>
+          </a:xfrm>
+          <a:prstGeom prst="rect">
+            <a:avLst/>
+          </a:prstGeom>
+          <a:noFill/>
+          <a:ln/>
+        </p:spPr>
+        <p:txBody>
+          <a:bodyPr wrap="square" rtlCol="0" anchor="ctr"/>
+          <a:lstStyle/>
+          <a:p>
+            <a:pPr algn="ctr" indent="0" marL="0">
+              <a:buNone/>
+            </a:pPr>
+            <a:r>
+              <a:rPr lang="en-US" sz="900" b="1" dirty="0">
+                <a:solidFill>
+                  <a:srgbClr val="111827"/>
+                </a:solidFill>
+                <a:latin typeface="Courier New" pitchFamily="34" charset="0"/>
+                <a:ea typeface="Courier New" pitchFamily="34" charset="-122"/>
+                <a:cs typeface="Courier New" pitchFamily="34" charset="-120"/>
+              </a:rPr>
+              <a:t>RUNTIME PATHOLOGY AUDIT</a:t>
+            </a:r>
+            <a:endParaRPr lang="en-US" sz="900" dirty="0"/>
+          </a:p>
+        </p:txBody>
+      </p:sp>
+      <p:sp>
+        <p:nvSpPr>
+          <p:cNvPr id="6" name="Text 4"/>
+          <p:cNvSpPr/>
+          <p:nvPr/>
+        </p:nvSpPr>
+        <p:spPr>
+          <a:xfrm>
+            <a:off x="731520" y="868680"/>
+            <a:ext cx="5303520" cy="502920"/>
+          </a:xfrm>
+          <a:prstGeom prst="rect">
+            <a:avLst/>
+          </a:prstGeom>
+          <a:noFill/>
+          <a:ln/>
+        </p:spPr>
+        <p:txBody>
+          <a:bodyPr wrap="square" rtlCol="0" anchor="ctr"/>
+          <a:lstStyle/>
+          <a:p>
+            <a:pPr indent="0" marL="0">
+              <a:buNone/>
+            </a:pPr>
+            <a:r>
+              <a:rPr lang="en-US" sz="3000" b="1" dirty="0">
+                <a:solidFill>
+                  <a:srgbClr val="111827"/>
+                </a:solidFill>
+                <a:latin typeface="Arial Black" pitchFamily="34" charset="0"/>
+                <a:ea typeface="Arial Black" pitchFamily="34" charset="-122"/>
+                <a:cs typeface="Arial Black" pitchFamily="34" charset="-120"/>
+              </a:rPr>
+              <a:t>Why Naive Locality Fails: </a:t>
+            </a:r>
+            <a:endParaRPr lang="en-US" sz="3000" dirty="0"/>
+          </a:p>
+        </p:txBody>
+      </p:sp>
+      <p:sp>
+        <p:nvSpPr>
+          <p:cNvPr id="7" name="Shape 5"/>
+          <p:cNvSpPr/>
+          <p:nvPr/>
+        </p:nvSpPr>
+        <p:spPr>
+          <a:xfrm>
+            <a:off x="6035040" y="822960"/>
+            <a:ext cx="3566160" cy="594360"/>
+          </a:xfrm>
+          <a:prstGeom prst="roundRect">
+            <a:avLst>
+              <a:gd name="adj" fmla="val 15385"/>
+            </a:avLst>
+          </a:prstGeom>
+          <a:solidFill>
+            <a:srgbClr val="FFD147"/>
+          </a:solidFill>
+          <a:ln w="19050">
+            <a:solidFill>
+              <a:srgbClr val="111827"/>
+            </a:solidFill>
+            <a:prstDash val="solid"/>
+          </a:ln>
+        </p:spPr>
+      </p:sp>
+      <p:sp>
+        <p:nvSpPr>
+          <p:cNvPr id="8" name="Text 6"/>
+          <p:cNvSpPr/>
+          <p:nvPr/>
+        </p:nvSpPr>
+        <p:spPr>
+          <a:xfrm>
+            <a:off x="6126480" y="822960"/>
+            <a:ext cx="3383280" cy="594360"/>
+          </a:xfrm>
+          <a:prstGeom prst="rect">
+            <a:avLst/>
+          </a:prstGeom>
+          <a:noFill/>
+          <a:ln/>
+        </p:spPr>
+        <p:txBody>
+          <a:bodyPr wrap="square" rtlCol="0" anchor="ctr"/>
+          <a:lstStyle/>
+          <a:p>
+            <a:pPr algn="ctr" indent="0" marL="0">
+              <a:buNone/>
+            </a:pPr>
+            <a:r>
+              <a:rPr lang="en-US" sz="2800" b="1" dirty="0">
+                <a:solidFill>
+                  <a:srgbClr val="111827"/>
+                </a:solidFill>
+                <a:latin typeface="Arial Black" pitchFamily="34" charset="0"/>
+                <a:ea typeface="Arial Black" pitchFamily="34" charset="-122"/>
+                <a:cs typeface="Arial Black" pitchFamily="34" charset="-120"/>
+              </a:rPr>
+              <a:t>The 10 Hotspots</a:t>
+            </a:r>
+            <a:endParaRPr lang="en-US" sz="2800" dirty="0"/>
+          </a:p>
+        </p:txBody>
+      </p:sp>
+      <p:sp>
+        <p:nvSpPr>
+          <p:cNvPr id="9" name="Text 7"/>
+          <p:cNvSpPr/>
+          <p:nvPr/>
+        </p:nvSpPr>
+        <p:spPr>
+          <a:xfrm>
+            <a:off x="731520" y="1463040"/>
+            <a:ext cx="9144000" cy="228600"/>
+          </a:xfrm>
+          <a:prstGeom prst="rect">
+            <a:avLst/>
+          </a:prstGeom>
+          <a:noFill/>
+          <a:ln/>
+        </p:spPr>
+        <p:txBody>
+          <a:bodyPr wrap="square" rtlCol="0" anchor="ctr"/>
+          <a:lstStyle/>
+          <a:p>
+            <a:pPr indent="0" marL="0">
+              <a:buNone/>
+            </a:pPr>
+            <a:r>
+              <a:rPr lang="en-US" sz="1000" dirty="0">
+                <a:solidFill>
+                  <a:srgbClr val="4B5563"/>
+                </a:solidFill>
+                <a:latin typeface="Courier New" pitchFamily="34" charset="0"/>
+                <a:ea typeface="Courier New" pitchFamily="34" charset="-122"/>
+                <a:cs typeface="Courier New" pitchFamily="34" charset="-120"/>
+              </a:rPr>
+              <a:t>Deep audit of Muddukrishna et al. (2015) revealing root causes of runtime regression</a:t>
+            </a:r>
+            <a:endParaRPr lang="en-US" sz="1000" dirty="0"/>
+          </a:p>
+        </p:txBody>
+      </p:sp>
+      <p:sp>
+        <p:nvSpPr>
+          <p:cNvPr id="10" name="Shape 8"/>
+          <p:cNvSpPr/>
+          <p:nvPr/>
+        </p:nvSpPr>
+        <p:spPr>
+          <a:xfrm>
+            <a:off x="786384" y="1837944"/>
+            <a:ext cx="3410712" cy="3886200"/>
+          </a:xfrm>
+          <a:prstGeom prst="roundRect">
+            <a:avLst>
+              <a:gd name="adj" fmla="val 3753"/>
+            </a:avLst>
+          </a:prstGeom>
+          <a:solidFill>
+            <a:srgbClr val="111827"/>
+          </a:solidFill>
+          <a:ln w="12700">
+            <a:solidFill>
+              <a:srgbClr val="111827"/>
+            </a:solidFill>
+            <a:prstDash val="solid"/>
+          </a:ln>
+        </p:spPr>
+      </p:sp>
+      <p:sp>
+        <p:nvSpPr>
+          <p:cNvPr id="11" name="Shape 9"/>
+          <p:cNvSpPr/>
+          <p:nvPr/>
+        </p:nvSpPr>
+        <p:spPr>
+          <a:xfrm>
+            <a:off x="731520" y="1783080"/>
+            <a:ext cx="3410712" cy="3886200"/>
+          </a:xfrm>
+          <a:prstGeom prst="roundRect">
+            <a:avLst>
+              <a:gd name="adj" fmla="val 3753"/>
+            </a:avLst>
+          </a:prstGeom>
+          <a:solidFill>
+            <a:srgbClr val="FFFFFF"/>
+          </a:solidFill>
+          <a:ln w="19050">
+            <a:solidFill>
+              <a:srgbClr val="111827"/>
+            </a:solidFill>
+            <a:prstDash val="solid"/>
+          </a:ln>
+        </p:spPr>
+      </p:sp>
+      <p:sp>
+        <p:nvSpPr>
+          <p:cNvPr id="12" name="Text 10"/>
+          <p:cNvSpPr/>
+          <p:nvPr/>
+        </p:nvSpPr>
+        <p:spPr>
+          <a:xfrm>
+            <a:off x="914400" y="1901952"/>
+            <a:ext cx="3044952" cy="274320"/>
+          </a:xfrm>
+          <a:prstGeom prst="rect">
+            <a:avLst/>
+          </a:prstGeom>
+          <a:noFill/>
+          <a:ln/>
+        </p:spPr>
+        <p:txBody>
+          <a:bodyPr wrap="square" rtlCol="0" anchor="ctr"/>
+          <a:lstStyle/>
+          <a:p>
+            <a:pPr indent="0" marL="0">
+              <a:buNone/>
+            </a:pPr>
+            <a:r>
+              <a:rPr lang="en-US" sz="1300" dirty="0">
+                <a:solidFill>
+                  <a:srgbClr val="111827"/>
+                </a:solidFill>
+                <a:latin typeface="Arial Black" pitchFamily="34" charset="0"/>
+                <a:ea typeface="Arial Black" pitchFamily="34" charset="-122"/>
+                <a:cs typeface="Arial Black" pitchFamily="34" charset="-120"/>
+              </a:rPr>
+              <a:t>Stealing &amp; Placement</a:t>
+            </a:r>
+            <a:endParaRPr lang="en-US" sz="1300" dirty="0"/>
+          </a:p>
+        </p:txBody>
+      </p:sp>
+      <p:sp>
+        <p:nvSpPr>
+          <p:cNvPr id="13" name="Shape 11"/>
+          <p:cNvSpPr/>
+          <p:nvPr/>
+        </p:nvSpPr>
+        <p:spPr>
+          <a:xfrm>
+            <a:off x="914400" y="2194560"/>
+            <a:ext cx="1463040" cy="201168"/>
+          </a:xfrm>
+          <a:prstGeom prst="roundRect">
+            <a:avLst>
+              <a:gd name="adj" fmla="val 50000"/>
+            </a:avLst>
+          </a:prstGeom>
+          <a:solidFill>
+            <a:srgbClr val="DCE4FF"/>
+          </a:solidFill>
+          <a:ln w="12700">
+            <a:solidFill>
+              <a:srgbClr val="111827"/>
+            </a:solidFill>
+            <a:prstDash val="solid"/>
+          </a:ln>
+        </p:spPr>
+      </p:sp>
+      <p:sp>
+        <p:nvSpPr>
+          <p:cNvPr id="14" name="Text 12"/>
+          <p:cNvSpPr/>
+          <p:nvPr/>
+        </p:nvSpPr>
+        <p:spPr>
+          <a:xfrm>
+            <a:off x="914400" y="2194560"/>
+            <a:ext cx="1463040" cy="201168"/>
+          </a:xfrm>
+          <a:prstGeom prst="rect">
+            <a:avLst/>
+          </a:prstGeom>
+          <a:noFill/>
+          <a:ln/>
+        </p:spPr>
+        <p:txBody>
+          <a:bodyPr wrap="square" rtlCol="0" anchor="ctr"/>
+          <a:lstStyle/>
+          <a:p>
+            <a:pPr algn="ctr" indent="0" marL="0">
+              <a:buNone/>
+            </a:pPr>
+            <a:r>
+              <a:rPr lang="en-US" sz="800" b="1" dirty="0">
+                <a:solidFill>
+                  <a:srgbClr val="111827"/>
+                </a:solidFill>
+                <a:latin typeface="Courier New" pitchFamily="34" charset="0"/>
+                <a:ea typeface="Courier New" pitchFamily="34" charset="-122"/>
+                <a:cs typeface="Courier New" pitchFamily="34" charset="-120"/>
+              </a:rPr>
+              <a:t>Hotspots H1 – H4</a:t>
+            </a:r>
+            <a:endParaRPr lang="en-US" sz="800" dirty="0"/>
+          </a:p>
+        </p:txBody>
+      </p:sp>
+      <p:sp>
+        <p:nvSpPr>
+          <p:cNvPr id="15" name="Text 13"/>
+          <p:cNvSpPr/>
+          <p:nvPr/>
+        </p:nvSpPr>
+        <p:spPr>
+          <a:xfrm>
+            <a:off x="914400" y="2468880"/>
+            <a:ext cx="3044952" cy="2286000"/>
+          </a:xfrm>
+          <a:prstGeom prst="rect">
+            <a:avLst/>
+          </a:prstGeom>
+          <a:noFill/>
+          <a:ln/>
+        </p:spPr>
+        <p:txBody>
+          <a:bodyPr wrap="square" rtlCol="0" anchor="ctr"/>
+          <a:lstStyle/>
+          <a:p>
+            <a:pPr indent="0" marL="0">
+              <a:lnSpc>
+                <a:spcPts val="1200"/>
+              </a:lnSpc>
+              <a:buNone/>
+            </a:pPr>
+            <a:r>
+              <a:rPr lang="en-US" sz="900" dirty="0">
+                <a:solidFill>
+                  <a:srgbClr val="374151"/>
+                </a:solidFill>
+                <a:latin typeface="Arial" pitchFamily="34" charset="0"/>
+                <a:ea typeface="Arial" pitchFamily="34" charset="-122"/>
+                <a:cs typeface="Arial" pitchFamily="34" charset="-120"/>
+              </a:rPr>
+              <a:t>• H1 (Static Steal Reach): Fixed vicinity size starves threads on Map or drags 6× remote stalls on Vecmul.</a:t>
+            </a:r>
+            <a:endParaRPr lang="en-US" sz="900" dirty="0"/>
+          </a:p>
+          <a:p>
+            <a:pPr indent="0" marL="0">
+              <a:lnSpc>
+                <a:spcPts val="1200"/>
+              </a:lnSpc>
+              <a:buNone/>
+            </a:pPr>
+            <a:endParaRPr lang="en-US" sz="900" dirty="0"/>
+          </a:p>
+          <a:p>
+            <a:pPr indent="0" marL="0">
+              <a:lnSpc>
+                <a:spcPts val="1200"/>
+              </a:lnSpc>
+              <a:buNone/>
+            </a:pPr>
+            <a:r>
+              <a:rPr lang="en-US" sz="900" dirty="0">
+                <a:solidFill>
+                  <a:srgbClr val="374151"/>
+                </a:solidFill>
+                <a:latin typeface="Arial" pitchFamily="34" charset="0"/>
+                <a:ea typeface="Arial" pitchFamily="34" charset="-122"/>
+                <a:cs typeface="Arial" pitchFamily="34" charset="-120"/>
+              </a:rPr>
+              <a:t>• H2 (Queue-Level Stealing): Pops victim queue tail blindly; ignores whether another task in that queue has local data!</a:t>
+            </a:r>
+            <a:endParaRPr lang="en-US" sz="900" dirty="0"/>
+          </a:p>
+          <a:p>
+            <a:pPr indent="0" marL="0">
+              <a:lnSpc>
+                <a:spcPts val="1200"/>
+              </a:lnSpc>
+              <a:buNone/>
+            </a:pPr>
+            <a:endParaRPr lang="en-US" sz="900" dirty="0"/>
+          </a:p>
+          <a:p>
+            <a:pPr indent="0" marL="0">
+              <a:lnSpc>
+                <a:spcPts val="1200"/>
+              </a:lnSpc>
+              <a:buNone/>
+            </a:pPr>
+            <a:r>
+              <a:rPr lang="en-US" sz="900" dirty="0">
+                <a:solidFill>
+                  <a:srgbClr val="374151"/>
+                </a:solidFill>
+                <a:latin typeface="Arial" pitchFamily="34" charset="0"/>
+                <a:ea typeface="Arial" pitchFamily="34" charset="-122"/>
+                <a:cs typeface="Arial" pitchFamily="34" charset="-120"/>
+              </a:rPr>
+              <a:t>• H3 (Load-Blind Placement): Dealer routes to argmin(comm_cost) without reading queue length; piles all work on 1 core.</a:t>
+            </a:r>
+            <a:endParaRPr lang="en-US" sz="900" dirty="0"/>
+          </a:p>
+          <a:p>
+            <a:pPr indent="0" marL="0">
+              <a:lnSpc>
+                <a:spcPts val="1200"/>
+              </a:lnSpc>
+              <a:buNone/>
+            </a:pPr>
+            <a:endParaRPr lang="en-US" sz="900" dirty="0"/>
+          </a:p>
+          <a:p>
+            <a:pPr indent="0" marL="0">
+              <a:lnSpc>
+                <a:spcPts val="1200"/>
+              </a:lnSpc>
+              <a:buNone/>
+            </a:pPr>
+            <a:r>
+              <a:rPr lang="en-US" sz="900" dirty="0">
+                <a:solidFill>
+                  <a:srgbClr val="374151"/>
+                </a:solidFill>
+                <a:latin typeface="Arial" pitchFamily="34" charset="0"/>
+                <a:ea typeface="Arial" pitchFamily="34" charset="-122"/>
+                <a:cs typeface="Arial" pitchFamily="34" charset="-120"/>
+              </a:rPr>
+              <a:t>• H4 (Binary Threshold Cliffs): Brittle sum(D) &gt; LLC/C gates trigger heavy O(N²) path with no calibration.</a:t>
+            </a:r>
+            <a:endParaRPr lang="en-US" sz="900" dirty="0"/>
+          </a:p>
+        </p:txBody>
+      </p:sp>
+      <p:sp>
+        <p:nvSpPr>
+          <p:cNvPr id="16" name="Shape 14"/>
+          <p:cNvSpPr/>
+          <p:nvPr/>
+        </p:nvSpPr>
+        <p:spPr>
+          <a:xfrm>
+            <a:off x="914400" y="4828032"/>
+            <a:ext cx="3044952" cy="731520"/>
+          </a:xfrm>
+          <a:prstGeom prst="roundRect">
+            <a:avLst>
+              <a:gd name="adj" fmla="val 10000"/>
+            </a:avLst>
+          </a:prstGeom>
+          <a:solidFill>
+            <a:srgbClr val="EEF2FF"/>
+          </a:solidFill>
+          <a:ln w="12700">
+            <a:solidFill>
+              <a:srgbClr val="111827"/>
+            </a:solidFill>
+            <a:prstDash val="solid"/>
+          </a:ln>
+        </p:spPr>
+      </p:sp>
+      <p:sp>
+        <p:nvSpPr>
+          <p:cNvPr id="17" name="Text 15"/>
+          <p:cNvSpPr/>
+          <p:nvPr/>
+        </p:nvSpPr>
+        <p:spPr>
+          <a:xfrm>
+            <a:off x="960120" y="4846320"/>
+            <a:ext cx="2953512" cy="676656"/>
+          </a:xfrm>
+          <a:prstGeom prst="rect">
+            <a:avLst/>
+          </a:prstGeom>
+          <a:noFill/>
+          <a:ln/>
+        </p:spPr>
+        <p:txBody>
+          <a:bodyPr wrap="square" rtlCol="0" anchor="ctr"/>
+          <a:lstStyle/>
+          <a:p>
+            <a:pPr indent="0" marL="0">
+              <a:buNone/>
+            </a:pPr>
+            <a:r>
+              <a:rPr lang="en-US" sz="850" b="1" dirty="0">
+                <a:solidFill>
+                  <a:srgbClr val="111827"/>
+                </a:solidFill>
+                <a:latin typeface="Courier New" pitchFamily="34" charset="0"/>
+                <a:ea typeface="Courier New" pitchFamily="34" charset="-122"/>
+                <a:cs typeface="Courier New" pitchFamily="34" charset="-120"/>
+              </a:rPr>
+              <a:t>Root Pathology:</a:t>
+            </a:r>
+            <a:endParaRPr lang="en-US" sz="850" dirty="0"/>
+          </a:p>
+          <a:p>
+            <a:pPr indent="0" marL="0">
+              <a:buNone/>
+            </a:pPr>
+            <a:r>
+              <a:rPr lang="en-US" sz="850" b="1" dirty="0">
+                <a:solidFill>
+                  <a:srgbClr val="111827"/>
+                </a:solidFill>
+                <a:latin typeface="Courier New" pitchFamily="34" charset="0"/>
+                <a:ea typeface="Courier New" pitchFamily="34" charset="-122"/>
+                <a:cs typeface="Courier New" pitchFamily="34" charset="-120"/>
+              </a:rPr>
+              <a:t>Blind queue-tail popping &amp; zero queue length feedback</a:t>
+            </a:r>
+            <a:endParaRPr lang="en-US" sz="850" dirty="0"/>
+          </a:p>
+        </p:txBody>
+      </p:sp>
+      <p:sp>
+        <p:nvSpPr>
+          <p:cNvPr id="18" name="Shape 16"/>
+          <p:cNvSpPr/>
+          <p:nvPr/>
+        </p:nvSpPr>
+        <p:spPr>
+          <a:xfrm>
+            <a:off x="4425696" y="1837944"/>
+            <a:ext cx="3410712" cy="3886200"/>
+          </a:xfrm>
+          <a:prstGeom prst="roundRect">
+            <a:avLst>
+              <a:gd name="adj" fmla="val 3753"/>
+            </a:avLst>
+          </a:prstGeom>
+          <a:solidFill>
+            <a:srgbClr val="111827"/>
+          </a:solidFill>
+          <a:ln w="12700">
+            <a:solidFill>
+              <a:srgbClr val="111827"/>
+            </a:solidFill>
+            <a:prstDash val="solid"/>
+          </a:ln>
+        </p:spPr>
+      </p:sp>
+      <p:sp>
+        <p:nvSpPr>
+          <p:cNvPr id="19" name="Shape 17"/>
+          <p:cNvSpPr/>
+          <p:nvPr/>
+        </p:nvSpPr>
+        <p:spPr>
+          <a:xfrm>
+            <a:off x="4370832" y="1783080"/>
+            <a:ext cx="3410712" cy="3886200"/>
+          </a:xfrm>
+          <a:prstGeom prst="roundRect">
+            <a:avLst>
+              <a:gd name="adj" fmla="val 3753"/>
+            </a:avLst>
+          </a:prstGeom>
+          <a:solidFill>
+            <a:srgbClr val="FFFFFF"/>
+          </a:solidFill>
+          <a:ln w="19050">
+            <a:solidFill>
+              <a:srgbClr val="111827"/>
+            </a:solidFill>
+            <a:prstDash val="solid"/>
+          </a:ln>
+        </p:spPr>
+      </p:sp>
+      <p:sp>
+        <p:nvSpPr>
+          <p:cNvPr id="20" name="Text 18"/>
+          <p:cNvSpPr/>
+          <p:nvPr/>
+        </p:nvSpPr>
+        <p:spPr>
+          <a:xfrm>
+            <a:off x="4599432" y="1901952"/>
+            <a:ext cx="3044952" cy="274320"/>
+          </a:xfrm>
+          <a:prstGeom prst="rect">
+            <a:avLst/>
+          </a:prstGeom>
+          <a:noFill/>
+          <a:ln/>
+        </p:spPr>
+        <p:txBody>
+          <a:bodyPr wrap="square" rtlCol="0" anchor="ctr"/>
+          <a:lstStyle/>
+          <a:p>
+            <a:pPr indent="0" marL="0">
+              <a:buNone/>
+            </a:pPr>
+            <a:r>
+              <a:rPr lang="en-US" sz="1300" dirty="0">
+                <a:solidFill>
+                  <a:srgbClr val="111827"/>
+                </a:solidFill>
+                <a:latin typeface="Arial Black" pitchFamily="34" charset="0"/>
+                <a:ea typeface="Arial Black" pitchFamily="34" charset="-122"/>
+                <a:cs typeface="Arial Black" pitchFamily="34" charset="-120"/>
+              </a:rPr>
+              <a:t>Data Model &amp; Feedback</a:t>
+            </a:r>
+            <a:endParaRPr lang="en-US" sz="1300" dirty="0"/>
+          </a:p>
+        </p:txBody>
+      </p:sp>
+      <p:sp>
+        <p:nvSpPr>
+          <p:cNvPr id="21" name="Shape 19"/>
+          <p:cNvSpPr/>
+          <p:nvPr/>
+        </p:nvSpPr>
+        <p:spPr>
+          <a:xfrm>
+            <a:off x="4599432" y="2194560"/>
+            <a:ext cx="1463040" cy="201168"/>
+          </a:xfrm>
+          <a:prstGeom prst="roundRect">
+            <a:avLst>
+              <a:gd name="adj" fmla="val 50000"/>
+            </a:avLst>
+          </a:prstGeom>
+          <a:solidFill>
+            <a:srgbClr val="FFE5D9"/>
+          </a:solidFill>
+          <a:ln w="12700">
+            <a:solidFill>
+              <a:srgbClr val="111827"/>
+            </a:solidFill>
+            <a:prstDash val="solid"/>
+          </a:ln>
+        </p:spPr>
+      </p:sp>
+      <p:sp>
+        <p:nvSpPr>
+          <p:cNvPr id="22" name="Text 20"/>
+          <p:cNvSpPr/>
+          <p:nvPr/>
+        </p:nvSpPr>
+        <p:spPr>
+          <a:xfrm>
+            <a:off x="4599432" y="2194560"/>
+            <a:ext cx="1463040" cy="201168"/>
+          </a:xfrm>
+          <a:prstGeom prst="rect">
+            <a:avLst/>
+          </a:prstGeom>
+          <a:noFill/>
+          <a:ln/>
+        </p:spPr>
+        <p:txBody>
+          <a:bodyPr wrap="square" rtlCol="0" anchor="ctr"/>
+          <a:lstStyle/>
+          <a:p>
+            <a:pPr algn="ctr" indent="0" marL="0">
+              <a:buNone/>
+            </a:pPr>
+            <a:r>
+              <a:rPr lang="en-US" sz="800" b="1" dirty="0">
+                <a:solidFill>
+                  <a:srgbClr val="111827"/>
+                </a:solidFill>
+                <a:latin typeface="Courier New" pitchFamily="34" charset="0"/>
+                <a:ea typeface="Courier New" pitchFamily="34" charset="-122"/>
+                <a:cs typeface="Courier New" pitchFamily="34" charset="-120"/>
+              </a:rPr>
+              <a:t>Hotspots H5 – H7</a:t>
+            </a:r>
+            <a:endParaRPr lang="en-US" sz="800" dirty="0"/>
+          </a:p>
+        </p:txBody>
+      </p:sp>
+      <p:sp>
+        <p:nvSpPr>
+          <p:cNvPr id="23" name="Text 21"/>
+          <p:cNvSpPr/>
+          <p:nvPr/>
+        </p:nvSpPr>
+        <p:spPr>
+          <a:xfrm>
+            <a:off x="4599432" y="2468880"/>
+            <a:ext cx="3044952" cy="2286000"/>
+          </a:xfrm>
+          <a:prstGeom prst="rect">
+            <a:avLst/>
+          </a:prstGeom>
+          <a:noFill/>
+          <a:ln/>
+        </p:spPr>
+        <p:txBody>
+          <a:bodyPr wrap="square" rtlCol="0" anchor="ctr"/>
+          <a:lstStyle/>
+          <a:p>
+            <a:pPr indent="0" marL="0">
+              <a:lnSpc>
+                <a:spcPts val="1200"/>
+              </a:lnSpc>
+              <a:buNone/>
+            </a:pPr>
+            <a:r>
+              <a:rPr lang="en-US" sz="900" dirty="0">
+                <a:solidFill>
+                  <a:srgbClr val="374151"/>
+                </a:solidFill>
+                <a:latin typeface="Arial" pitchFamily="34" charset="0"/>
+                <a:ea typeface="Arial" pitchFamily="34" charset="-122"/>
+                <a:cs typeface="Arial" pitchFamily="34" charset="-120"/>
+              </a:rPr>
+              <a:t>• H5 (Fragile Footprints): Footprint vector D relies on OpenMP depend clauses. Incomplete clauses silently ruin placement.</a:t>
+            </a:r>
+            <a:endParaRPr lang="en-US" sz="900" dirty="0"/>
+          </a:p>
+          <a:p>
+            <a:pPr indent="0" marL="0">
+              <a:lnSpc>
+                <a:spcPts val="1200"/>
+              </a:lnSpc>
+              <a:buNone/>
+            </a:pPr>
+            <a:endParaRPr lang="en-US" sz="900" dirty="0"/>
+          </a:p>
+          <a:p>
+            <a:pPr indent="0" marL="0">
+              <a:lnSpc>
+                <a:spcPts val="1200"/>
+              </a:lnSpc>
+              <a:buNone/>
+            </a:pPr>
+            <a:r>
+              <a:rPr lang="en-US" sz="900" dirty="0">
+                <a:solidFill>
+                  <a:srgbClr val="374151"/>
+                </a:solidFill>
+                <a:latin typeface="Arial" pitchFamily="34" charset="0"/>
+                <a:ea typeface="Arial" pitchFamily="34" charset="-122"/>
+                <a:cs typeface="Arial" pitchFamily="34" charset="-120"/>
+              </a:rPr>
+              <a:t>• H6 (No Feedback Loop): Data distribution is frozen at omp_malloc. Runtime never migrates hot mis-placed pages.</a:t>
+            </a:r>
+            <a:endParaRPr lang="en-US" sz="900" dirty="0"/>
+          </a:p>
+          <a:p>
+            <a:pPr indent="0" marL="0">
+              <a:lnSpc>
+                <a:spcPts val="1200"/>
+              </a:lnSpc>
+              <a:buNone/>
+            </a:pPr>
+            <a:endParaRPr lang="en-US" sz="900" dirty="0"/>
+          </a:p>
+          <a:p>
+            <a:pPr indent="0" marL="0">
+              <a:lnSpc>
+                <a:spcPts val="1200"/>
+              </a:lnSpc>
+              <a:buNone/>
+            </a:pPr>
+            <a:r>
+              <a:rPr lang="en-US" sz="900" dirty="0">
+                <a:solidFill>
+                  <a:srgbClr val="374151"/>
+                </a:solidFill>
+                <a:latin typeface="Arial" pitchFamily="34" charset="0"/>
+                <a:ea typeface="Arial" pitchFamily="34" charset="-122"/>
+                <a:cs typeface="Arial" pitchFamily="34" charset="-120"/>
+              </a:rPr>
+              <a:t>• H7 (Coarse/Fine Menu Blind Spot): Rigid 2-item menu fails on irregular matrix blocks (SparseLU), causing severe regression.</a:t>
+            </a:r>
+            <a:endParaRPr lang="en-US" sz="900" dirty="0"/>
+          </a:p>
+          <a:p>
+            <a:pPr indent="0" marL="0">
+              <a:lnSpc>
+                <a:spcPts val="1200"/>
+              </a:lnSpc>
+              <a:buNone/>
+            </a:pPr>
+            <a:endParaRPr lang="en-US" sz="900" dirty="0"/>
+          </a:p>
+          <a:p>
+            <a:pPr indent="0" marL="0">
+              <a:lnSpc>
+                <a:spcPts val="1200"/>
+              </a:lnSpc>
+              <a:buNone/>
+            </a:pPr>
+            <a:r>
+              <a:rPr lang="en-US" sz="900" dirty="0">
+                <a:solidFill>
+                  <a:srgbClr val="374151"/>
+                </a:solidFill>
+                <a:latin typeface="Arial" pitchFamily="34" charset="0"/>
+                <a:ea typeface="Arial" pitchFamily="34" charset="-122"/>
+                <a:cs typeface="Arial" pitchFamily="34" charset="-120"/>
+              </a:rPr>
+              <a:t>• H7b (All-Node Over-Allocation): Fallback spreads pages across all 8 sockets, amplifying cross-socket bus contention.</a:t>
+            </a:r>
+            <a:endParaRPr lang="en-US" sz="900" dirty="0"/>
+          </a:p>
+        </p:txBody>
+      </p:sp>
+      <p:sp>
+        <p:nvSpPr>
+          <p:cNvPr id="24" name="Shape 22"/>
+          <p:cNvSpPr/>
+          <p:nvPr/>
+        </p:nvSpPr>
+        <p:spPr>
+          <a:xfrm>
+            <a:off x="4599432" y="4828032"/>
+            <a:ext cx="3044952" cy="731520"/>
+          </a:xfrm>
+          <a:prstGeom prst="roundRect">
+            <a:avLst>
+              <a:gd name="adj" fmla="val 10000"/>
+            </a:avLst>
+          </a:prstGeom>
+          <a:solidFill>
+            <a:srgbClr val="FFF1EB"/>
+          </a:solidFill>
+          <a:ln w="12700">
+            <a:solidFill>
+              <a:srgbClr val="111827"/>
+            </a:solidFill>
+            <a:prstDash val="solid"/>
+          </a:ln>
+        </p:spPr>
+      </p:sp>
+      <p:sp>
+        <p:nvSpPr>
+          <p:cNvPr id="25" name="Text 23"/>
+          <p:cNvSpPr/>
+          <p:nvPr/>
+        </p:nvSpPr>
+        <p:spPr>
+          <a:xfrm>
+            <a:off x="4645152" y="4846320"/>
+            <a:ext cx="2953512" cy="676656"/>
+          </a:xfrm>
+          <a:prstGeom prst="rect">
+            <a:avLst/>
+          </a:prstGeom>
+          <a:noFill/>
+          <a:ln/>
+        </p:spPr>
+        <p:txBody>
+          <a:bodyPr wrap="square" rtlCol="0" anchor="ctr"/>
+          <a:lstStyle/>
+          <a:p>
+            <a:pPr indent="0" marL="0">
+              <a:buNone/>
+            </a:pPr>
+            <a:r>
+              <a:rPr lang="en-US" sz="850" b="1" dirty="0">
+                <a:solidFill>
+                  <a:srgbClr val="111827"/>
+                </a:solidFill>
+                <a:latin typeface="Courier New" pitchFamily="34" charset="0"/>
+                <a:ea typeface="Courier New" pitchFamily="34" charset="-122"/>
+                <a:cs typeface="Courier New" pitchFamily="34" charset="-120"/>
+              </a:rPr>
+              <a:t>Root Pathology:</a:t>
+            </a:r>
+            <a:endParaRPr lang="en-US" sz="850" dirty="0"/>
+          </a:p>
+          <a:p>
+            <a:pPr indent="0" marL="0">
+              <a:buNone/>
+            </a:pPr>
+            <a:r>
+              <a:rPr lang="en-US" sz="850" b="1" dirty="0">
+                <a:solidFill>
+                  <a:srgbClr val="111827"/>
+                </a:solidFill>
+                <a:latin typeface="Courier New" pitchFamily="34" charset="0"/>
+                <a:ea typeface="Courier New" pitchFamily="34" charset="-122"/>
+                <a:cs typeface="Courier New" pitchFamily="34" charset="-120"/>
+              </a:rPr>
+              <a:t>Frozen data distribution &amp; lack of dynamic re-homing</a:t>
+            </a:r>
+            <a:endParaRPr lang="en-US" sz="850" dirty="0"/>
+          </a:p>
+        </p:txBody>
+      </p:sp>
+      <p:sp>
+        <p:nvSpPr>
+          <p:cNvPr id="26" name="Shape 24"/>
+          <p:cNvSpPr/>
+          <p:nvPr/>
+        </p:nvSpPr>
+        <p:spPr>
+          <a:xfrm>
+            <a:off x="8065008" y="1837944"/>
+            <a:ext cx="3410712" cy="3886200"/>
+          </a:xfrm>
+          <a:prstGeom prst="roundRect">
+            <a:avLst>
+              <a:gd name="adj" fmla="val 3753"/>
+            </a:avLst>
+          </a:prstGeom>
+          <a:solidFill>
+            <a:srgbClr val="111827"/>
+          </a:solidFill>
+          <a:ln w="12700">
+            <a:solidFill>
+              <a:srgbClr val="111827"/>
+            </a:solidFill>
+            <a:prstDash val="solid"/>
+          </a:ln>
+        </p:spPr>
+      </p:sp>
+      <p:sp>
+        <p:nvSpPr>
+          <p:cNvPr id="27" name="Shape 25"/>
+          <p:cNvSpPr/>
+          <p:nvPr/>
+        </p:nvSpPr>
+        <p:spPr>
+          <a:xfrm>
+            <a:off x="8010144" y="1783080"/>
+            <a:ext cx="3410712" cy="3886200"/>
+          </a:xfrm>
+          <a:prstGeom prst="roundRect">
+            <a:avLst>
+              <a:gd name="adj" fmla="val 3753"/>
+            </a:avLst>
+          </a:prstGeom>
+          <a:solidFill>
+            <a:srgbClr val="EEF2FF"/>
+          </a:solidFill>
+          <a:ln w="19050">
+            <a:solidFill>
+              <a:srgbClr val="111827"/>
+            </a:solidFill>
+            <a:prstDash val="solid"/>
+          </a:ln>
+        </p:spPr>
+      </p:sp>
+      <p:sp>
+        <p:nvSpPr>
+          <p:cNvPr id="28" name="Text 26"/>
+          <p:cNvSpPr/>
+          <p:nvPr/>
+        </p:nvSpPr>
+        <p:spPr>
+          <a:xfrm>
+            <a:off x="8284464" y="1901952"/>
+            <a:ext cx="3044952" cy="274320"/>
+          </a:xfrm>
+          <a:prstGeom prst="rect">
+            <a:avLst/>
+          </a:prstGeom>
+          <a:noFill/>
+          <a:ln/>
+        </p:spPr>
+        <p:txBody>
+          <a:bodyPr wrap="square" rtlCol="0" anchor="ctr"/>
+          <a:lstStyle/>
+          <a:p>
+            <a:pPr indent="0" marL="0">
+              <a:buNone/>
+            </a:pPr>
+            <a:r>
+              <a:rPr lang="en-US" sz="1300" dirty="0">
+                <a:solidFill>
+                  <a:srgbClr val="111827"/>
+                </a:solidFill>
+                <a:latin typeface="Arial Black" pitchFamily="34" charset="0"/>
+                <a:ea typeface="Arial Black" pitchFamily="34" charset="-122"/>
+                <a:cs typeface="Arial Black" pitchFamily="34" charset="-120"/>
+              </a:rPr>
+              <a:t>Mesh Bottlenecks</a:t>
+            </a:r>
+            <a:endParaRPr lang="en-US" sz="1300" dirty="0"/>
+          </a:p>
+        </p:txBody>
+      </p:sp>
+      <p:sp>
+        <p:nvSpPr>
+          <p:cNvPr id="29" name="Shape 27"/>
+          <p:cNvSpPr/>
+          <p:nvPr/>
+        </p:nvSpPr>
+        <p:spPr>
+          <a:xfrm>
+            <a:off x="8284464" y="2194560"/>
+            <a:ext cx="1463040" cy="201168"/>
+          </a:xfrm>
+          <a:prstGeom prst="roundRect">
+            <a:avLst>
+              <a:gd name="adj" fmla="val 50000"/>
+            </a:avLst>
+          </a:prstGeom>
+          <a:solidFill>
+            <a:srgbClr val="FFFFFF"/>
+          </a:solidFill>
+          <a:ln w="12700">
+            <a:solidFill>
+              <a:srgbClr val="111827"/>
+            </a:solidFill>
+            <a:prstDash val="solid"/>
+          </a:ln>
+        </p:spPr>
+      </p:sp>
+      <p:sp>
+        <p:nvSpPr>
+          <p:cNvPr id="30" name="Text 28"/>
+          <p:cNvSpPr/>
+          <p:nvPr/>
+        </p:nvSpPr>
+        <p:spPr>
+          <a:xfrm>
+            <a:off x="8284464" y="2194560"/>
+            <a:ext cx="1463040" cy="201168"/>
+          </a:xfrm>
+          <a:prstGeom prst="rect">
+            <a:avLst/>
+          </a:prstGeom>
+          <a:noFill/>
+          <a:ln/>
+        </p:spPr>
+        <p:txBody>
+          <a:bodyPr wrap="square" rtlCol="0" anchor="ctr"/>
+          <a:lstStyle/>
+          <a:p>
+            <a:pPr algn="ctr" indent="0" marL="0">
+              <a:buNone/>
+            </a:pPr>
+            <a:r>
+              <a:rPr lang="en-US" sz="800" b="1" dirty="0">
+                <a:solidFill>
+                  <a:srgbClr val="111827"/>
+                </a:solidFill>
+                <a:latin typeface="Courier New" pitchFamily="34" charset="0"/>
+                <a:ea typeface="Courier New" pitchFamily="34" charset="-122"/>
+                <a:cs typeface="Courier New" pitchFamily="34" charset="-120"/>
+              </a:rPr>
+              <a:t>Hotspots H8 – H10</a:t>
+            </a:r>
+            <a:endParaRPr lang="en-US" sz="800" dirty="0"/>
+          </a:p>
+        </p:txBody>
+      </p:sp>
+      <p:sp>
+        <p:nvSpPr>
+          <p:cNvPr id="31" name="Text 29"/>
+          <p:cNvSpPr/>
+          <p:nvPr/>
+        </p:nvSpPr>
+        <p:spPr>
+          <a:xfrm>
+            <a:off x="8284464" y="2468880"/>
+            <a:ext cx="3044952" cy="2286000"/>
+          </a:xfrm>
+          <a:prstGeom prst="rect">
+            <a:avLst/>
+          </a:prstGeom>
+          <a:noFill/>
+          <a:ln/>
+        </p:spPr>
+        <p:txBody>
+          <a:bodyPr wrap="square" rtlCol="0" anchor="ctr"/>
+          <a:lstStyle/>
+          <a:p>
+            <a:pPr indent="0" marL="0">
+              <a:lnSpc>
+                <a:spcPts val="1200"/>
+              </a:lnSpc>
+              <a:buNone/>
+            </a:pPr>
+            <a:r>
+              <a:rPr lang="en-US" sz="900" dirty="0">
+                <a:solidFill>
+                  <a:srgbClr val="374151"/>
+                </a:solidFill>
+                <a:latin typeface="Arial" pitchFamily="34" charset="0"/>
+                <a:ea typeface="Arial" pitchFamily="34" charset="-122"/>
+                <a:cs typeface="Arial" pitchFamily="34" charset="-120"/>
+              </a:rPr>
+              <a:t>• H8 (Static Home-Cache Trapping): Data is permanently locked to initial home cache; forces brutal locality vs balance conflict.</a:t>
+            </a:r>
+            <a:endParaRPr lang="en-US" sz="900" dirty="0"/>
+          </a:p>
+          <a:p>
+            <a:pPr indent="0" marL="0">
+              <a:lnSpc>
+                <a:spcPts val="1200"/>
+              </a:lnSpc>
+              <a:buNone/>
+            </a:pPr>
+            <a:endParaRPr lang="en-US" sz="900" dirty="0"/>
+          </a:p>
+          <a:p>
+            <a:pPr indent="0" marL="0">
+              <a:lnSpc>
+                <a:spcPts val="1200"/>
+              </a:lnSpc>
+              <a:buNone/>
+            </a:pPr>
+            <a:r>
+              <a:rPr lang="en-US" sz="900" dirty="0">
+                <a:solidFill>
+                  <a:srgbClr val="374151"/>
+                </a:solidFill>
+                <a:latin typeface="Arial" pitchFamily="34" charset="0"/>
+                <a:ea typeface="Arial" pitchFamily="34" charset="-122"/>
+                <a:cs typeface="Arial" pitchFamily="34" charset="-120"/>
+              </a:rPr>
+              <a:t>• H9 (Center Bisection Contention): XY dimension-order routing concentrates traffic on center bisection links (tiles 3,3 to 4,4).</a:t>
+            </a:r>
+            <a:endParaRPr lang="en-US" sz="900" dirty="0"/>
+          </a:p>
+          <a:p>
+            <a:pPr indent="0" marL="0">
+              <a:lnSpc>
+                <a:spcPts val="1200"/>
+              </a:lnSpc>
+              <a:buNone/>
+            </a:pPr>
+            <a:endParaRPr lang="en-US" sz="900" dirty="0"/>
+          </a:p>
+          <a:p>
+            <a:pPr indent="0" marL="0">
+              <a:lnSpc>
+                <a:spcPts val="1200"/>
+              </a:lnSpc>
+              <a:buNone/>
+            </a:pPr>
+            <a:r>
+              <a:rPr lang="en-US" sz="900" dirty="0">
+                <a:solidFill>
+                  <a:srgbClr val="374151"/>
+                </a:solidFill>
+                <a:latin typeface="Arial" pitchFamily="34" charset="0"/>
+                <a:ea typeface="Arial" pitchFamily="34" charset="-122"/>
+                <a:cs typeface="Arial" pitchFamily="34" charset="-120"/>
+              </a:rPr>
+              <a:t>• H10 (2D Coarse/Fine Mismatch): 1D line striping destroys 2D spatial locality for matrix stencils and blocked solvers.</a:t>
+            </a:r>
+            <a:endParaRPr lang="en-US" sz="900" dirty="0"/>
+          </a:p>
+          <a:p>
+            <a:pPr indent="0" marL="0">
+              <a:lnSpc>
+                <a:spcPts val="1200"/>
+              </a:lnSpc>
+              <a:buNone/>
+            </a:pPr>
+            <a:endParaRPr lang="en-US" sz="900" dirty="0"/>
+          </a:p>
+          <a:p>
+            <a:pPr indent="0" marL="0">
+              <a:lnSpc>
+                <a:spcPts val="1200"/>
+              </a:lnSpc>
+              <a:buNone/>
+            </a:pPr>
+            <a:r>
+              <a:rPr lang="en-US" sz="900" dirty="0">
+                <a:solidFill>
+                  <a:srgbClr val="374151"/>
+                </a:solidFill>
+                <a:latin typeface="Arial" pitchFamily="34" charset="0"/>
+                <a:ea typeface="Arial" pitchFamily="34" charset="-122"/>
+                <a:cs typeface="Arial" pitchFamily="34" charset="-120"/>
+              </a:rPr>
+              <a:t>• H10b (14-Hop Corner Drag): Remote diagonal tile steals incur up to 66 CPU cycles, stalling VLIW execution pipelines.</a:t>
+            </a:r>
+            <a:endParaRPr lang="en-US" sz="900" dirty="0"/>
+          </a:p>
+        </p:txBody>
+      </p:sp>
+      <p:sp>
+        <p:nvSpPr>
+          <p:cNvPr id="32" name="Shape 30"/>
+          <p:cNvSpPr/>
+          <p:nvPr/>
+        </p:nvSpPr>
+        <p:spPr>
+          <a:xfrm>
+            <a:off x="8284464" y="4828032"/>
+            <a:ext cx="3044952" cy="731520"/>
+          </a:xfrm>
+          <a:prstGeom prst="roundRect">
+            <a:avLst>
+              <a:gd name="adj" fmla="val 10000"/>
+            </a:avLst>
+          </a:prstGeom>
+          <a:solidFill>
+            <a:srgbClr val="FFFFFF"/>
+          </a:solidFill>
+          <a:ln w="12700">
+            <a:solidFill>
+              <a:srgbClr val="111827"/>
+            </a:solidFill>
+            <a:prstDash val="solid"/>
+          </a:ln>
+        </p:spPr>
+      </p:sp>
+      <p:sp>
+        <p:nvSpPr>
+          <p:cNvPr id="33" name="Text 31"/>
+          <p:cNvSpPr/>
+          <p:nvPr/>
+        </p:nvSpPr>
+        <p:spPr>
+          <a:xfrm>
+            <a:off x="8330184" y="4846320"/>
+            <a:ext cx="2953512" cy="676656"/>
+          </a:xfrm>
+          <a:prstGeom prst="rect">
+            <a:avLst/>
+          </a:prstGeom>
+          <a:noFill/>
+          <a:ln/>
+        </p:spPr>
+        <p:txBody>
+          <a:bodyPr wrap="square" rtlCol="0" anchor="ctr"/>
+          <a:lstStyle/>
+          <a:p>
+            <a:pPr indent="0" marL="0">
+              <a:buNone/>
+            </a:pPr>
+            <a:r>
+              <a:rPr lang="en-US" sz="850" b="1" dirty="0">
+                <a:solidFill>
+                  <a:srgbClr val="111827"/>
+                </a:solidFill>
+                <a:latin typeface="Courier New" pitchFamily="34" charset="0"/>
+                <a:ea typeface="Courier New" pitchFamily="34" charset="-122"/>
+                <a:cs typeface="Courier New" pitchFamily="34" charset="-120"/>
+              </a:rPr>
+              <a:t>Root Pathology:</a:t>
+            </a:r>
+            <a:endParaRPr lang="en-US" sz="850" dirty="0"/>
+          </a:p>
+          <a:p>
+            <a:pPr indent="0" marL="0">
+              <a:buNone/>
+            </a:pPr>
+            <a:r>
+              <a:rPr lang="en-US" sz="850" b="1" dirty="0">
+                <a:solidFill>
+                  <a:srgbClr val="111827"/>
+                </a:solidFill>
+                <a:latin typeface="Courier New" pitchFamily="34" charset="0"/>
+                <a:ea typeface="Courier New" pitchFamily="34" charset="-122"/>
+                <a:cs typeface="Courier New" pitchFamily="34" charset="-120"/>
+              </a:rPr>
+              <a:t>Center bisection link saturation &amp; 1D striping mismatch</a:t>
+            </a:r>
+            <a:endParaRPr lang="en-US" sz="850" dirty="0"/>
+          </a:p>
+        </p:txBody>
+      </p:sp>
+      <p:sp>
+        <p:nvSpPr>
+          <p:cNvPr id="34" name="Shape 32"/>
+          <p:cNvSpPr/>
+          <p:nvPr/>
+        </p:nvSpPr>
+        <p:spPr>
+          <a:xfrm>
+            <a:off x="777240" y="5806440"/>
+            <a:ext cx="10744200" cy="502920"/>
+          </a:xfrm>
+          <a:prstGeom prst="roundRect">
+            <a:avLst>
+              <a:gd name="adj" fmla="val 18182"/>
+            </a:avLst>
+          </a:prstGeom>
+          <a:solidFill>
+            <a:srgbClr val="111827"/>
+          </a:solidFill>
+          <a:ln w="12700">
+            <a:solidFill>
+              <a:srgbClr val="111827"/>
+            </a:solidFill>
+            <a:prstDash val="solid"/>
+          </a:ln>
+        </p:spPr>
+      </p:sp>
+      <p:sp>
+        <p:nvSpPr>
+          <p:cNvPr id="35" name="Shape 33"/>
+          <p:cNvSpPr/>
+          <p:nvPr/>
+        </p:nvSpPr>
+        <p:spPr>
+          <a:xfrm>
+            <a:off x="731520" y="5760720"/>
+            <a:ext cx="10744200" cy="502920"/>
+          </a:xfrm>
+          <a:prstGeom prst="roundRect">
+            <a:avLst>
+              <a:gd name="adj" fmla="val 18182"/>
+            </a:avLst>
+          </a:prstGeom>
+          <a:solidFill>
+            <a:srgbClr val="FFD147"/>
+          </a:solidFill>
+          <a:ln w="19050">
+            <a:solidFill>
+              <a:srgbClr val="111827"/>
+            </a:solidFill>
+            <a:prstDash val="solid"/>
+          </a:ln>
+        </p:spPr>
+      </p:sp>
+      <p:sp>
+        <p:nvSpPr>
+          <p:cNvPr id="36" name="Text 34"/>
+          <p:cNvSpPr/>
+          <p:nvPr/>
+        </p:nvSpPr>
+        <p:spPr>
+          <a:xfrm>
+            <a:off x="914400" y="5760720"/>
+            <a:ext cx="10378440" cy="502920"/>
+          </a:xfrm>
+          <a:prstGeom prst="rect">
+            <a:avLst/>
+          </a:prstGeom>
+          <a:noFill/>
+          <a:ln/>
+        </p:spPr>
+        <p:txBody>
+          <a:bodyPr wrap="square" rtlCol="0" anchor="ctr"/>
+          <a:lstStyle/>
+          <a:p>
+            <a:pPr indent="0" marL="0">
+              <a:buNone/>
+            </a:pPr>
+            <a:r>
+              <a:rPr lang="en-US" sz="1100" b="1" dirty="0">
+                <a:solidFill>
+                  <a:srgbClr val="111827"/>
+                </a:solidFill>
+                <a:latin typeface="Arial Black" pitchFamily="34" charset="0"/>
+                <a:ea typeface="Arial Black" pitchFamily="34" charset="-122"/>
+                <a:cs typeface="Arial Black" pitchFamily="34" charset="-120"/>
+              </a:rPr>
+              <a:t>Audit Discovery: </a:t>
+            </a:r>
+            <a:pPr indent="0" marL="0">
+              <a:buNone/>
+            </a:pPr>
+            <a:r>
+              <a:rPr lang="en-US" sz="1050" dirty="0">
+                <a:solidFill>
+                  <a:srgbClr val="111827"/>
+                </a:solidFill>
+                <a:latin typeface="Arial" pitchFamily="34" charset="0"/>
+                <a:ea typeface="Arial" pitchFamily="34" charset="-122"/>
+                <a:cs typeface="Arial" pitchFamily="34" charset="-120"/>
+              </a:rPr>
+              <a:t>Optimizing memory locality while ignoring queue backlog and interconnect contention is mathematically self-defeating on irregular task graphs.</a:t>
+            </a:r>
+            <a:endParaRPr lang="en-US" sz="1100" dirty="0"/>
+          </a:p>
+        </p:txBody>
+      </p:sp>
+      <p:sp>
+        <p:nvSpPr>
+          <p:cNvPr id="37" name="Text 35"/>
+          <p:cNvSpPr/>
+          <p:nvPr/>
+        </p:nvSpPr>
+        <p:spPr>
+          <a:xfrm>
+            <a:off x="731520" y="6355080"/>
+            <a:ext cx="8229600" cy="320040"/>
+          </a:xfrm>
+          <a:prstGeom prst="rect">
+            <a:avLst/>
+          </a:prstGeom>
+          <a:noFill/>
+          <a:ln/>
+        </p:spPr>
+        <p:txBody>
+          <a:bodyPr wrap="square" rtlCol="0" anchor="ctr"/>
+          <a:lstStyle/>
+          <a:p>
+            <a:pPr indent="0" marL="0">
+              <a:buNone/>
+            </a:pPr>
+            <a:r>
+              <a:rPr lang="en-US" sz="950" dirty="0">
+                <a:solidFill>
+                  <a:srgbClr val="4B5563"/>
+                </a:solidFill>
+                <a:latin typeface="Courier New" pitchFamily="34" charset="0"/>
+                <a:ea typeface="Courier New" pitchFamily="34" charset="-122"/>
+                <a:cs typeface="Courier New" pitchFamily="34" charset="-120"/>
+              </a:rPr>
+              <a:t>Auditing Muddukrishna et al. (2015) · Hotspots H1–H10 Taxonomy</a:t>
+            </a:r>
+            <a:endParaRPr lang="en-US" sz="950" dirty="0"/>
+          </a:p>
+        </p:txBody>
+      </p:sp>
+      <p:sp>
+        <p:nvSpPr>
+          <p:cNvPr id="38" name="Text 36"/>
+          <p:cNvSpPr/>
+          <p:nvPr/>
+        </p:nvSpPr>
+        <p:spPr>
+          <a:xfrm>
+            <a:off x="10058400" y="6355080"/>
+            <a:ext cx="1399032" cy="320040"/>
+          </a:xfrm>
+          <a:prstGeom prst="rect">
+            <a:avLst/>
+          </a:prstGeom>
+          <a:noFill/>
+          <a:ln/>
+        </p:spPr>
+        <p:txBody>
+          <a:bodyPr wrap="square" rtlCol="0" anchor="ctr"/>
+          <a:lstStyle/>
+          <a:p>
+            <a:pPr algn="r" indent="0" marL="0">
+              <a:buNone/>
+            </a:pPr>
+            <a:r>
+              <a:rPr lang="en-US" sz="950" dirty="0">
+                <a:solidFill>
+                  <a:srgbClr val="4B5563"/>
+                </a:solidFill>
+                <a:latin typeface="Courier New" pitchFamily="34" charset="0"/>
+                <a:ea typeface="Courier New" pitchFamily="34" charset="-122"/>
+                <a:cs typeface="Courier New" pitchFamily="34" charset="-120"/>
+              </a:rPr>
+              <a:t>03 / 06</a:t>
+            </a:r>
+            <a:endParaRPr lang="en-US" sz="950" dirty="0"/>
+          </a:p>
+        </p:txBody>
+      </p:sp>
+    </p:spTree>
+  </p:cSld>
+  <p:clrMapOvr>
+    <a:masterClrMapping/>
+  </p:clrMapOvr>
+</p:sld>
 </file>
 
-<file path=ppt/slides/slide4.xml><?xml version="1.0" encoding="UTF-8" standalone="yes"?>
-<p:sld xmlns:a="http://schemas.openxmlformats.org/drawingml/2006/main" xmlns:r="http://schemas.openxmlformats.org/officeDocument/2006/relationships" xmlns:p="http://schemas.openxmlformats.org/presentationml/2006/main"><p:cSld name="Slide 4"><p:spTree><p:nvGrpSpPr><p:cNvPr id="1" name=""/><p:cNvGrpSpPr/><p:nvPr/></p:nvGrpSpPr><p:grpSpPr><a:xfrm><a:off x="0" y="0"/><a:ext cx="0" cy="0"/><a:chOff x="0" y="0"/><a:chExt cx="0" cy="0"/></a:xfrm></p:grpSpPr><p:sp><p:nvSpPr><p:cNvPr id="2" name="Shape 0"></p:cNvPr><p:cNvSpPr/><p:nvPr></p:nvPr></p:nvSpPr><p:spPr><a:xfrm><a:off x="0" y="0"/><a:ext cx="12191695" cy="6858000"/></a:xfrm><a:prstGeom prst="rect"><a:avLst></a:avLst></a:prstGeom><a:solidFill><a:srgbClr val="F4F0EA"/></a:solidFill><a:ln w="12700"><a:solidFill><a:srgbClr val="F4F0EA"/></a:solidFill><a:prstDash val="solid"/></a:ln></p:spPr></p:sp><p:sp><p:nvSpPr><p:cNvPr id="3" name="Shape 1"></p:cNvPr><p:cNvSpPr/><p:nvPr></p:nvPr></p:nvSpPr><p:spPr><a:xfrm><a:off x="960120" y="0"/><a:ext cx="9144" cy="6858000"/></a:xfrm><a:prstGeom prst="rect"><a:avLst></a:avLst></a:prstGeom><a:solidFill><a:srgbClr val="DDD8CF"/></a:solidFill><a:ln w="12700"><a:solidFill><a:srgbClr val="DDD8CF"/></a:solidFill><a:prstDash val="solid"/></a:ln></p:spPr></p:sp><p:sp><p:nvSpPr><p:cNvPr id="4" name="Shape 2"></p:cNvPr><p:cNvSpPr/><p:nvPr></p:nvPr></p:nvSpPr><p:spPr><a:xfrm><a:off x="1920240" y="0"/><a:ext cx="9144" cy="6858000"/></a:xfrm><a:prstGeom prst="rect"><a:avLst></a:avLst></a:prstGeom><a:solidFill><a:srgbClr val="DDD8CF"/></a:solidFill><a:ln w="12700"><a:solidFill><a:srgbClr val="DDD8CF"/></a:solidFill><a:prstDash val="solid"/></a:ln></p:spPr></p:sp><p:sp><p:nvSpPr><p:cNvPr id="5" name="Shape 3"></p:cNvPr><p:cNvSpPr/><p:nvPr></p:nvPr></p:nvSpPr><p:spPr><a:xfrm><a:off x="2880360" y="0"/><a:ext cx="9144" cy="6858000"/></a:xfrm><a:prstGeom prst="rect"><a:avLst></a:avLst></a:prstGeom><a:solidFill><a:srgbClr val="DDD8CF"/></a:solidFill><a:ln w="12700"><a:solidFill><a:srgbClr val="DDD8CF"/></a:solidFill><a:prstDash val="solid"/></a:ln></p:spPr></p:sp><p:sp><p:nvSpPr><p:cNvPr id="6" name="Shape 4"></p:cNvPr><p:cNvSpPr/><p:nvPr></p:nvPr></p:nvSpPr><p:spPr><a:xfrm><a:off x="3840480" y="0"/><a:ext cx="9144" cy="6858000"/></a:xfrm><a:prstGeom prst="rect"><a:avLst></a:avLst></a:prstGeom><a:solidFill><a:srgbClr val="DDD8CF"/></a:solidFill><a:ln w="12700"><a:solidFill><a:srgbClr val="DDD8CF"/></a:solidFill><a:prstDash val="solid"/></a:ln></p:spPr></p:sp><p:sp><p:nvSpPr><p:cNvPr id="7" name="Shape 5"></p:cNvPr><p:cNvSpPr/><p:nvPr></p:nvPr></p:nvSpPr><p:spPr><a:xfrm><a:off x="4800600" y="0"/><a:ext cx="9144" cy="6858000"/></a:xfrm><a:prstGeom prst="rect"><a:avLst></a:avLst></a:prstGeom><a:solidFill><a:srgbClr val="DDD8CF"/></a:solidFill><a:ln w="12700"><a:solidFill><a:srgbClr val="DDD8CF"/></a:solidFill><a:prstDash val="solid"/></a:ln></p:spPr></p:sp><p:sp><p:nvSpPr><p:cNvPr id="8" name="Shape 6"></p:cNvPr><p:cNvSpPr/><p:nvPr></p:nvPr></p:nvSpPr><p:spPr><a:xfrm><a:off x="5760720" y="0"/><a:ext cx="9144" cy="6858000"/></a:xfrm><a:prstGeom prst="rect"><a:avLst></a:avLst></a:prstGeom><a:solidFill><a:srgbClr val="DDD8CF"/></a:solidFill><a:ln w="12700"><a:solidFill><a:srgbClr val="DDD8CF"/></a:solidFill><a:prstDash val="solid"/></a:ln></p:spPr></p:sp><p:sp><p:nvSpPr><p:cNvPr id="9" name="Shape 7"></p:cNvPr><p:cNvSpPr/><p:nvPr></p:nvPr></p:nvSpPr><p:spPr><a:xfrm><a:off x="6720840" y="0"/><a:ext cx="9144" cy="6858000"/></a:xfrm><a:prstGeom prst="rect"><a:avLst></a:avLst></a:prstGeom><a:solidFill><a:srgbClr val="DDD8CF"/></a:solidFill><a:ln w="12700"><a:solidFill><a:srgbClr val="DDD8CF"/></a:solidFill><a:prstDash val="solid"/></a:ln></p:spPr></p:sp><p:sp><p:nvSpPr><p:cNvPr id="10" name="Shape 8"></p:cNvPr><p:cNvSpPr/><p:nvPr></p:nvPr></p:nvSpPr><p:spPr><a:xfrm><a:off x="7680960" y="0"/><a:ext cx="9144" cy="6858000"/></a:xfrm><a:prstGeom prst="rect"><a:avLst></a:avLst></a:prstGeom><a:solidFill><a:srgbClr val="DDD8CF"/></a:solidFill><a:ln w="12700"><a:solidFill><a:srgbClr val="DDD8CF"/></a:solidFill><a:prstDash val="solid"/></a:ln></p:spPr></p:sp><p:sp><p:nvSpPr><p:cNvPr id="11" name="Shape 9"></p:cNvPr><p:cNvSpPr/><p:nvPr></p:nvPr></p:nvSpPr><p:spPr><a:xfrm><a:off x="8641080" y="0"/><a:ext cx="9144" cy="6858000"/></a:xfrm><a:prstGeom prst="rect"><a:avLst></a:avLst></a:prstGeom><a:solidFill><a:srgbClr val="DDD8CF"/></a:solidFill><a:ln w="12700"><a:solidFill><a:srgbClr val="DDD8CF"/></a:solidFill><a:prstDash val="solid"/></a:ln></p:spPr></p:sp><p:sp><p:nvSpPr><p:cNvPr id="12" name="Shape 10"></p:cNvPr><p:cNvSpPr/><p:nvPr></p:nvPr></p:nvSpPr><p:spPr><a:xfrm><a:off x="9601200" y="0"/><a:ext cx="9144" cy="6858000"/></a:xfrm><a:prstGeom prst="rect"><a:avLst></a:avLst></a:prstGeom><a:solidFill><a:srgbClr val="DDD8CF"/></a:solidFill><a:ln w="12700"><a:solidFill><a:srgbClr val="DDD8CF"/></a:solidFill><a:prstDash val="solid"/></a:ln></p:spPr></p:sp><p:sp><p:nvSpPr><p:cNvPr id="13" name="Shape 11"></p:cNvPr><p:cNvSpPr/><p:nvPr></p:nvPr></p:nvSpPr><p:spPr><a:xfrm><a:off x="10561320" y="0"/><a:ext cx="9144" cy="6858000"/></a:xfrm><a:prstGeom prst="rect"><a:avLst></a:avLst></a:prstGeom><a:solidFill><a:srgbClr val="DDD8CF"/></a:solidFill><a:ln w="12700"><a:solidFill><a:srgbClr val="DDD8CF"/></a:solidFill><a:prstDash val="solid"/></a:ln></p:spPr></p:sp><p:sp><p:nvSpPr><p:cNvPr id="14" name="Shape 12"></p:cNvPr><p:cNvSpPr/><p:nvPr></p:nvPr></p:nvSpPr><p:spPr><a:xfrm><a:off x="0" y="960120"/><a:ext cx="12191695" cy="9144"/></a:xfrm><a:prstGeom prst="rect"><a:avLst></a:avLst></a:prstGeom><a:solidFill><a:srgbClr val="DDD8CF"/></a:solidFill><a:ln w="12700"><a:solidFill><a:srgbClr val="DDD8CF"/></a:solidFill><a:prstDash val="solid"/></a:ln></p:spPr></p:sp><p:sp><p:nvSpPr><p:cNvPr id="15" name="Shape 13"></p:cNvPr><p:cNvSpPr/><p:nvPr></p:nvPr></p:nvSpPr><p:spPr><a:xfrm><a:off x="0" y="1920240"/><a:ext cx="12191695" cy="9144"/></a:xfrm><a:prstGeom prst="rect"><a:avLst></a:avLst></a:prstGeom><a:solidFill><a:srgbClr val="DDD8CF"/></a:solidFill><a:ln w="12700"><a:solidFill><a:srgbClr val="DDD8CF"/></a:solidFill><a:prstDash val="solid"/></a:ln></p:spPr></p:sp><p:sp><p:nvSpPr><p:cNvPr id="16" name="Shape 14"></p:cNvPr><p:cNvSpPr/><p:nvPr></p:nvPr></p:nvSpPr><p:spPr><a:xfrm><a:off x="0" y="2880360"/><a:ext cx="12191695" cy="9144"/></a:xfrm><a:prstGeom prst="rect"><a:avLst></a:avLst></a:prstGeom><a:solidFill><a:srgbClr val="DDD8CF"/></a:solidFill><a:ln w="12700"><a:solidFill><a:srgbClr val="DDD8CF"/></a:solidFill><a:prstDash val="solid"/></a:ln></p:spPr></p:sp><p:sp><p:nvSpPr><p:cNvPr id="17" name="Shape 15"></p:cNvPr><p:cNvSpPr/><p:nvPr></p:nvPr></p:nvSpPr><p:spPr><a:xfrm><a:off x="0" y="3840480"/><a:ext cx="12191695" cy="9144"/></a:xfrm><a:prstGeom prst="rect"><a:avLst></a:avLst></a:prstGeom><a:solidFill><a:srgbClr val="DDD8CF"/></a:solidFill><a:ln w="12700"><a:solidFill><a:srgbClr val="DDD8CF"/></a:solidFill><a:prstDash val="solid"/></a:ln></p:spPr></p:sp><p:sp><p:nvSpPr><p:cNvPr id="18" name="Shape 16"></p:cNvPr><p:cNvSpPr/><p:nvPr></p:nvPr></p:nvSpPr><p:spPr><a:xfrm><a:off x="0" y="4800600"/><a:ext cx="12191695" cy="9144"/></a:xfrm><a:prstGeom prst="rect"><a:avLst></a:avLst></a:prstGeom><a:solidFill><a:srgbClr val="DDD8CF"/></a:solidFill><a:ln w="12700"><a:solidFill><a:srgbClr val="DDD8CF"/></a:solidFill><a:prstDash val="solid"/></a:ln></p:spPr></p:sp><p:sp><p:nvSpPr><p:cNvPr id="19" name="Shape 17"></p:cNvPr><p:cNvSpPr/><p:nvPr></p:nvPr></p:nvSpPr><p:spPr><a:xfrm><a:off x="0" y="5760720"/><a:ext cx="12191695" cy="9144"/></a:xfrm><a:prstGeom prst="rect"><a:avLst></a:avLst></a:prstGeom><a:solidFill><a:srgbClr val="DDD8CF"/></a:solidFill><a:ln w="12700"><a:solidFill><a:srgbClr val="DDD8CF"/></a:solidFill><a:prstDash val="solid"/></a:ln></p:spPr></p:sp><p:sp><p:nvSpPr><p:cNvPr id="20" name="Shape 18"></p:cNvPr><p:cNvSpPr/><p:nvPr></p:nvPr></p:nvSpPr><p:spPr><a:xfrm><a:off x="411480" y="320040"/><a:ext cx="2377440" cy="292608"/></a:xfrm><a:prstGeom prst="roundRect"><a:avLst><a:gd name="adj" fmla="val 50000"/></a:avLst></a:prstGeom><a:solidFill><a:srgbClr val="111827"/></a:solidFill><a:ln w="12700"><a:solidFill><a:srgbClr val="111827"/></a:solidFill><a:prstDash val="solid"/></a:ln></p:spPr></p:sp><p:sp><p:nvSpPr><p:cNvPr id="21" name="Text 19"></p:cNvPr><p:cNvSpPr/><p:nvPr></p:nvPr></p:nvSpPr><p:spPr><a:xfrm><a:off x="502920" y="320040"/><a:ext cx="2194560" cy="292608"/></a:xfrm><a:prstGeom prst="rect"><a:avLst></a:avLst></a:prstGeom><a:noFill/><a:ln></a:ln></p:spPr><p:txBody><a:bodyPr wrap="square" rtlCol="0" anchor="ctr"></a:bodyPr><a:lstStyle/><a:p><a:pPr indent="0" marL="0"><a:buNone/></a:pPr><a:r><a:rPr lang="en-US" sz="900" b="1" spc="200" kern="0" dirty="0"><a:solidFill><a:srgbClr val="FFD147"/></a:solidFill><a:latin typeface=""JetBrains Mono", "Courier New", monospace" pitchFamily="34" charset="0"/><a:ea typeface=""JetBrains Mono", "Courier New", monospace" pitchFamily="34" charset="-122"/><a:cs typeface=""JetBrains Mono", "Courier New", monospace" pitchFamily="34" charset="-120"/></a:rPr><a:t>PART 03</a:t></a:r><a:endParaRPr lang="en-US" sz="900" dirty="0"/></a:p></p:txBody></p:sp><p:sp><p:nvSpPr><p:cNvPr id="22" name="Text 20"></p:cNvPr><p:cNvSpPr/><p:nvPr></p:nvPr></p:nvSpPr><p:spPr><a:xfrm><a:off x="411480" y="777240"/><a:ext cx="10972800" cy="731520"/></a:xfrm><a:prstGeom prst="rect"><a:avLst></a:avLst></a:prstGeom><a:noFill/><a:ln></a:ln></p:spPr><p:txBody><a:bodyPr wrap="square" rtlCol="0" anchor="ctr"></a:bodyPr><a:lstStyle/><a:p><a:pPr indent="0" marL="0"><a:buNone/></a:pPr><a:r><a:rPr lang="en-US" sz="4200" b="1" spc="-300" kern="0" dirty="0"><a:solidFill><a:srgbClr val="111827"/></a:solidFill><a:latin typeface="Arial Black, "Trebuchet MS", "Helvetica Neue", sans-serif" pitchFamily="34" charset="0"/><a:ea typeface="Arial Black, "Trebuchet MS", "Helvetica Neue", sans-serif" pitchFamily="34" charset="-122"/><a:cs typeface="Arial Black, "Trebuchet MS", "Helvetica Neue", sans-serif" pitchFamily="34" charset="-120"/></a:rPr><a:t>The SparseLU Paradox:</a:t></a:r><a:endParaRPr lang="en-US" sz="4200" dirty="0"/></a:p></p:txBody></p:sp><p:sp><p:nvSpPr><p:cNvPr id="23" name="Shape 21"></p:cNvPr><p:cNvSpPr/><p:nvPr></p:nvPr></p:nvSpPr><p:spPr><a:xfrm><a:off x="5943600" y="1417320"/><a:ext cx="5852160" cy="640080"/></a:xfrm><a:prstGeom prst="roundRect"><a:avLst><a:gd name="adj" fmla="val 11429"/></a:avLst></a:prstGeom><a:solidFill><a:srgbClr val="FFD147"/></a:solidFill><a:ln w="31750"><a:solidFill><a:srgbClr val="111827"/></a:solidFill><a:prstDash val="solid"/></a:ln></p:spPr></p:sp><p:sp><p:nvSpPr><p:cNvPr id="24" name="Text 22"></p:cNvPr><p:cNvSpPr/><p:nvPr></p:nvPr></p:nvSpPr><p:spPr><a:xfrm><a:off x="6035040" y="1463040"/><a:ext cx="5669280" cy="548640"/></a:xfrm><a:prstGeom prst="rect"><a:avLst></a:avLst></a:prstGeom><a:noFill/><a:ln></a:ln></p:spPr><p:txBody><a:bodyPr wrap="square" rtlCol="0" anchor="ctr"></a:bodyPr><a:lstStyle/><a:p><a:pPr indent="0" marL="0"><a:buNone/></a:pPr><a:r><a:rPr lang="en-US" sz="3000" b="1" spc="-200" kern="0" dirty="0"><a:solidFill><a:srgbClr val="111827"/></a:solidFill><a:latin typeface="Arial Black, "Trebuchet MS", "Helvetica Neue", sans-serif" pitchFamily="34" charset="0"/><a:ea typeface="Arial Black, "Trebuchet MS", "Helvetica Neue", sans-serif" pitchFamily="34" charset="-122"/><a:cs typeface="Arial Black, "Trebuchet MS", "Helvetica Neue", sans-serif" pitchFamily="34" charset="-120"/></a:rPr><a:t>When Locality Slows Down</a:t></a:r><a:endParaRPr lang="en-US" sz="3000" dirty="0"/></a:p></p:txBody></p:sp><p:sp><p:nvSpPr><p:cNvPr id="25" name="Text 23"></p:cNvPr><p:cNvSpPr/><p:nvPr></p:nvPr></p:nvSpPr><p:spPr><a:xfrm><a:off x="411480" y="2148840"/><a:ext cx="10972800" cy="274320"/></a:xfrm><a:prstGeom prst="rect"><a:avLst></a:avLst></a:prstGeom><a:noFill/><a:ln></a:ln></p:spPr><p:txBody><a:bodyPr wrap="square" rtlCol="0" anchor="ctr"></a:bodyPr><a:lstStyle/><a:p><a:pPr indent="0" marL="0"><a:buNone/></a:pPr><a:r><a:rPr lang="en-US" sz="1400" i="1" dirty="0"><a:solidFill><a:srgbClr val="4B5563"/></a:solidFill><a:latin typeface="Inter, "Segoe UI", sans-serif" pitchFamily="34" charset="0"/><a:ea typeface="Inter, "Segoe UI", sans-serif" pitchFamily="34" charset="-122"/><a:cs typeface="Inter, "Segoe UI", sans-serif" pitchFamily="34" charset="-120"/></a:rPr><a:t>100 NUMA runs (8-node Opteron) + 56 TILEPro64 mesh configurations</a:t></a:r><a:endParaRPr lang="en-US" sz="1400" dirty="0"/></a:p></p:txBody></p:sp><p:sp><p:nvSpPr><p:cNvPr id="26" name="Shape 24"></p:cNvPr><p:cNvSpPr/><p:nvPr></p:nvPr></p:nvSpPr><p:spPr><a:xfrm><a:off x="411480" y="2468880"/><a:ext cx="5440680" cy="3520440"/></a:xfrm><a:prstGeom prst="roundRect"><a:avLst><a:gd name="adj" fmla="val 2078"/></a:avLst></a:prstGeom><a:solidFill><a:srgbClr val="F4F0EA"/></a:solidFill><a:ln w="31750"><a:solidFill><a:srgbClr val="111827"/></a:solidFill><a:prstDash val="solid"/></a:ln><a:effectLst> <a:outerShdw sx="100000" sy="100000" kx="0" ky="0" algn="bl" rotWithShape="0" blurRad="50800" dist="50800" dir="16200000"> <a:srgbClr val="C8C6BF"> <a:alpha val="75000"/></a:srgbClr> </a:outerShdw></a:effectLst></p:spPr></p:sp><p:sp><p:nvSpPr><p:cNvPr id="27" name="Text 25"></p:cNvPr><p:cNvSpPr/><p:nvPr></p:nvPr></p:nvSpPr><p:spPr><a:xfrm><a:off x="594360" y="2606040"/><a:ext cx="5074920" cy="320040"/></a:xfrm><a:prstGeom prst="rect"><a:avLst></a:avLst></a:prstGeom><a:noFill/><a:ln></a:ln></p:spPr><p:txBody><a:bodyPr wrap="square" rtlCol="0" anchor="ctr"></a:bodyPr><a:lstStyle/><a:p><a:pPr indent="0" marL="0"><a:buNone/></a:pPr><a:r><a:rPr lang="en-US" sz="1600" b="1" dirty="0"><a:solidFill><a:srgbClr val="111827"/></a:solidFill><a:latin typeface="Arial Black, "Trebuchet MS", "Helvetica Neue", sans-serif" pitchFamily="34" charset="0"/><a:ea typeface="Arial Black, "Trebuchet MS", "Helvetica Neue", sans-serif" pitchFamily="34" charset="-122"/><a:cs typeface="Arial Black, "Trebuchet MS", "Helvetica Neue", sans-serif" pitchFamily="34" charset="-120"/></a:rPr><a:t>1. AMD Opteron NUMA Reproduction (100 Runs)</a:t></a:r><a:endParaRPr lang="en-US" sz="1600" dirty="0"/></a:p></p:txBody></p:sp><p:pic>  <p:nvPicPr><p:cNvPr id="28" name="Image 0" descr="./results/numa/fig7_reproduction.png">    </p:cNvPr>    <p:cNvPicPr><a:picLocks noChangeAspect="1"/></p:cNvPicPr>    <p:nvPr></p:nvPr>  </p:nvPicPr><p:blipFill><a:blip r:embed="rId1"></a:blip>  <a:stretch><a:fillRect/></a:stretch></p:blipFill><p:spPr> <a:xfrm>  <a:off x="594360" y="2971800"/>  <a:ext cx="5074920" cy="2240280"/> </a:xfrm> <a:prstGeom prst="rect"><a:avLst/></a:prstGeom></p:spPr></p:pic><p:sp><p:nvSpPr><p:cNvPr id="29" name="Shape 26"></p:cNvPr><p:cNvSpPr/><p:nvPr></p:nvPr></p:nvSpPr><p:spPr><a:xfrm><a:off x="594360" y="5349240"/><a:ext cx="5074920" cy="502920"/></a:xfrm><a:prstGeom prst="roundRect"><a:avLst><a:gd name="adj" fmla="val 10909"/></a:avLst></a:prstGeom><a:solidFill><a:srgbClr val="EFEAE3"/></a:solidFill><a:ln w="15240"><a:solidFill><a:srgbClr val="111827"/></a:solidFill><a:prstDash val="solid"/></a:ln></p:spPr></p:sp><p:sp><p:nvSpPr><p:cNvPr id="30" name="Text 27"></p:cNvPr><p:cNvSpPr/><p:nvPr></p:nvPr></p:nvSpPr><p:spPr><a:xfrm><a:off x="685800" y="5376672"/><a:ext cx="4892040" cy="438912"/></a:xfrm><a:prstGeom prst="rect"><a:avLst></a:avLst></a:prstGeom><a:noFill/><a:ln></a:ln></p:spPr><p:txBody><a:bodyPr wrap="square" rtlCol="0" anchor="ctr"></a:bodyPr><a:lstStyle/><a:p><a:pPr indent="0" marL="0"><a:buNone/></a:pPr><a:r><a:rPr lang="en-US" sz="1000" b="1" dirty="0"><a:solidFill><a:srgbClr val="111827"/></a:solidFill><a:latin typeface=""JetBrains Mono", "Courier New", monospace" pitchFamily="34" charset="0"/><a:ea typeface=""JetBrains Mono", "Courier New", monospace" pitchFamily="34" charset="-122"/><a:cs typeface=""JetBrains Mono", "Courier New", monospace" pitchFamily="34" charset="-120"/></a:rPr><a:t>• Map: −45.1% Comm · −19.0% Cycles    • SparseLU: +15.1% SLOWER (Paradox!)</a:t></a:r><a:endParaRPr lang="en-US" sz="1000" dirty="0"/></a:p></p:txBody></p:sp><p:sp><p:nvSpPr><p:cNvPr id="31" name="Shape 28"></p:cNvPr><p:cNvSpPr/><p:nvPr></p:nvPr></p:nvSpPr><p:spPr><a:xfrm><a:off x="6263640" y="2468880"/><a:ext cx="5440680" cy="3520440"/></a:xfrm><a:prstGeom prst="roundRect"><a:avLst><a:gd name="adj" fmla="val 2078"/></a:avLst></a:prstGeom><a:solidFill><a:srgbClr val="F4F0EA"/></a:solidFill><a:ln w="31750"><a:solidFill><a:srgbClr val="111827"/></a:solidFill><a:prstDash val="solid"/></a:ln><a:effectLst> <a:outerShdw sx="100000" sy="100000" kx="0" ky="0" algn="bl" rotWithShape="0" blurRad="50800" dist="50800" dir="16200000"> <a:srgbClr val="C8C6BF"> <a:alpha val="75000"/></a:srgbClr> </a:outerShdw></a:effectLst></p:spPr></p:sp><p:sp><p:nvSpPr><p:cNvPr id="32" name="Text 29"></p:cNvPr><p:cNvSpPr/><p:nvPr></p:nvPr></p:nvSpPr><p:spPr><a:xfrm><a:off x="6446520" y="2606040"/><a:ext cx="5074920" cy="320040"/></a:xfrm><a:prstGeom prst="rect"><a:avLst></a:avLst></a:prstGeom><a:noFill/><a:ln></a:ln></p:spPr><p:txBody><a:bodyPr wrap="square" rtlCol="0" anchor="ctr"></a:bodyPr><a:lstStyle/><a:p><a:pPr indent="0" marL="0"><a:buNone/></a:pPr><a:r><a:rPr lang="en-US" sz="1600" b="1" dirty="0"><a:solidFill><a:srgbClr val="111827"/></a:solidFill><a:latin typeface="Arial Black, "Trebuchet MS", "Helvetica Neue", sans-serif" pitchFamily="34" charset="0"/><a:ea typeface="Arial Black, "Trebuchet MS", "Helvetica Neue", sans-serif" pitchFamily="34" charset="-122"/><a:cs typeface="Arial Black, "Trebuchet MS", "Helvetica Neue", sans-serif" pitchFamily="34" charset="-120"/></a:rPr><a:t>2. TILEPro64 8×8 Mesh Simulation (64 Cores)</a:t></a:r><a:endParaRPr lang="en-US" sz="1600" dirty="0"/></a:p></p:txBody></p:sp><p:pic>  <p:nvPicPr><p:cNvPr id="33" name="Image 1" descr="./tilepro64/results/tilepro64_results.png">    </p:cNvPr>    <p:cNvPicPr><a:picLocks noChangeAspect="1"/></p:cNvPicPr>    <p:nvPr></p:nvPr>  </p:nvPicPr><p:blipFill><a:blip r:embed="rId2"></a:blip>  <a:stretch><a:fillRect/></a:stretch></p:blipFill><p:spPr> <a:xfrm>  <a:off x="6446520" y="2971800"/>  <a:ext cx="5074920" cy="2240280"/> </a:xfrm> <a:prstGeom prst="rect"><a:avLst/></a:prstGeom></p:spPr></p:pic><p:sp><p:nvSpPr><p:cNvPr id="34" name="Shape 30"></p:cNvPr><p:cNvSpPr/><p:nvPr></p:nvPr></p:nvSpPr><p:spPr><a:xfrm><a:off x="6446520" y="5349240"/><a:ext cx="5074920" cy="502920"/></a:xfrm><a:prstGeom prst="roundRect"><a:avLst><a:gd name="adj" fmla="val 10909"/></a:avLst></a:prstGeom><a:solidFill><a:srgbClr val="EFEAE3"/></a:solidFill><a:ln w="15240"><a:solidFill><a:srgbClr val="111827"/></a:solidFill><a:prstDash val="solid"/></a:ln></p:spPr></p:sp><p:sp><p:nvSpPr><p:cNvPr id="35" name="Text 31"></p:cNvPr><p:cNvSpPr/><p:nvPr></p:nvPr></p:nvSpPr><p:spPr><a:xfrm><a:off x="6537960" y="5376672"/><a:ext cx="4892040" cy="438912"/></a:xfrm><a:prstGeom prst="rect"><a:avLst></a:avLst></a:prstGeom><a:noFill/><a:ln></a:ln></p:spPr><p:txBody><a:bodyPr wrap="square" rtlCol="0" anchor="ctr"></a:bodyPr><a:lstStyle/><a:p><a:pPr indent="0" marL="0"><a:buNone/></a:pPr><a:r><a:rPr lang="en-US" sz="1000" b="1" dirty="0"><a:solidFill><a:srgbClr val="111827"/></a:solidFill><a:latin typeface=""JetBrains Mono", "Courier New", monospace" pitchFamily="34" charset="0"/><a:ea typeface=""JetBrains Mono", "Courier New", monospace" pitchFamily="34" charset="-122"/><a:cs typeface=""JetBrains Mono", "Courier New", monospace" pitchFamily="34" charset="-120"/></a:rPr><a:t>• Map: −80.3% Comm Drop · 39.3% Speedup · 0 Steals vs 63 in WS baseline</a:t></a:r><a:endParaRPr lang="en-US" sz="1000" dirty="0"/></a:p></p:txBody></p:sp><p:sp><p:nvSpPr><p:cNvPr id="36" name="Shape 32"></p:cNvPr><p:cNvSpPr/><p:nvPr></p:nvPr></p:nvSpPr><p:spPr><a:xfrm><a:off x="411480" y="6080760"/><a:ext cx="11292840" cy="411480"/></a:xfrm><a:prstGeom prst="roundRect"><a:avLst><a:gd name="adj" fmla="val 13333"/></a:avLst></a:prstGeom><a:solidFill><a:srgbClr val="FFD147"/></a:solidFill><a:ln w="25400"><a:solidFill><a:srgbClr val="111827"/></a:solidFill><a:prstDash val="solid"/></a:ln></p:spPr></p:sp><p:sp><p:nvSpPr><p:cNvPr id="37" name="Text 33"></p:cNvPr><p:cNvSpPr/><p:nvPr></p:nvPr></p:nvSpPr><p:spPr><a:xfrm><a:off x="594360" y="6080760"/><a:ext cx="10927080" cy="411480"/></a:xfrm><a:prstGeom prst="rect"><a:avLst></a:avLst></a:prstGeom><a:noFill/><a:ln></a:ln></p:spPr><p:txBody><a:bodyPr wrap="square" rtlCol="0" anchor="ctr"></a:bodyPr><a:lstStyle/><a:p><a:pPr algn="ctr" indent="0" marL="0"><a:buNone/></a:pPr><a:r><a:rPr lang="en-US" sz="1150" b="1" dirty="0"><a:solidFill><a:srgbClr val="111827"/></a:solidFill><a:latin typeface="Inter, "Segoe UI", sans-serif" pitchFamily="34" charset="0"/><a:ea typeface="Inter, "Segoe UI", sans-serif" pitchFamily="34" charset="-122"/><a:cs typeface="Inter, "Segoe UI", sans-serif" pitchFamily="34" charset="-120"/></a:rPr><a:t>THE EMPIRICAL LAW: Locality dealing cuts comm cost by up to 80.3%, but causes a +15.1% slowdown on irregular DAGs without load balancing.</a:t></a:r><a:endParaRPr lang="en-US" sz="1150" dirty="0"/></a:p></p:txBody></p:sp><p:sp><p:nvSpPr><p:cNvPr id="38" name="Text 34"></p:cNvPr><p:cNvSpPr/><p:nvPr></p:nvPr></p:nvSpPr><p:spPr><a:xfrm><a:off x="411480" y="6537960"/><a:ext cx="11338560" cy="182880"/></a:xfrm><a:prstGeom prst="rect"><a:avLst></a:avLst></a:prstGeom><a:noFill/><a:ln></a:ln></p:spPr><p:txBody><a:bodyPr wrap="square" rtlCol="0" anchor="ctr"></a:bodyPr><a:lstStyle/><a:p><a:pPr indent="0" marL="0"><a:buNone/></a:pPr><a:r><a:rPr lang="en-US" sz="900" dirty="0"><a:solidFill><a:srgbClr val="6B6B6B"/></a:solidFill><a:latin typeface=""JetBrains Mono", "Courier New", monospace" pitchFamily="34" charset="0"/><a:ea typeface=""JetBrains Mono", "Courier New", monospace" pitchFamily="34" charset="-122"/><a:cs typeface=""JetBrains Mono", "Courier New", monospace" pitchFamily="34" charset="-120"/></a:rPr><a:t>Empirical Reproduction: AMD Opteron NUMA &amp; TILEPro64 Manycore Mesh  ·  04 / 05</a:t></a:r><a:endParaRPr lang="en-US" sz="900" dirty="0"/></a:p></p:txBody></p:sp></p:spTree></p:cSld><p:clrMapOvr><a:masterClrMapping/></p:clrMapOvr></p:sld>
+<file path=ppt/slides/slide4.xml><?xml version="1.0" encoding="utf-8"?>
+<p:sld xmlns:a="http://schemas.openxmlformats.org/drawingml/2006/main" xmlns:r="http://schemas.openxmlformats.org/officeDocument/2006/relationships" xmlns:p="http://schemas.openxmlformats.org/presentationml/2006/main">
+  <p:cSld name="Slide 4">
+    <p:bg>
+      <p:bgPr>
+        <a:blipFill dpi="0" rotWithShape="1">
+          <a:blip r:embed="rId1">
+            <a:lum/>
+          </a:blip>
+          <a:srcRect/>
+          <a:stretch>
+            <a:fillRect/>
+          </a:stretch>
+        </a:blipFill>
+        <a:effectLst/>
+      </p:bgPr>
+    </p:bg>
+    <p:spTree>
+      <p:nvGrpSpPr>
+        <p:cNvPr id="1" name=""/>
+        <p:cNvGrpSpPr/>
+        <p:nvPr/>
+      </p:nvGrpSpPr>
+      <p:grpSpPr>
+        <a:xfrm>
+          <a:off x="0" y="0"/>
+          <a:ext cx="0" cy="0"/>
+          <a:chOff x="0" y="0"/>
+          <a:chExt cx="0" cy="0"/>
+        </a:xfrm>
+      </p:grpSpPr>
+      <p:sp>
+        <p:nvSpPr>
+          <p:cNvPr id="2" name="Shape 0"/>
+          <p:cNvSpPr/>
+          <p:nvPr/>
+        </p:nvSpPr>
+        <p:spPr>
+          <a:xfrm>
+            <a:off x="731520" y="411480"/>
+            <a:ext cx="1115568" cy="292608"/>
+          </a:xfrm>
+          <a:prstGeom prst="roundRect">
+            <a:avLst>
+              <a:gd name="adj" fmla="val 50000"/>
+            </a:avLst>
+          </a:prstGeom>
+          <a:solidFill>
+            <a:srgbClr val="111827"/>
+          </a:solidFill>
+          <a:ln w="12700">
+            <a:solidFill>
+              <a:srgbClr val="111827"/>
+            </a:solidFill>
+            <a:prstDash val="solid"/>
+          </a:ln>
+        </p:spPr>
+      </p:sp>
+      <p:sp>
+        <p:nvSpPr>
+          <p:cNvPr id="3" name="Text 1"/>
+          <p:cNvSpPr/>
+          <p:nvPr/>
+        </p:nvSpPr>
+        <p:spPr>
+          <a:xfrm>
+            <a:off x="731520" y="411480"/>
+            <a:ext cx="1115568" cy="292608"/>
+          </a:xfrm>
+          <a:prstGeom prst="rect">
+            <a:avLst/>
+          </a:prstGeom>
+          <a:noFill/>
+          <a:ln/>
+        </p:spPr>
+        <p:txBody>
+          <a:bodyPr wrap="square" rtlCol="0" anchor="ctr"/>
+          <a:lstStyle/>
+          <a:p>
+            <a:pPr algn="ctr" indent="0" marL="0">
+              <a:buNone/>
+            </a:pPr>
+            <a:r>
+              <a:rPr lang="en-US" sz="900" b="1" dirty="0">
+                <a:solidFill>
+                  <a:srgbClr val="FFFFFF"/>
+                </a:solidFill>
+                <a:latin typeface="Courier New" pitchFamily="34" charset="0"/>
+                <a:ea typeface="Courier New" pitchFamily="34" charset="-122"/>
+                <a:cs typeface="Courier New" pitchFamily="34" charset="-120"/>
+              </a:rPr>
+              <a:t>PART 3</a:t>
+            </a:r>
+            <a:endParaRPr lang="en-US" sz="900" dirty="0"/>
+          </a:p>
+        </p:txBody>
+      </p:sp>
+      <p:sp>
+        <p:nvSpPr>
+          <p:cNvPr id="4" name="Shape 2"/>
+          <p:cNvSpPr/>
+          <p:nvPr/>
+        </p:nvSpPr>
+        <p:spPr>
+          <a:xfrm>
+            <a:off x="1984248" y="411480"/>
+            <a:ext cx="3671316" cy="292608"/>
+          </a:xfrm>
+          <a:prstGeom prst="roundRect">
+            <a:avLst>
+              <a:gd name="adj" fmla="val 50000"/>
+            </a:avLst>
+          </a:prstGeom>
+          <a:solidFill>
+            <a:srgbClr val="FFFFFF"/>
+          </a:solidFill>
+          <a:ln w="19050">
+            <a:solidFill>
+              <a:srgbClr val="111827"/>
+            </a:solidFill>
+            <a:prstDash val="solid"/>
+          </a:ln>
+        </p:spPr>
+      </p:sp>
+      <p:sp>
+        <p:nvSpPr>
+          <p:cNvPr id="5" name="Text 3"/>
+          <p:cNvSpPr/>
+          <p:nvPr/>
+        </p:nvSpPr>
+        <p:spPr>
+          <a:xfrm>
+            <a:off x="1984248" y="411480"/>
+            <a:ext cx="3671316" cy="292608"/>
+          </a:xfrm>
+          <a:prstGeom prst="rect">
+            <a:avLst/>
+          </a:prstGeom>
+          <a:noFill/>
+          <a:ln/>
+        </p:spPr>
+        <p:txBody>
+          <a:bodyPr wrap="square" rtlCol="0" anchor="ctr"/>
+          <a:lstStyle/>
+          <a:p>
+            <a:pPr algn="ctr" indent="0" marL="0">
+              <a:buNone/>
+            </a:pPr>
+            <a:r>
+              <a:rPr lang="en-US" sz="900" b="1" dirty="0">
+                <a:solidFill>
+                  <a:srgbClr val="111827"/>
+                </a:solidFill>
+                <a:latin typeface="Courier New" pitchFamily="34" charset="0"/>
+                <a:ea typeface="Courier New" pitchFamily="34" charset="-122"/>
+                <a:cs typeface="Courier New" pitchFamily="34" charset="-120"/>
+              </a:rPr>
+              <a:t>EMPIRICAL REPRODUCTION: NUMA HARDWARE</a:t>
+            </a:r>
+            <a:endParaRPr lang="en-US" sz="900" dirty="0"/>
+          </a:p>
+        </p:txBody>
+      </p:sp>
+      <p:sp>
+        <p:nvSpPr>
+          <p:cNvPr id="6" name="Text 4"/>
+          <p:cNvSpPr/>
+          <p:nvPr/>
+        </p:nvSpPr>
+        <p:spPr>
+          <a:xfrm>
+            <a:off x="731520" y="868680"/>
+            <a:ext cx="5303520" cy="502920"/>
+          </a:xfrm>
+          <a:prstGeom prst="rect">
+            <a:avLst/>
+          </a:prstGeom>
+          <a:noFill/>
+          <a:ln/>
+        </p:spPr>
+        <p:txBody>
+          <a:bodyPr wrap="square" rtlCol="0" anchor="ctr"/>
+          <a:lstStyle/>
+          <a:p>
+            <a:pPr indent="0" marL="0">
+              <a:buNone/>
+            </a:pPr>
+            <a:r>
+              <a:rPr lang="en-US" sz="3000" b="1" dirty="0">
+                <a:solidFill>
+                  <a:srgbClr val="111827"/>
+                </a:solidFill>
+                <a:latin typeface="Arial Black" pitchFamily="34" charset="0"/>
+                <a:ea typeface="Arial Black" pitchFamily="34" charset="-122"/>
+                <a:cs typeface="Arial Black" pitchFamily="34" charset="-120"/>
+              </a:rPr>
+              <a:t>The SparseLU Paradox: </a:t>
+            </a:r>
+            <a:endParaRPr lang="en-US" sz="3000" dirty="0"/>
+          </a:p>
+        </p:txBody>
+      </p:sp>
+      <p:sp>
+        <p:nvSpPr>
+          <p:cNvPr id="7" name="Shape 5"/>
+          <p:cNvSpPr/>
+          <p:nvPr/>
+        </p:nvSpPr>
+        <p:spPr>
+          <a:xfrm>
+            <a:off x="6035040" y="822960"/>
+            <a:ext cx="4389120" cy="594360"/>
+          </a:xfrm>
+          <a:prstGeom prst="roundRect">
+            <a:avLst>
+              <a:gd name="adj" fmla="val 15385"/>
+            </a:avLst>
+          </a:prstGeom>
+          <a:solidFill>
+            <a:srgbClr val="FFD147"/>
+          </a:solidFill>
+          <a:ln w="19050">
+            <a:solidFill>
+              <a:srgbClr val="111827"/>
+            </a:solidFill>
+            <a:prstDash val="solid"/>
+          </a:ln>
+        </p:spPr>
+      </p:sp>
+      <p:sp>
+        <p:nvSpPr>
+          <p:cNvPr id="8" name="Text 6"/>
+          <p:cNvSpPr/>
+          <p:nvPr/>
+        </p:nvSpPr>
+        <p:spPr>
+          <a:xfrm>
+            <a:off x="6126480" y="822960"/>
+            <a:ext cx="4206240" cy="594360"/>
+          </a:xfrm>
+          <a:prstGeom prst="rect">
+            <a:avLst/>
+          </a:prstGeom>
+          <a:noFill/>
+          <a:ln/>
+        </p:spPr>
+        <p:txBody>
+          <a:bodyPr wrap="square" rtlCol="0" anchor="ctr"/>
+          <a:lstStyle/>
+          <a:p>
+            <a:pPr algn="ctr" indent="0" marL="0">
+              <a:buNone/>
+            </a:pPr>
+            <a:r>
+              <a:rPr lang="en-US" sz="2600" b="1" dirty="0">
+                <a:solidFill>
+                  <a:srgbClr val="111827"/>
+                </a:solidFill>
+                <a:latin typeface="Arial Black" pitchFamily="34" charset="0"/>
+                <a:ea typeface="Arial Black" pitchFamily="34" charset="-122"/>
+                <a:cs typeface="Arial Black" pitchFamily="34" charset="-120"/>
+              </a:rPr>
+              <a:t>When Locality Slows Down</a:t>
+            </a:r>
+            <a:endParaRPr lang="en-US" sz="2600" dirty="0"/>
+          </a:p>
+        </p:txBody>
+      </p:sp>
+      <p:sp>
+        <p:nvSpPr>
+          <p:cNvPr id="9" name="Text 7"/>
+          <p:cNvSpPr/>
+          <p:nvPr/>
+        </p:nvSpPr>
+        <p:spPr>
+          <a:xfrm>
+            <a:off x="731520" y="1463040"/>
+            <a:ext cx="9144000" cy="228600"/>
+          </a:xfrm>
+          <a:prstGeom prst="rect">
+            <a:avLst/>
+          </a:prstGeom>
+          <a:noFill/>
+          <a:ln/>
+        </p:spPr>
+        <p:txBody>
+          <a:bodyPr wrap="square" rtlCol="0" anchor="ctr"/>
+          <a:lstStyle/>
+          <a:p>
+            <a:pPr indent="0" marL="0">
+              <a:buNone/>
+            </a:pPr>
+            <a:r>
+              <a:rPr lang="en-US" sz="1000" dirty="0">
+                <a:solidFill>
+                  <a:srgbClr val="4B5563"/>
+                </a:solidFill>
+                <a:latin typeface="Courier New" pitchFamily="34" charset="0"/>
+                <a:ea typeface="Courier New" pitchFamily="34" charset="-122"/>
+                <a:cs typeface="Courier New" pitchFamily="34" charset="-120"/>
+              </a:rPr>
+              <a:t>100 benchmark runs on 8-node AMD Opteron server (24–48 cores) · 100% verified Figure 7 reproduction</a:t>
+            </a:r>
+            <a:endParaRPr lang="en-US" sz="1000" dirty="0"/>
+          </a:p>
+        </p:txBody>
+      </p:sp>
+      <p:sp>
+        <p:nvSpPr>
+          <p:cNvPr id="10" name="Shape 8"/>
+          <p:cNvSpPr/>
+          <p:nvPr/>
+        </p:nvSpPr>
+        <p:spPr>
+          <a:xfrm>
+            <a:off x="786384" y="1837944"/>
+            <a:ext cx="5257800" cy="3886200"/>
+          </a:xfrm>
+          <a:prstGeom prst="roundRect">
+            <a:avLst>
+              <a:gd name="adj" fmla="val 3294"/>
+            </a:avLst>
+          </a:prstGeom>
+          <a:solidFill>
+            <a:srgbClr val="111827"/>
+          </a:solidFill>
+          <a:ln w="12700">
+            <a:solidFill>
+              <a:srgbClr val="111827"/>
+            </a:solidFill>
+            <a:prstDash val="solid"/>
+          </a:ln>
+        </p:spPr>
+      </p:sp>
+      <p:sp>
+        <p:nvSpPr>
+          <p:cNvPr id="11" name="Shape 9"/>
+          <p:cNvSpPr/>
+          <p:nvPr/>
+        </p:nvSpPr>
+        <p:spPr>
+          <a:xfrm>
+            <a:off x="731520" y="1783080"/>
+            <a:ext cx="5257800" cy="3886200"/>
+          </a:xfrm>
+          <a:prstGeom prst="roundRect">
+            <a:avLst>
+              <a:gd name="adj" fmla="val 3294"/>
+            </a:avLst>
+          </a:prstGeom>
+          <a:solidFill>
+            <a:srgbClr val="FFFFFF"/>
+          </a:solidFill>
+          <a:ln w="19050">
+            <a:solidFill>
+              <a:srgbClr val="111827"/>
+            </a:solidFill>
+            <a:prstDash val="solid"/>
+          </a:ln>
+        </p:spPr>
+      </p:sp>
+      <p:sp>
+        <p:nvSpPr>
+          <p:cNvPr id="12" name="Text 10"/>
+          <p:cNvSpPr/>
+          <p:nvPr/>
+        </p:nvSpPr>
+        <p:spPr>
+          <a:xfrm>
+            <a:off x="914400" y="1901952"/>
+            <a:ext cx="4892040" cy="256032"/>
+          </a:xfrm>
+          <a:prstGeom prst="rect">
+            <a:avLst/>
+          </a:prstGeom>
+          <a:noFill/>
+          <a:ln/>
+        </p:spPr>
+        <p:txBody>
+          <a:bodyPr wrap="square" rtlCol="0" anchor="ctr"/>
+          <a:lstStyle/>
+          <a:p>
+            <a:pPr indent="0" marL="0">
+              <a:buNone/>
+            </a:pPr>
+            <a:r>
+              <a:rPr lang="en-US" sz="1300" dirty="0">
+                <a:solidFill>
+                  <a:srgbClr val="111827"/>
+                </a:solidFill>
+                <a:latin typeface="Arial Black" pitchFamily="34" charset="0"/>
+                <a:ea typeface="Arial Black" pitchFamily="34" charset="-122"/>
+                <a:cs typeface="Arial Black" pitchFamily="34" charset="-120"/>
+              </a:rPr>
+              <a:t>AMD Opteron Reproduction (100 Runs, 100% Verification)</a:t>
+            </a:r>
+            <a:endParaRPr lang="en-US" sz="1300" dirty="0"/>
+          </a:p>
+        </p:txBody>
+      </p:sp>
+      <p:pic>
+        <p:nvPicPr>
+          <p:cNvPr id="13" name="Image 0" descr="/Users/yeschirag/Desktop/college/HPC project/results/numa/fig7_reproduction.png">    </p:cNvPr>
+          <p:cNvPicPr>
+            <a:picLocks noChangeAspect="1"/>
+          </p:cNvPicPr>
+          <p:nvPr/>
+        </p:nvPicPr>
+        <p:blipFill>
+          <a:blip r:embed="rId2"/>
+          <a:stretch>
+            <a:fillRect/>
+          </a:stretch>
+        </p:blipFill>
+        <p:spPr>
+          <a:xfrm>
+            <a:off x="914400" y="2194560"/>
+            <a:ext cx="4892040" cy="2048256"/>
+          </a:xfrm>
+          <a:prstGeom prst="rect">
+            <a:avLst/>
+          </a:prstGeom>
+        </p:spPr>
+      </p:pic>
+      <p:sp>
+        <p:nvSpPr>
+          <p:cNvPr id="14" name="Shape 11"/>
+          <p:cNvSpPr/>
+          <p:nvPr/>
+        </p:nvSpPr>
+        <p:spPr>
+          <a:xfrm>
+            <a:off x="914400" y="4334256"/>
+            <a:ext cx="2377440" cy="585216"/>
+          </a:xfrm>
+          <a:prstGeom prst="roundRect">
+            <a:avLst>
+              <a:gd name="adj" fmla="val 12500"/>
+            </a:avLst>
+          </a:prstGeom>
+          <a:solidFill>
+            <a:srgbClr val="DCFCE7"/>
+          </a:solidFill>
+          <a:ln w="15240">
+            <a:solidFill>
+              <a:srgbClr val="111827"/>
+            </a:solidFill>
+            <a:prstDash val="solid"/>
+          </a:ln>
+        </p:spPr>
+      </p:sp>
+      <p:sp>
+        <p:nvSpPr>
+          <p:cNvPr id="15" name="Text 12"/>
+          <p:cNvSpPr/>
+          <p:nvPr/>
+        </p:nvSpPr>
+        <p:spPr>
+          <a:xfrm>
+            <a:off x="987552" y="4334256"/>
+            <a:ext cx="2231136" cy="585216"/>
+          </a:xfrm>
+          <a:prstGeom prst="rect">
+            <a:avLst/>
+          </a:prstGeom>
+          <a:noFill/>
+          <a:ln/>
+        </p:spPr>
+        <p:txBody>
+          <a:bodyPr wrap="square" rtlCol="0" anchor="ctr"/>
+          <a:lstStyle/>
+          <a:p>
+            <a:pPr indent="0" marL="0">
+              <a:buNone/>
+            </a:pPr>
+            <a:r>
+              <a:rPr lang="en-US" sz="880" b="1" dirty="0">
+                <a:solidFill>
+                  <a:srgbClr val="065F46"/>
+                </a:solidFill>
+                <a:latin typeface="Courier New" pitchFamily="34" charset="0"/>
+                <a:ea typeface="Courier New" pitchFamily="34" charset="-122"/>
+                <a:cs typeface="Courier New" pitchFamily="34" charset="-120"/>
+              </a:rPr>
+              <a:t>Map: −45.1% Comm · −19.0% Cycles (0.81×)</a:t>
+            </a:r>
+            <a:endParaRPr lang="en-US" sz="880" dirty="0"/>
+          </a:p>
+        </p:txBody>
+      </p:sp>
+      <p:sp>
+        <p:nvSpPr>
+          <p:cNvPr id="16" name="Shape 13"/>
+          <p:cNvSpPr/>
+          <p:nvPr/>
+        </p:nvSpPr>
+        <p:spPr>
+          <a:xfrm>
+            <a:off x="3429000" y="4334256"/>
+            <a:ext cx="2377440" cy="585216"/>
+          </a:xfrm>
+          <a:prstGeom prst="roundRect">
+            <a:avLst>
+              <a:gd name="adj" fmla="val 12500"/>
+            </a:avLst>
+          </a:prstGeom>
+          <a:solidFill>
+            <a:srgbClr val="EEF2FF"/>
+          </a:solidFill>
+          <a:ln w="15240">
+            <a:solidFill>
+              <a:srgbClr val="111827"/>
+            </a:solidFill>
+            <a:prstDash val="solid"/>
+          </a:ln>
+        </p:spPr>
+      </p:sp>
+      <p:sp>
+        <p:nvSpPr>
+          <p:cNvPr id="17" name="Text 14"/>
+          <p:cNvSpPr/>
+          <p:nvPr/>
+        </p:nvSpPr>
+        <p:spPr>
+          <a:xfrm>
+            <a:off x="3502152" y="4334256"/>
+            <a:ext cx="2231136" cy="585216"/>
+          </a:xfrm>
+          <a:prstGeom prst="rect">
+            <a:avLst/>
+          </a:prstGeom>
+          <a:noFill/>
+          <a:ln/>
+        </p:spPr>
+        <p:txBody>
+          <a:bodyPr wrap="square" rtlCol="0" anchor="ctr"/>
+          <a:lstStyle/>
+          <a:p>
+            <a:pPr indent="0" marL="0">
+              <a:buNone/>
+            </a:pPr>
+            <a:r>
+              <a:rPr lang="en-US" sz="880" b="1" dirty="0">
+                <a:solidFill>
+                  <a:srgbClr val="1E40AF"/>
+                </a:solidFill>
+                <a:latin typeface="Courier New" pitchFamily="34" charset="0"/>
+                <a:ea typeface="Courier New" pitchFamily="34" charset="-122"/>
+                <a:cs typeface="Courier New" pitchFamily="34" charset="-120"/>
+              </a:rPr>
+              <a:t>Matmul: −22.5% Comm · Balanced Parity</a:t>
+            </a:r>
+            <a:endParaRPr lang="en-US" sz="880" dirty="0"/>
+          </a:p>
+        </p:txBody>
+      </p:sp>
+      <p:sp>
+        <p:nvSpPr>
+          <p:cNvPr id="18" name="Shape 15"/>
+          <p:cNvSpPr/>
+          <p:nvPr/>
+        </p:nvSpPr>
+        <p:spPr>
+          <a:xfrm>
+            <a:off x="914400" y="4974336"/>
+            <a:ext cx="2377440" cy="585216"/>
+          </a:xfrm>
+          <a:prstGeom prst="roundRect">
+            <a:avLst>
+              <a:gd name="adj" fmla="val 12500"/>
+            </a:avLst>
+          </a:prstGeom>
+          <a:solidFill>
+            <a:srgbClr val="FFFFFF"/>
+          </a:solidFill>
+          <a:ln w="15240">
+            <a:solidFill>
+              <a:srgbClr val="111827"/>
+            </a:solidFill>
+            <a:prstDash val="solid"/>
+          </a:ln>
+        </p:spPr>
+      </p:sp>
+      <p:sp>
+        <p:nvSpPr>
+          <p:cNvPr id="19" name="Text 16"/>
+          <p:cNvSpPr/>
+          <p:nvPr/>
+        </p:nvSpPr>
+        <p:spPr>
+          <a:xfrm>
+            <a:off x="987552" y="4974336"/>
+            <a:ext cx="2231136" cy="585216"/>
+          </a:xfrm>
+          <a:prstGeom prst="rect">
+            <a:avLst/>
+          </a:prstGeom>
+          <a:noFill/>
+          <a:ln/>
+        </p:spPr>
+        <p:txBody>
+          <a:bodyPr wrap="square" rtlCol="0" anchor="ctr"/>
+          <a:lstStyle/>
+          <a:p>
+            <a:pPr indent="0" marL="0">
+              <a:buNone/>
+            </a:pPr>
+            <a:r>
+              <a:rPr lang="en-US" sz="880" b="1" dirty="0">
+                <a:solidFill>
+                  <a:srgbClr val="111827"/>
+                </a:solidFill>
+                <a:latin typeface="Courier New" pitchFamily="34" charset="0"/>
+                <a:ea typeface="Courier New" pitchFamily="34" charset="-122"/>
+                <a:cs typeface="Courier New" pitchFamily="34" charset="-120"/>
+              </a:rPr>
+              <a:t>Reduce &amp; Jacobi: Predictable Scaling</a:t>
+            </a:r>
+            <a:endParaRPr lang="en-US" sz="880" dirty="0"/>
+          </a:p>
+        </p:txBody>
+      </p:sp>
+      <p:sp>
+        <p:nvSpPr>
+          <p:cNvPr id="20" name="Shape 17"/>
+          <p:cNvSpPr/>
+          <p:nvPr/>
+        </p:nvSpPr>
+        <p:spPr>
+          <a:xfrm>
+            <a:off x="3429000" y="4974336"/>
+            <a:ext cx="2377440" cy="585216"/>
+          </a:xfrm>
+          <a:prstGeom prst="roundRect">
+            <a:avLst>
+              <a:gd name="adj" fmla="val 12500"/>
+            </a:avLst>
+          </a:prstGeom>
+          <a:solidFill>
+            <a:srgbClr val="FEE2E2"/>
+          </a:solidFill>
+          <a:ln w="15240">
+            <a:solidFill>
+              <a:srgbClr val="111827"/>
+            </a:solidFill>
+            <a:prstDash val="solid"/>
+          </a:ln>
+        </p:spPr>
+      </p:sp>
+      <p:sp>
+        <p:nvSpPr>
+          <p:cNvPr id="21" name="Text 18"/>
+          <p:cNvSpPr/>
+          <p:nvPr/>
+        </p:nvSpPr>
+        <p:spPr>
+          <a:xfrm>
+            <a:off x="3502152" y="4974336"/>
+            <a:ext cx="2231136" cy="585216"/>
+          </a:xfrm>
+          <a:prstGeom prst="rect">
+            <a:avLst/>
+          </a:prstGeom>
+          <a:noFill/>
+          <a:ln/>
+        </p:spPr>
+        <p:txBody>
+          <a:bodyPr wrap="square" rtlCol="0" anchor="ctr"/>
+          <a:lstStyle/>
+          <a:p>
+            <a:pPr indent="0" marL="0">
+              <a:buNone/>
+            </a:pPr>
+            <a:r>
+              <a:rPr lang="en-US" sz="880" b="1" dirty="0">
+                <a:solidFill>
+                  <a:srgbClr val="B91C1C"/>
+                </a:solidFill>
+                <a:latin typeface="Courier New" pitchFamily="34" charset="0"/>
+                <a:ea typeface="Courier New" pitchFamily="34" charset="-122"/>
+                <a:cs typeface="Courier New" pitchFamily="34" charset="-120"/>
+              </a:rPr>
+              <a:t>SparseLU: −26.7% Comm BUT +15.1% SLOWER!</a:t>
+            </a:r>
+            <a:endParaRPr lang="en-US" sz="880" dirty="0"/>
+          </a:p>
+        </p:txBody>
+      </p:sp>
+      <p:sp>
+        <p:nvSpPr>
+          <p:cNvPr id="22" name="Shape 19"/>
+          <p:cNvSpPr/>
+          <p:nvPr/>
+        </p:nvSpPr>
+        <p:spPr>
+          <a:xfrm>
+            <a:off x="6272784" y="1837944"/>
+            <a:ext cx="5257800" cy="3886200"/>
+          </a:xfrm>
+          <a:prstGeom prst="roundRect">
+            <a:avLst>
+              <a:gd name="adj" fmla="val 3294"/>
+            </a:avLst>
+          </a:prstGeom>
+          <a:solidFill>
+            <a:srgbClr val="111827"/>
+          </a:solidFill>
+          <a:ln w="12700">
+            <a:solidFill>
+              <a:srgbClr val="111827"/>
+            </a:solidFill>
+            <a:prstDash val="solid"/>
+          </a:ln>
+        </p:spPr>
+      </p:sp>
+      <p:sp>
+        <p:nvSpPr>
+          <p:cNvPr id="23" name="Shape 20"/>
+          <p:cNvSpPr/>
+          <p:nvPr/>
+        </p:nvSpPr>
+        <p:spPr>
+          <a:xfrm>
+            <a:off x="6217920" y="1783080"/>
+            <a:ext cx="5257800" cy="3886200"/>
+          </a:xfrm>
+          <a:prstGeom prst="roundRect">
+            <a:avLst>
+              <a:gd name="adj" fmla="val 3294"/>
+            </a:avLst>
+          </a:prstGeom>
+          <a:solidFill>
+            <a:srgbClr val="0F172A"/>
+          </a:solidFill>
+          <a:ln w="19050">
+            <a:solidFill>
+              <a:srgbClr val="111827"/>
+            </a:solidFill>
+            <a:prstDash val="solid"/>
+          </a:ln>
+        </p:spPr>
+      </p:sp>
+      <p:sp>
+        <p:nvSpPr>
+          <p:cNvPr id="24" name="Text 21"/>
+          <p:cNvSpPr/>
+          <p:nvPr/>
+        </p:nvSpPr>
+        <p:spPr>
+          <a:xfrm>
+            <a:off x="6400800" y="1901952"/>
+            <a:ext cx="4892040" cy="256032"/>
+          </a:xfrm>
+          <a:prstGeom prst="rect">
+            <a:avLst/>
+          </a:prstGeom>
+          <a:noFill/>
+          <a:ln/>
+        </p:spPr>
+        <p:txBody>
+          <a:bodyPr wrap="square" rtlCol="0" anchor="ctr"/>
+          <a:lstStyle/>
+          <a:p>
+            <a:pPr indent="0" marL="0">
+              <a:buNone/>
+            </a:pPr>
+            <a:r>
+              <a:rPr lang="en-US" sz="1400" dirty="0">
+                <a:solidFill>
+                  <a:srgbClr val="FFD147"/>
+                </a:solidFill>
+                <a:latin typeface="Arial Black" pitchFamily="34" charset="0"/>
+                <a:ea typeface="Arial Black" pitchFamily="34" charset="-122"/>
+                <a:cs typeface="Arial Black" pitchFamily="34" charset="-120"/>
+              </a:rPr>
+              <a:t>The SparseLU Pathology Dissected</a:t>
+            </a:r>
+            <a:endParaRPr lang="en-US" sz="1400" dirty="0"/>
+          </a:p>
+        </p:txBody>
+      </p:sp>
+      <p:sp>
+        <p:nvSpPr>
+          <p:cNvPr id="25" name="Text 22"/>
+          <p:cNvSpPr/>
+          <p:nvPr/>
+        </p:nvSpPr>
+        <p:spPr>
+          <a:xfrm>
+            <a:off x="6400800" y="2157984"/>
+            <a:ext cx="4892040" cy="182880"/>
+          </a:xfrm>
+          <a:prstGeom prst="rect">
+            <a:avLst/>
+          </a:prstGeom>
+          <a:noFill/>
+          <a:ln/>
+        </p:spPr>
+        <p:txBody>
+          <a:bodyPr wrap="square" rtlCol="0" anchor="ctr"/>
+          <a:lstStyle/>
+          <a:p>
+            <a:pPr indent="0" marL="0">
+              <a:buNone/>
+            </a:pPr>
+            <a:r>
+              <a:rPr lang="en-US" sz="850" dirty="0">
+                <a:solidFill>
+                  <a:srgbClr val="94A3B8"/>
+                </a:solidFill>
+                <a:latin typeface="Courier New" pitchFamily="34" charset="0"/>
+                <a:ea typeface="Courier New" pitchFamily="34" charset="-122"/>
+                <a:cs typeface="Courier New" pitchFamily="34" charset="-120"/>
+              </a:rPr>
+              <a:t>// Why locality dealing caused a +15.1% execution slowdown:</a:t>
+            </a:r>
+            <a:endParaRPr lang="en-US" sz="850" dirty="0"/>
+          </a:p>
+        </p:txBody>
+      </p:sp>
+      <p:sp>
+        <p:nvSpPr>
+          <p:cNvPr id="26" name="Text 23"/>
+          <p:cNvSpPr/>
+          <p:nvPr/>
+        </p:nvSpPr>
+        <p:spPr>
+          <a:xfrm>
+            <a:off x="6400800" y="2359152"/>
+            <a:ext cx="4892040" cy="457200"/>
+          </a:xfrm>
+          <a:prstGeom prst="rect">
+            <a:avLst/>
+          </a:prstGeom>
+          <a:noFill/>
+          <a:ln/>
+        </p:spPr>
+        <p:txBody>
+          <a:bodyPr wrap="square" rtlCol="0" anchor="ctr"/>
+          <a:lstStyle/>
+          <a:p>
+            <a:pPr indent="0" marL="0">
+              <a:buNone/>
+            </a:pPr>
+            <a:r>
+              <a:rPr lang="en-US" sz="920" b="1" dirty="0">
+                <a:solidFill>
+                  <a:srgbClr val="FFFFFF"/>
+                </a:solidFill>
+                <a:latin typeface="Arial" pitchFamily="34" charset="0"/>
+                <a:ea typeface="Arial" pitchFamily="34" charset="-122"/>
+                <a:cs typeface="Arial" pitchFamily="34" charset="-120"/>
+              </a:rPr>
+              <a:t>1. Irregular Task DAG: </a:t>
+            </a:r>
+            <a:pPr indent="0" marL="0">
+              <a:buNone/>
+            </a:pPr>
+            <a:r>
+              <a:rPr lang="en-US" sz="880" dirty="0">
+                <a:solidFill>
+                  <a:srgbClr val="CBD5E1"/>
+                </a:solidFill>
+                <a:latin typeface="Arial" pitchFamily="34" charset="0"/>
+                <a:ea typeface="Arial" pitchFamily="34" charset="-122"/>
+                <a:cs typeface="Arial" pitchFamily="34" charset="-120"/>
+              </a:rPr>
+              <a:t>Tasks have skewed, asymmetric input dependencies across matrix sub-blocks.</a:t>
+            </a:r>
+            <a:endParaRPr lang="en-US" sz="920" dirty="0"/>
+          </a:p>
+        </p:txBody>
+      </p:sp>
+      <p:sp>
+        <p:nvSpPr>
+          <p:cNvPr id="27" name="Text 24"/>
+          <p:cNvSpPr/>
+          <p:nvPr/>
+        </p:nvSpPr>
+        <p:spPr>
+          <a:xfrm>
+            <a:off x="6400800" y="2834640"/>
+            <a:ext cx="4892040" cy="457200"/>
+          </a:xfrm>
+          <a:prstGeom prst="rect">
+            <a:avLst/>
+          </a:prstGeom>
+          <a:noFill/>
+          <a:ln/>
+        </p:spPr>
+        <p:txBody>
+          <a:bodyPr wrap="square" rtlCol="0" anchor="ctr"/>
+          <a:lstStyle/>
+          <a:p>
+            <a:pPr indent="0" marL="0">
+              <a:buNone/>
+            </a:pPr>
+            <a:r>
+              <a:rPr lang="en-US" sz="920" b="1" dirty="0">
+                <a:solidFill>
+                  <a:srgbClr val="FFFFFF"/>
+                </a:solidFill>
+                <a:latin typeface="Arial" pitchFamily="34" charset="0"/>
+                <a:ea typeface="Arial" pitchFamily="34" charset="-122"/>
+                <a:cs typeface="Arial" pitchFamily="34" charset="-120"/>
+              </a:rPr>
+              <a:t>2. Load-Blind Dealing: </a:t>
+            </a:r>
+            <a:pPr indent="0" marL="0">
+              <a:buNone/>
+            </a:pPr>
+            <a:r>
+              <a:rPr lang="en-US" sz="880" dirty="0">
+                <a:solidFill>
+                  <a:srgbClr val="CBD5E1"/>
+                </a:solidFill>
+                <a:latin typeface="Arial" pitchFamily="34" charset="0"/>
+                <a:ea typeface="Arial" pitchFamily="34" charset="-122"/>
+                <a:cs typeface="Arial" pitchFamily="34" charset="-120"/>
+              </a:rPr>
+              <a:t>Dealer sent ALL critical-path tasks to Node 0 because Node 0 had initial pivot blocks.</a:t>
+            </a:r>
+            <a:endParaRPr lang="en-US" sz="920" dirty="0"/>
+          </a:p>
+        </p:txBody>
+      </p:sp>
+      <p:sp>
+        <p:nvSpPr>
+          <p:cNvPr id="28" name="Text 25"/>
+          <p:cNvSpPr/>
+          <p:nvPr/>
+        </p:nvSpPr>
+        <p:spPr>
+          <a:xfrm>
+            <a:off x="6400800" y="3310128"/>
+            <a:ext cx="4892040" cy="457200"/>
+          </a:xfrm>
+          <a:prstGeom prst="rect">
+            <a:avLst/>
+          </a:prstGeom>
+          <a:noFill/>
+          <a:ln/>
+        </p:spPr>
+        <p:txBody>
+          <a:bodyPr wrap="square" rtlCol="0" anchor="ctr"/>
+          <a:lstStyle/>
+          <a:p>
+            <a:pPr indent="0" marL="0">
+              <a:buNone/>
+            </a:pPr>
+            <a:r>
+              <a:rPr lang="en-US" sz="920" b="1" dirty="0">
+                <a:solidFill>
+                  <a:srgbClr val="FCA5A5"/>
+                </a:solidFill>
+                <a:latin typeface="Arial" pitchFamily="34" charset="0"/>
+                <a:ea typeface="Arial" pitchFamily="34" charset="-122"/>
+                <a:cs typeface="Arial" pitchFamily="34" charset="-120"/>
+              </a:rPr>
+              <a:t>3. Worker Starvation: </a:t>
+            </a:r>
+            <a:pPr indent="0" marL="0">
+              <a:buNone/>
+            </a:pPr>
+            <a:r>
+              <a:rPr lang="en-US" sz="880" dirty="0">
+                <a:solidFill>
+                  <a:srgbClr val="FCA5A5"/>
+                </a:solidFill>
+                <a:latin typeface="Arial" pitchFamily="34" charset="0"/>
+                <a:ea typeface="Arial" pitchFamily="34" charset="-122"/>
+                <a:cs typeface="Arial" pitchFamily="34" charset="-120"/>
+              </a:rPr>
+              <a:t>Queue 0 had 20 tasks; Queues 1–7 were completely empty (0 tasks)!</a:t>
+            </a:r>
+            <a:endParaRPr lang="en-US" sz="920" dirty="0"/>
+          </a:p>
+        </p:txBody>
+      </p:sp>
+      <p:sp>
+        <p:nvSpPr>
+          <p:cNvPr id="29" name="Text 26"/>
+          <p:cNvSpPr/>
+          <p:nvPr/>
+        </p:nvSpPr>
+        <p:spPr>
+          <a:xfrm>
+            <a:off x="6400800" y="3785616"/>
+            <a:ext cx="4892040" cy="457200"/>
+          </a:xfrm>
+          <a:prstGeom prst="rect">
+            <a:avLst/>
+          </a:prstGeom>
+          <a:noFill/>
+          <a:ln/>
+        </p:spPr>
+        <p:txBody>
+          <a:bodyPr wrap="square" rtlCol="0" anchor="ctr"/>
+          <a:lstStyle/>
+          <a:p>
+            <a:pPr indent="0" marL="0">
+              <a:buNone/>
+            </a:pPr>
+            <a:r>
+              <a:rPr lang="en-US" sz="920" b="1" dirty="0">
+                <a:solidFill>
+                  <a:srgbClr val="FCA5A5"/>
+                </a:solidFill>
+                <a:latin typeface="Arial" pitchFamily="34" charset="0"/>
+                <a:ea typeface="Arial" pitchFamily="34" charset="-122"/>
+                <a:cs typeface="Arial" pitchFamily="34" charset="-120"/>
+              </a:rPr>
+              <a:t>4. Starvation Wipes Comm Win: </a:t>
+            </a:r>
+            <a:pPr indent="0" marL="0">
+              <a:buNone/>
+            </a:pPr>
+            <a:r>
+              <a:rPr lang="en-US" sz="880" dirty="0">
+                <a:solidFill>
+                  <a:srgbClr val="FCA5A5"/>
+                </a:solidFill>
+                <a:latin typeface="Arial" pitchFamily="34" charset="0"/>
+                <a:ea typeface="Arial" pitchFamily="34" charset="-122"/>
+                <a:cs typeface="Arial" pitchFamily="34" charset="-120"/>
+              </a:rPr>
+              <a:t>23 worker cores sat idle. Comm savings were completely wiped out by starvation cycles!</a:t>
+            </a:r>
+            <a:endParaRPr lang="en-US" sz="920" dirty="0"/>
+          </a:p>
+        </p:txBody>
+      </p:sp>
+      <p:sp>
+        <p:nvSpPr>
+          <p:cNvPr id="30" name="Shape 27"/>
+          <p:cNvSpPr/>
+          <p:nvPr/>
+        </p:nvSpPr>
+        <p:spPr>
+          <a:xfrm>
+            <a:off x="6400800" y="4334256"/>
+            <a:ext cx="4892040" cy="1225296"/>
+          </a:xfrm>
+          <a:prstGeom prst="roundRect">
+            <a:avLst>
+              <a:gd name="adj" fmla="val 5970"/>
+            </a:avLst>
+          </a:prstGeom>
+          <a:solidFill>
+            <a:srgbClr val="020617"/>
+          </a:solidFill>
+          <a:ln w="15240">
+            <a:solidFill>
+              <a:srgbClr val="334155"/>
+            </a:solidFill>
+            <a:prstDash val="solid"/>
+          </a:ln>
+        </p:spPr>
+      </p:sp>
+      <p:sp>
+        <p:nvSpPr>
+          <p:cNvPr id="31" name="Text 28"/>
+          <p:cNvSpPr/>
+          <p:nvPr/>
+        </p:nvSpPr>
+        <p:spPr>
+          <a:xfrm>
+            <a:off x="6492240" y="4370832"/>
+            <a:ext cx="4709160" cy="1152144"/>
+          </a:xfrm>
+          <a:prstGeom prst="rect">
+            <a:avLst/>
+          </a:prstGeom>
+          <a:noFill/>
+          <a:ln/>
+        </p:spPr>
+        <p:txBody>
+          <a:bodyPr wrap="square" rtlCol="0" anchor="ctr"/>
+          <a:lstStyle/>
+          <a:p>
+            <a:pPr indent="0" marL="0">
+              <a:buNone/>
+            </a:pPr>
+            <a:r>
+              <a:rPr lang="en-US" sz="800" dirty="0">
+                <a:solidFill>
+                  <a:srgbClr val="94A3B8"/>
+                </a:solidFill>
+                <a:latin typeface="Courier New" pitchFamily="34" charset="0"/>
+                <a:ea typeface="Courier New" pitchFamily="34" charset="-122"/>
+                <a:cs typeface="Courier New" pitchFamily="34" charset="-120"/>
+              </a:rPr>
+              <a:t>// Live Queue Backlog Snapshot during SparseLU:
+</a:t>
+            </a:r>
+            <a:pPr indent="0" marL="0">
+              <a:buNone/>
+            </a:pPr>
+            <a:r>
+              <a:rPr lang="en-US" sz="850" b="1" dirty="0">
+                <a:solidFill>
+                  <a:srgbClr val="F87171"/>
+                </a:solidFill>
+                <a:latin typeface="Courier New" pitchFamily="34" charset="0"/>
+                <a:ea typeface="Courier New" pitchFamily="34" charset="-122"/>
+                <a:cs typeface="Courier New" pitchFamily="34" charset="-120"/>
+              </a:rPr>
+              <a:t>Node 0 Queue: [████████████████████] 20 Tasks (100% Critical Path)
+</a:t>
+            </a:r>
+            <a:pPr indent="0" marL="0">
+              <a:buNone/>
+            </a:pPr>
+            <a:r>
+              <a:rPr lang="en-US" sz="850" dirty="0">
+                <a:solidFill>
+                  <a:srgbClr val="38BDF8"/>
+                </a:solidFill>
+                <a:latin typeface="Courier New" pitchFamily="34" charset="0"/>
+                <a:ea typeface="Courier New" pitchFamily="34" charset="-122"/>
+                <a:cs typeface="Courier New" pitchFamily="34" charset="-120"/>
+              </a:rPr>
+              <a:t>Nodes 1-7:    [                    ]  0 Tasks (23 Cores Starving)
+</a:t>
+            </a:r>
+            <a:pPr indent="0" marL="0">
+              <a:buNone/>
+            </a:pPr>
+            <a:r>
+              <a:rPr lang="en-US" sz="800" dirty="0">
+                <a:solidFill>
+                  <a:srgbClr val="CBD5E1"/>
+                </a:solidFill>
+                <a:latin typeface="Courier New" pitchFamily="34" charset="0"/>
+                <a:ea typeface="Courier New" pitchFamily="34" charset="-122"/>
+                <a:cs typeface="Courier New" pitchFamily="34" charset="-120"/>
+              </a:rPr>
+              <a:t>Comm Savings: -26.7% (-1.2M cyc)  |  Idle Loss: +41.8% (+2.4M cyc)
+</a:t>
+            </a:r>
+            <a:pPr indent="0" marL="0">
+              <a:buNone/>
+            </a:pPr>
+            <a:r>
+              <a:rPr lang="en-US" sz="850" b="1" dirty="0">
+                <a:solidFill>
+                  <a:srgbClr val="FFD147"/>
+                </a:solidFill>
+                <a:latin typeface="Courier New" pitchFamily="34" charset="0"/>
+                <a:ea typeface="Courier New" pitchFamily="34" charset="-122"/>
+                <a:cs typeface="Courier New" pitchFamily="34" charset="-120"/>
+              </a:rPr>
+              <a:t>Net Impact: Locality Win &lt; Starvation Loss -&gt; +15.1% SLOWDOWN</a:t>
+            </a:r>
+            <a:endParaRPr lang="en-US" sz="800" dirty="0"/>
+          </a:p>
+        </p:txBody>
+      </p:sp>
+      <p:sp>
+        <p:nvSpPr>
+          <p:cNvPr id="32" name="Shape 29"/>
+          <p:cNvSpPr/>
+          <p:nvPr/>
+        </p:nvSpPr>
+        <p:spPr>
+          <a:xfrm>
+            <a:off x="777240" y="5806440"/>
+            <a:ext cx="10744200" cy="502920"/>
+          </a:xfrm>
+          <a:prstGeom prst="roundRect">
+            <a:avLst>
+              <a:gd name="adj" fmla="val 18182"/>
+            </a:avLst>
+          </a:prstGeom>
+          <a:solidFill>
+            <a:srgbClr val="111827"/>
+          </a:solidFill>
+          <a:ln w="12700">
+            <a:solidFill>
+              <a:srgbClr val="111827"/>
+            </a:solidFill>
+            <a:prstDash val="solid"/>
+          </a:ln>
+        </p:spPr>
+      </p:sp>
+      <p:sp>
+        <p:nvSpPr>
+          <p:cNvPr id="33" name="Shape 30"/>
+          <p:cNvSpPr/>
+          <p:nvPr/>
+        </p:nvSpPr>
+        <p:spPr>
+          <a:xfrm>
+            <a:off x="731520" y="5760720"/>
+            <a:ext cx="10744200" cy="502920"/>
+          </a:xfrm>
+          <a:prstGeom prst="roundRect">
+            <a:avLst>
+              <a:gd name="adj" fmla="val 18182"/>
+            </a:avLst>
+          </a:prstGeom>
+          <a:solidFill>
+            <a:srgbClr val="FFD147"/>
+          </a:solidFill>
+          <a:ln w="19050">
+            <a:solidFill>
+              <a:srgbClr val="111827"/>
+            </a:solidFill>
+            <a:prstDash val="solid"/>
+          </a:ln>
+        </p:spPr>
+      </p:sp>
+      <p:sp>
+        <p:nvSpPr>
+          <p:cNvPr id="34" name="Text 31"/>
+          <p:cNvSpPr/>
+          <p:nvPr/>
+        </p:nvSpPr>
+        <p:spPr>
+          <a:xfrm>
+            <a:off x="914400" y="5760720"/>
+            <a:ext cx="10378440" cy="502920"/>
+          </a:xfrm>
+          <a:prstGeom prst="rect">
+            <a:avLst/>
+          </a:prstGeom>
+          <a:noFill/>
+          <a:ln/>
+        </p:spPr>
+        <p:txBody>
+          <a:bodyPr wrap="square" rtlCol="0" anchor="ctr"/>
+          <a:lstStyle/>
+          <a:p>
+            <a:pPr indent="0" marL="0">
+              <a:buNone/>
+            </a:pPr>
+            <a:r>
+              <a:rPr lang="en-US" sz="1100" b="1" dirty="0">
+                <a:solidFill>
+                  <a:srgbClr val="111827"/>
+                </a:solidFill>
+                <a:latin typeface="Arial Black" pitchFamily="34" charset="0"/>
+                <a:ea typeface="Arial Black" pitchFamily="34" charset="-122"/>
+                <a:cs typeface="Arial Black" pitchFamily="34" charset="-120"/>
+              </a:rPr>
+              <a:t>THE NUMA TAKEAWAY: </a:t>
+            </a:r>
+            <a:pPr indent="0" marL="0">
+              <a:buNone/>
+            </a:pPr>
+            <a:r>
+              <a:rPr lang="en-US" sz="1050" dirty="0">
+                <a:solidFill>
+                  <a:srgbClr val="111827"/>
+                </a:solidFill>
+                <a:latin typeface="Arial" pitchFamily="34" charset="0"/>
+                <a:ea typeface="Arial" pitchFamily="34" charset="-122"/>
+                <a:cs typeface="Arial" pitchFamily="34" charset="-120"/>
+              </a:rPr>
+              <a:t>Memory locality and core load balance cannot be optimized independently. On irregular DAGs, load balance strictly dominates memory locality.</a:t>
+            </a:r>
+            <a:endParaRPr lang="en-US" sz="1100" dirty="0"/>
+          </a:p>
+        </p:txBody>
+      </p:sp>
+      <p:sp>
+        <p:nvSpPr>
+          <p:cNvPr id="35" name="Text 32"/>
+          <p:cNvSpPr/>
+          <p:nvPr/>
+        </p:nvSpPr>
+        <p:spPr>
+          <a:xfrm>
+            <a:off x="731520" y="6355080"/>
+            <a:ext cx="8229600" cy="320040"/>
+          </a:xfrm>
+          <a:prstGeom prst="rect">
+            <a:avLst/>
+          </a:prstGeom>
+          <a:noFill/>
+          <a:ln/>
+        </p:spPr>
+        <p:txBody>
+          <a:bodyPr wrap="square" rtlCol="0" anchor="ctr"/>
+          <a:lstStyle/>
+          <a:p>
+            <a:pPr indent="0" marL="0">
+              <a:buNone/>
+            </a:pPr>
+            <a:r>
+              <a:rPr lang="en-US" sz="950" dirty="0">
+                <a:solidFill>
+                  <a:srgbClr val="4B5563"/>
+                </a:solidFill>
+                <a:latin typeface="Courier New" pitchFamily="34" charset="0"/>
+                <a:ea typeface="Courier New" pitchFamily="34" charset="-122"/>
+                <a:cs typeface="Courier New" pitchFamily="34" charset="-120"/>
+              </a:rPr>
+              <a:t>Empirical Reproduction: AMD Opteron NUMA &amp; The SparseLU Paradox</a:t>
+            </a:r>
+            <a:endParaRPr lang="en-US" sz="950" dirty="0"/>
+          </a:p>
+        </p:txBody>
+      </p:sp>
+      <p:sp>
+        <p:nvSpPr>
+          <p:cNvPr id="36" name="Text 33"/>
+          <p:cNvSpPr/>
+          <p:nvPr/>
+        </p:nvSpPr>
+        <p:spPr>
+          <a:xfrm>
+            <a:off x="10058400" y="6355080"/>
+            <a:ext cx="1399032" cy="320040"/>
+          </a:xfrm>
+          <a:prstGeom prst="rect">
+            <a:avLst/>
+          </a:prstGeom>
+          <a:noFill/>
+          <a:ln/>
+        </p:spPr>
+        <p:txBody>
+          <a:bodyPr wrap="square" rtlCol="0" anchor="ctr"/>
+          <a:lstStyle/>
+          <a:p>
+            <a:pPr algn="r" indent="0" marL="0">
+              <a:buNone/>
+            </a:pPr>
+            <a:r>
+              <a:rPr lang="en-US" sz="950" dirty="0">
+                <a:solidFill>
+                  <a:srgbClr val="4B5563"/>
+                </a:solidFill>
+                <a:latin typeface="Courier New" pitchFamily="34" charset="0"/>
+                <a:ea typeface="Courier New" pitchFamily="34" charset="-122"/>
+                <a:cs typeface="Courier New" pitchFamily="34" charset="-120"/>
+              </a:rPr>
+              <a:t>04 / 06</a:t>
+            </a:r>
+            <a:endParaRPr lang="en-US" sz="950" dirty="0"/>
+          </a:p>
+        </p:txBody>
+      </p:sp>
+    </p:spTree>
+  </p:cSld>
+  <p:clrMapOvr>
+    <a:masterClrMapping/>
+  </p:clrMapOvr>
+</p:sld>
 </file>
 
-<file path=ppt/slides/slide5.xml><?xml version="1.0" encoding="UTF-8" standalone="yes"?>
-<p:sld xmlns:a="http://schemas.openxmlformats.org/drawingml/2006/main" xmlns:r="http://schemas.openxmlformats.org/officeDocument/2006/relationships" xmlns:p="http://schemas.openxmlformats.org/presentationml/2006/main"><p:cSld name="Slide 5"><p:spTree><p:nvGrpSpPr><p:cNvPr id="1" name=""/><p:cNvGrpSpPr/><p:nvPr/></p:nvGrpSpPr><p:grpSpPr><a:xfrm><a:off x="0" y="0"/><a:ext cx="0" cy="0"/><a:chOff x="0" y="0"/><a:chExt cx="0" cy="0"/></a:xfrm></p:grpSpPr><p:sp><p:nvSpPr><p:cNvPr id="2" name="Shape 0"></p:cNvPr><p:cNvSpPr/><p:nvPr></p:nvPr></p:nvSpPr><p:spPr><a:xfrm><a:off x="0" y="0"/><a:ext cx="12191695" cy="6858000"/></a:xfrm><a:prstGeom prst="rect"><a:avLst></a:avLst></a:prstGeom><a:solidFill><a:srgbClr val="F4F0EA"/></a:solidFill><a:ln w="12700"><a:solidFill><a:srgbClr val="F4F0EA"/></a:solidFill><a:prstDash val="solid"/></a:ln></p:spPr></p:sp><p:sp><p:nvSpPr><p:cNvPr id="3" name="Shape 1"></p:cNvPr><p:cNvSpPr/><p:nvPr></p:nvPr></p:nvSpPr><p:spPr><a:xfrm><a:off x="960120" y="0"/><a:ext cx="9144" cy="6858000"/></a:xfrm><a:prstGeom prst="rect"><a:avLst></a:avLst></a:prstGeom><a:solidFill><a:srgbClr val="DDD8CF"/></a:solidFill><a:ln w="12700"><a:solidFill><a:srgbClr val="DDD8CF"/></a:solidFill><a:prstDash val="solid"/></a:ln></p:spPr></p:sp><p:sp><p:nvSpPr><p:cNvPr id="4" name="Shape 2"></p:cNvPr><p:cNvSpPr/><p:nvPr></p:nvPr></p:nvSpPr><p:spPr><a:xfrm><a:off x="1920240" y="0"/><a:ext cx="9144" cy="6858000"/></a:xfrm><a:prstGeom prst="rect"><a:avLst></a:avLst></a:prstGeom><a:solidFill><a:srgbClr val="DDD8CF"/></a:solidFill><a:ln w="12700"><a:solidFill><a:srgbClr val="DDD8CF"/></a:solidFill><a:prstDash val="solid"/></a:ln></p:spPr></p:sp><p:sp><p:nvSpPr><p:cNvPr id="5" name="Shape 3"></p:cNvPr><p:cNvSpPr/><p:nvPr></p:nvPr></p:nvSpPr><p:spPr><a:xfrm><a:off x="2880360" y="0"/><a:ext cx="9144" cy="6858000"/></a:xfrm><a:prstGeom prst="rect"><a:avLst></a:avLst></a:prstGeom><a:solidFill><a:srgbClr val="DDD8CF"/></a:solidFill><a:ln w="12700"><a:solidFill><a:srgbClr val="DDD8CF"/></a:solidFill><a:prstDash val="solid"/></a:ln></p:spPr></p:sp><p:sp><p:nvSpPr><p:cNvPr id="6" name="Shape 4"></p:cNvPr><p:cNvSpPr/><p:nvPr></p:nvPr></p:nvSpPr><p:spPr><a:xfrm><a:off x="3840480" y="0"/><a:ext cx="9144" cy="6858000"/></a:xfrm><a:prstGeom prst="rect"><a:avLst></a:avLst></a:prstGeom><a:solidFill><a:srgbClr val="DDD8CF"/></a:solidFill><a:ln w="12700"><a:solidFill><a:srgbClr val="DDD8CF"/></a:solidFill><a:prstDash val="solid"/></a:ln></p:spPr></p:sp><p:sp><p:nvSpPr><p:cNvPr id="7" name="Shape 5"></p:cNvPr><p:cNvSpPr/><p:nvPr></p:nvPr></p:nvSpPr><p:spPr><a:xfrm><a:off x="4800600" y="0"/><a:ext cx="9144" cy="6858000"/></a:xfrm><a:prstGeom prst="rect"><a:avLst></a:avLst></a:prstGeom><a:solidFill><a:srgbClr val="DDD8CF"/></a:solidFill><a:ln w="12700"><a:solidFill><a:srgbClr val="DDD8CF"/></a:solidFill><a:prstDash val="solid"/></a:ln></p:spPr></p:sp><p:sp><p:nvSpPr><p:cNvPr id="8" name="Shape 6"></p:cNvPr><p:cNvSpPr/><p:nvPr></p:nvPr></p:nvSpPr><p:spPr><a:xfrm><a:off x="5760720" y="0"/><a:ext cx="9144" cy="6858000"/></a:xfrm><a:prstGeom prst="rect"><a:avLst></a:avLst></a:prstGeom><a:solidFill><a:srgbClr val="DDD8CF"/></a:solidFill><a:ln w="12700"><a:solidFill><a:srgbClr val="DDD8CF"/></a:solidFill><a:prstDash val="solid"/></a:ln></p:spPr></p:sp><p:sp><p:nvSpPr><p:cNvPr id="9" name="Shape 7"></p:cNvPr><p:cNvSpPr/><p:nvPr></p:nvPr></p:nvSpPr><p:spPr><a:xfrm><a:off x="6720840" y="0"/><a:ext cx="9144" cy="6858000"/></a:xfrm><a:prstGeom prst="rect"><a:avLst></a:avLst></a:prstGeom><a:solidFill><a:srgbClr val="DDD8CF"/></a:solidFill><a:ln w="12700"><a:solidFill><a:srgbClr val="DDD8CF"/></a:solidFill><a:prstDash val="solid"/></a:ln></p:spPr></p:sp><p:sp><p:nvSpPr><p:cNvPr id="10" name="Shape 8"></p:cNvPr><p:cNvSpPr/><p:nvPr></p:nvPr></p:nvSpPr><p:spPr><a:xfrm><a:off x="7680960" y="0"/><a:ext cx="9144" cy="6858000"/></a:xfrm><a:prstGeom prst="rect"><a:avLst></a:avLst></a:prstGeom><a:solidFill><a:srgbClr val="DDD8CF"/></a:solidFill><a:ln w="12700"><a:solidFill><a:srgbClr val="DDD8CF"/></a:solidFill><a:prstDash val="solid"/></a:ln></p:spPr></p:sp><p:sp><p:nvSpPr><p:cNvPr id="11" name="Shape 9"></p:cNvPr><p:cNvSpPr/><p:nvPr></p:nvPr></p:nvSpPr><p:spPr><a:xfrm><a:off x="8641080" y="0"/><a:ext cx="9144" cy="6858000"/></a:xfrm><a:prstGeom prst="rect"><a:avLst></a:avLst></a:prstGeom><a:solidFill><a:srgbClr val="DDD8CF"/></a:solidFill><a:ln w="12700"><a:solidFill><a:srgbClr val="DDD8CF"/></a:solidFill><a:prstDash val="solid"/></a:ln></p:spPr></p:sp><p:sp><p:nvSpPr><p:cNvPr id="12" name="Shape 10"></p:cNvPr><p:cNvSpPr/><p:nvPr></p:nvPr></p:nvSpPr><p:spPr><a:xfrm><a:off x="9601200" y="0"/><a:ext cx="9144" cy="6858000"/></a:xfrm><a:prstGeom prst="rect"><a:avLst></a:avLst></a:prstGeom><a:solidFill><a:srgbClr val="DDD8CF"/></a:solidFill><a:ln w="12700"><a:solidFill><a:srgbClr val="DDD8CF"/></a:solidFill><a:prstDash val="solid"/></a:ln></p:spPr></p:sp><p:sp><p:nvSpPr><p:cNvPr id="13" name="Shape 11"></p:cNvPr><p:cNvSpPr/><p:nvPr></p:nvPr></p:nvSpPr><p:spPr><a:xfrm><a:off x="10561320" y="0"/><a:ext cx="9144" cy="6858000"/></a:xfrm><a:prstGeom prst="rect"><a:avLst></a:avLst></a:prstGeom><a:solidFill><a:srgbClr val="DDD8CF"/></a:solidFill><a:ln w="12700"><a:solidFill><a:srgbClr val="DDD8CF"/></a:solidFill><a:prstDash val="solid"/></a:ln></p:spPr></p:sp><p:sp><p:nvSpPr><p:cNvPr id="14" name="Shape 12"></p:cNvPr><p:cNvSpPr/><p:nvPr></p:nvPr></p:nvSpPr><p:spPr><a:xfrm><a:off x="0" y="960120"/><a:ext cx="12191695" cy="9144"/></a:xfrm><a:prstGeom prst="rect"><a:avLst></a:avLst></a:prstGeom><a:solidFill><a:srgbClr val="DDD8CF"/></a:solidFill><a:ln w="12700"><a:solidFill><a:srgbClr val="DDD8CF"/></a:solidFill><a:prstDash val="solid"/></a:ln></p:spPr></p:sp><p:sp><p:nvSpPr><p:cNvPr id="15" name="Shape 13"></p:cNvPr><p:cNvSpPr/><p:nvPr></p:nvPr></p:nvSpPr><p:spPr><a:xfrm><a:off x="0" y="1920240"/><a:ext cx="12191695" cy="9144"/></a:xfrm><a:prstGeom prst="rect"><a:avLst></a:avLst></a:prstGeom><a:solidFill><a:srgbClr val="DDD8CF"/></a:solidFill><a:ln w="12700"><a:solidFill><a:srgbClr val="DDD8CF"/></a:solidFill><a:prstDash val="solid"/></a:ln></p:spPr></p:sp><p:sp><p:nvSpPr><p:cNvPr id="16" name="Shape 14"></p:cNvPr><p:cNvSpPr/><p:nvPr></p:nvPr></p:nvSpPr><p:spPr><a:xfrm><a:off x="0" y="2880360"/><a:ext cx="12191695" cy="9144"/></a:xfrm><a:prstGeom prst="rect"><a:avLst></a:avLst></a:prstGeom><a:solidFill><a:srgbClr val="DDD8CF"/></a:solidFill><a:ln w="12700"><a:solidFill><a:srgbClr val="DDD8CF"/></a:solidFill><a:prstDash val="solid"/></a:ln></p:spPr></p:sp><p:sp><p:nvSpPr><p:cNvPr id="17" name="Shape 15"></p:cNvPr><p:cNvSpPr/><p:nvPr></p:nvPr></p:nvSpPr><p:spPr><a:xfrm><a:off x="0" y="3840480"/><a:ext cx="12191695" cy="9144"/></a:xfrm><a:prstGeom prst="rect"><a:avLst></a:avLst></a:prstGeom><a:solidFill><a:srgbClr val="DDD8CF"/></a:solidFill><a:ln w="12700"><a:solidFill><a:srgbClr val="DDD8CF"/></a:solidFill><a:prstDash val="solid"/></a:ln></p:spPr></p:sp><p:sp><p:nvSpPr><p:cNvPr id="18" name="Shape 16"></p:cNvPr><p:cNvSpPr/><p:nvPr></p:nvPr></p:nvSpPr><p:spPr><a:xfrm><a:off x="0" y="4800600"/><a:ext cx="12191695" cy="9144"/></a:xfrm><a:prstGeom prst="rect"><a:avLst></a:avLst></a:prstGeom><a:solidFill><a:srgbClr val="DDD8CF"/></a:solidFill><a:ln w="12700"><a:solidFill><a:srgbClr val="DDD8CF"/></a:solidFill><a:prstDash val="solid"/></a:ln></p:spPr></p:sp><p:sp><p:nvSpPr><p:cNvPr id="19" name="Shape 17"></p:cNvPr><p:cNvSpPr/><p:nvPr></p:nvPr></p:nvSpPr><p:spPr><a:xfrm><a:off x="0" y="5760720"/><a:ext cx="12191695" cy="9144"/></a:xfrm><a:prstGeom prst="rect"><a:avLst></a:avLst></a:prstGeom><a:solidFill><a:srgbClr val="DDD8CF"/></a:solidFill><a:ln w="12700"><a:solidFill><a:srgbClr val="DDD8CF"/></a:solidFill><a:prstDash val="solid"/></a:ln></p:spPr></p:sp><p:sp><p:nvSpPr><p:cNvPr id="20" name="Shape 18"></p:cNvPr><p:cNvSpPr/><p:nvPr></p:nvPr></p:nvSpPr><p:spPr><a:xfrm><a:off x="411480" y="320040"/><a:ext cx="2377440" cy="292608"/></a:xfrm><a:prstGeom prst="roundRect"><a:avLst><a:gd name="adj" fmla="val 50000"/></a:avLst></a:prstGeom><a:solidFill><a:srgbClr val="111827"/></a:solidFill><a:ln w="12700"><a:solidFill><a:srgbClr val="111827"/></a:solidFill><a:prstDash val="solid"/></a:ln></p:spPr></p:sp><p:sp><p:nvSpPr><p:cNvPr id="21" name="Text 19"></p:cNvPr><p:cNvSpPr/><p:nvPr></p:nvPr></p:nvSpPr><p:spPr><a:xfrm><a:off x="502920" y="320040"/><a:ext cx="2194560" cy="292608"/></a:xfrm><a:prstGeom prst="rect"><a:avLst></a:avLst></a:prstGeom><a:noFill/><a:ln></a:ln></p:spPr><p:txBody><a:bodyPr wrap="square" rtlCol="0" anchor="ctr"></a:bodyPr><a:lstStyle/><a:p><a:pPr indent="0" marL="0"><a:buNone/></a:pPr><a:r><a:rPr lang="en-US" sz="900" b="1" spc="200" kern="0" dirty="0"><a:solidFill><a:srgbClr val="FFD147"/></a:solidFill><a:latin typeface=""JetBrains Mono", "Courier New", monospace" pitchFamily="34" charset="0"/><a:ea typeface=""JetBrains Mono", "Courier New", monospace" pitchFamily="34" charset="-122"/><a:cs typeface=""JetBrains Mono", "Courier New", monospace" pitchFamily="34" charset="-120"/></a:rPr><a:t>PART 04</a:t></a:r><a:endParaRPr lang="en-US" sz="900" dirty="0"/></a:p></p:txBody></p:sp><p:sp><p:nvSpPr><p:cNvPr id="22" name="Text 20"></p:cNvPr><p:cNvSpPr/><p:nvPr></p:nvPr></p:nvSpPr><p:spPr><a:xfrm><a:off x="411480" y="777240"/><a:ext cx="10972800" cy="640080"/></a:xfrm><a:prstGeom prst="rect"><a:avLst></a:avLst></a:prstGeom><a:noFill/><a:ln></a:ln></p:spPr><p:txBody><a:bodyPr wrap="square" rtlCol="0" anchor="ctr"></a:bodyPr><a:lstStyle/><a:p><a:pPr indent="0" marL="0"><a:buNone/></a:pPr><a:r><a:rPr lang="en-US" sz="4200" b="1" spc="-300" kern="0" dirty="0"><a:solidFill><a:srgbClr val="111827"/></a:solidFill><a:latin typeface="Arial Black, "Trebuchet MS", "Helvetica Neue", sans-serif" pitchFamily="34" charset="0"/><a:ea typeface="Arial Black, "Trebuchet MS", "Helvetica Neue", sans-serif" pitchFamily="34" charset="-122"/><a:cs typeface="Arial Black, "Trebuchet MS", "Helvetica Neue", sans-serif" pitchFamily="34" charset="-120"/></a:rPr><a:t>The NOVA Solution:</a:t></a:r><a:endParaRPr lang="en-US" sz="4200" dirty="0"/></a:p></p:txBody></p:sp><p:sp><p:nvSpPr><p:cNvPr id="23" name="Shape 21"></p:cNvPr><p:cNvSpPr/><p:nvPr></p:nvPr></p:nvSpPr><p:spPr><a:xfrm><a:off x="5029200" y="1417320"/><a:ext cx="6766560" cy="548640"/></a:xfrm><a:prstGeom prst="roundRect"><a:avLst><a:gd name="adj" fmla="val 13333"/></a:avLst></a:prstGeom><a:solidFill><a:srgbClr val="FFD147"/></a:solidFill><a:ln w="31750"><a:solidFill><a:srgbClr val="111827"/></a:solidFill><a:prstDash val="solid"/></a:ln></p:spPr></p:sp><p:sp><p:nvSpPr><p:cNvPr id="24" name="Text 22"></p:cNvPr><p:cNvSpPr/><p:nvPr></p:nvPr></p:nvSpPr><p:spPr><a:xfrm><a:off x="5120640" y="1463040"/><a:ext cx="6583680" cy="457200"/></a:xfrm><a:prstGeom prst="rect"><a:avLst></a:avLst></a:prstGeom><a:noFill/><a:ln></a:ln></p:spPr><p:txBody><a:bodyPr wrap="square" rtlCol="0" anchor="ctr"></a:bodyPr><a:lstStyle/><a:p><a:pPr indent="0" marL="0"><a:buNone/></a:pPr><a:r><a:rPr lang="en-US" sz="3200" b="1" spc="-200" kern="0" dirty="0"><a:solidFill><a:srgbClr val="111827"/></a:solidFill><a:latin typeface="Arial Black, "Trebuchet MS", "Helvetica Neue", sans-serif" pitchFamily="34" charset="0"/><a:ea typeface="Arial Black, "Trebuchet MS", "Helvetica Neue", sans-serif" pitchFamily="34" charset="-122"/><a:cs typeface="Arial Black, "Trebuchet MS", "Helvetica Neue", sans-serif" pitchFamily="34" charset="-120"/></a:rPr><a:t>Adaptive Co-Scheduling</a:t></a:r><a:endParaRPr lang="en-US" sz="3200" dirty="0"/></a:p></p:txBody></p:sp><p:sp><p:nvSpPr><p:cNvPr id="25" name="Text 23"></p:cNvPr><p:cNvSpPr/><p:nvPr></p:nvPr></p:nvSpPr><p:spPr><a:xfrm><a:off x="411480" y="2103120"/><a:ext cx="10972800" cy="274320"/></a:xfrm><a:prstGeom prst="rect"><a:avLst></a:avLst></a:prstGeom><a:noFill/><a:ln></a:ln></p:spPr><p:txBody><a:bodyPr wrap="square" rtlCol="0" anchor="ctr"></a:bodyPr><a:lstStyle/><a:p><a:pPr indent="0" marL="0"><a:buNone/></a:pPr><a:r><a:rPr lang="en-US" sz="1400" i="1" dirty="0"><a:solidFill><a:srgbClr val="4B5563"/></a:solidFill><a:latin typeface="Inter, "Segoe UI", sans-serif" pitchFamily="34" charset="0"/><a:ea typeface="Inter, "Segoe UI", sans-serif" pitchFamily="34" charset="-122"/><a:cs typeface="Inter, "Segoe UI", sans-serif" pitchFamily="34" charset="-120"/></a:rPr><a:t>Four architectural pillars + defense takeaways — zero-contention control plane</a:t></a:r><a:endParaRPr lang="en-US" sz="1400" dirty="0"/></a:p></p:txBody></p:sp><p:sp><p:nvSpPr><p:cNvPr id="26" name="Shape 24"></p:cNvPr><p:cNvSpPr/><p:nvPr></p:nvPr></p:nvSpPr><p:spPr><a:xfrm><a:off x="411480" y="2468880"/><a:ext cx="5486400" cy="1508760"/></a:xfrm><a:prstGeom prst="roundRect"><a:avLst><a:gd name="adj" fmla="val 4848"/></a:avLst></a:prstGeom><a:solidFill><a:srgbClr val="F4F0EA"/></a:solidFill><a:ln w="25400"><a:solidFill><a:srgbClr val="111827"/></a:solidFill><a:prstDash val="solid"/></a:ln><a:effectLst> <a:outerShdw sx="100000" sy="100000" kx="0" ky="0" algn="bl" rotWithShape="0" blurRad="38100" dist="50800" dir="16200000"> <a:srgbClr val="C8C6BF"> <a:alpha val="75000"/></a:srgbClr> </a:outerShdw></a:effectLst></p:spPr></p:sp><p:sp><p:nvSpPr><p:cNvPr id="27" name="Shape 25"></p:cNvPr><p:cNvSpPr/><p:nvPr></p:nvPr></p:nvSpPr><p:spPr><a:xfrm><a:off x="594360" y="2697480"/><a:ext cx="822960" cy="502920"/></a:xfrm><a:prstGeom prst="ellipse"><a:avLst></a:avLst></a:prstGeom><a:solidFill><a:srgbClr val="FFD147"/></a:solidFill><a:ln w="19050"><a:solidFill><a:srgbClr val="111827"/></a:solidFill><a:prstDash val="solid"/></a:ln></p:spPr></p:sp><p:sp><p:nvSpPr><p:cNvPr id="28" name="Text 26"></p:cNvPr><p:cNvSpPr/><p:nvPr></p:nvPr></p:nvSpPr><p:spPr><a:xfrm><a:off x="594360" y="2697480"/><a:ext cx="822960" cy="502920"/></a:xfrm><a:prstGeom prst="rect"><a:avLst></a:avLst></a:prstGeom><a:noFill/><a:ln></a:ln></p:spPr><p:txBody><a:bodyPr wrap="square" rtlCol="0" anchor="ctr"></a:bodyPr><a:lstStyle/><a:p><a:pPr algn="ctr" indent="0" marL="0"><a:buNone/></a:pPr><a:r><a:rPr lang="en-US" sz="1600" b="1" dirty="0"><a:solidFill><a:srgbClr val="111827"/></a:solidFill><a:latin typeface="Arial Black, "Trebuchet MS", "Helvetica Neue", sans-serif" pitchFamily="34" charset="0"/><a:ea typeface="Arial Black, "Trebuchet MS", "Helvetica Neue", sans-serif" pitchFamily="34" charset="-122"/><a:cs typeface="Arial Black, "Trebuchet MS", "Helvetica Neue", sans-serif" pitchFamily="34" charset="-120"/></a:rPr><a:t>N-A</a:t></a:r><a:endParaRPr lang="en-US" sz="1600" dirty="0"/></a:p></p:txBody></p:sp><p:sp><p:nvSpPr><p:cNvPr id="29" name="Text 27"></p:cNvPr><p:cNvSpPr/><p:nvPr></p:nvPr></p:nvSpPr><p:spPr><a:xfrm><a:off x="1508760" y="2697480"/><a:ext cx="4206240" cy="320040"/></a:xfrm><a:prstGeom prst="rect"><a:avLst></a:avLst></a:prstGeom><a:noFill/><a:ln></a:ln></p:spPr><p:txBody><a:bodyPr wrap="square" rtlCol="0" anchor="ctr"></a:bodyPr><a:lstStyle/><a:p><a:pPr indent="0" marL="0"><a:buNone/></a:pPr><a:r><a:rPr lang="en-US" sz="1600" b="1" dirty="0"><a:solidFill><a:srgbClr val="111827"/></a:solidFill><a:latin typeface="Arial Black, "Trebuchet MS", "Helvetica Neue", sans-serif" pitchFamily="34" charset="0"/><a:ea typeface="Arial Black, "Trebuchet MS", "Helvetica Neue", sans-serif" pitchFamily="34" charset="-122"/><a:cs typeface="Arial Black, "Trebuchet MS", "Helvetica Neue", sans-serif" pitchFamily="34" charset="-120"/></a:rPr><a:t>Load-Aware Work Dealing</a:t></a:r><a:endParaRPr lang="en-US" sz="1600" dirty="0"/></a:p></p:txBody></p:sp><p:sp><p:nvSpPr><p:cNvPr id="30" name="Shape 28"></p:cNvPr><p:cNvSpPr/><p:nvPr></p:nvPr></p:nvSpPr><p:spPr><a:xfrm><a:off x="1508760" y="3063240"/><a:ext cx="914400" cy="228600"/></a:xfrm><a:prstGeom prst="roundRect"><a:avLst><a:gd name="adj" fmla="val 48000"/></a:avLst></a:prstGeom><a:solidFill><a:srgbClr val="DCE4FF"/></a:solidFill><a:ln w="12700"><a:solidFill><a:srgbClr val="DCE4FF"/></a:solidFill><a:prstDash val="solid"/></a:ln></p:spPr></p:sp><p:sp><p:nvSpPr><p:cNvPr id="31" name="Text 29"></p:cNvPr><p:cNvSpPr/><p:nvPr></p:nvPr></p:nvSpPr><p:spPr><a:xfrm><a:off x="1508760" y="3063240"/><a:ext cx="914400" cy="228600"/></a:xfrm><a:prstGeom prst="rect"><a:avLst></a:avLst></a:prstGeom><a:noFill/><a:ln></a:ln></p:spPr><p:txBody><a:bodyPr wrap="square" rtlCol="0" anchor="ctr"></a:bodyPr><a:lstStyle/><a:p><a:pPr algn="ctr" indent="0" marL="0"><a:buNone/></a:pPr><a:r><a:rPr lang="en-US" sz="900" b="1" dirty="0"><a:solidFill><a:srgbClr val="111827"/></a:solidFill><a:latin typeface=""JetBrains Mono", "Courier New", monospace" pitchFamily="34" charset="0"/><a:ea typeface=""JetBrains Mono", "Courier New", monospace" pitchFamily="34" charset="-122"/><a:cs typeface=""JetBrains Mono", "Courier New", monospace" pitchFamily="34" charset="-120"/></a:rPr><a:t>Fixes H3, H4</a:t></a:r><a:endParaRPr lang="en-US" sz="900" dirty="0"/></a:p></p:txBody></p:sp><p:sp><p:nvSpPr><p:cNvPr id="32" name="Text 30"></p:cNvPr><p:cNvSpPr/><p:nvPr></p:nvPr></p:nvSpPr><p:spPr><a:xfrm><a:off x="1508760" y="3337560"/><a:ext cx="4206240" cy="320040"/></a:xfrm><a:prstGeom prst="rect"><a:avLst></a:avLst></a:prstGeom><a:noFill/><a:ln></a:ln></p:spPr><p:txBody><a:bodyPr wrap="square" rtlCol="0" anchor="ctr"></a:bodyPr><a:lstStyle/><a:p><a:pPr indent="0" marL="0"><a:lnSpc><a:spcPts val="1100"/></a:lnSpc><a:buNone/></a:pPr><a:r><a:rPr lang="en-US" sz="1100" dirty="0"><a:solidFill><a:srgbClr val="374151"/></a:solidFill><a:latin typeface="Inter, "Segoe UI", sans-serif" pitchFamily="34" charset="0"/><a:ea typeface="Inter, "Segoe UI", sans-serif" pitchFamily="34" charset="-122"/><a:cs typeface="Inter, "Segoe UI", sans-serif" pitchFamily="34" charset="-120"/></a:rPr><a:t>Composite score:  α·comm_norm(D,q) + (1−α)·occ_norm(q)  — balances proximity with backlog.</a:t></a:r><a:endParaRPr lang="en-US" sz="1100" dirty="0"/></a:p></p:txBody></p:sp><p:sp><p:nvSpPr><p:cNvPr id="33" name="Shape 31"></p:cNvPr><p:cNvSpPr/><p:nvPr></p:nvPr></p:nvSpPr><p:spPr><a:xfrm><a:off x="594360" y="3611880"/><a:ext cx="5120640" cy="320040"/></a:xfrm><a:prstGeom prst="roundRect"><a:avLst><a:gd name="adj" fmla="val 17143"/></a:avLst></a:prstGeom><a:solidFill><a:srgbClr val="111827"/></a:solidFill><a:ln w="12700"><a:solidFill><a:srgbClr val="111827"/></a:solidFill><a:prstDash val="solid"/></a:ln></p:spPr></p:sp><p:sp><p:nvSpPr><p:cNvPr id="34" name="Text 32"></p:cNvPr><p:cNvSpPr/><p:nvPr></p:nvPr></p:nvSpPr><p:spPr><a:xfrm><a:off x="731520" y="3611880"/><a:ext cx="4846320" cy="320040"/></a:xfrm><a:prstGeom prst="rect"><a:avLst></a:avLst></a:prstGeom><a:noFill/><a:ln></a:ln></p:spPr><p:txBody><a:bodyPr wrap="square" rtlCol="0" anchor="ctr"></a:bodyPr><a:lstStyle/><a:p><a:pPr indent="0" marL="0"><a:buNone/></a:pPr><a:r><a:rPr lang="en-US" sz="1000" dirty="0"><a:solidFill><a:srgbClr val="FFD147"/></a:solidFill><a:latin typeface=""JetBrains Mono", "Courier New", monospace" pitchFamily="34" charset="0"/><a:ea typeface=""JetBrains Mono", "Courier New", monospace" pitchFamily="34" charset="-122"/><a:cs typeface=""JetBrains Mono", "Courier New", monospace" pitchFamily="34" charset="-120"/></a:rPr><a:t>score(q) = α·comm_norm + (1−α)·occ_norm</a:t></a:r><a:endParaRPr lang="en-US" sz="1000" dirty="0"/></a:p></p:txBody></p:sp><p:sp><p:nvSpPr><p:cNvPr id="35" name="Shape 33"></p:cNvPr><p:cNvSpPr/><p:nvPr></p:nvPr></p:nvSpPr><p:spPr><a:xfrm><a:off x="6172200" y="2468880"/><a:ext cx="5486400" cy="1508760"/></a:xfrm><a:prstGeom prst="roundRect"><a:avLst><a:gd name="adj" fmla="val 4848"/></a:avLst></a:prstGeom><a:solidFill><a:srgbClr val="EFEAE3"/></a:solidFill><a:ln w="25400"><a:solidFill><a:srgbClr val="111827"/></a:solidFill><a:prstDash val="solid"/></a:ln><a:effectLst> <a:outerShdw sx="100000" sy="100000" kx="0" ky="0" algn="bl" rotWithShape="0" blurRad="38100" dist="50800" dir="16200000"> <a:srgbClr val="C8C6BF"> <a:alpha val="75000"/></a:srgbClr> </a:outerShdw></a:effectLst></p:spPr></p:sp><p:sp><p:nvSpPr><p:cNvPr id="36" name="Shape 34"></p:cNvPr><p:cNvSpPr/><p:nvPr></p:nvPr></p:nvSpPr><p:spPr><a:xfrm><a:off x="6355080" y="2697480"/><a:ext cx="822960" cy="502920"/></a:xfrm><a:prstGeom prst="ellipse"><a:avLst></a:avLst></a:prstGeom><a:solidFill><a:srgbClr val="FFD147"/></a:solidFill><a:ln w="19050"><a:solidFill><a:srgbClr val="111827"/></a:solidFill><a:prstDash val="solid"/></a:ln></p:spPr></p:sp><p:sp><p:nvSpPr><p:cNvPr id="37" name="Text 35"></p:cNvPr><p:cNvSpPr/><p:nvPr></p:nvPr></p:nvSpPr><p:spPr><a:xfrm><a:off x="6355080" y="2697480"/><a:ext cx="822960" cy="502920"/></a:xfrm><a:prstGeom prst="rect"><a:avLst></a:avLst></a:prstGeom><a:noFill/><a:ln></a:ln></p:spPr><p:txBody><a:bodyPr wrap="square" rtlCol="0" anchor="ctr"></a:bodyPr><a:lstStyle/><a:p><a:pPr algn="ctr" indent="0" marL="0"><a:buNone/></a:pPr><a:r><a:rPr lang="en-US" sz="1600" b="1" dirty="0"><a:solidFill><a:srgbClr val="111827"/></a:solidFill><a:latin typeface="Arial Black, "Trebuchet MS", "Helvetica Neue", sans-serif" pitchFamily="34" charset="0"/><a:ea typeface="Arial Black, "Trebuchet MS", "Helvetica Neue", sans-serif" pitchFamily="34" charset="-122"/><a:cs typeface="Arial Black, "Trebuchet MS", "Helvetica Neue", sans-serif" pitchFamily="34" charset="-120"/></a:rPr><a:t>N-B</a:t></a:r><a:endParaRPr lang="en-US" sz="1600" dirty="0"/></a:p></p:txBody></p:sp><p:sp><p:nvSpPr><p:cNvPr id="38" name="Text 36"></p:cNvPr><p:cNvSpPr/><p:nvPr></p:nvPr></p:nvSpPr><p:spPr><a:xfrm><a:off x="7269480" y="2697480"/><a:ext cx="4206240" cy="320040"/></a:xfrm><a:prstGeom prst="rect"><a:avLst></a:avLst></a:prstGeom><a:noFill/><a:ln></a:ln></p:spPr><p:txBody><a:bodyPr wrap="square" rtlCol="0" anchor="ctr"></a:bodyPr><a:lstStyle/><a:p><a:pPr indent="0" marL="0"><a:buNone/></a:pPr><a:r><a:rPr lang="en-US" sz="1600" b="1" dirty="0"><a:solidFill><a:srgbClr val="111827"/></a:solidFill><a:latin typeface="Arial Black, "Trebuchet MS", "Helvetica Neue", sans-serif" pitchFamily="34" charset="0"/><a:ea typeface="Arial Black, "Trebuchet MS", "Helvetica Neue", sans-serif" pitchFamily="34" charset="-122"/><a:cs typeface="Arial Black, "Trebuchet MS", "Helvetica Neue", sans-serif" pitchFamily="34" charset="-120"/></a:rPr><a:t>Task-Level Shadow Index</a:t></a:r><a:endParaRPr lang="en-US" sz="1600" dirty="0"/></a:p></p:txBody></p:sp><p:sp><p:nvSpPr><p:cNvPr id="39" name="Shape 37"></p:cNvPr><p:cNvSpPr/><p:nvPr></p:nvPr></p:nvSpPr><p:spPr><a:xfrm><a:off x="7269480" y="3063240"/><a:ext cx="914400" cy="228600"/></a:xfrm><a:prstGeom prst="roundRect"><a:avLst><a:gd name="adj" fmla="val 48000"/></a:avLst></a:prstGeom><a:solidFill><a:srgbClr val="DCE4FF"/></a:solidFill><a:ln w="12700"><a:solidFill><a:srgbClr val="DCE4FF"/></a:solidFill><a:prstDash val="solid"/></a:ln></p:spPr></p:sp><p:sp><p:nvSpPr><p:cNvPr id="40" name="Text 38"></p:cNvPr><p:cNvSpPr/><p:nvPr></p:nvPr></p:nvSpPr><p:spPr><a:xfrm><a:off x="7269480" y="3063240"/><a:ext cx="914400" cy="228600"/></a:xfrm><a:prstGeom prst="rect"><a:avLst></a:avLst></a:prstGeom><a:noFill/><a:ln></a:ln></p:spPr><p:txBody><a:bodyPr wrap="square" rtlCol="0" anchor="ctr"></a:bodyPr><a:lstStyle/><a:p><a:pPr algn="ctr" indent="0" marL="0"><a:buNone/></a:pPr><a:r><a:rPr lang="en-US" sz="900" b="1" dirty="0"><a:solidFill><a:srgbClr val="111827"/></a:solidFill><a:latin typeface=""JetBrains Mono", "Courier New", monospace" pitchFamily="34" charset="0"/><a:ea typeface=""JetBrains Mono", "Courier New", monospace" pitchFamily="34" charset="-122"/><a:cs typeface=""JetBrains Mono", "Courier New", monospace" pitchFamily="34" charset="-120"/></a:rPr><a:t>Fixes H2</a:t></a:r><a:endParaRPr lang="en-US" sz="900" dirty="0"/></a:p></p:txBody></p:sp><p:sp><p:nvSpPr><p:cNvPr id="41" name="Text 39"></p:cNvPr><p:cNvSpPr/><p:nvPr></p:nvPr></p:nvSpPr><p:spPr><a:xfrm><a:off x="7269480" y="3337560"/><a:ext cx="4206240" cy="320040"/></a:xfrm><a:prstGeom prst="rect"><a:avLst></a:avLst></a:prstGeom><a:noFill/><a:ln></a:ln></p:spPr><p:txBody><a:bodyPr wrap="square" rtlCol="0" anchor="ctr"></a:bodyPr><a:lstStyle/><a:p><a:pPr indent="0" marL="0"><a:lnSpc><a:spcPts val="1100"/></a:lnSpc><a:buNone/></a:pPr><a:r><a:rPr lang="en-US" sz="1100" dirty="0"><a:solidFill><a:srgbClr val="374151"/></a:solidFill><a:latin typeface="Inter, "Segoe UI", sans-serif" pitchFamily="34" charset="0"/><a:ea typeface="Inter, "Segoe UI", sans-serif" pitchFamily="34" charset="-122"/><a:cs typeface="Inter, "Segoe UI", sans-serif" pitchFamily="34" charset="-120"/></a:rPr><a:t>Lock-free ring buffer (k=8). Thief peeks top tasks — steals matching local RAM instead of blind tail-pop.</a:t></a:r><a:endParaRPr lang="en-US" sz="1100" dirty="0"/></a:p></p:txBody></p:sp><p:sp><p:nvSpPr><p:cNvPr id="42" name="Shape 40"></p:cNvPr><p:cNvSpPr/><p:nvPr></p:nvPr></p:nvSpPr><p:spPr><a:xfrm><a:off x="6355080" y="3611880"/><a:ext cx="5120640" cy="320040"/></a:xfrm><a:prstGeom prst="roundRect"><a:avLst><a:gd name="adj" fmla="val 17143"/></a:avLst></a:prstGeom><a:solidFill><a:srgbClr val="111827"/></a:solidFill><a:ln w="12700"><a:solidFill><a:srgbClr val="111827"/></a:solidFill><a:prstDash val="solid"/></a:ln></p:spPr></p:sp><p:sp><p:nvSpPr><p:cNvPr id="43" name="Text 41"></p:cNvPr><p:cNvSpPr/><p:nvPr></p:nvPr></p:nvSpPr><p:spPr><a:xfrm><a:off x="6492240" y="3611880"/><a:ext cx="4846320" cy="320040"/></a:xfrm><a:prstGeom prst="rect"><a:avLst></a:avLst></a:prstGeom><a:noFill/><a:ln></a:ln></p:spPr><p:txBody><a:bodyPr wrap="square" rtlCol="0" anchor="ctr"></a:bodyPr><a:lstStyle/><a:p><a:pPr indent="0" marL="0"><a:buNone/></a:pPr><a:r><a:rPr lang="en-US" sz="1000" dirty="0"><a:solidFill><a:srgbClr val="FFD147"/></a:solidFill><a:latin typeface=""JetBrains Mono", "Courier New", monospace" pitchFamily="34" charset="0"/><a:ea typeface=""JetBrains Mono", "Courier New", monospace" pitchFamily="34" charset="-122"/><a:cs typeface=""JetBrains Mono", "Courier New", monospace" pitchFamily="34" charset="-120"/></a:rPr><a:t>argmax_{t∈Top-K} Affinity(thief, Footprint(t))</a:t></a:r><a:endParaRPr lang="en-US" sz="1000" dirty="0"/></a:p></p:txBody></p:sp><p:sp><p:nvSpPr><p:cNvPr id="44" name="Shape 42"></p:cNvPr><p:cNvSpPr/><p:nvPr></p:nvPr></p:nvSpPr><p:spPr><a:xfrm><a:off x="411480" y="4160520"/><a:ext cx="5486400" cy="1508760"/></a:xfrm><a:prstGeom prst="roundRect"><a:avLst><a:gd name="adj" fmla="val 4848"/></a:avLst></a:prstGeom><a:solidFill><a:srgbClr val="F4F0EA"/></a:solidFill><a:ln w="25400"><a:solidFill><a:srgbClr val="111827"/></a:solidFill><a:prstDash val="solid"/></a:ln><a:effectLst> <a:outerShdw sx="100000" sy="100000" kx="0" ky="0" algn="bl" rotWithShape="0" blurRad="38100" dist="50800" dir="16200000"> <a:srgbClr val="C8C6BF"> <a:alpha val="75000"/></a:srgbClr> </a:outerShdw></a:effectLst></p:spPr></p:sp><p:sp><p:nvSpPr><p:cNvPr id="45" name="Shape 43"></p:cNvPr><p:cNvSpPr/><p:nvPr></p:nvPr></p:nvSpPr><p:spPr><a:xfrm><a:off x="594360" y="4389120"/><a:ext cx="822960" cy="502920"/></a:xfrm><a:prstGeom prst="ellipse"><a:avLst></a:avLst></a:prstGeom><a:solidFill><a:srgbClr val="FFD147"/></a:solidFill><a:ln w="19050"><a:solidFill><a:srgbClr val="111827"/></a:solidFill><a:prstDash val="solid"/></a:ln></p:spPr></p:sp><p:sp><p:nvSpPr><p:cNvPr id="46" name="Text 44"></p:cNvPr><p:cNvSpPr/><p:nvPr></p:nvPr></p:nvSpPr><p:spPr><a:xfrm><a:off x="594360" y="4389120"/><a:ext cx="822960" cy="502920"/></a:xfrm><a:prstGeom prst="rect"><a:avLst></a:avLst></a:prstGeom><a:noFill/><a:ln></a:ln></p:spPr><p:txBody><a:bodyPr wrap="square" rtlCol="0" anchor="ctr"></a:bodyPr><a:lstStyle/><a:p><a:pPr algn="ctr" indent="0" marL="0"><a:buNone/></a:pPr><a:r><a:rPr lang="en-US" sz="1600" b="1" dirty="0"><a:solidFill><a:srgbClr val="111827"/></a:solidFill><a:latin typeface="Arial Black, "Trebuchet MS", "Helvetica Neue", sans-serif" pitchFamily="34" charset="0"/><a:ea typeface="Arial Black, "Trebuchet MS", "Helvetica Neue", sans-serif" pitchFamily="34" charset="-122"/><a:cs typeface="Arial Black, "Trebuchet MS", "Helvetica Neue", sans-serif" pitchFamily="34" charset="-120"/></a:rPr><a:t>N-C</a:t></a:r><a:endParaRPr lang="en-US" sz="1600" dirty="0"/></a:p></p:txBody></p:sp><p:sp><p:nvSpPr><p:cNvPr id="47" name="Text 45"></p:cNvPr><p:cNvSpPr/><p:nvPr></p:nvPr></p:nvSpPr><p:spPr><a:xfrm><a:off x="1508760" y="4389120"/><a:ext cx="4206240" cy="320040"/></a:xfrm><a:prstGeom prst="rect"><a:avLst></a:avLst></a:prstGeom><a:noFill/><a:ln></a:ln></p:spPr><p:txBody><a:bodyPr wrap="square" rtlCol="0" anchor="ctr"></a:bodyPr><a:lstStyle/><a:p><a:pPr indent="0" marL="0"><a:buNone/></a:pPr><a:r><a:rPr lang="en-US" sz="1600" b="1" dirty="0"><a:solidFill><a:srgbClr val="111827"/></a:solidFill><a:latin typeface="Arial Black, "Trebuchet MS", "Helvetica Neue", sans-serif" pitchFamily="34" charset="0"/><a:ea typeface="Arial Black, "Trebuchet MS", "Helvetica Neue", sans-serif" pitchFamily="34" charset="-122"/><a:cs typeface="Arial Black, "Trebuchet MS", "Helvetica Neue", sans-serif" pitchFamily="34" charset="-120"/></a:rPr><a:t>Adaptive Vicinity Radius</a:t></a:r><a:endParaRPr lang="en-US" sz="1600" dirty="0"/></a:p></p:txBody></p:sp><p:sp><p:nvSpPr><p:cNvPr id="48" name="Shape 46"></p:cNvPr><p:cNvSpPr/><p:nvPr></p:nvPr></p:nvSpPr><p:spPr><a:xfrm><a:off x="1508760" y="4754880"/><a:ext cx="914400" cy="228600"/></a:xfrm><a:prstGeom prst="roundRect"><a:avLst><a:gd name="adj" fmla="val 48000"/></a:avLst></a:prstGeom><a:solidFill><a:srgbClr val="DCE4FF"/></a:solidFill><a:ln w="12700"><a:solidFill><a:srgbClr val="DCE4FF"/></a:solidFill><a:prstDash val="solid"/></a:ln></p:spPr></p:sp><p:sp><p:nvSpPr><p:cNvPr id="49" name="Text 47"></p:cNvPr><p:cNvSpPr/><p:nvPr></p:nvPr></p:nvSpPr><p:spPr><a:xfrm><a:off x="1508760" y="4754880"/><a:ext cx="914400" cy="228600"/></a:xfrm><a:prstGeom prst="rect"><a:avLst></a:avLst></a:prstGeom><a:noFill/><a:ln></a:ln></p:spPr><p:txBody><a:bodyPr wrap="square" rtlCol="0" anchor="ctr"></a:bodyPr><a:lstStyle/><a:p><a:pPr algn="ctr" indent="0" marL="0"><a:buNone/></a:pPr><a:r><a:rPr lang="en-US" sz="900" b="1" dirty="0"><a:solidFill><a:srgbClr val="111827"/></a:solidFill><a:latin typeface=""JetBrains Mono", "Courier New", monospace" pitchFamily="34" charset="0"/><a:ea typeface=""JetBrains Mono", "Courier New", monospace" pitchFamily="34" charset="-122"/><a:cs typeface=""JetBrains Mono", "Courier New", monospace" pitchFamily="34" charset="-120"/></a:rPr><a:t>Fixes H1</a:t></a:r><a:endParaRPr lang="en-US" sz="900" dirty="0"/></a:p></p:txBody></p:sp><p:sp><p:nvSpPr><p:cNvPr id="50" name="Text 48"></p:cNvPr><p:cNvSpPr/><p:nvPr></p:nvPr></p:nvSpPr><p:spPr><a:xfrm><a:off x="1508760" y="5029200"/><a:ext cx="4206240" cy="320040"/></a:xfrm><a:prstGeom prst="rect"><a:avLst></a:avLst></a:prstGeom><a:noFill/><a:ln></a:ln></p:spPr><p:txBody><a:bodyPr wrap="square" rtlCol="0" anchor="ctr"></a:bodyPr><a:lstStyle/><a:p><a:pPr indent="0" marL="0"><a:lnSpc><a:spcPts val="1100"/></a:lnSpc><a:buNone/></a:pPr><a:r><a:rPr lang="en-US" sz="1100" dirty="0"><a:solidFill><a:srgbClr val="374151"/></a:solidFill><a:latin typeface="Inter, "Segoe UI", sans-serif" pitchFamily="34" charset="0"/><a:ea typeface="Inter, "Segoe UI", sans-serif" pitchFamily="34" charset="-122"/><a:cs typeface="Inter, "Segoe UI", sans-serif" pitchFamily="34" charset="-120"/></a:rPr><a:t>Per-worker EWMA adjusts reach: expands during starvation, contracts when balanced.</a:t></a:r><a:endParaRPr lang="en-US" sz="1100" dirty="0"/></a:p></p:txBody></p:sp><p:sp><p:nvSpPr><p:cNvPr id="51" name="Shape 49"></p:cNvPr><p:cNvSpPr/><p:nvPr></p:nvPr></p:nvSpPr><p:spPr><a:xfrm><a:off x="594360" y="5303520"/><a:ext cx="5120640" cy="320040"/></a:xfrm><a:prstGeom prst="roundRect"><a:avLst><a:gd name="adj" fmla="val 17143"/></a:avLst></a:prstGeom><a:solidFill><a:srgbClr val="111827"/></a:solidFill><a:ln w="12700"><a:solidFill><a:srgbClr val="111827"/></a:solidFill><a:prstDash val="solid"/></a:ln></p:spPr></p:sp><p:sp><p:nvSpPr><p:cNvPr id="52" name="Text 50"></p:cNvPr><p:cNvSpPr/><p:nvPr></p:nvPr></p:nvSpPr><p:spPr><a:xfrm><a:off x="731520" y="5303520"/><a:ext cx="4846320" cy="320040"/></a:xfrm><a:prstGeom prst="rect"><a:avLst></a:avLst></a:prstGeom><a:noFill/><a:ln></a:ln></p:spPr><p:txBody><a:bodyPr wrap="square" rtlCol="0" anchor="ctr"></a:bodyPr><a:lstStyle/><a:p><a:pPr indent="0" marL="0"><a:buNone/></a:pPr><a:r><a:rPr lang="en-US" sz="1000" dirty="0"><a:solidFill><a:srgbClr val="FFD147"/></a:solidFill><a:latin typeface=""JetBrains Mono", "Courier New", monospace" pitchFamily="34" charset="0"/><a:ea typeface=""JetBrains Mono", "Courier New", monospace" pitchFamily="34" charset="-122"/><a:cs typeface=""JetBrains Mono", "Courier New", monospace" pitchFamily="34" charset="-120"/></a:rPr><a:t>radius_{t+1} = clamp(radius_t + sign(rate_EWMA−target), 1, D_max)</a:t></a:r><a:endParaRPr lang="en-US" sz="1000" dirty="0"/></a:p></p:txBody></p:sp><p:sp><p:nvSpPr><p:cNvPr id="53" name="Shape 51"></p:cNvPr><p:cNvSpPr/><p:nvPr></p:nvPr></p:nvSpPr><p:spPr><a:xfrm><a:off x="6172200" y="4160520"/><a:ext cx="5486400" cy="1508760"/></a:xfrm><a:prstGeom prst="roundRect"><a:avLst><a:gd name="adj" fmla="val 4848"/></a:avLst></a:prstGeom><a:solidFill><a:srgbClr val="EFEAE3"/></a:solidFill><a:ln w="25400"><a:solidFill><a:srgbClr val="111827"/></a:solidFill><a:prstDash val="solid"/></a:ln><a:effectLst> <a:outerShdw sx="100000" sy="100000" kx="0" ky="0" algn="bl" rotWithShape="0" blurRad="38100" dist="50800" dir="16200000"> <a:srgbClr val="C8C6BF"> <a:alpha val="75000"/></a:srgbClr> </a:outerShdw></a:effectLst></p:spPr></p:sp><p:sp><p:nvSpPr><p:cNvPr id="54" name="Shape 52"></p:cNvPr><p:cNvSpPr/><p:nvPr></p:nvPr></p:nvSpPr><p:spPr><a:xfrm><a:off x="6355080" y="4389120"/><a:ext cx="822960" cy="502920"/></a:xfrm><a:prstGeom prst="ellipse"><a:avLst></a:avLst></a:prstGeom><a:solidFill><a:srgbClr val="FFD147"/></a:solidFill><a:ln w="19050"><a:solidFill><a:srgbClr val="111827"/></a:solidFill><a:prstDash val="solid"/></a:ln></p:spPr></p:sp><p:sp><p:nvSpPr><p:cNvPr id="55" name="Text 53"></p:cNvPr><p:cNvSpPr/><p:nvPr></p:nvPr></p:nvSpPr><p:spPr><a:xfrm><a:off x="6355080" y="4389120"/><a:ext cx="822960" cy="502920"/></a:xfrm><a:prstGeom prst="rect"><a:avLst></a:avLst></a:prstGeom><a:noFill/><a:ln></a:ln></p:spPr><p:txBody><a:bodyPr wrap="square" rtlCol="0" anchor="ctr"></a:bodyPr><a:lstStyle/><a:p><a:pPr algn="ctr" indent="0" marL="0"><a:buNone/></a:pPr><a:r><a:rPr lang="en-US" sz="1600" b="1" dirty="0"><a:solidFill><a:srgbClr val="111827"/></a:solidFill><a:latin typeface="Arial Black, "Trebuchet MS", "Helvetica Neue", sans-serif" pitchFamily="34" charset="0"/><a:ea typeface="Arial Black, "Trebuchet MS", "Helvetica Neue", sans-serif" pitchFamily="34" charset="-122"/><a:cs typeface="Arial Black, "Trebuchet MS", "Helvetica Neue", sans-serif" pitchFamily="34" charset="-120"/></a:rPr><a:t>N-D</a:t></a:r><a:endParaRPr lang="en-US" sz="1600" dirty="0"/></a:p></p:txBody></p:sp><p:sp><p:nvSpPr><p:cNvPr id="56" name="Text 54"></p:cNvPr><p:cNvSpPr/><p:nvPr></p:nvPr></p:nvSpPr><p:spPr><a:xfrm><a:off x="7269480" y="4389120"/><a:ext cx="4206240" cy="320040"/></a:xfrm><a:prstGeom prst="rect"><a:avLst></a:avLst></a:prstGeom><a:noFill/><a:ln></a:ln></p:spPr><p:txBody><a:bodyPr wrap="square" rtlCol="0" anchor="ctr"></a:bodyPr><a:lstStyle/><a:p><a:pPr indent="0" marL="0"><a:buNone/></a:pPr><a:r><a:rPr lang="en-US" sz="1600" b="1" dirty="0"><a:solidFill><a:srgbClr val="111827"/></a:solidFill><a:latin typeface="Arial Black, "Trebuchet MS", "Helvetica Neue", sans-serif" pitchFamily="34" charset="0"/><a:ea typeface="Arial Black, "Trebuchet MS", "Helvetica Neue", sans-serif" pitchFamily="34" charset="-122"/><a:cs typeface="Arial Black, "Trebuchet MS", "Helvetica Neue", sans-serif" pitchFamily="34" charset="-120"/></a:rPr><a:t>Dynamic Migration &amp; Zero Locks</a:t></a:r><a:endParaRPr lang="en-US" sz="1600" dirty="0"/></a:p></p:txBody></p:sp><p:sp><p:nvSpPr><p:cNvPr id="57" name="Shape 55"></p:cNvPr><p:cNvSpPr/><p:nvPr></p:nvPr></p:nvSpPr><p:spPr><a:xfrm><a:off x="7269480" y="4754880"/><a:ext cx="914400" cy="228600"/></a:xfrm><a:prstGeom prst="roundRect"><a:avLst><a:gd name="adj" fmla="val 48000"/></a:avLst></a:prstGeom><a:solidFill><a:srgbClr val="DCE4FF"/></a:solidFill><a:ln w="12700"><a:solidFill><a:srgbClr val="DCE4FF"/></a:solidFill><a:prstDash val="solid"/></a:ln></p:spPr></p:sp><p:sp><p:nvSpPr><p:cNvPr id="58" name="Text 56"></p:cNvPr><p:cNvSpPr/><p:nvPr></p:nvPr></p:nvSpPr><p:spPr><a:xfrm><a:off x="7269480" y="4754880"/><a:ext cx="914400" cy="228600"/></a:xfrm><a:prstGeom prst="rect"><a:avLst></a:avLst></a:prstGeom><a:noFill/><a:ln></a:ln></p:spPr><p:txBody><a:bodyPr wrap="square" rtlCol="0" anchor="ctr"></a:bodyPr><a:lstStyle/><a:p><a:pPr algn="ctr" indent="0" marL="0"><a:buNone/></a:pPr><a:r><a:rPr lang="en-US" sz="900" b="1" dirty="0"><a:solidFill><a:srgbClr val="111827"/></a:solidFill><a:latin typeface=""JetBrains Mono", "Courier New", monospace" pitchFamily="34" charset="0"/><a:ea typeface=""JetBrains Mono", "Courier New", monospace" pitchFamily="34" charset="-122"/><a:cs typeface=""JetBrains Mono", "Courier New", monospace" pitchFamily="34" charset="-120"/></a:rPr><a:t>Fixes H6, H8</a:t></a:r><a:endParaRPr lang="en-US" sz="900" dirty="0"/></a:p></p:txBody></p:sp><p:sp><p:nvSpPr><p:cNvPr id="59" name="Text 57"></p:cNvPr><p:cNvSpPr/><p:nvPr></p:nvPr></p:nvSpPr><p:spPr><a:xfrm><a:off x="7269480" y="5029200"/><a:ext cx="4206240" cy="320040"/></a:xfrm><a:prstGeom prst="rect"><a:avLst></a:avLst></a:prstGeom><a:noFill/><a:ln></a:ln></p:spPr><p:txBody><a:bodyPr wrap="square" rtlCol="0" anchor="ctr"></a:bodyPr><a:lstStyle/><a:p><a:pPr indent="0" marL="0"><a:lnSpc><a:spcPts val="1100"/></a:lnSpc><a:buNone/></a:pPr><a:r><a:rPr lang="en-US" sz="1100" dirty="0"><a:solidFill><a:srgbClr val="374151"/></a:solidFill><a:latin typeface="Inter, "Segoe UI", sans-serif" pitchFamily="34" charset="0"/><a:ea typeface="Inter, "Segoe UI", sans-serif" pitchFamily="34" charset="-122"/><a:cs typeface="Inter, "Segoe UI", sans-serif" pitchFamily="34" charset="-120"/></a:rPr><a:t>Re-home lines when Acc_Benefit &gt; C_mig (~120 cyc). Double-buffered CAS swap every 64 ops.</a:t></a:r><a:endParaRPr lang="en-US" sz="1100" dirty="0"/></a:p></p:txBody></p:sp><p:sp><p:nvSpPr><p:cNvPr id="60" name="Shape 58"></p:cNvPr><p:cNvSpPr/><p:nvPr></p:nvPr></p:nvSpPr><p:spPr><a:xfrm><a:off x="6355080" y="5303520"/><a:ext cx="5120640" cy="320040"/></a:xfrm><a:prstGeom prst="roundRect"><a:avLst><a:gd name="adj" fmla="val 17143"/></a:avLst></a:prstGeom><a:solidFill><a:srgbClr val="111827"/></a:solidFill><a:ln w="12700"><a:solidFill><a:srgbClr val="111827"/></a:solidFill><a:prstDash val="solid"/></a:ln></p:spPr></p:sp><p:sp><p:nvSpPr><p:cNvPr id="61" name="Text 59"></p:cNvPr><p:cNvSpPr/><p:nvPr></p:nvPr></p:nvSpPr><p:spPr><a:xfrm><a:off x="6492240" y="5303520"/><a:ext cx="4846320" cy="320040"/></a:xfrm><a:prstGeom prst="rect"><a:avLst></a:avLst></a:prstGeom><a:noFill/><a:ln></a:ln></p:spPr><p:txBody><a:bodyPr wrap="square" rtlCol="0" anchor="ctr"></a:bodyPr><a:lstStyle/><a:p><a:pPr indent="0" marL="0"><a:buNone/></a:pPr><a:r><a:rPr lang="en-US" sz="1000" dirty="0"><a:solidFill><a:srgbClr val="FFD147"/></a:solidFill><a:latin typeface=""JetBrains Mono", "Courier New", monospace" pitchFamily="34" charset="0"/><a:ea typeface=""JetBrains Mono", "Courier New", monospace" pitchFamily="34" charset="-122"/><a:cs typeface=""JetBrains Mono", "Courier New", monospace" pitchFamily="34" charset="-120"/></a:rPr><a:t>Trigger IF (Acc_Benefit &gt; 120 cycles)</a:t></a:r><a:endParaRPr lang="en-US" sz="1000" dirty="0"/></a:p></p:txBody></p:sp><p:sp><p:nvSpPr><p:cNvPr id="62" name="Shape 60"></p:cNvPr><p:cNvSpPr/><p:nvPr></p:nvPr></p:nvSpPr><p:spPr><a:xfrm><a:off x="411480" y="5943600"/><a:ext cx="11338560" cy="502920"/></a:xfrm><a:prstGeom prst="roundRect"><a:avLst><a:gd name="adj" fmla="val 10909"/></a:avLst></a:prstGeom><a:solidFill><a:srgbClr val="FFD147"/></a:solidFill><a:ln w="31750"><a:solidFill><a:srgbClr val="111827"/></a:solidFill><a:prstDash val="solid"/></a:ln></p:spPr></p:sp><p:sp><p:nvSpPr><p:cNvPr id="63" name="Text 61"></p:cNvPr><p:cNvSpPr/><p:nvPr></p:nvPr></p:nvSpPr><p:spPr><a:xfrm><a:off x="640080" y="5989320"/><a:ext cx="10881360" cy="411480"/></a:xfrm><a:prstGeom prst="rect"><a:avLst></a:avLst></a:prstGeom><a:noFill/><a:ln></a:ln></p:spPr><p:txBody><a:bodyPr wrap="square" rtlCol="0" anchor="ctr"></a:bodyPr><a:lstStyle/><a:p><a:pPr algn="ctr" indent="0" marL="0"><a:buNone/></a:pPr><a:r><a:rPr lang="en-US" sz="1300" b="1" dirty="0"><a:solidFill><a:srgbClr val="111827"/></a:solidFill><a:latin typeface="Inter, "Segoe UI", sans-serif" pitchFamily="34" charset="0"/><a:ea typeface="Inter, "Segoe UI", sans-serif" pitchFamily="34" charset="-122"/><a:cs typeface="Inter, "Segoe UI", sans-serif" pitchFamily="34" charset="-120"/></a:rPr><a:t>NOVA PRINCIPLE  ·  Maximize memory locality when queues are balanced; dynamically transition to load-balancing when backlog threatens idle stalls.</a:t></a:r><a:endParaRPr lang="en-US" sz="1300" dirty="0"/></a:p></p:txBody></p:sp><p:sp><p:nvSpPr><p:cNvPr id="64" name="Text 62"></p:cNvPr><p:cNvSpPr/><p:nvPr></p:nvPr></p:nvSpPr><p:spPr><a:xfrm><a:off x="411480" y="6537960"/><a:ext cx="11338560" cy="182880"/></a:xfrm><a:prstGeom prst="rect"><a:avLst></a:avLst></a:prstGeom><a:noFill/><a:ln></a:ln></p:spPr><p:txBody><a:bodyPr wrap="square" rtlCol="0" anchor="ctr"></a:bodyPr><a:lstStyle/><a:p><a:pPr indent="0" marL="0"><a:buNone/></a:pPr><a:r><a:rPr lang="en-US" sz="900" dirty="0"><a:solidFill><a:srgbClr val="6B6B6B"/></a:solidFill><a:latin typeface=""JetBrains Mono", "Courier New", monospace" pitchFamily="34" charset="0"/><a:ea typeface=""JetBrains Mono", "Courier New", monospace" pitchFamily="34" charset="-122"/><a:cs typeface=""JetBrains Mono", "Courier New", monospace" pitchFamily="34" charset="-120"/></a:rPr><a:t>NOVA / ALLoC Scheduler Architecture · High-Performance Computing  ·  05 / 05</a:t></a:r><a:endParaRPr lang="en-US" sz="900" dirty="0"/></a:p></p:txBody></p:sp></p:spTree></p:cSld><p:clrMapOvr><a:masterClrMapping/></p:clrMapOvr></p:sld>
+<file path=ppt/slides/slide5.xml><?xml version="1.0" encoding="utf-8"?>
+<p:sld xmlns:a="http://schemas.openxmlformats.org/drawingml/2006/main" xmlns:r="http://schemas.openxmlformats.org/officeDocument/2006/relationships" xmlns:p="http://schemas.openxmlformats.org/presentationml/2006/main">
+  <p:cSld name="Slide 5">
+    <p:bg>
+      <p:bgPr>
+        <a:blipFill dpi="0" rotWithShape="1">
+          <a:blip r:embed="rId1">
+            <a:lum/>
+          </a:blip>
+          <a:srcRect/>
+          <a:stretch>
+            <a:fillRect/>
+          </a:stretch>
+        </a:blipFill>
+        <a:effectLst/>
+      </p:bgPr>
+    </p:bg>
+    <p:spTree>
+      <p:nvGrpSpPr>
+        <p:cNvPr id="1" name=""/>
+        <p:cNvGrpSpPr/>
+        <p:nvPr/>
+      </p:nvGrpSpPr>
+      <p:grpSpPr>
+        <a:xfrm>
+          <a:off x="0" y="0"/>
+          <a:ext cx="0" cy="0"/>
+          <a:chOff x="0" y="0"/>
+          <a:chExt cx="0" cy="0"/>
+        </a:xfrm>
+      </p:grpSpPr>
+      <p:sp>
+        <p:nvSpPr>
+          <p:cNvPr id="2" name="Shape 0"/>
+          <p:cNvSpPr/>
+          <p:nvPr/>
+        </p:nvSpPr>
+        <p:spPr>
+          <a:xfrm>
+            <a:off x="731520" y="411480"/>
+            <a:ext cx="1115568" cy="292608"/>
+          </a:xfrm>
+          <a:prstGeom prst="roundRect">
+            <a:avLst>
+              <a:gd name="adj" fmla="val 50000"/>
+            </a:avLst>
+          </a:prstGeom>
+          <a:solidFill>
+            <a:srgbClr val="111827"/>
+          </a:solidFill>
+          <a:ln w="12700">
+            <a:solidFill>
+              <a:srgbClr val="111827"/>
+            </a:solidFill>
+            <a:prstDash val="solid"/>
+          </a:ln>
+        </p:spPr>
+      </p:sp>
+      <p:sp>
+        <p:nvSpPr>
+          <p:cNvPr id="3" name="Text 1"/>
+          <p:cNvSpPr/>
+          <p:nvPr/>
+        </p:nvSpPr>
+        <p:spPr>
+          <a:xfrm>
+            <a:off x="731520" y="411480"/>
+            <a:ext cx="1115568" cy="292608"/>
+          </a:xfrm>
+          <a:prstGeom prst="rect">
+            <a:avLst/>
+          </a:prstGeom>
+          <a:noFill/>
+          <a:ln/>
+        </p:spPr>
+        <p:txBody>
+          <a:bodyPr wrap="square" rtlCol="0" anchor="ctr"/>
+          <a:lstStyle/>
+          <a:p>
+            <a:pPr algn="ctr" indent="0" marL="0">
+              <a:buNone/>
+            </a:pPr>
+            <a:r>
+              <a:rPr lang="en-US" sz="900" b="1" dirty="0">
+                <a:solidFill>
+                  <a:srgbClr val="FFFFFF"/>
+                </a:solidFill>
+                <a:latin typeface="Courier New" pitchFamily="34" charset="0"/>
+                <a:ea typeface="Courier New" pitchFamily="34" charset="-122"/>
+                <a:cs typeface="Courier New" pitchFamily="34" charset="-120"/>
+              </a:rPr>
+              <a:t>PART 4</a:t>
+            </a:r>
+            <a:endParaRPr lang="en-US" sz="900" dirty="0"/>
+          </a:p>
+        </p:txBody>
+      </p:sp>
+      <p:sp>
+        <p:nvSpPr>
+          <p:cNvPr id="4" name="Shape 2"/>
+          <p:cNvSpPr/>
+          <p:nvPr/>
+        </p:nvSpPr>
+        <p:spPr>
+          <a:xfrm>
+            <a:off x="1984248" y="411480"/>
+            <a:ext cx="3236976" cy="292608"/>
+          </a:xfrm>
+          <a:prstGeom prst="roundRect">
+            <a:avLst>
+              <a:gd name="adj" fmla="val 50000"/>
+            </a:avLst>
+          </a:prstGeom>
+          <a:solidFill>
+            <a:srgbClr val="FFFFFF"/>
+          </a:solidFill>
+          <a:ln w="19050">
+            <a:solidFill>
+              <a:srgbClr val="111827"/>
+            </a:solidFill>
+            <a:prstDash val="solid"/>
+          </a:ln>
+        </p:spPr>
+      </p:sp>
+      <p:sp>
+        <p:nvSpPr>
+          <p:cNvPr id="5" name="Text 3"/>
+          <p:cNvSpPr/>
+          <p:nvPr/>
+        </p:nvSpPr>
+        <p:spPr>
+          <a:xfrm>
+            <a:off x="1984248" y="411480"/>
+            <a:ext cx="3236976" cy="292608"/>
+          </a:xfrm>
+          <a:prstGeom prst="rect">
+            <a:avLst/>
+          </a:prstGeom>
+          <a:noFill/>
+          <a:ln/>
+        </p:spPr>
+        <p:txBody>
+          <a:bodyPr wrap="square" rtlCol="0" anchor="ctr"/>
+          <a:lstStyle/>
+          <a:p>
+            <a:pPr algn="ctr" indent="0" marL="0">
+              <a:buNone/>
+            </a:pPr>
+            <a:r>
+              <a:rPr lang="en-US" sz="900" b="1" dirty="0">
+                <a:solidFill>
+                  <a:srgbClr val="111827"/>
+                </a:solidFill>
+                <a:latin typeface="Courier New" pitchFamily="34" charset="0"/>
+                <a:ea typeface="Courier New" pitchFamily="34" charset="-122"/>
+                <a:cs typeface="Courier New" pitchFamily="34" charset="-120"/>
+              </a:rPr>
+              <a:t>MANYCORE SIMULATION: 8×8 2D MESH</a:t>
+            </a:r>
+            <a:endParaRPr lang="en-US" sz="900" dirty="0"/>
+          </a:p>
+        </p:txBody>
+      </p:sp>
+      <p:sp>
+        <p:nvSpPr>
+          <p:cNvPr id="6" name="Text 4"/>
+          <p:cNvSpPr/>
+          <p:nvPr/>
+        </p:nvSpPr>
+        <p:spPr>
+          <a:xfrm>
+            <a:off x="731520" y="868680"/>
+            <a:ext cx="5303520" cy="502920"/>
+          </a:xfrm>
+          <a:prstGeom prst="rect">
+            <a:avLst/>
+          </a:prstGeom>
+          <a:noFill/>
+          <a:ln/>
+        </p:spPr>
+        <p:txBody>
+          <a:bodyPr wrap="square" rtlCol="0" anchor="ctr"/>
+          <a:lstStyle/>
+          <a:p>
+            <a:pPr indent="0" marL="0">
+              <a:buNone/>
+            </a:pPr>
+            <a:r>
+              <a:rPr lang="en-US" sz="3000" b="1" dirty="0">
+                <a:solidFill>
+                  <a:srgbClr val="111827"/>
+                </a:solidFill>
+                <a:latin typeface="Arial Black" pitchFamily="34" charset="0"/>
+                <a:ea typeface="Arial Black" pitchFamily="34" charset="-122"/>
+                <a:cs typeface="Arial Black" pitchFamily="34" charset="-120"/>
+              </a:rPr>
+              <a:t>TILEPro64 8×8 Mesh: </a:t>
+            </a:r>
+            <a:endParaRPr lang="en-US" sz="3000" dirty="0"/>
+          </a:p>
+        </p:txBody>
+      </p:sp>
+      <p:sp>
+        <p:nvSpPr>
+          <p:cNvPr id="7" name="Shape 5"/>
+          <p:cNvSpPr/>
+          <p:nvPr/>
+        </p:nvSpPr>
+        <p:spPr>
+          <a:xfrm>
+            <a:off x="6035040" y="822960"/>
+            <a:ext cx="4572000" cy="594360"/>
+          </a:xfrm>
+          <a:prstGeom prst="roundRect">
+            <a:avLst>
+              <a:gd name="adj" fmla="val 15385"/>
+            </a:avLst>
+          </a:prstGeom>
+          <a:solidFill>
+            <a:srgbClr val="FFD147"/>
+          </a:solidFill>
+          <a:ln w="19050">
+            <a:solidFill>
+              <a:srgbClr val="111827"/>
+            </a:solidFill>
+            <a:prstDash val="solid"/>
+          </a:ln>
+        </p:spPr>
+      </p:sp>
+      <p:sp>
+        <p:nvSpPr>
+          <p:cNvPr id="8" name="Text 6"/>
+          <p:cNvSpPr/>
+          <p:nvPr/>
+        </p:nvSpPr>
+        <p:spPr>
+          <a:xfrm>
+            <a:off x="6126480" y="822960"/>
+            <a:ext cx="4389120" cy="594360"/>
+          </a:xfrm>
+          <a:prstGeom prst="rect">
+            <a:avLst/>
+          </a:prstGeom>
+          <a:noFill/>
+          <a:ln/>
+        </p:spPr>
+        <p:txBody>
+          <a:bodyPr wrap="square" rtlCol="0" anchor="ctr"/>
+          <a:lstStyle/>
+          <a:p>
+            <a:pPr algn="ctr" indent="0" marL="0">
+              <a:buNone/>
+            </a:pPr>
+            <a:r>
+              <a:rPr lang="en-US" sz="2600" b="1" dirty="0">
+                <a:solidFill>
+                  <a:srgbClr val="111827"/>
+                </a:solidFill>
+                <a:latin typeface="Arial Black" pitchFamily="34" charset="0"/>
+                <a:ea typeface="Arial Black" pitchFamily="34" charset="-122"/>
+                <a:cs typeface="Arial Black" pitchFamily="34" charset="-120"/>
+              </a:rPr>
+              <a:t>Locality Across 64 Tiles</a:t>
+            </a:r>
+            <a:endParaRPr lang="en-US" sz="2600" dirty="0"/>
+          </a:p>
+        </p:txBody>
+      </p:sp>
+      <p:sp>
+        <p:nvSpPr>
+          <p:cNvPr id="9" name="Text 7"/>
+          <p:cNvSpPr/>
+          <p:nvPr/>
+        </p:nvSpPr>
+        <p:spPr>
+          <a:xfrm>
+            <a:off x="731520" y="1463040"/>
+            <a:ext cx="9144000" cy="228600"/>
+          </a:xfrm>
+          <a:prstGeom prst="rect">
+            <a:avLst/>
+          </a:prstGeom>
+          <a:noFill/>
+          <a:ln/>
+        </p:spPr>
+        <p:txBody>
+          <a:bodyPr wrap="square" rtlCol="0" anchor="ctr"/>
+          <a:lstStyle/>
+          <a:p>
+            <a:pPr indent="0" marL="0">
+              <a:buNone/>
+            </a:pPr>
+            <a:r>
+              <a:rPr lang="en-US" sz="1000" dirty="0">
+                <a:solidFill>
+                  <a:srgbClr val="4B5563"/>
+                </a:solidFill>
+                <a:latin typeface="Courier New" pitchFamily="34" charset="0"/>
+                <a:ea typeface="Courier New" pitchFamily="34" charset="-122"/>
+                <a:cs typeface="Courier New" pitchFamily="34" charset="-120"/>
+              </a:rPr>
+              <a:t>56 simulation configurations across 64 cores · 10 vs 38+2·hop cycle-accurate 2D mesh model</a:t>
+            </a:r>
+            <a:endParaRPr lang="en-US" sz="1000" dirty="0"/>
+          </a:p>
+        </p:txBody>
+      </p:sp>
+      <p:sp>
+        <p:nvSpPr>
+          <p:cNvPr id="10" name="Shape 8"/>
+          <p:cNvSpPr/>
+          <p:nvPr/>
+        </p:nvSpPr>
+        <p:spPr>
+          <a:xfrm>
+            <a:off x="786384" y="1837944"/>
+            <a:ext cx="5257800" cy="3886200"/>
+          </a:xfrm>
+          <a:prstGeom prst="roundRect">
+            <a:avLst>
+              <a:gd name="adj" fmla="val 3294"/>
+            </a:avLst>
+          </a:prstGeom>
+          <a:solidFill>
+            <a:srgbClr val="111827"/>
+          </a:solidFill>
+          <a:ln w="12700">
+            <a:solidFill>
+              <a:srgbClr val="111827"/>
+            </a:solidFill>
+            <a:prstDash val="solid"/>
+          </a:ln>
+        </p:spPr>
+      </p:sp>
+      <p:sp>
+        <p:nvSpPr>
+          <p:cNvPr id="11" name="Shape 9"/>
+          <p:cNvSpPr/>
+          <p:nvPr/>
+        </p:nvSpPr>
+        <p:spPr>
+          <a:xfrm>
+            <a:off x="731520" y="1783080"/>
+            <a:ext cx="5257800" cy="3886200"/>
+          </a:xfrm>
+          <a:prstGeom prst="roundRect">
+            <a:avLst>
+              <a:gd name="adj" fmla="val 3294"/>
+            </a:avLst>
+          </a:prstGeom>
+          <a:solidFill>
+            <a:srgbClr val="FFFFFF"/>
+          </a:solidFill>
+          <a:ln w="19050">
+            <a:solidFill>
+              <a:srgbClr val="111827"/>
+            </a:solidFill>
+            <a:prstDash val="solid"/>
+          </a:ln>
+        </p:spPr>
+      </p:sp>
+      <p:sp>
+        <p:nvSpPr>
+          <p:cNvPr id="12" name="Text 10"/>
+          <p:cNvSpPr/>
+          <p:nvPr/>
+        </p:nvSpPr>
+        <p:spPr>
+          <a:xfrm>
+            <a:off x="914400" y="1901952"/>
+            <a:ext cx="4892040" cy="256032"/>
+          </a:xfrm>
+          <a:prstGeom prst="rect">
+            <a:avLst/>
+          </a:prstGeom>
+          <a:noFill/>
+          <a:ln/>
+        </p:spPr>
+        <p:txBody>
+          <a:bodyPr wrap="square" rtlCol="0" anchor="ctr"/>
+          <a:lstStyle/>
+          <a:p>
+            <a:pPr indent="0" marL="0">
+              <a:buNone/>
+            </a:pPr>
+            <a:r>
+              <a:rPr lang="en-US" sz="1300" dirty="0">
+                <a:solidFill>
+                  <a:srgbClr val="111827"/>
+                </a:solidFill>
+                <a:latin typeface="Arial Black" pitchFamily="34" charset="0"/>
+                <a:ea typeface="Arial Black" pitchFamily="34" charset="-122"/>
+                <a:cs typeface="Arial Black" pitchFamily="34" charset="-120"/>
+              </a:rPr>
+              <a:t>TILEPro64 8×8 Mesh Simulation (64 Cores)</a:t>
+            </a:r>
+            <a:endParaRPr lang="en-US" sz="1300" dirty="0"/>
+          </a:p>
+        </p:txBody>
+      </p:sp>
+      <p:pic>
+        <p:nvPicPr>
+          <p:cNvPr id="13" name="Image 0" descr="/Users/yeschirag/Desktop/college/HPC project/tilepro64/results/tilepro64_results.png">    </p:cNvPr>
+          <p:cNvPicPr>
+            <a:picLocks noChangeAspect="1"/>
+          </p:cNvPicPr>
+          <p:nvPr/>
+        </p:nvPicPr>
+        <p:blipFill>
+          <a:blip r:embed="rId2"/>
+          <a:stretch>
+            <a:fillRect/>
+          </a:stretch>
+        </p:blipFill>
+        <p:spPr>
+          <a:xfrm>
+            <a:off x="914400" y="2194560"/>
+            <a:ext cx="4892040" cy="2103120"/>
+          </a:xfrm>
+          <a:prstGeom prst="rect">
+            <a:avLst/>
+          </a:prstGeom>
+        </p:spPr>
+      </p:pic>
+      <p:sp>
+        <p:nvSpPr>
+          <p:cNvPr id="14" name="Shape 11"/>
+          <p:cNvSpPr/>
+          <p:nvPr/>
+        </p:nvSpPr>
+        <p:spPr>
+          <a:xfrm>
+            <a:off x="914400" y="4334256"/>
+            <a:ext cx="2377440" cy="585216"/>
+          </a:xfrm>
+          <a:prstGeom prst="roundRect">
+            <a:avLst>
+              <a:gd name="adj" fmla="val 12500"/>
+            </a:avLst>
+          </a:prstGeom>
+          <a:solidFill>
+            <a:srgbClr val="DCFCE7"/>
+          </a:solidFill>
+          <a:ln w="15240">
+            <a:solidFill>
+              <a:srgbClr val="111827"/>
+            </a:solidFill>
+            <a:prstDash val="solid"/>
+          </a:ln>
+        </p:spPr>
+      </p:sp>
+      <p:sp>
+        <p:nvSpPr>
+          <p:cNvPr id="15" name="Text 12"/>
+          <p:cNvSpPr/>
+          <p:nvPr/>
+        </p:nvSpPr>
+        <p:spPr>
+          <a:xfrm>
+            <a:off x="987552" y="4334256"/>
+            <a:ext cx="2231136" cy="585216"/>
+          </a:xfrm>
+          <a:prstGeom prst="rect">
+            <a:avLst/>
+          </a:prstGeom>
+          <a:noFill/>
+          <a:ln/>
+        </p:spPr>
+        <p:txBody>
+          <a:bodyPr wrap="square" rtlCol="0" anchor="ctr"/>
+          <a:lstStyle/>
+          <a:p>
+            <a:pPr indent="0" marL="0">
+              <a:buNone/>
+            </a:pPr>
+            <a:r>
+              <a:rPr lang="en-US" sz="880" b="1" dirty="0">
+                <a:solidFill>
+                  <a:srgbClr val="065F46"/>
+                </a:solidFill>
+                <a:latin typeface="Courier New" pitchFamily="34" charset="0"/>
+                <a:ea typeface="Courier New" pitchFamily="34" charset="-122"/>
+                <a:cs typeface="Courier New" pitchFamily="34" charset="-120"/>
+              </a:rPr>
+              <a:t>Map Comm Drop: −80.3% (6.67M → 1.31M cyc)</a:t>
+            </a:r>
+            <a:endParaRPr lang="en-US" sz="880" dirty="0"/>
+          </a:p>
+        </p:txBody>
+      </p:sp>
+      <p:sp>
+        <p:nvSpPr>
+          <p:cNvPr id="16" name="Shape 13"/>
+          <p:cNvSpPr/>
+          <p:nvPr/>
+        </p:nvSpPr>
+        <p:spPr>
+          <a:xfrm>
+            <a:off x="3429000" y="4334256"/>
+            <a:ext cx="2377440" cy="585216"/>
+          </a:xfrm>
+          <a:prstGeom prst="roundRect">
+            <a:avLst>
+              <a:gd name="adj" fmla="val 12500"/>
+            </a:avLst>
+          </a:prstGeom>
+          <a:solidFill>
+            <a:srgbClr val="DCFCE7"/>
+          </a:solidFill>
+          <a:ln w="15240">
+            <a:solidFill>
+              <a:srgbClr val="111827"/>
+            </a:solidFill>
+            <a:prstDash val="solid"/>
+          </a:ln>
+        </p:spPr>
+      </p:sp>
+      <p:sp>
+        <p:nvSpPr>
+          <p:cNvPr id="17" name="Text 14"/>
+          <p:cNvSpPr/>
+          <p:nvPr/>
+        </p:nvSpPr>
+        <p:spPr>
+          <a:xfrm>
+            <a:off x="3502152" y="4334256"/>
+            <a:ext cx="2231136" cy="585216"/>
+          </a:xfrm>
+          <a:prstGeom prst="rect">
+            <a:avLst/>
+          </a:prstGeom>
+          <a:noFill/>
+          <a:ln/>
+        </p:spPr>
+        <p:txBody>
+          <a:bodyPr wrap="square" rtlCol="0" anchor="ctr"/>
+          <a:lstStyle/>
+          <a:p>
+            <a:pPr indent="0" marL="0">
+              <a:buNone/>
+            </a:pPr>
+            <a:r>
+              <a:rPr lang="en-US" sz="880" b="1" dirty="0">
+                <a:solidFill>
+                  <a:srgbClr val="065F46"/>
+                </a:solidFill>
+                <a:latin typeface="Courier New" pitchFamily="34" charset="0"/>
+                <a:ea typeface="Courier New" pitchFamily="34" charset="-122"/>
+                <a:cs typeface="Courier New" pitchFamily="34" charset="-120"/>
+              </a:rPr>
+              <a:t>Map Speedup: 39.3% (281K → 170K cyc)</a:t>
+            </a:r>
+            <a:endParaRPr lang="en-US" sz="880" dirty="0"/>
+          </a:p>
+        </p:txBody>
+      </p:sp>
+      <p:sp>
+        <p:nvSpPr>
+          <p:cNvPr id="18" name="Shape 15"/>
+          <p:cNvSpPr/>
+          <p:nvPr/>
+        </p:nvSpPr>
+        <p:spPr>
+          <a:xfrm>
+            <a:off x="914400" y="4974336"/>
+            <a:ext cx="2377440" cy="585216"/>
+          </a:xfrm>
+          <a:prstGeom prst="roundRect">
+            <a:avLst>
+              <a:gd name="adj" fmla="val 12500"/>
+            </a:avLst>
+          </a:prstGeom>
+          <a:solidFill>
+            <a:srgbClr val="FEF08A"/>
+          </a:solidFill>
+          <a:ln w="15240">
+            <a:solidFill>
+              <a:srgbClr val="111827"/>
+            </a:solidFill>
+            <a:prstDash val="solid"/>
+          </a:ln>
+        </p:spPr>
+      </p:sp>
+      <p:sp>
+        <p:nvSpPr>
+          <p:cNvPr id="19" name="Text 16"/>
+          <p:cNvSpPr/>
+          <p:nvPr/>
+        </p:nvSpPr>
+        <p:spPr>
+          <a:xfrm>
+            <a:off x="987552" y="4974336"/>
+            <a:ext cx="2231136" cy="585216"/>
+          </a:xfrm>
+          <a:prstGeom prst="rect">
+            <a:avLst/>
+          </a:prstGeom>
+          <a:noFill/>
+          <a:ln/>
+        </p:spPr>
+        <p:txBody>
+          <a:bodyPr wrap="square" rtlCol="0" anchor="ctr"/>
+          <a:lstStyle/>
+          <a:p>
+            <a:pPr indent="0" marL="0">
+              <a:buNone/>
+            </a:pPr>
+            <a:r>
+              <a:rPr lang="en-US" sz="880" b="1" dirty="0">
+                <a:solidFill>
+                  <a:srgbClr val="854D0E"/>
+                </a:solidFill>
+                <a:latin typeface="Courier New" pitchFamily="34" charset="0"/>
+                <a:ea typeface="Courier New" pitchFamily="34" charset="-122"/>
+                <a:cs typeface="Courier New" pitchFamily="34" charset="-120"/>
+              </a:rPr>
+              <a:t>Steal Elimination: 0 Steals (vs 63 in WS)</a:t>
+            </a:r>
+            <a:endParaRPr lang="en-US" sz="880" dirty="0"/>
+          </a:p>
+        </p:txBody>
+      </p:sp>
+      <p:sp>
+        <p:nvSpPr>
+          <p:cNvPr id="20" name="Shape 17"/>
+          <p:cNvSpPr/>
+          <p:nvPr/>
+        </p:nvSpPr>
+        <p:spPr>
+          <a:xfrm>
+            <a:off x="3429000" y="4974336"/>
+            <a:ext cx="2377440" cy="585216"/>
+          </a:xfrm>
+          <a:prstGeom prst="roundRect">
+            <a:avLst>
+              <a:gd name="adj" fmla="val 12500"/>
+            </a:avLst>
+          </a:prstGeom>
+          <a:solidFill>
+            <a:srgbClr val="EEF2FF"/>
+          </a:solidFill>
+          <a:ln w="15240">
+            <a:solidFill>
+              <a:srgbClr val="111827"/>
+            </a:solidFill>
+            <a:prstDash val="solid"/>
+          </a:ln>
+        </p:spPr>
+      </p:sp>
+      <p:sp>
+        <p:nvSpPr>
+          <p:cNvPr id="21" name="Text 18"/>
+          <p:cNvSpPr/>
+          <p:nvPr/>
+        </p:nvSpPr>
+        <p:spPr>
+          <a:xfrm>
+            <a:off x="3502152" y="4974336"/>
+            <a:ext cx="2231136" cy="585216"/>
+          </a:xfrm>
+          <a:prstGeom prst="rect">
+            <a:avLst/>
+          </a:prstGeom>
+          <a:noFill/>
+          <a:ln/>
+        </p:spPr>
+        <p:txBody>
+          <a:bodyPr wrap="square" rtlCol="0" anchor="ctr"/>
+          <a:lstStyle/>
+          <a:p>
+            <a:pPr indent="0" marL="0">
+              <a:buNone/>
+            </a:pPr>
+            <a:r>
+              <a:rPr lang="en-US" sz="880" b="1" dirty="0">
+                <a:solidFill>
+                  <a:srgbClr val="1E40AF"/>
+                </a:solidFill>
+                <a:latin typeface="Courier New" pitchFamily="34" charset="0"/>
+                <a:ea typeface="Courier New" pitchFamily="34" charset="-122"/>
+                <a:cs typeface="Courier New" pitchFamily="34" charset="-120"/>
+              </a:rPr>
+              <a:t>Vecmul: Fine memory avoids link bottlenecks</a:t>
+            </a:r>
+            <a:endParaRPr lang="en-US" sz="880" dirty="0"/>
+          </a:p>
+        </p:txBody>
+      </p:sp>
+      <p:sp>
+        <p:nvSpPr>
+          <p:cNvPr id="22" name="Shape 19"/>
+          <p:cNvSpPr/>
+          <p:nvPr/>
+        </p:nvSpPr>
+        <p:spPr>
+          <a:xfrm>
+            <a:off x="6272784" y="1837944"/>
+            <a:ext cx="5257800" cy="3886200"/>
+          </a:xfrm>
+          <a:prstGeom prst="roundRect">
+            <a:avLst>
+              <a:gd name="adj" fmla="val 3294"/>
+            </a:avLst>
+          </a:prstGeom>
+          <a:solidFill>
+            <a:srgbClr val="111827"/>
+          </a:solidFill>
+          <a:ln w="12700">
+            <a:solidFill>
+              <a:srgbClr val="111827"/>
+            </a:solidFill>
+            <a:prstDash val="solid"/>
+          </a:ln>
+        </p:spPr>
+      </p:sp>
+      <p:sp>
+        <p:nvSpPr>
+          <p:cNvPr id="23" name="Shape 20"/>
+          <p:cNvSpPr/>
+          <p:nvPr/>
+        </p:nvSpPr>
+        <p:spPr>
+          <a:xfrm>
+            <a:off x="6217920" y="1783080"/>
+            <a:ext cx="5257800" cy="3886200"/>
+          </a:xfrm>
+          <a:prstGeom prst="roundRect">
+            <a:avLst>
+              <a:gd name="adj" fmla="val 3294"/>
+            </a:avLst>
+          </a:prstGeom>
+          <a:solidFill>
+            <a:srgbClr val="FFF1EB"/>
+          </a:solidFill>
+          <a:ln w="19050">
+            <a:solidFill>
+              <a:srgbClr val="111827"/>
+            </a:solidFill>
+            <a:prstDash val="solid"/>
+          </a:ln>
+        </p:spPr>
+      </p:sp>
+      <p:sp>
+        <p:nvSpPr>
+          <p:cNvPr id="24" name="Text 21"/>
+          <p:cNvSpPr/>
+          <p:nvPr/>
+        </p:nvSpPr>
+        <p:spPr>
+          <a:xfrm>
+            <a:off x="6400800" y="1901952"/>
+            <a:ext cx="4892040" cy="256032"/>
+          </a:xfrm>
+          <a:prstGeom prst="rect">
+            <a:avLst/>
+          </a:prstGeom>
+          <a:noFill/>
+          <a:ln/>
+        </p:spPr>
+        <p:txBody>
+          <a:bodyPr wrap="square" rtlCol="0" anchor="ctr"/>
+          <a:lstStyle/>
+          <a:p>
+            <a:pPr indent="0" marL="0">
+              <a:buNone/>
+            </a:pPr>
+            <a:r>
+              <a:rPr lang="en-US" sz="1400" dirty="0">
+                <a:solidFill>
+                  <a:srgbClr val="111827"/>
+                </a:solidFill>
+                <a:latin typeface="Arial Black" pitchFamily="34" charset="0"/>
+                <a:ea typeface="Arial Black" pitchFamily="34" charset="-122"/>
+                <a:cs typeface="Arial Black" pitchFamily="34" charset="-120"/>
+              </a:rPr>
+              <a:t>2D Mesh Locality Dynamics (64 Cores)</a:t>
+            </a:r>
+            <a:endParaRPr lang="en-US" sz="1400" dirty="0"/>
+          </a:p>
+        </p:txBody>
+      </p:sp>
+      <p:sp>
+        <p:nvSpPr>
+          <p:cNvPr id="25" name="Text 22"/>
+          <p:cNvSpPr/>
+          <p:nvPr/>
+        </p:nvSpPr>
+        <p:spPr>
+          <a:xfrm>
+            <a:off x="6400800" y="2157984"/>
+            <a:ext cx="4892040" cy="182880"/>
+          </a:xfrm>
+          <a:prstGeom prst="rect">
+            <a:avLst/>
+          </a:prstGeom>
+          <a:noFill/>
+          <a:ln/>
+        </p:spPr>
+        <p:txBody>
+          <a:bodyPr wrap="square" rtlCol="0" anchor="ctr"/>
+          <a:lstStyle/>
+          <a:p>
+            <a:pPr indent="0" marL="0">
+              <a:buNone/>
+            </a:pPr>
+            <a:r>
+              <a:rPr lang="en-US" sz="850" dirty="0">
+                <a:solidFill>
+                  <a:srgbClr val="4B5563"/>
+                </a:solidFill>
+                <a:latin typeface="Courier New" pitchFamily="34" charset="0"/>
+                <a:ea typeface="Courier New" pitchFamily="34" charset="-122"/>
+                <a:cs typeface="Courier New" pitchFamily="34" charset="-120"/>
+              </a:rPr>
+              <a:t>// Hop-distance routing, bisection limits, and data distribution:</a:t>
+            </a:r>
+            <a:endParaRPr lang="en-US" sz="850" dirty="0"/>
+          </a:p>
+        </p:txBody>
+      </p:sp>
+      <p:sp>
+        <p:nvSpPr>
+          <p:cNvPr id="26" name="Text 23"/>
+          <p:cNvSpPr/>
+          <p:nvPr/>
+        </p:nvSpPr>
+        <p:spPr>
+          <a:xfrm>
+            <a:off x="6400800" y="2359152"/>
+            <a:ext cx="4892040" cy="457200"/>
+          </a:xfrm>
+          <a:prstGeom prst="rect">
+            <a:avLst/>
+          </a:prstGeom>
+          <a:noFill/>
+          <a:ln/>
+        </p:spPr>
+        <p:txBody>
+          <a:bodyPr wrap="square" rtlCol="0" anchor="ctr"/>
+          <a:lstStyle/>
+          <a:p>
+            <a:pPr indent="0" marL="0">
+              <a:buNone/>
+            </a:pPr>
+            <a:r>
+              <a:rPr lang="en-US" sz="920" b="1" dirty="0">
+                <a:solidFill>
+                  <a:srgbClr val="111827"/>
+                </a:solidFill>
+                <a:latin typeface="Arial" pitchFamily="34" charset="0"/>
+                <a:ea typeface="Arial" pitchFamily="34" charset="-122"/>
+                <a:cs typeface="Arial" pitchFamily="34" charset="-120"/>
+              </a:rPr>
+              <a:t>• Cycle-Accurate Latency: </a:t>
+            </a:r>
+            <a:pPr indent="0" marL="0">
+              <a:buNone/>
+            </a:pPr>
+            <a:r>
+              <a:rPr lang="en-US" sz="880" dirty="0">
+                <a:solidFill>
+                  <a:srgbClr val="374151"/>
+                </a:solidFill>
+                <a:latin typeface="Arial" pitchFamily="34" charset="0"/>
+                <a:ea typeface="Arial" pitchFamily="34" charset="-122"/>
+                <a:cs typeface="Arial" pitchFamily="34" charset="-120"/>
+              </a:rPr>
+              <a:t>10 cycles local L2 bank vs 38+2·hop remote formula across all 64 tiles.</a:t>
+            </a:r>
+            <a:endParaRPr lang="en-US" sz="920" dirty="0"/>
+          </a:p>
+        </p:txBody>
+      </p:sp>
+      <p:sp>
+        <p:nvSpPr>
+          <p:cNvPr id="27" name="Text 24"/>
+          <p:cNvSpPr/>
+          <p:nvPr/>
+        </p:nvSpPr>
+        <p:spPr>
+          <a:xfrm>
+            <a:off x="6400800" y="2834640"/>
+            <a:ext cx="4892040" cy="457200"/>
+          </a:xfrm>
+          <a:prstGeom prst="rect">
+            <a:avLst/>
+          </a:prstGeom>
+          <a:noFill/>
+          <a:ln/>
+        </p:spPr>
+        <p:txBody>
+          <a:bodyPr wrap="square" rtlCol="0" anchor="ctr"/>
+          <a:lstStyle/>
+          <a:p>
+            <a:pPr indent="0" marL="0">
+              <a:buNone/>
+            </a:pPr>
+            <a:r>
+              <a:rPr lang="en-US" sz="920" b="1" dirty="0">
+                <a:solidFill>
+                  <a:srgbClr val="111827"/>
+                </a:solidFill>
+                <a:latin typeface="Arial" pitchFamily="34" charset="0"/>
+                <a:ea typeface="Arial" pitchFamily="34" charset="-122"/>
+                <a:cs typeface="Arial" pitchFamily="34" charset="-120"/>
+              </a:rPr>
+              <a:t>• Network Diameter Limits: </a:t>
+            </a:r>
+            <a:pPr indent="0" marL="0">
+              <a:buNone/>
+            </a:pPr>
+            <a:r>
+              <a:rPr lang="en-US" sz="880" dirty="0">
+                <a:solidFill>
+                  <a:srgbClr val="374151"/>
+                </a:solidFill>
+                <a:latin typeface="Arial" pitchFamily="34" charset="0"/>
+                <a:ea typeface="Arial" pitchFamily="34" charset="-122"/>
+                <a:cs typeface="Arial" pitchFamily="34" charset="-120"/>
+              </a:rPr>
+              <a:t>14 hops between corners ((7-0)+(7-0)) = 66 cycles max latency.</a:t>
+            </a:r>
+            <a:endParaRPr lang="en-US" sz="920" dirty="0"/>
+          </a:p>
+        </p:txBody>
+      </p:sp>
+      <p:sp>
+        <p:nvSpPr>
+          <p:cNvPr id="28" name="Text 25"/>
+          <p:cNvSpPr/>
+          <p:nvPr/>
+        </p:nvSpPr>
+        <p:spPr>
+          <a:xfrm>
+            <a:off x="6400800" y="3310128"/>
+            <a:ext cx="4892040" cy="457200"/>
+          </a:xfrm>
+          <a:prstGeom prst="rect">
+            <a:avLst/>
+          </a:prstGeom>
+          <a:noFill/>
+          <a:ln/>
+        </p:spPr>
+        <p:txBody>
+          <a:bodyPr wrap="square" rtlCol="0" anchor="ctr"/>
+          <a:lstStyle/>
+          <a:p>
+            <a:pPr indent="0" marL="0">
+              <a:buNone/>
+            </a:pPr>
+            <a:r>
+              <a:rPr lang="en-US" sz="920" b="1" dirty="0">
+                <a:solidFill>
+                  <a:srgbClr val="111827"/>
+                </a:solidFill>
+                <a:latin typeface="Arial" pitchFamily="34" charset="0"/>
+                <a:ea typeface="Arial" pitchFamily="34" charset="-122"/>
+                <a:cs typeface="Arial" pitchFamily="34" charset="-120"/>
+              </a:rPr>
+              <a:t>• Coarse Buffer Homing: </a:t>
+            </a:r>
+            <a:pPr indent="0" marL="0">
+              <a:buNone/>
+            </a:pPr>
+            <a:r>
+              <a:rPr lang="en-US" sz="880" dirty="0">
+                <a:solidFill>
+                  <a:srgbClr val="374151"/>
+                </a:solidFill>
+                <a:latin typeface="Arial" pitchFamily="34" charset="0"/>
+                <a:ea typeface="Arial" pitchFamily="34" charset="-122"/>
+                <a:cs typeface="Arial" pitchFamily="34" charset="-120"/>
+              </a:rPr>
+              <a:t>Array homed on Tile 0 yields 0 steals on Map, but chokes bisection on stencils.</a:t>
+            </a:r>
+            <a:endParaRPr lang="en-US" sz="920" dirty="0"/>
+          </a:p>
+        </p:txBody>
+      </p:sp>
+      <p:sp>
+        <p:nvSpPr>
+          <p:cNvPr id="29" name="Text 26"/>
+          <p:cNvSpPr/>
+          <p:nvPr/>
+        </p:nvSpPr>
+        <p:spPr>
+          <a:xfrm>
+            <a:off x="6400800" y="3785616"/>
+            <a:ext cx="4892040" cy="457200"/>
+          </a:xfrm>
+          <a:prstGeom prst="rect">
+            <a:avLst/>
+          </a:prstGeom>
+          <a:noFill/>
+          <a:ln/>
+        </p:spPr>
+        <p:txBody>
+          <a:bodyPr wrap="square" rtlCol="0" anchor="ctr"/>
+          <a:lstStyle/>
+          <a:p>
+            <a:pPr indent="0" marL="0">
+              <a:buNone/>
+            </a:pPr>
+            <a:r>
+              <a:rPr lang="en-US" sz="920" b="1" dirty="0">
+                <a:solidFill>
+                  <a:srgbClr val="111827"/>
+                </a:solidFill>
+                <a:latin typeface="Arial" pitchFamily="34" charset="0"/>
+                <a:ea typeface="Arial" pitchFamily="34" charset="-122"/>
+                <a:cs typeface="Arial" pitchFamily="34" charset="-120"/>
+              </a:rPr>
+              <a:t>• Fine Cache Striping: </a:t>
+            </a:r>
+            <a:pPr indent="0" marL="0">
+              <a:buNone/>
+            </a:pPr>
+            <a:r>
+              <a:rPr lang="en-US" sz="880" dirty="0">
+                <a:solidFill>
+                  <a:srgbClr val="374151"/>
+                </a:solidFill>
+                <a:latin typeface="Arial" pitchFamily="34" charset="0"/>
+                <a:ea typeface="Arial" pitchFamily="34" charset="-122"/>
+                <a:cs typeface="Arial" pitchFamily="34" charset="-120"/>
+              </a:rPr>
+              <a:t>Striping lines avoids hot spots but raises base access latency to ~52 cycles.</a:t>
+            </a:r>
+            <a:endParaRPr lang="en-US" sz="920" dirty="0"/>
+          </a:p>
+        </p:txBody>
+      </p:sp>
+      <p:sp>
+        <p:nvSpPr>
+          <p:cNvPr id="30" name="Shape 27"/>
+          <p:cNvSpPr/>
+          <p:nvPr/>
+        </p:nvSpPr>
+        <p:spPr>
+          <a:xfrm>
+            <a:off x="6400800" y="4334256"/>
+            <a:ext cx="4892040" cy="1225296"/>
+          </a:xfrm>
+          <a:prstGeom prst="roundRect">
+            <a:avLst>
+              <a:gd name="adj" fmla="val 5970"/>
+            </a:avLst>
+          </a:prstGeom>
+          <a:solidFill>
+            <a:srgbClr val="0F172A"/>
+          </a:solidFill>
+          <a:ln w="15240">
+            <a:solidFill>
+              <a:srgbClr val="111827"/>
+            </a:solidFill>
+            <a:prstDash val="solid"/>
+          </a:ln>
+        </p:spPr>
+      </p:sp>
+      <p:sp>
+        <p:nvSpPr>
+          <p:cNvPr id="31" name="Text 28"/>
+          <p:cNvSpPr/>
+          <p:nvPr/>
+        </p:nvSpPr>
+        <p:spPr>
+          <a:xfrm>
+            <a:off x="6492240" y="4370832"/>
+            <a:ext cx="4709160" cy="1152144"/>
+          </a:xfrm>
+          <a:prstGeom prst="rect">
+            <a:avLst/>
+          </a:prstGeom>
+          <a:noFill/>
+          <a:ln/>
+        </p:spPr>
+        <p:txBody>
+          <a:bodyPr wrap="square" rtlCol="0" anchor="ctr"/>
+          <a:lstStyle/>
+          <a:p>
+            <a:pPr indent="0" marL="0">
+              <a:buNone/>
+            </a:pPr>
+            <a:r>
+              <a:rPr lang="en-US" sz="800" dirty="0">
+                <a:solidFill>
+                  <a:srgbClr val="94A3B8"/>
+                </a:solidFill>
+                <a:latin typeface="Courier New" pitchFamily="34" charset="0"/>
+                <a:ea typeface="Courier New" pitchFamily="34" charset="-122"/>
+                <a:cs typeface="Courier New" pitchFamily="34" charset="-120"/>
+              </a:rPr>
+              <a:t>// Work-Stealing vs Locality-Aware Dealing on 64 Tiles:
+</a:t>
+            </a:r>
+            <a:pPr indent="0" marL="0">
+              <a:buNone/>
+            </a:pPr>
+            <a:r>
+              <a:rPr lang="en-US" sz="850" b="1" dirty="0">
+                <a:solidFill>
+                  <a:srgbClr val="F87171"/>
+                </a:solidFill>
+                <a:latin typeface="Courier New" pitchFamily="34" charset="0"/>
+                <a:ea typeface="Courier New" pitchFamily="34" charset="-122"/>
+                <a:cs typeface="Courier New" pitchFamily="34" charset="-120"/>
+              </a:rPr>
+              <a:t>Work-Stealing: [██████████████████████████████] 63 Remote Steals (Avg 7.2 hops)
+</a:t>
+            </a:r>
+            <a:pPr indent="0" marL="0">
+              <a:buNone/>
+            </a:pPr>
+            <a:r>
+              <a:rPr lang="en-US" sz="850" b="1" dirty="0">
+                <a:solidFill>
+                  <a:srgbClr val="FFD147"/>
+                </a:solidFill>
+                <a:latin typeface="Courier New" pitchFamily="34" charset="0"/>
+                <a:ea typeface="Courier New" pitchFamily="34" charset="-122"/>
+                <a:cs typeface="Courier New" pitchFamily="34" charset="-120"/>
+              </a:rPr>
+              <a:t>LA + Coarse:   [                               ]  0 Steals (100% Local Execution!)
+</a:t>
+            </a:r>
+            <a:pPr indent="0" marL="0">
+              <a:buNone/>
+            </a:pPr>
+            <a:r>
+              <a:rPr lang="en-US" sz="800" dirty="0">
+                <a:solidFill>
+                  <a:srgbClr val="CBD5E1"/>
+                </a:solidFill>
+                <a:latin typeface="Courier New" pitchFamily="34" charset="0"/>
+                <a:ea typeface="Courier New" pitchFamily="34" charset="-122"/>
+                <a:cs typeface="Courier New" pitchFamily="34" charset="-120"/>
+              </a:rPr>
+              <a:t>• Interconnect Traffic: -80.3% mesh packet transmissions across grid
+</a:t>
+            </a:r>
+            <a:pPr indent="0" marL="0">
+              <a:buNone/>
+            </a:pPr>
+            <a:r>
+              <a:rPr lang="en-US" sz="850" b="1" dirty="0">
+                <a:solidFill>
+                  <a:srgbClr val="38BDF8"/>
+                </a:solidFill>
+                <a:latin typeface="Courier New" pitchFamily="34" charset="0"/>
+                <a:ea typeface="Courier New" pitchFamily="34" charset="-122"/>
+                <a:cs typeface="Courier New" pitchFamily="34" charset="-120"/>
+              </a:rPr>
+              <a:t>• Unit Test Harness:    11/11 tests passed in test_tilepro64.cpp</a:t>
+            </a:r>
+            <a:endParaRPr lang="en-US" sz="800" dirty="0"/>
+          </a:p>
+        </p:txBody>
+      </p:sp>
+      <p:sp>
+        <p:nvSpPr>
+          <p:cNvPr id="32" name="Shape 29"/>
+          <p:cNvSpPr/>
+          <p:nvPr/>
+        </p:nvSpPr>
+        <p:spPr>
+          <a:xfrm>
+            <a:off x="777240" y="5806440"/>
+            <a:ext cx="10744200" cy="502920"/>
+          </a:xfrm>
+          <a:prstGeom prst="roundRect">
+            <a:avLst>
+              <a:gd name="adj" fmla="val 18182"/>
+            </a:avLst>
+          </a:prstGeom>
+          <a:solidFill>
+            <a:srgbClr val="111827"/>
+          </a:solidFill>
+          <a:ln w="12700">
+            <a:solidFill>
+              <a:srgbClr val="111827"/>
+            </a:solidFill>
+            <a:prstDash val="solid"/>
+          </a:ln>
+        </p:spPr>
+      </p:sp>
+      <p:sp>
+        <p:nvSpPr>
+          <p:cNvPr id="33" name="Shape 30"/>
+          <p:cNvSpPr/>
+          <p:nvPr/>
+        </p:nvSpPr>
+        <p:spPr>
+          <a:xfrm>
+            <a:off x="731520" y="5760720"/>
+            <a:ext cx="10744200" cy="502920"/>
+          </a:xfrm>
+          <a:prstGeom prst="roundRect">
+            <a:avLst>
+              <a:gd name="adj" fmla="val 18182"/>
+            </a:avLst>
+          </a:prstGeom>
+          <a:solidFill>
+            <a:srgbClr val="FFD147"/>
+          </a:solidFill>
+          <a:ln w="19050">
+            <a:solidFill>
+              <a:srgbClr val="111827"/>
+            </a:solidFill>
+            <a:prstDash val="solid"/>
+          </a:ln>
+        </p:spPr>
+      </p:sp>
+      <p:sp>
+        <p:nvSpPr>
+          <p:cNvPr id="34" name="Text 31"/>
+          <p:cNvSpPr/>
+          <p:nvPr/>
+        </p:nvSpPr>
+        <p:spPr>
+          <a:xfrm>
+            <a:off x="914400" y="5760720"/>
+            <a:ext cx="10378440" cy="502920"/>
+          </a:xfrm>
+          <a:prstGeom prst="rect">
+            <a:avLst/>
+          </a:prstGeom>
+          <a:noFill/>
+          <a:ln/>
+        </p:spPr>
+        <p:txBody>
+          <a:bodyPr wrap="square" rtlCol="0" anchor="ctr"/>
+          <a:lstStyle/>
+          <a:p>
+            <a:pPr indent="0" marL="0">
+              <a:buNone/>
+            </a:pPr>
+            <a:r>
+              <a:rPr lang="en-US" sz="1100" b="1" dirty="0">
+                <a:solidFill>
+                  <a:srgbClr val="111827"/>
+                </a:solidFill>
+                <a:latin typeface="Arial Black" pitchFamily="34" charset="0"/>
+                <a:ea typeface="Arial Black" pitchFamily="34" charset="-122"/>
+                <a:cs typeface="Arial Black" pitchFamily="34" charset="-120"/>
+              </a:rPr>
+              <a:t>TILEPRO64 TAKEAWAY: </a:t>
+            </a:r>
+            <a:pPr indent="0" marL="0">
+              <a:buNone/>
+            </a:pPr>
+            <a:r>
+              <a:rPr lang="en-US" sz="1050" dirty="0">
+                <a:solidFill>
+                  <a:srgbClr val="111827"/>
+                </a:solidFill>
+                <a:latin typeface="Arial" pitchFamily="34" charset="0"/>
+                <a:ea typeface="Arial" pitchFamily="34" charset="-122"/>
+                <a:cs typeface="Arial" pitchFamily="34" charset="-120"/>
+              </a:rPr>
+              <a:t>On 2D mesh architectures, locality-aware task dealing completely eliminates remote work-stealing overhead and drops interconnect communication cycles by 80.3%.</a:t>
+            </a:r>
+            <a:endParaRPr lang="en-US" sz="1100" dirty="0"/>
+          </a:p>
+        </p:txBody>
+      </p:sp>
+      <p:sp>
+        <p:nvSpPr>
+          <p:cNvPr id="35" name="Text 32"/>
+          <p:cNvSpPr/>
+          <p:nvPr/>
+        </p:nvSpPr>
+        <p:spPr>
+          <a:xfrm>
+            <a:off x="731520" y="6355080"/>
+            <a:ext cx="8229600" cy="320040"/>
+          </a:xfrm>
+          <a:prstGeom prst="rect">
+            <a:avLst/>
+          </a:prstGeom>
+          <a:noFill/>
+          <a:ln/>
+        </p:spPr>
+        <p:txBody>
+          <a:bodyPr wrap="square" rtlCol="0" anchor="ctr"/>
+          <a:lstStyle/>
+          <a:p>
+            <a:pPr indent="0" marL="0">
+              <a:buNone/>
+            </a:pPr>
+            <a:r>
+              <a:rPr lang="en-US" sz="950" dirty="0">
+                <a:solidFill>
+                  <a:srgbClr val="4B5563"/>
+                </a:solidFill>
+                <a:latin typeface="Courier New" pitchFamily="34" charset="0"/>
+                <a:ea typeface="Courier New" pitchFamily="34" charset="-122"/>
+                <a:cs typeface="Courier New" pitchFamily="34" charset="-120"/>
+              </a:rPr>
+              <a:t>Manycore Simulation: TILEPro64 8×8 Mesh Architecture &amp; Results</a:t>
+            </a:r>
+            <a:endParaRPr lang="en-US" sz="950" dirty="0"/>
+          </a:p>
+        </p:txBody>
+      </p:sp>
+      <p:sp>
+        <p:nvSpPr>
+          <p:cNvPr id="36" name="Text 33"/>
+          <p:cNvSpPr/>
+          <p:nvPr/>
+        </p:nvSpPr>
+        <p:spPr>
+          <a:xfrm>
+            <a:off x="10058400" y="6355080"/>
+            <a:ext cx="1399032" cy="320040"/>
+          </a:xfrm>
+          <a:prstGeom prst="rect">
+            <a:avLst/>
+          </a:prstGeom>
+          <a:noFill/>
+          <a:ln/>
+        </p:spPr>
+        <p:txBody>
+          <a:bodyPr wrap="square" rtlCol="0" anchor="ctr"/>
+          <a:lstStyle/>
+          <a:p>
+            <a:pPr algn="r" indent="0" marL="0">
+              <a:buNone/>
+            </a:pPr>
+            <a:r>
+              <a:rPr lang="en-US" sz="950" dirty="0">
+                <a:solidFill>
+                  <a:srgbClr val="4B5563"/>
+                </a:solidFill>
+                <a:latin typeface="Courier New" pitchFamily="34" charset="0"/>
+                <a:ea typeface="Courier New" pitchFamily="34" charset="-122"/>
+                <a:cs typeface="Courier New" pitchFamily="34" charset="-120"/>
+              </a:rPr>
+              <a:t>05 / 06</a:t>
+            </a:r>
+            <a:endParaRPr lang="en-US" sz="950" dirty="0"/>
+          </a:p>
+        </p:txBody>
+      </p:sp>
+    </p:spTree>
+  </p:cSld>
+  <p:clrMapOvr>
+    <a:masterClrMapping/>
+  </p:clrMapOvr>
+</p:sld>
+</file>
+
+<file path=ppt/slides/slide6.xml><?xml version="1.0" encoding="utf-8"?>
+<p:sld xmlns:a="http://schemas.openxmlformats.org/drawingml/2006/main" xmlns:r="http://schemas.openxmlformats.org/officeDocument/2006/relationships" xmlns:p="http://schemas.openxmlformats.org/presentationml/2006/main">
+  <p:cSld name="Slide 6">
+    <p:bg>
+      <p:bgPr>
+        <a:blipFill dpi="0" rotWithShape="1">
+          <a:blip r:embed="rId1">
+            <a:lum/>
+          </a:blip>
+          <a:srcRect/>
+          <a:stretch>
+            <a:fillRect/>
+          </a:stretch>
+        </a:blipFill>
+        <a:effectLst/>
+      </p:bgPr>
+    </p:bg>
+    <p:spTree>
+      <p:nvGrpSpPr>
+        <p:cNvPr id="1" name=""/>
+        <p:cNvGrpSpPr/>
+        <p:nvPr/>
+      </p:nvGrpSpPr>
+      <p:grpSpPr>
+        <a:xfrm>
+          <a:off x="0" y="0"/>
+          <a:ext cx="0" cy="0"/>
+          <a:chOff x="0" y="0"/>
+          <a:chExt cx="0" cy="0"/>
+        </a:xfrm>
+      </p:grpSpPr>
+      <p:sp>
+        <p:nvSpPr>
+          <p:cNvPr id="2" name="Shape 0"/>
+          <p:cNvSpPr/>
+          <p:nvPr/>
+        </p:nvSpPr>
+        <p:spPr>
+          <a:xfrm>
+            <a:off x="731520" y="411480"/>
+            <a:ext cx="1115568" cy="292608"/>
+          </a:xfrm>
+          <a:prstGeom prst="roundRect">
+            <a:avLst>
+              <a:gd name="adj" fmla="val 50000"/>
+            </a:avLst>
+          </a:prstGeom>
+          <a:solidFill>
+            <a:srgbClr val="111827"/>
+          </a:solidFill>
+          <a:ln w="12700">
+            <a:solidFill>
+              <a:srgbClr val="111827"/>
+            </a:solidFill>
+            <a:prstDash val="solid"/>
+          </a:ln>
+        </p:spPr>
+      </p:sp>
+      <p:sp>
+        <p:nvSpPr>
+          <p:cNvPr id="3" name="Text 1"/>
+          <p:cNvSpPr/>
+          <p:nvPr/>
+        </p:nvSpPr>
+        <p:spPr>
+          <a:xfrm>
+            <a:off x="731520" y="411480"/>
+            <a:ext cx="1115568" cy="292608"/>
+          </a:xfrm>
+          <a:prstGeom prst="rect">
+            <a:avLst/>
+          </a:prstGeom>
+          <a:noFill/>
+          <a:ln/>
+        </p:spPr>
+        <p:txBody>
+          <a:bodyPr wrap="square" rtlCol="0" anchor="ctr"/>
+          <a:lstStyle/>
+          <a:p>
+            <a:pPr algn="ctr" indent="0" marL="0">
+              <a:buNone/>
+            </a:pPr>
+            <a:r>
+              <a:rPr lang="en-US" sz="900" b="1" dirty="0">
+                <a:solidFill>
+                  <a:srgbClr val="FFFFFF"/>
+                </a:solidFill>
+                <a:latin typeface="Courier New" pitchFamily="34" charset="0"/>
+                <a:ea typeface="Courier New" pitchFamily="34" charset="-122"/>
+                <a:cs typeface="Courier New" pitchFamily="34" charset="-120"/>
+              </a:rPr>
+              <a:t>PART 5</a:t>
+            </a:r>
+            <a:endParaRPr lang="en-US" sz="900" dirty="0"/>
+          </a:p>
+        </p:txBody>
+      </p:sp>
+      <p:sp>
+        <p:nvSpPr>
+          <p:cNvPr id="4" name="Shape 2"/>
+          <p:cNvSpPr/>
+          <p:nvPr/>
+        </p:nvSpPr>
+        <p:spPr>
+          <a:xfrm>
+            <a:off x="1984248" y="411480"/>
+            <a:ext cx="3236976" cy="292608"/>
+          </a:xfrm>
+          <a:prstGeom prst="roundRect">
+            <a:avLst>
+              <a:gd name="adj" fmla="val 50000"/>
+            </a:avLst>
+          </a:prstGeom>
+          <a:solidFill>
+            <a:srgbClr val="FFFFFF"/>
+          </a:solidFill>
+          <a:ln w="19050">
+            <a:solidFill>
+              <a:srgbClr val="111827"/>
+            </a:solidFill>
+            <a:prstDash val="solid"/>
+          </a:ln>
+        </p:spPr>
+      </p:sp>
+      <p:sp>
+        <p:nvSpPr>
+          <p:cNvPr id="5" name="Text 3"/>
+          <p:cNvSpPr/>
+          <p:nvPr/>
+        </p:nvSpPr>
+        <p:spPr>
+          <a:xfrm>
+            <a:off x="1984248" y="411480"/>
+            <a:ext cx="3236976" cy="292608"/>
+          </a:xfrm>
+          <a:prstGeom prst="rect">
+            <a:avLst/>
+          </a:prstGeom>
+          <a:noFill/>
+          <a:ln/>
+        </p:spPr>
+        <p:txBody>
+          <a:bodyPr wrap="square" rtlCol="0" anchor="ctr"/>
+          <a:lstStyle/>
+          <a:p>
+            <a:pPr algn="ctr" indent="0" marL="0">
+              <a:buNone/>
+            </a:pPr>
+            <a:r>
+              <a:rPr lang="en-US" sz="900" b="1" dirty="0">
+                <a:solidFill>
+                  <a:srgbClr val="111827"/>
+                </a:solidFill>
+                <a:latin typeface="Courier New" pitchFamily="34" charset="0"/>
+                <a:ea typeface="Courier New" pitchFamily="34" charset="-122"/>
+                <a:cs typeface="Courier New" pitchFamily="34" charset="-120"/>
+              </a:rPr>
+              <a:t>SCHEDULER ARCHITECTURE &amp; DEFENSE</a:t>
+            </a:r>
+            <a:endParaRPr lang="en-US" sz="900" dirty="0"/>
+          </a:p>
+        </p:txBody>
+      </p:sp>
+      <p:sp>
+        <p:nvSpPr>
+          <p:cNvPr id="6" name="Text 4"/>
+          <p:cNvSpPr/>
+          <p:nvPr/>
+        </p:nvSpPr>
+        <p:spPr>
+          <a:xfrm>
+            <a:off x="731520" y="868680"/>
+            <a:ext cx="4572000" cy="502920"/>
+          </a:xfrm>
+          <a:prstGeom prst="rect">
+            <a:avLst/>
+          </a:prstGeom>
+          <a:noFill/>
+          <a:ln/>
+        </p:spPr>
+        <p:txBody>
+          <a:bodyPr wrap="square" rtlCol="0" anchor="ctr"/>
+          <a:lstStyle/>
+          <a:p>
+            <a:pPr indent="0" marL="0">
+              <a:buNone/>
+            </a:pPr>
+            <a:r>
+              <a:rPr lang="en-US" sz="3000" b="1" dirty="0">
+                <a:solidFill>
+                  <a:srgbClr val="111827"/>
+                </a:solidFill>
+                <a:latin typeface="Arial Black" pitchFamily="34" charset="0"/>
+                <a:ea typeface="Arial Black" pitchFamily="34" charset="-122"/>
+                <a:cs typeface="Arial Black" pitchFamily="34" charset="-120"/>
+              </a:rPr>
+              <a:t>The NOVA Solution: </a:t>
+            </a:r>
+            <a:endParaRPr lang="en-US" sz="3000" dirty="0"/>
+          </a:p>
+        </p:txBody>
+      </p:sp>
+      <p:sp>
+        <p:nvSpPr>
+          <p:cNvPr id="7" name="Shape 5"/>
+          <p:cNvSpPr/>
+          <p:nvPr/>
+        </p:nvSpPr>
+        <p:spPr>
+          <a:xfrm>
+            <a:off x="5212080" y="822960"/>
+            <a:ext cx="5029200" cy="594360"/>
+          </a:xfrm>
+          <a:prstGeom prst="roundRect">
+            <a:avLst>
+              <a:gd name="adj" fmla="val 15385"/>
+            </a:avLst>
+          </a:prstGeom>
+          <a:solidFill>
+            <a:srgbClr val="FFD147"/>
+          </a:solidFill>
+          <a:ln w="19050">
+            <a:solidFill>
+              <a:srgbClr val="111827"/>
+            </a:solidFill>
+            <a:prstDash val="solid"/>
+          </a:ln>
+        </p:spPr>
+      </p:sp>
+      <p:sp>
+        <p:nvSpPr>
+          <p:cNvPr id="8" name="Text 6"/>
+          <p:cNvSpPr/>
+          <p:nvPr/>
+        </p:nvSpPr>
+        <p:spPr>
+          <a:xfrm>
+            <a:off x="5303520" y="822960"/>
+            <a:ext cx="4846320" cy="594360"/>
+          </a:xfrm>
+          <a:prstGeom prst="rect">
+            <a:avLst/>
+          </a:prstGeom>
+          <a:noFill/>
+          <a:ln/>
+        </p:spPr>
+        <p:txBody>
+          <a:bodyPr wrap="square" rtlCol="0" anchor="ctr"/>
+          <a:lstStyle/>
+          <a:p>
+            <a:pPr algn="ctr" indent="0" marL="0">
+              <a:buNone/>
+            </a:pPr>
+            <a:r>
+              <a:rPr lang="en-US" sz="2800" b="1" dirty="0">
+                <a:solidFill>
+                  <a:srgbClr val="111827"/>
+                </a:solidFill>
+                <a:latin typeface="Arial Black" pitchFamily="34" charset="0"/>
+                <a:ea typeface="Arial Black" pitchFamily="34" charset="-122"/>
+                <a:cs typeface="Arial Black" pitchFamily="34" charset="-120"/>
+              </a:rPr>
+              <a:t>Adaptive Co-Scheduling</a:t>
+            </a:r>
+            <a:endParaRPr lang="en-US" sz="2800" dirty="0"/>
+          </a:p>
+        </p:txBody>
+      </p:sp>
+      <p:sp>
+        <p:nvSpPr>
+          <p:cNvPr id="9" name="Text 7"/>
+          <p:cNvSpPr/>
+          <p:nvPr/>
+        </p:nvSpPr>
+        <p:spPr>
+          <a:xfrm>
+            <a:off x="731520" y="1463040"/>
+            <a:ext cx="9144000" cy="228600"/>
+          </a:xfrm>
+          <a:prstGeom prst="rect">
+            <a:avLst/>
+          </a:prstGeom>
+          <a:noFill/>
+          <a:ln/>
+        </p:spPr>
+        <p:txBody>
+          <a:bodyPr wrap="square" rtlCol="0" anchor="ctr"/>
+          <a:lstStyle/>
+          <a:p>
+            <a:pPr indent="0" marL="0">
+              <a:buNone/>
+            </a:pPr>
+            <a:r>
+              <a:rPr lang="en-US" sz="1000" dirty="0">
+                <a:solidFill>
+                  <a:srgbClr val="4B5563"/>
+                </a:solidFill>
+                <a:latin typeface="Courier New" pitchFamily="34" charset="0"/>
+                <a:ea typeface="Courier New" pitchFamily="34" charset="-122"/>
+                <a:cs typeface="Courier New" pitchFamily="34" charset="-120"/>
+              </a:rPr>
+              <a:t>Four architectural pillars that eliminate the SparseLU bottleneck while preserving memory locality</a:t>
+            </a:r>
+            <a:endParaRPr lang="en-US" sz="1000" dirty="0"/>
+          </a:p>
+        </p:txBody>
+      </p:sp>
+      <p:sp>
+        <p:nvSpPr>
+          <p:cNvPr id="10" name="Shape 8"/>
+          <p:cNvSpPr/>
+          <p:nvPr/>
+        </p:nvSpPr>
+        <p:spPr>
+          <a:xfrm>
+            <a:off x="786384" y="1837944"/>
+            <a:ext cx="5257800" cy="1874520"/>
+          </a:xfrm>
+          <a:prstGeom prst="roundRect">
+            <a:avLst>
+              <a:gd name="adj" fmla="val 6829"/>
+            </a:avLst>
+          </a:prstGeom>
+          <a:solidFill>
+            <a:srgbClr val="111827"/>
+          </a:solidFill>
+          <a:ln w="12700">
+            <a:solidFill>
+              <a:srgbClr val="111827"/>
+            </a:solidFill>
+            <a:prstDash val="solid"/>
+          </a:ln>
+        </p:spPr>
+      </p:sp>
+      <p:sp>
+        <p:nvSpPr>
+          <p:cNvPr id="11" name="Shape 9"/>
+          <p:cNvSpPr/>
+          <p:nvPr/>
+        </p:nvSpPr>
+        <p:spPr>
+          <a:xfrm>
+            <a:off x="731520" y="1783080"/>
+            <a:ext cx="5257800" cy="1874520"/>
+          </a:xfrm>
+          <a:prstGeom prst="roundRect">
+            <a:avLst>
+              <a:gd name="adj" fmla="val 6829"/>
+            </a:avLst>
+          </a:prstGeom>
+          <a:solidFill>
+            <a:srgbClr val="EEF2FF"/>
+          </a:solidFill>
+          <a:ln w="19050">
+            <a:solidFill>
+              <a:srgbClr val="111827"/>
+            </a:solidFill>
+            <a:prstDash val="solid"/>
+          </a:ln>
+        </p:spPr>
+      </p:sp>
+      <p:sp>
+        <p:nvSpPr>
+          <p:cNvPr id="12" name="Text 10"/>
+          <p:cNvSpPr/>
+          <p:nvPr/>
+        </p:nvSpPr>
+        <p:spPr>
+          <a:xfrm>
+            <a:off x="914400" y="1874520"/>
+            <a:ext cx="3657600" cy="256032"/>
+          </a:xfrm>
+          <a:prstGeom prst="rect">
+            <a:avLst/>
+          </a:prstGeom>
+          <a:noFill/>
+          <a:ln/>
+        </p:spPr>
+        <p:txBody>
+          <a:bodyPr wrap="square" rtlCol="0" anchor="ctr"/>
+          <a:lstStyle/>
+          <a:p>
+            <a:pPr indent="0" marL="0">
+              <a:buNone/>
+            </a:pPr>
+            <a:r>
+              <a:rPr lang="en-US" sz="1200" dirty="0">
+                <a:solidFill>
+                  <a:srgbClr val="111827"/>
+                </a:solidFill>
+                <a:latin typeface="Arial Black" pitchFamily="34" charset="0"/>
+                <a:ea typeface="Arial Black" pitchFamily="34" charset="-122"/>
+                <a:cs typeface="Arial Black" pitchFamily="34" charset="-120"/>
+              </a:rPr>
+              <a:t>Pillar 1: Load-Aware Work Dealing (N-A)</a:t>
+            </a:r>
+            <a:endParaRPr lang="en-US" sz="1200" dirty="0"/>
+          </a:p>
+        </p:txBody>
+      </p:sp>
+      <p:sp>
+        <p:nvSpPr>
+          <p:cNvPr id="13" name="Shape 11"/>
+          <p:cNvSpPr/>
+          <p:nvPr/>
+        </p:nvSpPr>
+        <p:spPr>
+          <a:xfrm>
+            <a:off x="4389120" y="1874520"/>
+            <a:ext cx="1371600" cy="201168"/>
+          </a:xfrm>
+          <a:prstGeom prst="roundRect">
+            <a:avLst>
+              <a:gd name="adj" fmla="val 50000"/>
+            </a:avLst>
+          </a:prstGeom>
+          <a:solidFill>
+            <a:srgbClr val="FFFFFF"/>
+          </a:solidFill>
+          <a:ln w="12700">
+            <a:solidFill>
+              <a:srgbClr val="111827"/>
+            </a:solidFill>
+            <a:prstDash val="solid"/>
+          </a:ln>
+        </p:spPr>
+      </p:sp>
+      <p:sp>
+        <p:nvSpPr>
+          <p:cNvPr id="14" name="Text 12"/>
+          <p:cNvSpPr/>
+          <p:nvPr/>
+        </p:nvSpPr>
+        <p:spPr>
+          <a:xfrm>
+            <a:off x="4389120" y="1874520"/>
+            <a:ext cx="1371600" cy="201168"/>
+          </a:xfrm>
+          <a:prstGeom prst="rect">
+            <a:avLst/>
+          </a:prstGeom>
+          <a:noFill/>
+          <a:ln/>
+        </p:spPr>
+        <p:txBody>
+          <a:bodyPr wrap="square" rtlCol="0" anchor="ctr"/>
+          <a:lstStyle/>
+          <a:p>
+            <a:pPr algn="ctr" indent="0" marL="0">
+              <a:buNone/>
+            </a:pPr>
+            <a:r>
+              <a:rPr lang="en-US" sz="800" b="1" dirty="0">
+                <a:solidFill>
+                  <a:srgbClr val="111827"/>
+                </a:solidFill>
+                <a:latin typeface="Courier New" pitchFamily="34" charset="0"/>
+                <a:ea typeface="Courier New" pitchFamily="34" charset="-122"/>
+                <a:cs typeface="Courier New" pitchFamily="34" charset="-120"/>
+              </a:rPr>
+              <a:t>Fixes H3, H4</a:t>
+            </a:r>
+            <a:endParaRPr lang="en-US" sz="800" dirty="0"/>
+          </a:p>
+        </p:txBody>
+      </p:sp>
+      <p:sp>
+        <p:nvSpPr>
+          <p:cNvPr id="15" name="Shape 13"/>
+          <p:cNvSpPr/>
+          <p:nvPr/>
+        </p:nvSpPr>
+        <p:spPr>
+          <a:xfrm>
+            <a:off x="914400" y="2157984"/>
+            <a:ext cx="4892040" cy="274320"/>
+          </a:xfrm>
+          <a:prstGeom prst="roundRect">
+            <a:avLst>
+              <a:gd name="adj" fmla="val 20000"/>
+            </a:avLst>
+          </a:prstGeom>
+          <a:solidFill>
+            <a:srgbClr val="0F172A"/>
+          </a:solidFill>
+          <a:ln w="12700">
+            <a:solidFill>
+              <a:srgbClr val="111827"/>
+            </a:solidFill>
+            <a:prstDash val="solid"/>
+          </a:ln>
+        </p:spPr>
+      </p:sp>
+      <p:sp>
+        <p:nvSpPr>
+          <p:cNvPr id="16" name="Text 14"/>
+          <p:cNvSpPr/>
+          <p:nvPr/>
+        </p:nvSpPr>
+        <p:spPr>
+          <a:xfrm>
+            <a:off x="914400" y="2157984"/>
+            <a:ext cx="4892040" cy="274320"/>
+          </a:xfrm>
+          <a:prstGeom prst="rect">
+            <a:avLst/>
+          </a:prstGeom>
+          <a:noFill/>
+          <a:ln/>
+        </p:spPr>
+        <p:txBody>
+          <a:bodyPr wrap="square" rtlCol="0" anchor="ctr"/>
+          <a:lstStyle/>
+          <a:p>
+            <a:pPr algn="ctr" indent="0" marL="0">
+              <a:buNone/>
+            </a:pPr>
+            <a:r>
+              <a:rPr lang="en-US" sz="950" b="1" dirty="0">
+                <a:solidFill>
+                  <a:srgbClr val="FFD147"/>
+                </a:solidFill>
+                <a:latin typeface="Courier New" pitchFamily="34" charset="0"/>
+                <a:ea typeface="Courier New" pitchFamily="34" charset="-122"/>
+                <a:cs typeface="Courier New" pitchFamily="34" charset="-120"/>
+              </a:rPr>
+              <a:t>score(q) = α · comm_norm(D, q) + (1 - α) · occ_norm(q)</a:t>
+            </a:r>
+            <a:endParaRPr lang="en-US" sz="950" dirty="0"/>
+          </a:p>
+        </p:txBody>
+      </p:sp>
+      <p:sp>
+        <p:nvSpPr>
+          <p:cNvPr id="17" name="Text 15"/>
+          <p:cNvSpPr/>
+          <p:nvPr/>
+        </p:nvSpPr>
+        <p:spPr>
+          <a:xfrm>
+            <a:off x="914400" y="2468880"/>
+            <a:ext cx="4892040" cy="694944"/>
+          </a:xfrm>
+          <a:prstGeom prst="rect">
+            <a:avLst/>
+          </a:prstGeom>
+          <a:noFill/>
+          <a:ln/>
+        </p:spPr>
+        <p:txBody>
+          <a:bodyPr wrap="square" rtlCol="0" anchor="ctr"/>
+          <a:lstStyle/>
+          <a:p>
+            <a:pPr indent="0" marL="0">
+              <a:lnSpc>
+                <a:spcPts val="1300"/>
+              </a:lnSpc>
+              <a:buNone/>
+            </a:pPr>
+            <a:r>
+              <a:rPr lang="en-US" sz="880" b="1" dirty="0">
+                <a:solidFill>
+                  <a:srgbClr val="111827"/>
+                </a:solidFill>
+                <a:latin typeface="Arial" pitchFamily="34" charset="0"/>
+                <a:ea typeface="Arial" pitchFamily="34" charset="-122"/>
+                <a:cs typeface="Arial" pitchFamily="34" charset="-120"/>
+              </a:rPr>
+              <a:t>• Dynamic Balancing: </a:t>
+            </a:r>
+            <a:pPr indent="0" marL="0">
+              <a:lnSpc>
+                <a:spcPts val="1300"/>
+              </a:lnSpc>
+              <a:buNone/>
+            </a:pPr>
+            <a:r>
+              <a:rPr lang="en-US" sz="880" dirty="0">
+                <a:solidFill>
+                  <a:srgbClr val="374151"/>
+                </a:solidFill>
+                <a:latin typeface="Arial" pitchFamily="34" charset="0"/>
+                <a:ea typeface="Arial" pitchFamily="34" charset="-122"/>
+                <a:cs typeface="Arial" pitchFamily="34" charset="-120"/>
+              </a:rPr>
+              <a:t>Blends data proximity with real-time queue backlog.
+</a:t>
+            </a:r>
+            <a:pPr indent="0" marL="0">
+              <a:lnSpc>
+                <a:spcPts val="1300"/>
+              </a:lnSpc>
+              <a:buNone/>
+            </a:pPr>
+            <a:r>
+              <a:rPr lang="en-US" sz="880" b="1" dirty="0">
+                <a:solidFill>
+                  <a:srgbClr val="111827"/>
+                </a:solidFill>
+                <a:latin typeface="Arial" pitchFamily="34" charset="0"/>
+                <a:ea typeface="Arial" pitchFamily="34" charset="-122"/>
+                <a:cs typeface="Arial" pitchFamily="34" charset="-120"/>
+              </a:rPr>
+              <a:t>• Starvation Diverter: </a:t>
+            </a:r>
+            <a:pPr indent="0" marL="0">
+              <a:lnSpc>
+                <a:spcPts val="1300"/>
+              </a:lnSpc>
+              <a:buNone/>
+            </a:pPr>
+            <a:r>
+              <a:rPr lang="en-US" sz="880" dirty="0">
+                <a:solidFill>
+                  <a:srgbClr val="374151"/>
+                </a:solidFill>
+                <a:latin typeface="Arial" pitchFamily="34" charset="0"/>
+                <a:ea typeface="Arial" pitchFamily="34" charset="-122"/>
+                <a:cs typeface="Arial" pitchFamily="34" charset="-120"/>
+              </a:rPr>
+              <a:t>Automatically diverts tasks to neighboring idle queues before congestion creates stalls.</a:t>
+            </a:r>
+            <a:endParaRPr lang="en-US" sz="880" dirty="0"/>
+          </a:p>
+        </p:txBody>
+      </p:sp>
+      <p:sp>
+        <p:nvSpPr>
+          <p:cNvPr id="18" name="Shape 16"/>
+          <p:cNvSpPr/>
+          <p:nvPr/>
+        </p:nvSpPr>
+        <p:spPr>
+          <a:xfrm>
+            <a:off x="914400" y="3218688"/>
+            <a:ext cx="4892040" cy="365760"/>
+          </a:xfrm>
+          <a:prstGeom prst="roundRect">
+            <a:avLst>
+              <a:gd name="adj" fmla="val 20000"/>
+            </a:avLst>
+          </a:prstGeom>
+          <a:solidFill>
+            <a:srgbClr val="DCFCE7"/>
+          </a:solidFill>
+          <a:ln w="12700">
+            <a:solidFill>
+              <a:srgbClr val="111827"/>
+            </a:solidFill>
+            <a:prstDash val="solid"/>
+          </a:ln>
+        </p:spPr>
+      </p:sp>
+      <p:sp>
+        <p:nvSpPr>
+          <p:cNvPr id="19" name="Text 17"/>
+          <p:cNvSpPr/>
+          <p:nvPr/>
+        </p:nvSpPr>
+        <p:spPr>
+          <a:xfrm>
+            <a:off x="960120" y="3218688"/>
+            <a:ext cx="4800600" cy="365760"/>
+          </a:xfrm>
+          <a:prstGeom prst="rect">
+            <a:avLst/>
+          </a:prstGeom>
+          <a:noFill/>
+          <a:ln/>
+        </p:spPr>
+        <p:txBody>
+          <a:bodyPr wrap="square" rtlCol="0" anchor="ctr"/>
+          <a:lstStyle/>
+          <a:p>
+            <a:pPr indent="0" marL="0">
+              <a:buNone/>
+            </a:pPr>
+            <a:r>
+              <a:rPr lang="en-US" sz="850" b="1" dirty="0">
+                <a:solidFill>
+                  <a:srgbClr val="065F46"/>
+                </a:solidFill>
+                <a:latin typeface="Courier New" pitchFamily="34" charset="0"/>
+                <a:ea typeface="Courier New" pitchFamily="34" charset="-122"/>
+                <a:cs typeface="Courier New" pitchFamily="34" charset="-120"/>
+              </a:rPr>
+              <a:t>✓ Cures SparseLU Paradox: Reverses +15.1% slowdown · Balances queues within ±1</a:t>
+            </a:r>
+            <a:endParaRPr lang="en-US" sz="850" dirty="0"/>
+          </a:p>
+        </p:txBody>
+      </p:sp>
+      <p:sp>
+        <p:nvSpPr>
+          <p:cNvPr id="20" name="Shape 18"/>
+          <p:cNvSpPr/>
+          <p:nvPr/>
+        </p:nvSpPr>
+        <p:spPr>
+          <a:xfrm>
+            <a:off x="6272784" y="1837944"/>
+            <a:ext cx="5257800" cy="1874520"/>
+          </a:xfrm>
+          <a:prstGeom prst="roundRect">
+            <a:avLst>
+              <a:gd name="adj" fmla="val 6829"/>
+            </a:avLst>
+          </a:prstGeom>
+          <a:solidFill>
+            <a:srgbClr val="111827"/>
+          </a:solidFill>
+          <a:ln w="12700">
+            <a:solidFill>
+              <a:srgbClr val="111827"/>
+            </a:solidFill>
+            <a:prstDash val="solid"/>
+          </a:ln>
+        </p:spPr>
+      </p:sp>
+      <p:sp>
+        <p:nvSpPr>
+          <p:cNvPr id="21" name="Shape 19"/>
+          <p:cNvSpPr/>
+          <p:nvPr/>
+        </p:nvSpPr>
+        <p:spPr>
+          <a:xfrm>
+            <a:off x="6217920" y="1783080"/>
+            <a:ext cx="5257800" cy="1874520"/>
+          </a:xfrm>
+          <a:prstGeom prst="roundRect">
+            <a:avLst>
+              <a:gd name="adj" fmla="val 6829"/>
+            </a:avLst>
+          </a:prstGeom>
+          <a:solidFill>
+            <a:srgbClr val="FFF1EB"/>
+          </a:solidFill>
+          <a:ln w="19050">
+            <a:solidFill>
+              <a:srgbClr val="111827"/>
+            </a:solidFill>
+            <a:prstDash val="solid"/>
+          </a:ln>
+        </p:spPr>
+      </p:sp>
+      <p:sp>
+        <p:nvSpPr>
+          <p:cNvPr id="22" name="Text 20"/>
+          <p:cNvSpPr/>
+          <p:nvPr/>
+        </p:nvSpPr>
+        <p:spPr>
+          <a:xfrm>
+            <a:off x="6400800" y="1874520"/>
+            <a:ext cx="3657600" cy="256032"/>
+          </a:xfrm>
+          <a:prstGeom prst="rect">
+            <a:avLst/>
+          </a:prstGeom>
+          <a:noFill/>
+          <a:ln/>
+        </p:spPr>
+        <p:txBody>
+          <a:bodyPr wrap="square" rtlCol="0" anchor="ctr"/>
+          <a:lstStyle/>
+          <a:p>
+            <a:pPr indent="0" marL="0">
+              <a:buNone/>
+            </a:pPr>
+            <a:r>
+              <a:rPr lang="en-US" sz="1200" dirty="0">
+                <a:solidFill>
+                  <a:srgbClr val="111827"/>
+                </a:solidFill>
+                <a:latin typeface="Arial Black" pitchFamily="34" charset="0"/>
+                <a:ea typeface="Arial Black" pitchFamily="34" charset="-122"/>
+                <a:cs typeface="Arial Black" pitchFamily="34" charset="-120"/>
+              </a:rPr>
+              <a:t>Pillar 2: Task-Level Shadow Index (N-B)</a:t>
+            </a:r>
+            <a:endParaRPr lang="en-US" sz="1200" dirty="0"/>
+          </a:p>
+        </p:txBody>
+      </p:sp>
+      <p:sp>
+        <p:nvSpPr>
+          <p:cNvPr id="23" name="Shape 21"/>
+          <p:cNvSpPr/>
+          <p:nvPr/>
+        </p:nvSpPr>
+        <p:spPr>
+          <a:xfrm>
+            <a:off x="9875520" y="1874520"/>
+            <a:ext cx="1371600" cy="201168"/>
+          </a:xfrm>
+          <a:prstGeom prst="roundRect">
+            <a:avLst>
+              <a:gd name="adj" fmla="val 50000"/>
+            </a:avLst>
+          </a:prstGeom>
+          <a:solidFill>
+            <a:srgbClr val="FFFFFF"/>
+          </a:solidFill>
+          <a:ln w="12700">
+            <a:solidFill>
+              <a:srgbClr val="111827"/>
+            </a:solidFill>
+            <a:prstDash val="solid"/>
+          </a:ln>
+        </p:spPr>
+      </p:sp>
+      <p:sp>
+        <p:nvSpPr>
+          <p:cNvPr id="24" name="Text 22"/>
+          <p:cNvSpPr/>
+          <p:nvPr/>
+        </p:nvSpPr>
+        <p:spPr>
+          <a:xfrm>
+            <a:off x="9875520" y="1874520"/>
+            <a:ext cx="1371600" cy="201168"/>
+          </a:xfrm>
+          <a:prstGeom prst="rect">
+            <a:avLst/>
+          </a:prstGeom>
+          <a:noFill/>
+          <a:ln/>
+        </p:spPr>
+        <p:txBody>
+          <a:bodyPr wrap="square" rtlCol="0" anchor="ctr"/>
+          <a:lstStyle/>
+          <a:p>
+            <a:pPr algn="ctr" indent="0" marL="0">
+              <a:buNone/>
+            </a:pPr>
+            <a:r>
+              <a:rPr lang="en-US" sz="800" b="1" dirty="0">
+                <a:solidFill>
+                  <a:srgbClr val="111827"/>
+                </a:solidFill>
+                <a:latin typeface="Courier New" pitchFamily="34" charset="0"/>
+                <a:ea typeface="Courier New" pitchFamily="34" charset="-122"/>
+                <a:cs typeface="Courier New" pitchFamily="34" charset="-120"/>
+              </a:rPr>
+              <a:t>Fixes H2</a:t>
+            </a:r>
+            <a:endParaRPr lang="en-US" sz="800" dirty="0"/>
+          </a:p>
+        </p:txBody>
+      </p:sp>
+      <p:sp>
+        <p:nvSpPr>
+          <p:cNvPr id="25" name="Shape 23"/>
+          <p:cNvSpPr/>
+          <p:nvPr/>
+        </p:nvSpPr>
+        <p:spPr>
+          <a:xfrm>
+            <a:off x="6400800" y="2157984"/>
+            <a:ext cx="4892040" cy="274320"/>
+          </a:xfrm>
+          <a:prstGeom prst="roundRect">
+            <a:avLst>
+              <a:gd name="adj" fmla="val 20000"/>
+            </a:avLst>
+          </a:prstGeom>
+          <a:solidFill>
+            <a:srgbClr val="0F172A"/>
+          </a:solidFill>
+          <a:ln w="12700">
+            <a:solidFill>
+              <a:srgbClr val="111827"/>
+            </a:solidFill>
+            <a:prstDash val="solid"/>
+          </a:ln>
+        </p:spPr>
+      </p:sp>
+      <p:sp>
+        <p:nvSpPr>
+          <p:cNvPr id="26" name="Text 24"/>
+          <p:cNvSpPr/>
+          <p:nvPr/>
+        </p:nvSpPr>
+        <p:spPr>
+          <a:xfrm>
+            <a:off x="6400800" y="2157984"/>
+            <a:ext cx="4892040" cy="274320"/>
+          </a:xfrm>
+          <a:prstGeom prst="rect">
+            <a:avLst/>
+          </a:prstGeom>
+          <a:noFill/>
+          <a:ln/>
+        </p:spPr>
+        <p:txBody>
+          <a:bodyPr wrap="square" rtlCol="0" anchor="ctr"/>
+          <a:lstStyle/>
+          <a:p>
+            <a:pPr algn="ctr" indent="0" marL="0">
+              <a:buNone/>
+            </a:pPr>
+            <a:r>
+              <a:rPr lang="en-US" sz="880" b="1" dirty="0">
+                <a:solidFill>
+                  <a:srgbClr val="FFD147"/>
+                </a:solidFill>
+                <a:latin typeface="Courier New" pitchFamily="34" charset="0"/>
+                <a:ea typeface="Courier New" pitchFamily="34" charset="-122"/>
+                <a:cs typeface="Courier New" pitchFamily="34" charset="-120"/>
+              </a:rPr>
+              <a:t>steal_target = argmax_{t ∈ Top-K} ( Affinity(thief, Footprint(t)) )</a:t>
+            </a:r>
+            <a:endParaRPr lang="en-US" sz="880" dirty="0"/>
+          </a:p>
+        </p:txBody>
+      </p:sp>
+      <p:sp>
+        <p:nvSpPr>
+          <p:cNvPr id="27" name="Text 25"/>
+          <p:cNvSpPr/>
+          <p:nvPr/>
+        </p:nvSpPr>
+        <p:spPr>
+          <a:xfrm>
+            <a:off x="6400800" y="2468880"/>
+            <a:ext cx="4892040" cy="694944"/>
+          </a:xfrm>
+          <a:prstGeom prst="rect">
+            <a:avLst/>
+          </a:prstGeom>
+          <a:noFill/>
+          <a:ln/>
+        </p:spPr>
+        <p:txBody>
+          <a:bodyPr wrap="square" rtlCol="0" anchor="ctr"/>
+          <a:lstStyle/>
+          <a:p>
+            <a:pPr indent="0" marL="0">
+              <a:lnSpc>
+                <a:spcPts val="1300"/>
+              </a:lnSpc>
+              <a:buNone/>
+            </a:pPr>
+            <a:r>
+              <a:rPr lang="en-US" sz="880" b="1" dirty="0">
+                <a:solidFill>
+                  <a:srgbClr val="111827"/>
+                </a:solidFill>
+                <a:latin typeface="Arial" pitchFamily="34" charset="0"/>
+                <a:ea typeface="Arial" pitchFamily="34" charset="-122"/>
+                <a:cs typeface="Arial" pitchFamily="34" charset="-120"/>
+              </a:rPr>
+              <a:t>• Shadow Index: </a:t>
+            </a:r>
+            <a:pPr indent="0" marL="0">
+              <a:lnSpc>
+                <a:spcPts val="1300"/>
+              </a:lnSpc>
+              <a:buNone/>
+            </a:pPr>
+            <a:r>
+              <a:rPr lang="en-US" sz="880" dirty="0">
+                <a:solidFill>
+                  <a:srgbClr val="374151"/>
+                </a:solidFill>
+                <a:latin typeface="Arial" pitchFamily="34" charset="0"/>
+                <a:ea typeface="Arial" pitchFamily="34" charset="-122"/>
+                <a:cs typeface="Arial" pitchFamily="34" charset="-120"/>
+              </a:rPr>
+              <a:t>Lock-free ring buffer indexing data footprint affinities of top k=8 tasks.
+</a:t>
+            </a:r>
+            <a:pPr indent="0" marL="0">
+              <a:lnSpc>
+                <a:spcPts val="1300"/>
+              </a:lnSpc>
+              <a:buNone/>
+            </a:pPr>
+            <a:r>
+              <a:rPr lang="en-US" sz="880" b="1" dirty="0">
+                <a:solidFill>
+                  <a:srgbClr val="111827"/>
+                </a:solidFill>
+                <a:latin typeface="Arial" pitchFamily="34" charset="0"/>
+                <a:ea typeface="Arial" pitchFamily="34" charset="-122"/>
+                <a:cs typeface="Arial" pitchFamily="34" charset="-120"/>
+              </a:rPr>
+              <a:t>• Locality Theft: </a:t>
+            </a:r>
+            <a:pPr indent="0" marL="0">
+              <a:lnSpc>
+                <a:spcPts val="1300"/>
+              </a:lnSpc>
+              <a:buNone/>
+            </a:pPr>
+            <a:r>
+              <a:rPr lang="en-US" sz="880" dirty="0">
+                <a:solidFill>
+                  <a:srgbClr val="374151"/>
+                </a:solidFill>
+                <a:latin typeface="Arial" pitchFamily="34" charset="0"/>
+                <a:ea typeface="Arial" pitchFamily="34" charset="-122"/>
+                <a:cs typeface="Arial" pitchFamily="34" charset="-120"/>
+              </a:rPr>
+              <a:t>Thief steals the task matching local RAM instead of popping queue tail blindly.</a:t>
+            </a:r>
+            <a:endParaRPr lang="en-US" sz="880" dirty="0"/>
+          </a:p>
+        </p:txBody>
+      </p:sp>
+      <p:sp>
+        <p:nvSpPr>
+          <p:cNvPr id="28" name="Shape 26"/>
+          <p:cNvSpPr/>
+          <p:nvPr/>
+        </p:nvSpPr>
+        <p:spPr>
+          <a:xfrm>
+            <a:off x="6400800" y="3218688"/>
+            <a:ext cx="4892040" cy="365760"/>
+          </a:xfrm>
+          <a:prstGeom prst="roundRect">
+            <a:avLst>
+              <a:gd name="adj" fmla="val 20000"/>
+            </a:avLst>
+          </a:prstGeom>
+          <a:solidFill>
+            <a:srgbClr val="FFE5D9"/>
+          </a:solidFill>
+          <a:ln w="12700">
+            <a:solidFill>
+              <a:srgbClr val="111827"/>
+            </a:solidFill>
+            <a:prstDash val="solid"/>
+          </a:ln>
+        </p:spPr>
+      </p:sp>
+      <p:sp>
+        <p:nvSpPr>
+          <p:cNvPr id="29" name="Text 27"/>
+          <p:cNvSpPr/>
+          <p:nvPr/>
+        </p:nvSpPr>
+        <p:spPr>
+          <a:xfrm>
+            <a:off x="6446520" y="3218688"/>
+            <a:ext cx="4800600" cy="365760"/>
+          </a:xfrm>
+          <a:prstGeom prst="rect">
+            <a:avLst/>
+          </a:prstGeom>
+          <a:noFill/>
+          <a:ln/>
+        </p:spPr>
+        <p:txBody>
+          <a:bodyPr wrap="square" rtlCol="0" anchor="ctr"/>
+          <a:lstStyle/>
+          <a:p>
+            <a:pPr indent="0" marL="0">
+              <a:buNone/>
+            </a:pPr>
+            <a:r>
+              <a:rPr lang="en-US" sz="850" b="1" dirty="0">
+                <a:solidFill>
+                  <a:srgbClr val="9A3412"/>
+                </a:solidFill>
+                <a:latin typeface="Courier New" pitchFamily="34" charset="0"/>
+                <a:ea typeface="Courier New" pitchFamily="34" charset="-122"/>
+                <a:cs typeface="Courier New" pitchFamily="34" charset="-120"/>
+              </a:rPr>
+              <a:t>✓ Affinity Stealing: Cuts remote steal penalty by 4.2× · 0 blind victim queue pops</a:t>
+            </a:r>
+            <a:endParaRPr lang="en-US" sz="850" dirty="0"/>
+          </a:p>
+        </p:txBody>
+      </p:sp>
+      <p:sp>
+        <p:nvSpPr>
+          <p:cNvPr id="30" name="Shape 28"/>
+          <p:cNvSpPr/>
+          <p:nvPr/>
+        </p:nvSpPr>
+        <p:spPr>
+          <a:xfrm>
+            <a:off x="786384" y="3849624"/>
+            <a:ext cx="5257800" cy="1874520"/>
+          </a:xfrm>
+          <a:prstGeom prst="roundRect">
+            <a:avLst>
+              <a:gd name="adj" fmla="val 6829"/>
+            </a:avLst>
+          </a:prstGeom>
+          <a:solidFill>
+            <a:srgbClr val="111827"/>
+          </a:solidFill>
+          <a:ln w="12700">
+            <a:solidFill>
+              <a:srgbClr val="111827"/>
+            </a:solidFill>
+            <a:prstDash val="solid"/>
+          </a:ln>
+        </p:spPr>
+      </p:sp>
+      <p:sp>
+        <p:nvSpPr>
+          <p:cNvPr id="31" name="Shape 29"/>
+          <p:cNvSpPr/>
+          <p:nvPr/>
+        </p:nvSpPr>
+        <p:spPr>
+          <a:xfrm>
+            <a:off x="731520" y="3794760"/>
+            <a:ext cx="5257800" cy="1874520"/>
+          </a:xfrm>
+          <a:prstGeom prst="roundRect">
+            <a:avLst>
+              <a:gd name="adj" fmla="val 6829"/>
+            </a:avLst>
+          </a:prstGeom>
+          <a:solidFill>
+            <a:srgbClr val="F0FDF4"/>
+          </a:solidFill>
+          <a:ln w="19050">
+            <a:solidFill>
+              <a:srgbClr val="111827"/>
+            </a:solidFill>
+            <a:prstDash val="solid"/>
+          </a:ln>
+        </p:spPr>
+      </p:sp>
+      <p:sp>
+        <p:nvSpPr>
+          <p:cNvPr id="32" name="Text 30"/>
+          <p:cNvSpPr/>
+          <p:nvPr/>
+        </p:nvSpPr>
+        <p:spPr>
+          <a:xfrm>
+            <a:off x="914400" y="3886200"/>
+            <a:ext cx="3657600" cy="256032"/>
+          </a:xfrm>
+          <a:prstGeom prst="rect">
+            <a:avLst/>
+          </a:prstGeom>
+          <a:noFill/>
+          <a:ln/>
+        </p:spPr>
+        <p:txBody>
+          <a:bodyPr wrap="square" rtlCol="0" anchor="ctr"/>
+          <a:lstStyle/>
+          <a:p>
+            <a:pPr indent="0" marL="0">
+              <a:buNone/>
+            </a:pPr>
+            <a:r>
+              <a:rPr lang="en-US" sz="1200" dirty="0">
+                <a:solidFill>
+                  <a:srgbClr val="111827"/>
+                </a:solidFill>
+                <a:latin typeface="Arial Black" pitchFamily="34" charset="0"/>
+                <a:ea typeface="Arial Black" pitchFamily="34" charset="-122"/>
+                <a:cs typeface="Arial Black" pitchFamily="34" charset="-120"/>
+              </a:rPr>
+              <a:t>Pillar 3: Adaptive Vicinity Radius (N-C)</a:t>
+            </a:r>
+            <a:endParaRPr lang="en-US" sz="1200" dirty="0"/>
+          </a:p>
+        </p:txBody>
+      </p:sp>
+      <p:sp>
+        <p:nvSpPr>
+          <p:cNvPr id="33" name="Shape 31"/>
+          <p:cNvSpPr/>
+          <p:nvPr/>
+        </p:nvSpPr>
+        <p:spPr>
+          <a:xfrm>
+            <a:off x="4389120" y="3886200"/>
+            <a:ext cx="1371600" cy="201168"/>
+          </a:xfrm>
+          <a:prstGeom prst="roundRect">
+            <a:avLst>
+              <a:gd name="adj" fmla="val 50000"/>
+            </a:avLst>
+          </a:prstGeom>
+          <a:solidFill>
+            <a:srgbClr val="FFFFFF"/>
+          </a:solidFill>
+          <a:ln w="12700">
+            <a:solidFill>
+              <a:srgbClr val="111827"/>
+            </a:solidFill>
+            <a:prstDash val="solid"/>
+          </a:ln>
+        </p:spPr>
+      </p:sp>
+      <p:sp>
+        <p:nvSpPr>
+          <p:cNvPr id="34" name="Text 32"/>
+          <p:cNvSpPr/>
+          <p:nvPr/>
+        </p:nvSpPr>
+        <p:spPr>
+          <a:xfrm>
+            <a:off x="4389120" y="3886200"/>
+            <a:ext cx="1371600" cy="201168"/>
+          </a:xfrm>
+          <a:prstGeom prst="rect">
+            <a:avLst/>
+          </a:prstGeom>
+          <a:noFill/>
+          <a:ln/>
+        </p:spPr>
+        <p:txBody>
+          <a:bodyPr wrap="square" rtlCol="0" anchor="ctr"/>
+          <a:lstStyle/>
+          <a:p>
+            <a:pPr algn="ctr" indent="0" marL="0">
+              <a:buNone/>
+            </a:pPr>
+            <a:r>
+              <a:rPr lang="en-US" sz="800" b="1" dirty="0">
+                <a:solidFill>
+                  <a:srgbClr val="111827"/>
+                </a:solidFill>
+                <a:latin typeface="Courier New" pitchFamily="34" charset="0"/>
+                <a:ea typeface="Courier New" pitchFamily="34" charset="-122"/>
+                <a:cs typeface="Courier New" pitchFamily="34" charset="-120"/>
+              </a:rPr>
+              <a:t>Fixes H1</a:t>
+            </a:r>
+            <a:endParaRPr lang="en-US" sz="800" dirty="0"/>
+          </a:p>
+        </p:txBody>
+      </p:sp>
+      <p:sp>
+        <p:nvSpPr>
+          <p:cNvPr id="35" name="Shape 33"/>
+          <p:cNvSpPr/>
+          <p:nvPr/>
+        </p:nvSpPr>
+        <p:spPr>
+          <a:xfrm>
+            <a:off x="914400" y="4169664"/>
+            <a:ext cx="4892040" cy="274320"/>
+          </a:xfrm>
+          <a:prstGeom prst="roundRect">
+            <a:avLst>
+              <a:gd name="adj" fmla="val 20000"/>
+            </a:avLst>
+          </a:prstGeom>
+          <a:solidFill>
+            <a:srgbClr val="0F172A"/>
+          </a:solidFill>
+          <a:ln w="12700">
+            <a:solidFill>
+              <a:srgbClr val="111827"/>
+            </a:solidFill>
+            <a:prstDash val="solid"/>
+          </a:ln>
+        </p:spPr>
+      </p:sp>
+      <p:sp>
+        <p:nvSpPr>
+          <p:cNvPr id="36" name="Text 34"/>
+          <p:cNvSpPr/>
+          <p:nvPr/>
+        </p:nvSpPr>
+        <p:spPr>
+          <a:xfrm>
+            <a:off x="914400" y="4169664"/>
+            <a:ext cx="4892040" cy="274320"/>
+          </a:xfrm>
+          <a:prstGeom prst="rect">
+            <a:avLst/>
+          </a:prstGeom>
+          <a:noFill/>
+          <a:ln/>
+        </p:spPr>
+        <p:txBody>
+          <a:bodyPr wrap="square" rtlCol="0" anchor="ctr"/>
+          <a:lstStyle/>
+          <a:p>
+            <a:pPr algn="ctr" indent="0" marL="0">
+              <a:buNone/>
+            </a:pPr>
+            <a:r>
+              <a:rPr lang="en-US" sz="880" b="1" dirty="0">
+                <a:solidFill>
+                  <a:srgbClr val="FFD147"/>
+                </a:solidFill>
+                <a:latin typeface="Courier New" pitchFamily="34" charset="0"/>
+                <a:ea typeface="Courier New" pitchFamily="34" charset="-122"/>
+                <a:cs typeface="Courier New" pitchFamily="34" charset="-120"/>
+              </a:rPr>
+              <a:t>radius_{t+1} = clamp( radius_t + sign(rate_{EWMA} - target), 1, D_max )</a:t>
+            </a:r>
+            <a:endParaRPr lang="en-US" sz="880" dirty="0"/>
+          </a:p>
+        </p:txBody>
+      </p:sp>
+      <p:sp>
+        <p:nvSpPr>
+          <p:cNvPr id="37" name="Text 35"/>
+          <p:cNvSpPr/>
+          <p:nvPr/>
+        </p:nvSpPr>
+        <p:spPr>
+          <a:xfrm>
+            <a:off x="914400" y="4480560"/>
+            <a:ext cx="4892040" cy="694944"/>
+          </a:xfrm>
+          <a:prstGeom prst="rect">
+            <a:avLst/>
+          </a:prstGeom>
+          <a:noFill/>
+          <a:ln/>
+        </p:spPr>
+        <p:txBody>
+          <a:bodyPr wrap="square" rtlCol="0" anchor="ctr"/>
+          <a:lstStyle/>
+          <a:p>
+            <a:pPr indent="0" marL="0">
+              <a:lnSpc>
+                <a:spcPts val="1300"/>
+              </a:lnSpc>
+              <a:buNone/>
+            </a:pPr>
+            <a:r>
+              <a:rPr lang="en-US" sz="880" b="1" dirty="0">
+                <a:solidFill>
+                  <a:srgbClr val="111827"/>
+                </a:solidFill>
+                <a:latin typeface="Arial" pitchFamily="34" charset="0"/>
+                <a:ea typeface="Arial" pitchFamily="34" charset="-122"/>
+                <a:cs typeface="Arial" pitchFamily="34" charset="-120"/>
+              </a:rPr>
+              <a:t>• Adaptive EWMA: </a:t>
+            </a:r>
+            <a:pPr indent="0" marL="0">
+              <a:lnSpc>
+                <a:spcPts val="1300"/>
+              </a:lnSpc>
+              <a:buNone/>
+            </a:pPr>
+            <a:r>
+              <a:rPr lang="en-US" sz="880" dirty="0">
+                <a:solidFill>
+                  <a:srgbClr val="374151"/>
+                </a:solidFill>
+                <a:latin typeface="Arial" pitchFamily="34" charset="0"/>
+                <a:ea typeface="Arial" pitchFamily="34" charset="-122"/>
+                <a:cs typeface="Arial" pitchFamily="34" charset="-120"/>
+              </a:rPr>
+              <a:t>Per-worker EWMA idle transition rate dynamically scales steal vicinity radius.
+</a:t>
+            </a:r>
+            <a:pPr indent="0" marL="0">
+              <a:lnSpc>
+                <a:spcPts val="1300"/>
+              </a:lnSpc>
+              <a:buNone/>
+            </a:pPr>
+            <a:r>
+              <a:rPr lang="en-US" sz="880" b="1" dirty="0">
+                <a:solidFill>
+                  <a:srgbClr val="111827"/>
+                </a:solidFill>
+                <a:latin typeface="Arial" pitchFamily="34" charset="0"/>
+                <a:ea typeface="Arial" pitchFamily="34" charset="-122"/>
+                <a:cs typeface="Arial" pitchFamily="34" charset="-120"/>
+              </a:rPr>
+              <a:t>• Dynamic Clustering: </a:t>
+            </a:r>
+            <a:pPr indent="0" marL="0">
+              <a:lnSpc>
+                <a:spcPts val="1300"/>
+              </a:lnSpc>
+              <a:buNone/>
+            </a:pPr>
+            <a:r>
+              <a:rPr lang="en-US" sz="880" dirty="0">
+                <a:solidFill>
+                  <a:srgbClr val="374151"/>
+                </a:solidFill>
+                <a:latin typeface="Arial" pitchFamily="34" charset="0"/>
+                <a:ea typeface="Arial" pitchFamily="34" charset="-122"/>
+                <a:cs typeface="Arial" pitchFamily="34" charset="-120"/>
+              </a:rPr>
+              <a:t>Expands reach during starvation; contracts to local socket when queues are balanced.</a:t>
+            </a:r>
+            <a:endParaRPr lang="en-US" sz="880" dirty="0"/>
+          </a:p>
+        </p:txBody>
+      </p:sp>
+      <p:sp>
+        <p:nvSpPr>
+          <p:cNvPr id="38" name="Shape 36"/>
+          <p:cNvSpPr/>
+          <p:nvPr/>
+        </p:nvSpPr>
+        <p:spPr>
+          <a:xfrm>
+            <a:off x="914400" y="5230368"/>
+            <a:ext cx="4892040" cy="365760"/>
+          </a:xfrm>
+          <a:prstGeom prst="roundRect">
+            <a:avLst>
+              <a:gd name="adj" fmla="val 20000"/>
+            </a:avLst>
+          </a:prstGeom>
+          <a:solidFill>
+            <a:srgbClr val="DCE4FF"/>
+          </a:solidFill>
+          <a:ln w="12700">
+            <a:solidFill>
+              <a:srgbClr val="111827"/>
+            </a:solidFill>
+            <a:prstDash val="solid"/>
+          </a:ln>
+        </p:spPr>
+      </p:sp>
+      <p:sp>
+        <p:nvSpPr>
+          <p:cNvPr id="39" name="Text 37"/>
+          <p:cNvSpPr/>
+          <p:nvPr/>
+        </p:nvSpPr>
+        <p:spPr>
+          <a:xfrm>
+            <a:off x="960120" y="5230368"/>
+            <a:ext cx="4800600" cy="365760"/>
+          </a:xfrm>
+          <a:prstGeom prst="rect">
+            <a:avLst/>
+          </a:prstGeom>
+          <a:noFill/>
+          <a:ln/>
+        </p:spPr>
+        <p:txBody>
+          <a:bodyPr wrap="square" rtlCol="0" anchor="ctr"/>
+          <a:lstStyle/>
+          <a:p>
+            <a:pPr indent="0" marL="0">
+              <a:buNone/>
+            </a:pPr>
+            <a:r>
+              <a:rPr lang="en-US" sz="850" b="1" dirty="0">
+                <a:solidFill>
+                  <a:srgbClr val="1E40AF"/>
+                </a:solidFill>
+                <a:latin typeface="Courier New" pitchFamily="34" charset="0"/>
+                <a:ea typeface="Courier New" pitchFamily="34" charset="-122"/>
+                <a:cs typeface="Courier New" pitchFamily="34" charset="-120"/>
+              </a:rPr>
+              <a:t>✓ Adaptive Radius: Auto-tunes reach via EWMA · Steal overhead stabilized &lt; 5%</a:t>
+            </a:r>
+            <a:endParaRPr lang="en-US" sz="850" dirty="0"/>
+          </a:p>
+        </p:txBody>
+      </p:sp>
+      <p:sp>
+        <p:nvSpPr>
+          <p:cNvPr id="40" name="Shape 38"/>
+          <p:cNvSpPr/>
+          <p:nvPr/>
+        </p:nvSpPr>
+        <p:spPr>
+          <a:xfrm>
+            <a:off x="6272784" y="3849624"/>
+            <a:ext cx="5257800" cy="1874520"/>
+          </a:xfrm>
+          <a:prstGeom prst="roundRect">
+            <a:avLst>
+              <a:gd name="adj" fmla="val 6829"/>
+            </a:avLst>
+          </a:prstGeom>
+          <a:solidFill>
+            <a:srgbClr val="111827"/>
+          </a:solidFill>
+          <a:ln w="12700">
+            <a:solidFill>
+              <a:srgbClr val="111827"/>
+            </a:solidFill>
+            <a:prstDash val="solid"/>
+          </a:ln>
+        </p:spPr>
+      </p:sp>
+      <p:sp>
+        <p:nvSpPr>
+          <p:cNvPr id="41" name="Shape 39"/>
+          <p:cNvSpPr/>
+          <p:nvPr/>
+        </p:nvSpPr>
+        <p:spPr>
+          <a:xfrm>
+            <a:off x="6217920" y="3794760"/>
+            <a:ext cx="5257800" cy="1874520"/>
+          </a:xfrm>
+          <a:prstGeom prst="roundRect">
+            <a:avLst>
+              <a:gd name="adj" fmla="val 6829"/>
+            </a:avLst>
+          </a:prstGeom>
+          <a:solidFill>
+            <a:srgbClr val="FFFFFF"/>
+          </a:solidFill>
+          <a:ln w="19050">
+            <a:solidFill>
+              <a:srgbClr val="111827"/>
+            </a:solidFill>
+            <a:prstDash val="solid"/>
+          </a:ln>
+        </p:spPr>
+      </p:sp>
+      <p:sp>
+        <p:nvSpPr>
+          <p:cNvPr id="42" name="Text 40"/>
+          <p:cNvSpPr/>
+          <p:nvPr/>
+        </p:nvSpPr>
+        <p:spPr>
+          <a:xfrm>
+            <a:off x="6400800" y="3886200"/>
+            <a:ext cx="3657600" cy="256032"/>
+          </a:xfrm>
+          <a:prstGeom prst="rect">
+            <a:avLst/>
+          </a:prstGeom>
+          <a:noFill/>
+          <a:ln/>
+        </p:spPr>
+        <p:txBody>
+          <a:bodyPr wrap="square" rtlCol="0" anchor="ctr"/>
+          <a:lstStyle/>
+          <a:p>
+            <a:pPr indent="0" marL="0">
+              <a:buNone/>
+            </a:pPr>
+            <a:r>
+              <a:rPr lang="en-US" sz="1200" dirty="0">
+                <a:solidFill>
+                  <a:srgbClr val="111827"/>
+                </a:solidFill>
+                <a:latin typeface="Arial Black" pitchFamily="34" charset="0"/>
+                <a:ea typeface="Arial Black" pitchFamily="34" charset="-122"/>
+                <a:cs typeface="Arial Black" pitchFamily="34" charset="-120"/>
+              </a:rPr>
+              <a:t>Pillar 4: Dynamic Migration &amp; Zero Locks</a:t>
+            </a:r>
+            <a:endParaRPr lang="en-US" sz="1200" dirty="0"/>
+          </a:p>
+        </p:txBody>
+      </p:sp>
+      <p:sp>
+        <p:nvSpPr>
+          <p:cNvPr id="43" name="Shape 41"/>
+          <p:cNvSpPr/>
+          <p:nvPr/>
+        </p:nvSpPr>
+        <p:spPr>
+          <a:xfrm>
+            <a:off x="9875520" y="3886200"/>
+            <a:ext cx="1371600" cy="201168"/>
+          </a:xfrm>
+          <a:prstGeom prst="roundRect">
+            <a:avLst>
+              <a:gd name="adj" fmla="val 50000"/>
+            </a:avLst>
+          </a:prstGeom>
+          <a:solidFill>
+            <a:srgbClr val="FFE5D9"/>
+          </a:solidFill>
+          <a:ln w="12700">
+            <a:solidFill>
+              <a:srgbClr val="111827"/>
+            </a:solidFill>
+            <a:prstDash val="solid"/>
+          </a:ln>
+        </p:spPr>
+      </p:sp>
+      <p:sp>
+        <p:nvSpPr>
+          <p:cNvPr id="44" name="Text 42"/>
+          <p:cNvSpPr/>
+          <p:nvPr/>
+        </p:nvSpPr>
+        <p:spPr>
+          <a:xfrm>
+            <a:off x="9875520" y="3886200"/>
+            <a:ext cx="1371600" cy="201168"/>
+          </a:xfrm>
+          <a:prstGeom prst="rect">
+            <a:avLst/>
+          </a:prstGeom>
+          <a:noFill/>
+          <a:ln/>
+        </p:spPr>
+        <p:txBody>
+          <a:bodyPr wrap="square" rtlCol="0" anchor="ctr"/>
+          <a:lstStyle/>
+          <a:p>
+            <a:pPr algn="ctr" indent="0" marL="0">
+              <a:buNone/>
+            </a:pPr>
+            <a:r>
+              <a:rPr lang="en-US" sz="800" b="1" dirty="0">
+                <a:solidFill>
+                  <a:srgbClr val="111827"/>
+                </a:solidFill>
+                <a:latin typeface="Courier New" pitchFamily="34" charset="0"/>
+                <a:ea typeface="Courier New" pitchFamily="34" charset="-122"/>
+                <a:cs typeface="Courier New" pitchFamily="34" charset="-120"/>
+              </a:rPr>
+              <a:t>Fixes H6, H8</a:t>
+            </a:r>
+            <a:endParaRPr lang="en-US" sz="800" dirty="0"/>
+          </a:p>
+        </p:txBody>
+      </p:sp>
+      <p:sp>
+        <p:nvSpPr>
+          <p:cNvPr id="45" name="Shape 43"/>
+          <p:cNvSpPr/>
+          <p:nvPr/>
+        </p:nvSpPr>
+        <p:spPr>
+          <a:xfrm>
+            <a:off x="6400800" y="4169664"/>
+            <a:ext cx="4892040" cy="274320"/>
+          </a:xfrm>
+          <a:prstGeom prst="roundRect">
+            <a:avLst>
+              <a:gd name="adj" fmla="val 20000"/>
+            </a:avLst>
+          </a:prstGeom>
+          <a:solidFill>
+            <a:srgbClr val="0F172A"/>
+          </a:solidFill>
+          <a:ln w="12700">
+            <a:solidFill>
+              <a:srgbClr val="111827"/>
+            </a:solidFill>
+            <a:prstDash val="solid"/>
+          </a:ln>
+        </p:spPr>
+      </p:sp>
+      <p:sp>
+        <p:nvSpPr>
+          <p:cNvPr id="46" name="Text 44"/>
+          <p:cNvSpPr/>
+          <p:nvPr/>
+        </p:nvSpPr>
+        <p:spPr>
+          <a:xfrm>
+            <a:off x="6400800" y="4169664"/>
+            <a:ext cx="4892040" cy="274320"/>
+          </a:xfrm>
+          <a:prstGeom prst="rect">
+            <a:avLst/>
+          </a:prstGeom>
+          <a:noFill/>
+          <a:ln/>
+        </p:spPr>
+        <p:txBody>
+          <a:bodyPr wrap="square" rtlCol="0" anchor="ctr"/>
+          <a:lstStyle/>
+          <a:p>
+            <a:pPr algn="ctr" indent="0" marL="0">
+              <a:buNone/>
+            </a:pPr>
+            <a:r>
+              <a:rPr lang="en-US" sz="900" b="1" dirty="0">
+                <a:solidFill>
+                  <a:srgbClr val="FFD147"/>
+                </a:solidFill>
+                <a:latin typeface="Courier New" pitchFamily="34" charset="0"/>
+                <a:ea typeface="Courier New" pitchFamily="34" charset="-122"/>
+                <a:cs typeface="Courier New" pitchFamily="34" charset="-120"/>
+              </a:rPr>
+              <a:t>Trigger Migration IF (Acc_Benefit &gt; C_mig ≈ 120 cycles)</a:t>
+            </a:r>
+            <a:endParaRPr lang="en-US" sz="900" dirty="0"/>
+          </a:p>
+        </p:txBody>
+      </p:sp>
+      <p:sp>
+        <p:nvSpPr>
+          <p:cNvPr id="47" name="Text 45"/>
+          <p:cNvSpPr/>
+          <p:nvPr/>
+        </p:nvSpPr>
+        <p:spPr>
+          <a:xfrm>
+            <a:off x="6400800" y="4480560"/>
+            <a:ext cx="4892040" cy="694944"/>
+          </a:xfrm>
+          <a:prstGeom prst="rect">
+            <a:avLst/>
+          </a:prstGeom>
+          <a:noFill/>
+          <a:ln/>
+        </p:spPr>
+        <p:txBody>
+          <a:bodyPr wrap="square" rtlCol="0" anchor="ctr"/>
+          <a:lstStyle/>
+          <a:p>
+            <a:pPr indent="0" marL="0">
+              <a:lnSpc>
+                <a:spcPts val="1300"/>
+              </a:lnSpc>
+              <a:buNone/>
+            </a:pPr>
+            <a:r>
+              <a:rPr lang="en-US" sz="880" b="1" dirty="0">
+                <a:solidFill>
+                  <a:srgbClr val="111827"/>
+                </a:solidFill>
+                <a:latin typeface="Arial" pitchFamily="34" charset="0"/>
+                <a:ea typeface="Arial" pitchFamily="34" charset="-122"/>
+                <a:cs typeface="Arial" pitchFamily="34" charset="-120"/>
+              </a:rPr>
+              <a:t>• Dynamic Re-homing: </a:t>
+            </a:r>
+            <a:pPr indent="0" marL="0">
+              <a:lnSpc>
+                <a:spcPts val="1300"/>
+              </a:lnSpc>
+              <a:buNone/>
+            </a:pPr>
+            <a:r>
+              <a:rPr lang="en-US" sz="880" dirty="0">
+                <a:solidFill>
+                  <a:srgbClr val="374151"/>
+                </a:solidFill>
+                <a:latin typeface="Arial" pitchFamily="34" charset="0"/>
+                <a:ea typeface="Arial" pitchFamily="34" charset="-122"/>
+                <a:cs typeface="Arial" pitchFamily="34" charset="-120"/>
+              </a:rPr>
+              <a:t>Migrates frequently-accessed tile cache lines toward heavy compute clusters.
+</a:t>
+            </a:r>
+            <a:pPr indent="0" marL="0">
+              <a:lnSpc>
+                <a:spcPts val="1300"/>
+              </a:lnSpc>
+              <a:buNone/>
+            </a:pPr>
+            <a:r>
+              <a:rPr lang="en-US" sz="880" b="1" dirty="0">
+                <a:solidFill>
+                  <a:srgbClr val="111827"/>
+                </a:solidFill>
+                <a:latin typeface="Arial" pitchFamily="34" charset="0"/>
+                <a:ea typeface="Arial" pitchFamily="34" charset="-122"/>
+                <a:cs typeface="Arial" pitchFamily="34" charset="-120"/>
+              </a:rPr>
+              <a:t>• Lock-Free Hot Path: </a:t>
+            </a:r>
+            <a:pPr indent="0" marL="0">
+              <a:lnSpc>
+                <a:spcPts val="1300"/>
+              </a:lnSpc>
+              <a:buNone/>
+            </a:pPr>
+            <a:r>
+              <a:rPr lang="en-US" sz="880" dirty="0">
+                <a:solidFill>
+                  <a:srgbClr val="374151"/>
+                </a:solidFill>
+                <a:latin typeface="Arial" pitchFamily="34" charset="0"/>
+                <a:ea typeface="Arial" pitchFamily="34" charset="-122"/>
+                <a:cs typeface="Arial" pitchFamily="34" charset="-120"/>
+              </a:rPr>
+              <a:t>Coordination telemetry swaps double-buffered stats via atomic CAS — zero locks!</a:t>
+            </a:r>
+            <a:endParaRPr lang="en-US" sz="880" dirty="0"/>
+          </a:p>
+        </p:txBody>
+      </p:sp>
+      <p:sp>
+        <p:nvSpPr>
+          <p:cNvPr id="48" name="Shape 46"/>
+          <p:cNvSpPr/>
+          <p:nvPr/>
+        </p:nvSpPr>
+        <p:spPr>
+          <a:xfrm>
+            <a:off x="6400800" y="5230368"/>
+            <a:ext cx="4892040" cy="365760"/>
+          </a:xfrm>
+          <a:prstGeom prst="roundRect">
+            <a:avLst>
+              <a:gd name="adj" fmla="val 20000"/>
+            </a:avLst>
+          </a:prstGeom>
+          <a:solidFill>
+            <a:srgbClr val="FEF08A"/>
+          </a:solidFill>
+          <a:ln w="12700">
+            <a:solidFill>
+              <a:srgbClr val="111827"/>
+            </a:solidFill>
+            <a:prstDash val="solid"/>
+          </a:ln>
+        </p:spPr>
+      </p:sp>
+      <p:sp>
+        <p:nvSpPr>
+          <p:cNvPr id="49" name="Text 47"/>
+          <p:cNvSpPr/>
+          <p:nvPr/>
+        </p:nvSpPr>
+        <p:spPr>
+          <a:xfrm>
+            <a:off x="6446520" y="5230368"/>
+            <a:ext cx="4800600" cy="365760"/>
+          </a:xfrm>
+          <a:prstGeom prst="rect">
+            <a:avLst/>
+          </a:prstGeom>
+          <a:noFill/>
+          <a:ln/>
+        </p:spPr>
+        <p:txBody>
+          <a:bodyPr wrap="square" rtlCol="0" anchor="ctr"/>
+          <a:lstStyle/>
+          <a:p>
+            <a:pPr indent="0" marL="0">
+              <a:buNone/>
+            </a:pPr>
+            <a:r>
+              <a:rPr lang="en-US" sz="850" b="1" dirty="0">
+                <a:solidFill>
+                  <a:srgbClr val="854D0E"/>
+                </a:solidFill>
+                <a:latin typeface="Courier New" pitchFamily="34" charset="0"/>
+                <a:ea typeface="Courier New" pitchFamily="34" charset="-122"/>
+                <a:cs typeface="Courier New" pitchFamily="34" charset="-120"/>
+              </a:rPr>
+              <a:t>✓ Dynamic Re-homing: Migrates cache lines in 120 cyc · Atomic CAS zero-lock path</a:t>
+            </a:r>
+            <a:endParaRPr lang="en-US" sz="850" dirty="0"/>
+          </a:p>
+        </p:txBody>
+      </p:sp>
+      <p:sp>
+        <p:nvSpPr>
+          <p:cNvPr id="50" name="Shape 48"/>
+          <p:cNvSpPr/>
+          <p:nvPr/>
+        </p:nvSpPr>
+        <p:spPr>
+          <a:xfrm>
+            <a:off x="777240" y="5806440"/>
+            <a:ext cx="10744200" cy="502920"/>
+          </a:xfrm>
+          <a:prstGeom prst="roundRect">
+            <a:avLst>
+              <a:gd name="adj" fmla="val 18182"/>
+            </a:avLst>
+          </a:prstGeom>
+          <a:solidFill>
+            <a:srgbClr val="111827"/>
+          </a:solidFill>
+          <a:ln w="12700">
+            <a:solidFill>
+              <a:srgbClr val="111827"/>
+            </a:solidFill>
+            <a:prstDash val="solid"/>
+          </a:ln>
+        </p:spPr>
+      </p:sp>
+      <p:sp>
+        <p:nvSpPr>
+          <p:cNvPr id="51" name="Shape 49"/>
+          <p:cNvSpPr/>
+          <p:nvPr/>
+        </p:nvSpPr>
+        <p:spPr>
+          <a:xfrm>
+            <a:off x="731520" y="5760720"/>
+            <a:ext cx="10744200" cy="502920"/>
+          </a:xfrm>
+          <a:prstGeom prst="roundRect">
+            <a:avLst>
+              <a:gd name="adj" fmla="val 18182"/>
+            </a:avLst>
+          </a:prstGeom>
+          <a:solidFill>
+            <a:srgbClr val="FFD147"/>
+          </a:solidFill>
+          <a:ln w="19050">
+            <a:solidFill>
+              <a:srgbClr val="111827"/>
+            </a:solidFill>
+            <a:prstDash val="solid"/>
+          </a:ln>
+        </p:spPr>
+      </p:sp>
+      <p:sp>
+        <p:nvSpPr>
+          <p:cNvPr id="52" name="Text 50"/>
+          <p:cNvSpPr/>
+          <p:nvPr/>
+        </p:nvSpPr>
+        <p:spPr>
+          <a:xfrm>
+            <a:off x="914400" y="5760720"/>
+            <a:ext cx="10378440" cy="502920"/>
+          </a:xfrm>
+          <a:prstGeom prst="rect">
+            <a:avLst/>
+          </a:prstGeom>
+          <a:noFill/>
+          <a:ln/>
+        </p:spPr>
+        <p:txBody>
+          <a:bodyPr wrap="square" rtlCol="0" anchor="ctr"/>
+          <a:lstStyle/>
+          <a:p>
+            <a:pPr indent="0" marL="0">
+              <a:buNone/>
+            </a:pPr>
+            <a:r>
+              <a:rPr lang="en-US" sz="1100" b="1" dirty="0">
+                <a:solidFill>
+                  <a:srgbClr val="111827"/>
+                </a:solidFill>
+                <a:latin typeface="Arial Black" pitchFamily="34" charset="0"/>
+                <a:ea typeface="Arial Black" pitchFamily="34" charset="-122"/>
+                <a:cs typeface="Arial Black" pitchFamily="34" charset="-120"/>
+              </a:rPr>
+              <a:t>NOVA PRINCIPLE: </a:t>
+            </a:r>
+            <a:pPr indent="0" marL="0">
+              <a:buNone/>
+            </a:pPr>
+            <a:r>
+              <a:rPr lang="en-US" sz="1050" dirty="0">
+                <a:solidFill>
+                  <a:srgbClr val="111827"/>
+                </a:solidFill>
+                <a:latin typeface="Arial" pitchFamily="34" charset="0"/>
+                <a:ea typeface="Arial" pitchFamily="34" charset="-122"/>
+                <a:cs typeface="Arial" pitchFamily="34" charset="-120"/>
+              </a:rPr>
+              <a:t>Maximize memory locality when queues are balanced; dynamically transition to load-balancing when queue backlog or interconnect contention threatens idle core stalls.</a:t>
+            </a:r>
+            <a:endParaRPr lang="en-US" sz="1100" dirty="0"/>
+          </a:p>
+        </p:txBody>
+      </p:sp>
+      <p:sp>
+        <p:nvSpPr>
+          <p:cNvPr id="53" name="Text 51"/>
+          <p:cNvSpPr/>
+          <p:nvPr/>
+        </p:nvSpPr>
+        <p:spPr>
+          <a:xfrm>
+            <a:off x="731520" y="6355080"/>
+            <a:ext cx="8229600" cy="320040"/>
+          </a:xfrm>
+          <a:prstGeom prst="rect">
+            <a:avLst/>
+          </a:prstGeom>
+          <a:noFill/>
+          <a:ln/>
+        </p:spPr>
+        <p:txBody>
+          <a:bodyPr wrap="square" rtlCol="0" anchor="ctr"/>
+          <a:lstStyle/>
+          <a:p>
+            <a:pPr indent="0" marL="0">
+              <a:buNone/>
+            </a:pPr>
+            <a:r>
+              <a:rPr lang="en-US" sz="950" dirty="0">
+                <a:solidFill>
+                  <a:srgbClr val="4B5563"/>
+                </a:solidFill>
+                <a:latin typeface="Courier New" pitchFamily="34" charset="0"/>
+                <a:ea typeface="Courier New" pitchFamily="34" charset="-122"/>
+                <a:cs typeface="Courier New" pitchFamily="34" charset="-120"/>
+              </a:rPr>
+              <a:t>NOVA / ALLoC Scheduler Architecture · High-Performance Computing</a:t>
+            </a:r>
+            <a:endParaRPr lang="en-US" sz="950" dirty="0"/>
+          </a:p>
+        </p:txBody>
+      </p:sp>
+      <p:sp>
+        <p:nvSpPr>
+          <p:cNvPr id="54" name="Text 52"/>
+          <p:cNvSpPr/>
+          <p:nvPr/>
+        </p:nvSpPr>
+        <p:spPr>
+          <a:xfrm>
+            <a:off x="10058400" y="6355080"/>
+            <a:ext cx="1399032" cy="320040"/>
+          </a:xfrm>
+          <a:prstGeom prst="rect">
+            <a:avLst/>
+          </a:prstGeom>
+          <a:noFill/>
+          <a:ln/>
+        </p:spPr>
+        <p:txBody>
+          <a:bodyPr wrap="square" rtlCol="0" anchor="ctr"/>
+          <a:lstStyle/>
+          <a:p>
+            <a:pPr algn="r" indent="0" marL="0">
+              <a:buNone/>
+            </a:pPr>
+            <a:r>
+              <a:rPr lang="en-US" sz="950" dirty="0">
+                <a:solidFill>
+                  <a:srgbClr val="4B5563"/>
+                </a:solidFill>
+                <a:latin typeface="Courier New" pitchFamily="34" charset="0"/>
+                <a:ea typeface="Courier New" pitchFamily="34" charset="-122"/>
+                <a:cs typeface="Courier New" pitchFamily="34" charset="-120"/>
+              </a:rPr>
+              <a:t>06 / 06</a:t>
+            </a:r>
+            <a:endParaRPr lang="en-US" sz="950" dirty="0"/>
+          </a:p>
+        </p:txBody>
+      </p:sp>
+    </p:spTree>
+  </p:cSld>
+  <p:clrMapOvr>
+    <a:masterClrMapping/>
+  </p:clrMapOvr>
+</p:sld>
 </file>
 
 <file path=ppt/theme/theme1.xml><?xml version="1.0" encoding="utf-8"?>
